--- a/산출물/통합반/이론/11회차/통합반_11일차.pptx
+++ b/산출물/통합반/이론/11회차/통합반_11일차.pptx
@@ -635,7 +635,7 @@
           <a:lstStyle/>
           <a:p>
             <a:r>
-              <a:t>먼저 짚을 게 있어요. 경보 메시지와 지식 그래프는 서로 다른 곳에서 만들어졌습니다. 경보는 감지 서비스가 냈고, 그래프는 사람이 정의하고 적재했죠. 이 둘이 만나는 지점은 딱 값 하나예요. 경보의 패턴 칸에 쿨러 성능 저하를 뜻하는 코드가 적혀 있었죠. 그래프의 이상 패턴 노드에도 같은 코드가 속성으로 들어 있습니다. 진단 도구는 이 코드로 그래프의 출발 노드를 찾아요. 화면 맨 왼쪽, 진하게 칠한 동그라미가 그 노드입니다. 거기서부터는 관계를 따라가요. 이상 패턴이 증상을 감지하고, 증상이 고장 유형을 가리킵니다. 유온 상승이라는 증상을 거쳐서 쿨러 냉각 성능 상실이라는 고장 유형에 닿는 거죠. 그런데 마지막 화살표를 보세요. 방향이 반대예요. 원인이 고장 유형을 일으킨다는 관계라서, 원인 쪽에서 고장 유형 쪽으로 향합니다. 진단 도구는 이 화살표를 거슬러 올라가서 원인 후보를 얻어요. 후보는 셋입니다. 쿨러 핀 오염, 팬 구동 불량, 주변 온도 상승이죠. 앞에서 경보 메시지에는 원인이 없다고 했는데, 그 빈칸에 들어갈 수 있는 답들이 여기서 처음 나온 거예요. 만약 경보의 코드와 그래프의 코드가 달랐다면 어떻게 됐을까요? 진단 도구는 출발 노드부터 찾지 못했을 겁니다. 여러 저장소가 같은 대상을 같은 값으로 가리키도록 식별자를 맞춰 둔 까닭이, 바로 여기서 드러나는 거예요.</a:t>
+              <a:t>먼저 짚을 게 있어요. 경보 메시지와 지식 그래프는 서로 다른 곳에서 만들어졌습니다. 경보는 감지 서비스가 냈고, 그래프는 사람이 정의하고 적재했죠. 이 둘이 만나는 지점은 딱 값 하나예요. 경보의 패턴 칸에 쿨러 성능 저하를 뜻하는 코드가 적혀 있었죠. 그래프의 이상 패턴 노드에도 같은 코드가 속성으로 들어 있습니다. 진단 도구는 이 코드로 그래프의 출발 노드를 찾아요. 화면 맨 왼쪽 아래 동그라미가 그 노드입니다. 노드에는 클래스 이름을 적었고, 가운데 진한 노드는 여러 관계가 모이는 고장 유형이에요. 거기서부터는 관계를 따라가요. 이상 패턴이 증상을 감지하고, 증상이 고장 유형을 가리킵니다. 유온 상승이라는 증상을 거쳐서 쿨러 냉각 성능 상실이라는 고장 유형에 닿는 거죠. 그런데 마지막 화살표를 보세요. 방향이 반대예요. 원인이 고장 유형을 일으킨다는 관계라서, 원인 쪽에서 고장 유형 쪽으로 향합니다. 진단 도구는 이 화살표를 거슬러 올라가서 원인 후보를 얻어요. 후보는 셋입니다. 쿨러 핀 오염, 팬 구동 불량, 주변 온도 상승이죠. 앞에서 경보 메시지에는 원인이 없다고 했는데, 그 빈칸에 들어갈 수 있는 답들이 여기서 처음 나온 거예요. 만약 경보의 코드와 그래프의 코드가 달랐다면 어떻게 됐을까요? 진단 도구는 출발 노드부터 찾지 못했을 겁니다. 여러 저장소가 같은 대상을 같은 값으로 가리키도록 식별자를 맞춰 둔 까닭이, 바로 여기서 드러나는 거예요.</a:t>
             </a:r>
           </a:p>
         </p:txBody>
@@ -1125,7 +1125,7 @@
           <a:lstStyle/>
           <a:p>
             <a:r>
-              <a:t>그 판단 번호가 붙은 추천안을 열어 볼게요. 화면 왼쪽이 제출 도구로 낸 추천안을 항목별로 나눠 적은 거예요. 맨 위가 방금 본 판단 번호고요. 그 아래 항목들이 앞의 도구들이 읽고 계산한 결과를 어떻게 담고 있는지 볼게요. 원인은 쿨러 핀 오염입니다. 그 아래 근거에는 팬 진동은 정상인데 냉각 효율이 절반에 못 미치는 46퍼센트쯤으로 떨어져 있다는 값이 적혔어요. 진단 도구가 시계열 DB에서 읽은 값이죠. 배제 칸에는 맞지 않은 후보 둘, 팬 구동 불량과 주변 온도 상승이 적혔습니다. 왜 그 원인이 아닌지까지 남긴 거예요. 추천은 팬 최대 운전이고, 평가에서 받은 점수가 같이 실렸습니다. 그 아래 예측은, 이 조치를 하면 주어진 가정에서 유온이 50도 조금 아래로 내려갈 것으로 본 계산 결과고요. 예측값은 실제로 측정한 회복 온도와 구별해야 합니다. 예측이 좋아 보여도 실행 뒤에는 다시 관측해야 해요. 마지막 줄이 출처예요. 매뉴얼의 즉시 완화 조치 절을 가리킵니다. 승인하는 사람 입장에서 생각해 볼까요? 원인과 추천만 있다면 믿을지 말지 정할 근거가 없습니다. 근거가 된 값, 배제한 후보, 예측, 출처가 함께 있으니까, 무엇을 보고 이렇게 판단했는지 확인할 수 있는 거예요.</a:t>
+              <a:t>그 판단 번호가 붙은 추천안을 열어 볼게요. 화면 왼쪽이 제출 도구로 낸 추천안을 항목별로 나눠 적은 거예요. 맨 위가 방금 본 판단 번호고요. 그 아래 항목들이 앞의 도구들이 읽고 계산한 결과를 어떻게 담고 있는지 볼게요. 원인은 쿨러 핀 오염입니다. 그 아래 근거에는 팬 진동은 정상인데 냉각 효율이 절반에 못 미치는 46퍼센트쯤으로 떨어져 있다는 값이 적혔어요. 진단 도구가 시계열 DB에서 읽은 값이죠. 배제 칸에는 맞지 않은 후보 둘, 팬 구동 불량과 주변 온도 상승이 적혔습니다. 다른 두 후보가 등록된 기준을 충족하지 못한 이유까지 남긴 거예요. 추천은 팬 최대 운전이고, 평가에서 받은 점수가 같이 실렸습니다. 그 아래 예측은, 이 조치를 하면 주어진 가정에서 유온이 50도 조금 아래로 내려갈 것으로 본 계산 결과고요. 예측값은 실제로 측정한 회복 온도와 구별해야 합니다. 예측이 좋아 보여도 실행 뒤에는 다시 관측해야 해요. 마지막 줄이 출처예요. 매뉴얼의 즉시 완화 조치 절을 가리킵니다. 승인하는 사람 입장에서 생각해 볼까요? 원인과 추천만 있다면 믿을지 말지 정할 근거가 없습니다. 근거가 된 값, 배제한 후보, 예측, 출처가 함께 있으니까, 무엇을 보고 이렇게 판단했는지 확인할 수 있는 거예요.</a:t>
             </a:r>
           </a:p>
         </p:txBody>
@@ -1685,7 +1685,7 @@
           <a:lstStyle/>
           <a:p>
             <a:r>
-              <a:t>이 자리는 누가 맡고, 무엇을 기준으로 채울까요? 추천안이 제출된 뒤에 남은 다섯 자리를 표로 놓았습니다. 가운데 칸이 그 자리를 맡는 쪽, 오른쪽 칸이 그 일의 기준이에요. 첫 줄, 승인은 운전원이 맡습니다. 기준은 조치에 정해진 승인 역할이에요. 팬 최대 운전의 승인 역할이 운전원이라서 운전원에게 간 거죠. 둘째 줄부터는 맡는 쪽이 모두 프로세스 엔진이에요. 냉각 명령은 엔진이 SCADA를 거쳐 PLC에 보냅니다. 기준은 승인된 조치, 곧 팬 속도 100퍼센트고요. 재관측은 엔진이 시계열 DB에서 값을 다시 읽는 일이에요. 유온이 55도 미만으로 내려오고 경보가 해제돼야 회복으로 봅니다. 조건을 둘로 둔 데는 까닭이 있어요. 값이 기준 아래로 한 번 내려간 것만 보고 회복이라고 하지 않으려는 거죠. 경보를 냈던 감지 쪽에서도 이상이 풀렸다고 해제를 내 줘야 하는 거예요. 작업지시 등록은, 회복을 확인한 뒤에 엔진이 정비 관리 시스템, CMMS에 등록해요. 마지막 결과 보고는 처리 건이 어느 끝에 닿았는지, 그리고 그때까지의 결과를 알리는 일입니다. 가운데 칸의 화살표 방향도 보세요. 명령과 작업지시는 엔진에서 바깥으로 나가는 쓰기고요, 재관측만 바깥에서 엔진으로 들어오는 읽기예요. 이 다섯 자리를 정해진 순서로 잇는 게 바로 프로세스입니다.</a:t>
+              <a:t>이 자리는 누가 맡고, 무엇을 기준으로 채울까요? 추천안이 제출된 뒤에 남은 다섯 자리를 표로 놓았습니다. 가운데 칸이 그 자리를 맡는 쪽, 오른쪽 칸이 그 일의 기준이에요. 첫 줄, 승인은 운전원이 맡습니다. 기준은 조치에 정해진 승인 역할이에요. 팬 최대 운전의 승인 역할이 운전원이라서 운전원에게 간 거죠. 둘째 줄부터는 맡는 쪽이 모두 프로세스 엔진이에요. 냉각 명령은 엔진이 SCADA를 거쳐 PLC에 보냅니다. 기준은 승인된 조치, 곧 팬 속도 100퍼센트고요. 재관측은 엔진이 시계열 DB에서 값을 다시 읽는 일이에요. 유온이 55도 미만으로 내려오고 경보가 해제돼야 회복으로 봅니다. 조건을 둘로 둔 데는 까닭이 있어요. 값이 기준 아래로 한 번 내려간 것만 보고 회복이라고 하지 않으려는 거죠. 경보를 냈던 감지 쪽에서도 이상이 풀렸다고 해제를 내 줘야 하는 거예요. 작업지시 등록은, 회복을 확인한 뒤에 엔진이 정비 관리 시스템, CMMS에 등록해요. 결과 보고는 진행한 경로와 그때까지의 업무 결과를 알리는 일입니다. 보고 뒤에 끝 이벤트로 이어지는지도 확인합니다. 가운데 칸의 화살표 방향도 보세요. 명령과 작업지시는 엔진에서 바깥으로 나가는 쓰기고요, 재관측만 바깥에서 엔진으로 들어오는 읽기예요. 이 다섯 자리를 정해진 순서로 잇는 게 바로 프로세스입니다.</a:t>
             </a:r>
           </a:p>
         </p:txBody>
@@ -1895,7 +1895,7 @@
           <a:lstStyle/>
           <a:p>
             <a:r>
-              <a:t>그 약속대로 놓인 추천안을 운전원이 승인하면, 처리 건에 새 값이 남습니다. 표의 위 두 줄은 프로세스 변수고, 아래 두 줄은 처리 기록이에요. 첫 줄은 승인이라는 결정과 고른 조치입니다. 쿨러 사건에서는 추천안 그대로 팬 최대 운전을 골랐어요. 이 표는 그 선택을 같은 흐름의 변수와 기록 항목에 대응시킨 예입니다. 운전원 승인 단계가 채우는 값이죠. 강조한 둘째 줄이 승인한 역할이에요. 이 값은 승인하는 순간 서버가 채웁니다. 에이전트는 자기 결과에 이 값을 써넣을 수 없어요. 에이전트의 제안과 승인 처리 경로를 분리한 거죠. 수업 환경에서는 화면에서 고른 역할로 흐름을 경험합니다. 실제 업무에서는 로그인한 신원과 그 역할의 권한을 연결해서 확인해야 누가 승인했는지 책임을 물을 수 있어요. 아래 두 줄은 처리 기록입니다. 셋째 줄은 승인이 접수됐다는 기록이에요. 승인한 역할과 판단 번호가 같이 남습니다. 이 기록이 있어야 나중에 누가, 어떤 근거로, 무엇을 승인했는지 되짚을 수 있어요. 판단 번호로 추천안과 이어져 있으니까, 승인에서 추천안으로, 추천안에서 근거와 출처로 거슬러 갈 수 있는 거죠. 넷째 줄은 승인이 다음 단계로 전달됐다는 기록입니다. 이 전달이 성공한 뒤에야 냉각 명령이 시작돼요. 승인 시점의 조건도 다시 확인해야 합니다. 추천을 만든 뒤에 설비 상태나 정책이 바뀔 수 있으니까요. HYD도 현재 조건을 확인하지 못하거나 허용하지 않는 경우에는 그대로 실행에 넘기지 않도록 검사합니다. 과거의 추천이 있었다는 사실만으로 지금의 실행을 허용하지 않는 겁니다.</a:t>
+              <a:t>그 약속대로 놓인 추천안을 운전원이 승인하면, 처리 건에 새 값이 남습니다. 위쪽 두 칸은 프로세스 변수고, 아래쪽 화살표는 처리 기록이 남는 순서예요. 첫 줄은 승인이라는 결정과 고른 조치입니다. 쿨러 사건에서는 추천안 그대로 팬 최대 운전을 골랐어요. 이 그림은 그 선택을 같은 흐름의 변수와 기록 항목에 대응시킨 예입니다. 운전원 승인 단계가 채우는 값이죠. 위쪽 오른편의 강조한 칸이 승인한 역할이에요. 이 값은 승인하는 순간 서버가 채웁니다. 에이전트는 자기 결과에 이 값을 써넣을 수 없어요. 에이전트의 제안과 승인 처리 경로를 분리한 거죠. 수업 환경에서는 화면에서 고른 역할로 흐름을 경험합니다. 실제 업무에서는 로그인한 신원과 그 역할의 권한을 연결해서 확인해야 누가 승인했는지 책임을 물을 수 있어요. 아래쪽은 처리 기록이 남는 순서입니다. 왼쪽은 승인이 접수됐다는 기록이에요. 승인한 역할과 판단 번호가 같이 남습니다. 이 기록이 있어야 나중에 누가, 어떤 근거로, 무엇을 승인했는지 되짚을 수 있어요. 판단 번호로 추천안과 이어져 있으니까, 승인에서 추천안으로, 추천안에서 근거와 출처로 거슬러 갈 수 있는 거죠. 오른쪽은 승인이 다음 단계로 전달됐다는 기록입니다. 이 전달이 성공한 뒤에야 냉각 명령이 시작돼요. 승인 시점의 조건도 다시 확인해야 합니다. 추천을 만든 뒤에 설비 상태나 정책이 바뀔 수 있으니까요. HYD도 현재 조건을 확인하지 못하거나 허용하지 않는 경우에는 그대로 실행에 넘기지 않도록 검사합니다. 과거의 추천이 있었다는 사실만으로 지금의 실행을 허용하지 않는 겁니다.</a:t>
             </a:r>
           </a:p>
         </p:txBody>
@@ -2035,7 +2035,7 @@
           <a:lstStyle/>
           <a:p>
             <a:r>
-              <a:t>여기까지는 운전원이 승인한 경우였어요. 승인하지 않으면 어떻게 될까요? 같은 추천안이라도 사람의 결정에 따라 결말이 셋으로 갈립니다. 표의 가운데 칸, 시스템 실행의 수를 견줘 보세요. 첫 줄, 이 사례의 정상 경로에서는 승인 뒤 명령이 실행되고, 회복을 확인한 다음 작업지시가 등록돼 정상 종료로 닫혔고 결과 보고도 정상이었습니다. 승인만으로 정상 종료가 보장되는 건 아니에요. 회복 기준을 충족하지 못하면 미달 결과를 남기는 다른 경로로 갑니다. 둘째 줄, 거절하면 시스템 실행이 한 건도 없어요. 설비 명령도 작업지시도 나가지 않고, 거절의 끝으로 닫힙니다. 결과 보고에는 반려, 그리고 설비 명령은 내지 않았다는 사실이 남아요. 기록을 열어 보면 가지 않은 단계들, 냉각 명령과 재관측과 작업지시는 취소 상태로 남아 있고, 거절의 사유도 함께 남습니다. 어느 갈래로 갔는지가 기록에 그대로 보이는 거죠. 그런데 여기서 조심할 게 있습니다. 이때도 처리 건의 상태는 완료로 표시돼요. 그러니까 일이 실제로 이뤄졌는지는 어느 끝에 닿았는지와 결과 보고로 읽어야 합니다. 셋째 줄, 응답이 없으면 정해 둔 기한이 지난 뒤 승인 지연 알림만 나갑니다. 처리 건은 자동으로 승인되지도, 취소되거나 거절되지도 않아요. 승인을 계속 기다립니다. 늦게 승인하더라도 그때의 조건을 다시 확인해 허용되는 경우에 실행을 이어갑니다. 왜 기한이 지나면 알아서 승인하거나 취소하게 두지 않았을까요? 자동으로 승인하면, 아무도 결정하지 않은 조치가 설비를 움직이게 됩니다. 사람의 승인을 둔 의미가 사라지죠. 반대로 자동으로 취소하면, 유온이 오르고 있는데 필요한 조치가 조용히 사라져요. 그래서 결정은 끝까지 사람에게 남겨 두고, 늦어졌다는 사실만 알려서 사람을 다시 부르는 겁니다. 세 경우 모두 에이전트의 추천안은 같았습니다. 결말을 가른 건 사람의 결정이에요. 그리고 그 결정에 따라 어디로 갈지는 프로세스 정의가 정해 둔 길입니다.</a:t>
+              <a:t>여기까지는 운전원이 승인한 경우였어요. 승인하지 않으면 어떻게 될까요? 같은 추천안이라도 사람의 결정에 따라 결말이 셋으로 갈립니다. 표의 가운데 칸, 시스템 실행의 수를 견줘 보세요. 첫 줄, 이 사례의 정상 경로에서는 승인 뒤 명령이 실행되고, 회복을 확인한 다음 작업지시가 등록돼 정상 종료로 닫혔고 결과 보고도 정상이었습니다. 승인만으로 정상 종료가 보장되는 건 아니에요. 회복 기준을 충족하지 못하면 미달 결과를 남기는 다른 경로로 갑니다. 둘째 줄, 거절하면 시스템 실행이 한 건도 없어요. 설비 명령도 작업지시도 나가지 않고, 거절의 끝으로 닫힙니다. 결과 보고에는 반려, 그리고 설비 명령은 내지 않았다는 사실이 남아요. 기록을 열어 보면 가지 않은 단계들, 냉각 명령과 재관측과 작업지시는 취소 상태로 남아 있고, 거절의 사유도 함께 남습니다. 어느 갈래로 갔는지가 기록에 그대로 보이는 거죠. 그런데 여기서 조심할 게 있습니다. 이때도 처리 건의 상태는 완료로 표시돼요. 그러니까 일이 실제로 이뤄졌는지는 어느 끝에 닿았는지와 결과 보고로 읽어야 합니다. 셋째 줄, 응답이 없으면 정해 둔 기한이 지난 뒤 승인 지연 알림만 나갑니다. 처리 건은 자동으로 승인되지도, 취소되거나 거절되지도 않아요. 승인을 계속 기다립니다. 늦게 승인하더라도 그때의 조건을 다시 확인해 허용되는 경우에 실행을 이어갑니다. 왜 기한이 지나면 알아서 승인하거나 취소하게 두지 않았을까요? 자동으로 승인하면, 아무도 결정하지 않은 조치가 설비를 움직이게 됩니다. 사람의 승인을 둔 의미가 사라지죠. 반대로 자동으로 취소하면, 유온이 오르고 있는데 필요한 조치가 조용히 사라져요. 그래서 결정은 끝까지 사람에게 남겨 두고, 늦어졌다는 사실만 알려서 사람을 다시 부르는 겁니다. 이 표는 서로 다른 실행 기록에서 승인 여부에 따른 경로를 비교한 것입니다. 추천안의 모든 내용과 입력이 같았다는 뜻은 아니에요. 사람의 결정에 따라 실행을 허용하거나 보류하는 구조를 보세요. 그리고 그 결정에 따라 어디로 갈지는 프로세스 정의가 정해 둔 길입니다.</a:t>
             </a:r>
           </a:p>
         </p:txBody>
@@ -2315,7 +2315,7 @@
           <a:lstStyle/>
           <a:p>
             <a:r>
-              <a:t>배운 장치를 두 쪽으로 나눴습니다. 화면 왼쪽이 에이전트 쪽, 오른쪽이 프로세스 쪽이에요. 아래 꼬리표는 각 쪽이 지키는 걸 한마디로 적은 겁니다. 왼쪽, 에이전트 쪽에는 에이전트 실행, 스킬, MCP가 있고, 명세를 기준으로 개발하는 SDD와, 구체적인 행동 예로 기대 결과를 합의하고 검증하는 BDD가 있어요. 이 장치들은 한 단계 안에서 추천안 하나를 제대로 만들게 합니다. 그래서 지키는 건 판단의 품질이에요. 오른쪽, 프로세스 쪽에는 BPMN으로 그린 프로세스 정의와 그 정의로 열린 인스턴스, 사람의 승인인 HITL, 그리고 시스템 실행이 있습니다. 이 장치들은 단계와 단계를 이어서 업무를 끝내요. 지키는 건 순서와 책임입니다. 두 꼬리표를 쿨러 사건에 대어 보면 이렇습니다. 판단의 품질은 등록된 근거가 지지하는 원인을 가리고, 근거와 배제한 후보, 출처까지 추천안에 남긴 것이에요. 순서와 책임은 운전원이 승인하기 전에는 팬이 움직이지 않았고, 누가 승인했는지가 기록으로 남은 것이고요. 그리고 두 쪽은 서로를 대신하지 못합니다. 스킬을 아무리 잘 써도, 승인 없이 명령이 나가는 걸 막을 수는 없습니다. 프로세스를 아무리 잘 그려도, 에이전트가 근거 없는 원인을 내는 걸 막을 수는 없고요. 결과가 기대와 다를 때 어느 쪽 몫인지부터 가려야 하는 이유예요.</a:t>
+              <a:t>배운 장치를 두 쪽으로 나눴습니다. 화면 왼쪽이 에이전트 쪽, 오른쪽이 프로세스 쪽이에요. 아래 꼬리표는 각 쪽이 지키는 걸 한마디로 적은 겁니다. 왼쪽, 에이전트 쪽에는 에이전트 실행, 스킬, MCP가 있고, 명세를 기준으로 개발하는 SDD와, 구체적인 행동 예로 기대 결과를 합의하고 검증하는 BDD가 있어요. 이 장치들은 한 단계 안에서 추천안 하나를 제대로 만들게 합니다. 그래서 지키는 건 판단의 품질이에요. 오른쪽, 프로세스 쪽에는 BPMN으로 그린 프로세스 정의와 그 정의로 열린 인스턴스, 사람의 승인인 HITL, 그리고 시스템 실행이 있습니다. 이 장치들은 단계와 단계를 이어서 업무를 끝내요. 지키는 건 순서와 책임입니다. 두 꼬리표를 쿨러 사건에 대어 보면 이렇습니다. 판단의 품질은 등록된 근거가 지지하는 원인을 가리고, 근거와 배제한 후보, 출처까지 추천안에 남긴 것이에요. 순서와 책임은 운전원이 승인하기 전에는 팬 속도를 바꾸는 명령이 나가지 않았고, 누가 승인했는지가 기록으로 남은 것이고요. 그리고 두 쪽은 서로를 대신하지 못합니다. 스킬을 아무리 잘 써도, 승인 없이 명령이 나가는 걸 막을 수는 없습니다. 프로세스를 아무리 잘 그려도, 에이전트가 근거 없는 원인을 내는 걸 막을 수는 없고요. 결과가 기대와 다를 때 어느 쪽 몫인지부터 가려야 하는 이유예요.</a:t>
             </a:r>
           </a:p>
         </p:txBody>
@@ -2385,7 +2385,7 @@
           <a:lstStyle/>
           <a:p>
             <a:r>
-              <a:t>실제 처리 건에서 이 장치들은 어디서 일했을까요? 같은 사건의 줄 위에 두 쪽 장치가 일한 자리를 표시했습니다. 위쪽이 프로세스 쪽, 아래쪽이 에이전트 쪽이에요. 아래쪽부터 볼게요. 파란 상자로 두른 둘째 자리가 에이전트 쪽입니다. 냉각 대응 에이전트가 이 한 자리에서 냉각 긴급 대응 스킬을 따라 일했고요, 판단 엔진과 업무 DB의 MCP 도구를 사용할 수 있도록 연결했습니다. 지식 그래프는 판단 엔진의 진단 도구가 안에서 읽습니다. 이 처리 건의 요약에는 도구 호출 열 번이 남아 있어요. 다만 이 정본 사건의 호출별 상세 기록은 없어서, 연결된 도구를 모두 실제로 호출했다고 단정하지는 않습니다. 왼쪽 아래 문서 그림은 명세와 시나리오예요. 이건 실행 중에 일한 게 아닙니다. 결과에 무엇이 있어야 하는지, 어떤 상황에서 어떻게 행동해야 하는지를 실행에 앞서 정해 둔 거죠. 이번엔 위쪽이에요. 남색 긴 괄호가 프로세스 정의와 인스턴스입니다. 냉각 긴급 대응 정의에는 작업 아홉, 분기 둘, 타이머 하나가 그려져 있고요, 그 정의로 열린 인스턴스 하나가 경보에서 정상 종료까지를 덮었습니다. 정의는 하나지만, 경보가 날 때마다 인스턴스가 새로 하나씩 열려요. 쿨러 성능 저하 경보가 하루에 세 번 나면 처리 건도 셋이 되고, 저마다 따로 진행되고 따로 기록이 남습니다. HYD는 같은 테넌트와 프로세스 정의, 사건 식별자의 중복 시작을 검사합니다. 이것만으로 외부 명령이 반드시 한 번만 실행된다고 보장하는 것은 아니에요. 명령 재시도와 중복 효과는 별도 확인이 필요합니다. 괄호 아래를 보면, 승인 위의 선이 운전원 역할로 남은 승인 기록이고, 냉각 명령에서 작업지시까지 걸친 파란 괄호가 설비 명령과 작업지시를 남긴 시스템 실행이에요. 한눈에 보이시죠? 에이전트 쪽 장치는 줄의 한 자리에만 있고, 프로세스 쪽 장치는 줄 전체를 덮습니다.</a:t>
+              <a:t>실제 처리 건에서 이 장치들은 어디서 일했을까요? 같은 사건의 줄 위에 두 쪽 장치가 일한 자리를 표시했습니다. 위쪽이 프로세스 쪽, 아래쪽이 에이전트 쪽이에요. 아래쪽부터 볼게요. 파란 상자로 두른 둘째 자리가 에이전트 쪽입니다. 냉각 대응 에이전트가 이 한 자리에서 냉각 긴급 대응 스킬을 따라 일했고요, 판단 엔진과 업무 DB의 MCP 도구를 사용할 수 있도록 연결했습니다. 지식 그래프는 판단 엔진의 진단 도구가 안에서 읽습니다. 이 처리 건의 요약에는 도구 호출 열 번이 남아 있어요. 다만 이 정본 사건의 호출별 상세 기록은 없어서, 연결된 도구를 모두 실제로 호출했다고 단정하지는 않습니다. 왼쪽 아래 문서 그림은 명세와 시나리오예요. 이건 실행 중에 일한 게 아닙니다. 결과에 무엇이 있어야 하는지, 어떤 상황에서 어떻게 행동해야 하는지를 실행에 앞서 정해 둔 거죠. 이번엔 위쪽이에요. 남색 긴 괄호가 프로세스 정의와 인스턴스입니다. 냉각 긴급 대응 정의에는 작업 아홉, 분기 둘, 타이머 하나가 그려져 있고요, 그 정의로 열린 인스턴스 하나가 경보에서 정상 종료까지를 덮었습니다. 정의는 하나지만, 경보가 날 때마다 인스턴스가 새로 하나씩 열려요. 서로 다른 사건 식별자를 가진 쿨러 성능 저하 경보 세 건이 시작 조건을 충족하면 처리 건도 셋이 되고, 저마다 따로 진행되고 따로 기록이 남습니다. HYD는 같은 테넌트와 프로세스 정의, 사건 식별자의 중복 시작을 검사합니다. 이것만으로 외부 명령이 반드시 한 번만 실행된다고 보장하는 것은 아니에요. 명령 재시도와 중복 효과는 별도 확인이 필요합니다. 괄호 아래를 보면, 승인 위의 선이 운전원 역할로 남은 승인 기록이고, 냉각 명령에서 작업지시까지 걸친 파란 괄호가 설비 명령과 작업지시를 남긴 시스템 실행이에요. 한눈에 보이시죠? 에이전트 쪽 장치는 줄의 한 자리에만 있고, 프로세스 쪽 장치는 줄 전체를 덮습니다.</a:t>
             </a:r>
           </a:p>
         </p:txBody>
@@ -2735,7 +2735,7 @@
           <a:lstStyle/>
           <a:p>
             <a:r>
-              <a:t>이렇게 위험을 막는 장치는 에이전트 쪽에도 있습니다. 두 쪽의 장치를 위험별로 짝지어 봤어요. 윗줄이 에이전트 쪽 장치, 아랫줄이 프로세스 쪽 장치입니다. 그리고 둘을 잇는 세로선에 붙은 이름이, 두 장치가 함께 막는 위험이에요. 왼쪽 짝이 막는 건 근거가 모자란 추천안입니다. 도구는 증거와 값의 상태를 검사하고, 에이전트에는 근거가 부족하면 이유를 적어 보류하도록 지침을 둡니다. 사람도 추천안의 근거를 검토하도록 해서 놓친 부분을 다시 살펴요. 가운데 짝은 승인 없는 쓰기예요. 에이전트의 업무 도구 접근을 읽기와 제안 제출로 제한하고, 프로세스에서는 승인 조건의 갈림을 지나야만 실행에 닿게 합니다. 오른쪽 짝은 드러나지 않은 채 길어지는 대기예요. 에이전트 쪽에서는 실행 시간과 재시도에 한도가 있어서, 멈춘 작업이 드러나고 사람이 닫을 수 있습니다. 프로세스 쪽에서는 승인 지연 타이머가 사람의 응답이 늦어졌다는 걸 알려요. 타이머가 알림을 보냈다고 대기가 자동 해결되지는 않습니다. 누가 확인하고 어떻게 다시 처리할지도 정해야 하죠. 이 짝이 말하는 건 한 장치만 믿지 않는다는 거예요. 에이전트 쪽 장치는 모델의 판단에 기대는 부분이 있어서 놓칠 수 있습니다. 프로세스 쪽 장치는 그 판단의 결과가 효과를 내기 전에 한 번 더 거르고요.</a:t>
+              <a:t>이렇게 위험을 막는 장치는 에이전트 쪽에도 있습니다. 두 쪽의 장치를 위험별로 짝지어 봤어요. 윗줄이 에이전트 쪽 장치, 아랫줄이 프로세스 쪽 장치입니다. 그리고 둘을 잇는 세로선에 붙은 이름이, 두 장치가 함께 막는 위험이에요. 왼쪽 짝이 막는 건 근거가 모자란 추천안입니다. 도구는 증거와 값의 상태를 검사하고, 에이전트에는 근거가 부족하면 이유를 적어 보류하도록 지침을 둡니다. 사람도 추천안의 근거를 검토하도록 해서 놓친 부분을 다시 살펴요. 가운데 짝은 승인 없는 쓰기예요. 에이전트의 업무 도구 접근을 읽기와 제안 제출로 제한하고, 프로세스에서는 승인 조건의 갈림을 지나야만 실행에 닿게 합니다. 오른쪽 짝은 드러나지 않은 채 길어지는 대기예요. 에이전트 쪽에서는 실행 시간과 재시도에 한도가 있어서, 멈춘 작업이 드러나고 사람이 닫을 수 있습니다. 프로세스 쪽에서는 승인 지연 타이머가 사람의 응답이 늦어졌다는 걸 알려요. 타이머가 알림을 보냈다고 대기가 자동 해결되지는 않습니다. 누가 확인하고 어떻게 다시 처리할지도 정해야 하죠. 이 짝이 말하는 건 한 장치만 믿지 않는다는 거예요. 보류 지침처럼 모델 판단에 기대는 부분과 도구 권한처럼 기계적으로 제한하는 부분을 구별해야 합니다. 프로세스의 승인 검사는 실행 전에 권한과 조건을 확인하고, 지연 타이머는 응답이 늦어진 상태를 알립니다. 각 장치가 작동하는 시점과 막는 위험이 다른 거죠.</a:t>
             </a:r>
           </a:p>
         </p:txBody>
@@ -3225,7 +3225,7 @@
           <a:lstStyle/>
           <a:p>
             <a:r>
-              <a:t>네 번째 실습은 직접 그린 흐름으로 에이전트를 실행하는 일입니다. 앞 실습에서 만들 에이전트는 제안이나 보류 한 건을 내는 데서 멈춥니다. 쿨러 사건에서도 에이전트의 일은 추천안을 제출하면서 끝났고, 그 뒤를 이은 건 프로세스였죠. 내 업무도 마찬가지예요. 에이전트가 낸 제안이나 보류를 누가 확인하고 어떻게 끝낼지는 흐름이 정합니다. 작은 업무의 흐름은 bpmn.io로 그리고요, 화면의 다섯 칸, 시작, 에이전트 작업, 필요한 자리의 사람 확인, 결과 보고, 종료입니다. 그린 흐름을 준비된 연결 방식의 범위에서 등록하고 실행하면, 앞에서 만든 에이전트가 그 단계에서 일하고 처리 건 하나가 기록으로 남아요. 등록된 흐름과 그 처리 건의 기록이 이 실습에서 남는 것입니다. 이때 지킬 게 하나 있습니다. 일정 등록이나 메일 발송처럼 준비된 범위 밖의 외부 시스템 쓰기는 성공한 것처럼 적지 않아요. 하지 못한 일로 결과 보고에 남깁니다. 처리 건이 끝 이벤트에 닿아 닫히고, 사람 확인이 필요한 자리에 실제로 있었고, 결과 보고에 한 일과 하지 못한 일이 함께 남았으면 성공이에요. 단, 등록할 수 있는 연결이 먼저 준비돼 있어야 합니다. 수업 예제에는 제가 실제 도구와 결과 형식에 맞게 채울 자리도 있어요. 연결이 없는 기능을 성공으로 꾸미지 말고, 확인 가능한 범위와 막힌 이유를 결과로 남겨야 합니다.</a:t>
+              <a:t>네 번째 실습은 직접 그린 흐름으로 에이전트를 실행하는 일입니다. 앞 실습에서 만들 에이전트는 제안이나 보류 한 건을 내는 데서 멈춥니다. 쿨러 사건에서도 에이전트의 일은 추천안을 제출하면서 끝났고, 그 뒤를 이은 건 프로세스였죠. 내 업무도 마찬가지예요. 에이전트가 낸 제안이나 보류를 누가 확인하고 어떻게 끝낼지는 흐름이 정합니다. 작은 업무의 흐름은 bpmn.io로 그리고요, 화면의 다섯 칸, 시작, 에이전트 작업, 필요한 자리의 사람 확인, 결과 보고, 종료입니다. 그린 흐름을 준비된 연결 방식의 범위에서 등록하고 실행하면, 앞에서 만든 에이전트가 그 단계에서 일하고 처리 건 하나가 기록으로 남아요. 등록된 흐름과 그 처리 건의 기록이 이 실습에서 남는 것입니다. 이때 지킬 게 하나 있습니다. 일정 등록이나 메일 발송처럼 준비된 범위 밖의 외부 시스템 쓰기는 성공한 것처럼 적지 않아요. 하지 못한 일로 결과 보고에 남깁니다. 필요한 흐름이 모두 끝나 다른 열린 작업 없이 처리 건이 닫히고, 사람 확인이 필요한 자리에 실제로 있었고, 결과 보고에 한 일과 하지 못한 일이 함께 남았으면 성공이에요. 단, 등록할 수 있는 연결이 먼저 준비돼 있어야 합니다. 수업 예제에는 제가 실제 도구와 결과 형식에 맞게 채울 자리도 있어요. 연결이 없는 기능을 성공으로 꾸미지 말고, 확인 가능한 범위와 막힌 이유를 결과로 남겨야 합니다.</a:t>
             </a:r>
           </a:p>
         </p:txBody>
@@ -3925,7 +3925,7 @@
           <a:lstStyle/>
           <a:p>
             <a:r>
-              <a:t>실습과 시연에서 남긴 기록으로 돌아왔습니다. 이제 복습과 용어 정리, 퀴즈로 이번 회차를 마무리하겠습니다. 학습 노트에는 완성한 결과와 아직 확인하지 못한 것을 구분해 두겠습니다. 먼저 이번 회차에 배운 흐름을 쿨러 사건으로 복습해 보겠습니다. 표에 쿨러 사건의 다섯 순간을 놓았어요. 답과 근거 칸은 잠깐 가려 둘게요. 순간마다 지식, 에이전트, 프로세스 가운데 어느 영역의 일인지 먼저 골라 보세요. 왜 그 영역인지 근거도 같이 생각해 보시고요. 답을 맞춰 볼까요? 첫째, 핀 오염의 기준을 읽은 순간은 지식의 일입니다. 여기서 지식으로 분류한 것은 읽는 행동이 아니라 기준의 출처와 역할입니다. 기준은 매뉴얼과 정책을 검토해 관리하고 개정하는 지식이죠. 둘째, 지금의 냉각 효율을 읽어서 기준에 댄 건 에이전트의 일이에요. 값은 도구로 읽은 현재 값이고, 그걸 기준에 대어 판단하는 게 에이전트의 몫이니까요. 셋째, 쿨러 핀 세척을 설비보전팀장이 승인한다는 건 다시 지식입니다. 승인 역할은 조치에 적힌 지식이었죠. 넷째, 운전원 승인 뒤에 냉각 명령이 열린 건 프로세스의 일이에요. 단계 사이의 순서는 엔진이 지킵니다. 다섯째가 헷갈리기 쉬워요. 내려간 유온을 다시 읽고 작업지시를 등록한 건 프로세스의 일입니다. 둘째 순간처럼 시계열 DB를 읽긴 하는데, 판단의 재료를 읽은 게 아니라 승인 뒤 실행의 결과를 확인한 서비스 작업이거든요. 결국 같은 값을 읽어도, 누가 무엇을 위해 읽었는지에 따라 영역이 갈립니다. 이 HYD 사례에서는 진단 도구를 통한 대조와 승인 뒤 재관측 서비스의 역할이 다릅니다. 다른 시스템에서는 배치가 달라질 수 있어도, 판단 근거를 읽는 일과 실행 결과를 확인하는 일을 구별하는 질문은 유효합니다.</a:t>
+              <a:t>실습과 시연에서 남긴 기록으로 돌아왔습니다. 이제 복습과 용어 정리, 퀴즈로 이번 회차를 마무리하겠습니다. 학습 노트에는 완성한 결과와 아직 확인하지 못한 것을 구분해 두겠습니다. 먼저 이번 회차에 배운 흐름을 쿨러 사건으로 복습해 보겠습니다. 표에 쿨러 사건의 다섯 순간을 놓았어요. 답과 근거 칸은 잠깐 가려 둘게요. 순간마다 지식, 에이전트, 프로세스 가운데 어느 영역의 일인지 먼저 골라 보세요. 왜 그 영역인지 근거도 같이 생각해 보시고요. 답을 맞춰 볼까요? 첫째, 핀 오염을 판단할 기준을 등록해 관리하는 일은 지식의 영역입니다. 기준은 매뉴얼과 정책을 검토해 관리하고 개정하는 지식이죠. 둘째, 지금의 냉각 효율을 읽어서 기준에 댄 건 에이전트의 일이에요. 값은 도구로 읽은 현재 값이고, 그걸 기준에 대어 판단하는 게 에이전트의 몫이니까요. 셋째, 쿨러 핀 세척을 설비보전팀장이 승인한다는 건 다시 지식입니다. 승인 역할은 조치에 적힌 지식이었죠. 넷째, 운전원 승인 뒤에 냉각 명령이 열린 건 프로세스의 일이에요. 단계 사이의 순서는 엔진이 지킵니다. 다섯째가 헷갈리기 쉬워요. 내려간 유온을 다시 읽고 작업지시를 등록한 건 프로세스의 일입니다. 둘째 순간처럼 시계열 DB를 읽긴 하는데, 판단의 재료를 읽은 게 아니라 승인 뒤 실행의 결과를 확인한 서비스 작업이거든요. 결국 같은 값을 읽어도, 누가 무엇을 위해 읽었는지에 따라 영역이 갈립니다. 이 HYD 사례에서는 진단 도구를 통한 대조와 승인 뒤 재관측 서비스의 역할이 다릅니다. 다른 시스템에서는 배치가 달라질 수 있어도, 판단 근거를 읽는 일과 실행 결과를 확인하는 일을 구별하는 질문은 유효합니다.</a:t>
             </a:r>
           </a:p>
         </p:txBody>
@@ -3995,7 +3995,7 @@
           <a:lstStyle/>
           <a:p>
             <a:r>
-              <a:t>흐름을 되짚었으니, 이번엔 용어의 이름과 뜻을 정리하겠습니다. 표에 이번 회차에서 다시 쓰고 새로 세운 용어 일곱 개가 있어요. 스킬은 에이전트가 업무를 수행하는 순서와 요령을 적은 재사용 지침입니다. MCP는 에이전트가 외부 시스템의 도구를 같은 방식으로 부르게 하는 연결 규약이에요. 출력 계약은 에이전트의 결과에 반드시 있어야 할 항목과 형식의 약속입니다. HITL은 사람의 판단이나 피드백을 과정 안에 넣는 방식입니다. 이 수업에서는 실행 전에 승인하거나 거절하는 자리로 구체화했고요. 프로세스 인스턴스는 프로세스 정의에 따라 실제로 도는 한 건이에요. 우리가 처리 건이라고 불러 온 거죠. 워크아이템은 인스턴스 안에서 수행자에게 맡겨지는 작업 하나, 우리가 단계라고 부른 겁니다. 마지막으로 멀티 에이전트 오케스트레이션은 한 프로세스 안에서 여러 에이전트의 순서와 호출을 조율하는 일입니다.</a:t>
+              <a:t>흐름을 되짚었으니, 이번엔 용어의 이름과 뜻을 정리하겠습니다. 표에 이번 회차에서 다시 쓰고 새로 세운 용어 일곱 개가 있어요. 스킬은 에이전트가 업무를 수행하는 순서와 요령을 적은 재사용 지침입니다. MCP는 에이전트가 외부 시스템의 도구를 같은 방식으로 부르게 하는 연결 규약이에요. 출력 계약은 결과의 필수 항목과 형식, 의미와 처리 조건에 대한 약속입니다. HITL은 사람의 판단이나 피드백을 과정 안에 넣는 방식입니다. 이 수업에서는 실행 전에 승인하거나 거절하는 자리로 구체화했고요. 프로세스 인스턴스는 프로세스 정의에 따라 실제로 도는 한 건이에요. 우리가 처리 건이라고 불러 온 거죠. 워크아이템은 인스턴스 안에서 수행자에게 맡겨지는 작업 하나, 우리가 단계라고 부른 겁니다. 마지막으로 멀티 에이전트 오케스트레이션은 한 프로세스 안에서 여러 에이전트의 순서와 호출을 조율하는 일입니다.</a:t>
             </a:r>
           </a:p>
         </p:txBody>
@@ -4275,7 +4275,7 @@
           <a:lstStyle/>
           <a:p>
             <a:r>
-              <a:t>마지막 문제입니다. 재고 보충을 빨리 끝내려고, 구매 에이전트에게 발주를 직접 등록하는 쓰기 도구를 연결하자는 의견이 나왔어요. 통제의 관점에서 가장 알맞은 판단은 무엇일까요? 1번, 발주 등록은 승인 뒤의 프로세스 작업에 두고 에이전트는 읽기만 한다. 2번, 스킬에 승인 뒤에만 발주한다고 적어 두면 쓰기 도구를 연결해도 된다. 3번, 발주한 뒤에 감사 기록이 남으니 쓰기 도구를 연결해도 문제없다. 4번, 발주 수량을 규칙으로 계산하게 하면 사람의 승인은 필요 없다.</a:t>
+              <a:t>마지막 문제입니다. 재고 보충을 빨리 끝내려고, 구매 에이전트에게 발주를 직접 등록하는 쓰기 도구를 연결하자는 의견이 나왔어요. 이 수업의 승인 정책에서 가장 알맞은 판단은 무엇일까요? 1번, 발주는 승인 뒤 프로세스가 등록하고 에이전트는 업무 원천을 조회해 제안을 제출한다. 2번, 스킬에 승인 뒤에만 발주한다고 적어 두면 쓰기 도구를 연결해도 된다. 3번, 발주한 뒤에 감사 기록이 남으니 쓰기 도구를 연결해도 문제없다. 4번, 발주 수량을 규칙으로 계산하게 하면 사람의 승인은 필요 없다.</a:t>
             </a:r>
           </a:p>
         </p:txBody>
@@ -8613,7 +8613,147 @@
         </p:nvSpPr>
         <p:spPr>
           <a:xfrm>
-            <a:off x="548639" y="3122676"/>
+            <a:off x="548639" y="4318711"/>
+            <a:ext cx="1737360" cy="1737360"/>
+          </a:xfrm>
+          <a:prstGeom prst="ellipse">
+            <a:avLst/>
+          </a:prstGeom>
+          <a:solidFill>
+            <a:srgbClr val="E7F3FD"/>
+          </a:solidFill>
+          <a:ln w="25400">
+            <a:solidFill>
+              <a:srgbClr val="5CB8F2"/>
+            </a:solidFill>
+          </a:ln>
+        </p:spPr>
+        <p:txBody>
+          <a:bodyPr rtlCol="0" anchor="ctr"/>
+          <a:lstStyle/>
+          <a:p>
+            <a:pPr algn="ctr"/>
+          </a:p>
+        </p:txBody>
+      </p:sp>
+      <p:sp>
+        <p:nvSpPr>
+          <p:cNvPr id="7" name="TextBox 6"/>
+          <p:cNvSpPr txBox="1"/>
+          <p:nvPr/>
+        </p:nvSpPr>
+        <p:spPr>
+          <a:xfrm>
+            <a:off x="523951" y="4648809"/>
+            <a:ext cx="1786737" cy="1077163"/>
+          </a:xfrm>
+          <a:prstGeom prst="rect">
+            <a:avLst/>
+          </a:prstGeom>
+          <a:noFill/>
+        </p:spPr>
+        <p:txBody>
+          <a:bodyPr wrap="square" anchor="ctr"/>
+          <a:lstStyle/>
+          <a:p>
+            <a:pPr algn="ctr" eaLnBrk="0">
+              <a:lnSpc>
+                <a:spcPct val="110000"/>
+              </a:lnSpc>
+            </a:pPr>
+            <a:r>
+              <a:rPr sz="1400" b="1">
+                <a:solidFill>
+                  <a:srgbClr val="13294B"/>
+                </a:solidFill>
+                <a:latin typeface="맑은 고딕"/>
+                <a:ea typeface="맑은 고딕"/>
+                <a:cs typeface="맑은 고딕"/>
+              </a:rPr>
+              <a:t>AnomalyPattern</a:t>
+            </a:r>
+          </a:p>
+        </p:txBody>
+      </p:sp>
+      <p:sp>
+        <p:nvSpPr>
+          <p:cNvPr id="8" name="Oval 7"/>
+          <p:cNvSpPr/>
+          <p:nvPr/>
+        </p:nvSpPr>
+        <p:spPr>
+          <a:xfrm>
+            <a:off x="3730038" y="1777136"/>
+            <a:ext cx="1737360" cy="1737360"/>
+          </a:xfrm>
+          <a:prstGeom prst="ellipse">
+            <a:avLst/>
+          </a:prstGeom>
+          <a:solidFill>
+            <a:srgbClr val="E7F3FD"/>
+          </a:solidFill>
+          <a:ln w="25400">
+            <a:solidFill>
+              <a:srgbClr val="5CB8F2"/>
+            </a:solidFill>
+          </a:ln>
+        </p:spPr>
+        <p:txBody>
+          <a:bodyPr rtlCol="0" anchor="ctr"/>
+          <a:lstStyle/>
+          <a:p>
+            <a:pPr algn="ctr"/>
+          </a:p>
+        </p:txBody>
+      </p:sp>
+      <p:sp>
+        <p:nvSpPr>
+          <p:cNvPr id="9" name="TextBox 8"/>
+          <p:cNvSpPr txBox="1"/>
+          <p:nvPr/>
+        </p:nvSpPr>
+        <p:spPr>
+          <a:xfrm>
+            <a:off x="3851653" y="2107234"/>
+            <a:ext cx="1494129" cy="1077163"/>
+          </a:xfrm>
+          <a:prstGeom prst="rect">
+            <a:avLst/>
+          </a:prstGeom>
+          <a:noFill/>
+        </p:spPr>
+        <p:txBody>
+          <a:bodyPr wrap="square" anchor="ctr"/>
+          <a:lstStyle/>
+          <a:p>
+            <a:pPr algn="ctr" eaLnBrk="0">
+              <a:lnSpc>
+                <a:spcPct val="110000"/>
+              </a:lnSpc>
+            </a:pPr>
+            <a:r>
+              <a:rPr sz="1400" b="1">
+                <a:solidFill>
+                  <a:srgbClr val="13294B"/>
+                </a:solidFill>
+                <a:latin typeface="맑은 고딕"/>
+                <a:ea typeface="맑은 고딕"/>
+                <a:cs typeface="맑은 고딕"/>
+              </a:rPr>
+              <a:t>Symptom</a:t>
+            </a:r>
+          </a:p>
+        </p:txBody>
+      </p:sp>
+      <p:sp>
+        <p:nvSpPr>
+          <p:cNvPr id="10" name="Oval 9"/>
+          <p:cNvSpPr/>
+          <p:nvPr/>
+        </p:nvSpPr>
+        <p:spPr>
+          <a:xfrm>
+            <a:off x="6817866" y="4318711"/>
             <a:ext cx="1737360" cy="1737360"/>
           </a:xfrm>
           <a:prstGeom prst="ellipse">
@@ -8638,13 +8778,13 @@
       </p:sp>
       <p:sp>
         <p:nvSpPr>
-          <p:cNvPr id="7" name="TextBox 6"/>
-          <p:cNvSpPr txBox="1"/>
-          <p:nvPr/>
-        </p:nvSpPr>
-        <p:spPr>
-          <a:xfrm>
-            <a:off x="670255" y="3452774"/>
+          <p:cNvPr id="11" name="TextBox 10"/>
+          <p:cNvSpPr txBox="1"/>
+          <p:nvPr/>
+        </p:nvSpPr>
+        <p:spPr>
+          <a:xfrm>
+            <a:off x="6939482" y="4648809"/>
             <a:ext cx="1494129" cy="1077163"/>
           </a:xfrm>
           <a:prstGeom prst="rect">
@@ -8670,38 +8810,20 @@
                 <a:ea typeface="맑은 고딕"/>
                 <a:cs typeface="맑은 고딕"/>
               </a:rPr>
-              <a:t>이상 패턴</a:t>
-            </a:r>
-          </a:p>
-          <a:p>
-            <a:pPr algn="ctr" eaLnBrk="0">
-              <a:lnSpc>
-                <a:spcPct val="110000"/>
-              </a:lnSpc>
-            </a:pPr>
-            <a:r>
-              <a:rPr sz="1100" b="0">
-                <a:solidFill>
-                  <a:srgbClr val="556175"/>
-                </a:solidFill>
-                <a:latin typeface="맑은 고딕"/>
-                <a:ea typeface="맑은 고딕"/>
-                <a:cs typeface="맑은 고딕"/>
-              </a:rPr>
-              <a:t>쿨러 성능 저하</a:t>
-            </a:r>
-          </a:p>
-        </p:txBody>
-      </p:sp>
-      <p:sp>
-        <p:nvSpPr>
-          <p:cNvPr id="8" name="Oval 7"/>
+              <a:t>FailureMode</a:t>
+            </a:r>
+          </a:p>
+        </p:txBody>
+      </p:sp>
+      <p:sp>
+        <p:nvSpPr>
+          <p:cNvPr id="12" name="Oval 11"/>
           <p:cNvSpPr/>
           <p:nvPr/>
         </p:nvSpPr>
         <p:spPr>
           <a:xfrm>
-            <a:off x="3730038" y="3122676"/>
+            <a:off x="9905695" y="1777136"/>
             <a:ext cx="1737360" cy="1737360"/>
           </a:xfrm>
           <a:prstGeom prst="ellipse">
@@ -8726,13 +8848,13 @@
       </p:sp>
       <p:sp>
         <p:nvSpPr>
-          <p:cNvPr id="9" name="TextBox 8"/>
-          <p:cNvSpPr txBox="1"/>
-          <p:nvPr/>
-        </p:nvSpPr>
-        <p:spPr>
-          <a:xfrm>
-            <a:off x="3851653" y="3452774"/>
+          <p:cNvPr id="13" name="TextBox 12"/>
+          <p:cNvSpPr txBox="1"/>
+          <p:nvPr/>
+        </p:nvSpPr>
+        <p:spPr>
+          <a:xfrm>
+            <a:off x="10027310" y="2107234"/>
             <a:ext cx="1494129" cy="1077163"/>
           </a:xfrm>
           <a:prstGeom prst="rect">
@@ -8758,219 +8880,7 @@
                 <a:ea typeface="맑은 고딕"/>
                 <a:cs typeface="맑은 고딕"/>
               </a:rPr>
-              <a:t>증상</a:t>
-            </a:r>
-          </a:p>
-          <a:p>
-            <a:pPr algn="ctr" eaLnBrk="0">
-              <a:lnSpc>
-                <a:spcPct val="110000"/>
-              </a:lnSpc>
-            </a:pPr>
-            <a:r>
-              <a:rPr sz="1100" b="0">
-                <a:solidFill>
-                  <a:srgbClr val="556175"/>
-                </a:solidFill>
-                <a:latin typeface="맑은 고딕"/>
-                <a:ea typeface="맑은 고딕"/>
-                <a:cs typeface="맑은 고딕"/>
-              </a:rPr>
-              <a:t>유온 상승</a:t>
-            </a:r>
-          </a:p>
-        </p:txBody>
-      </p:sp>
-      <p:sp>
-        <p:nvSpPr>
-          <p:cNvPr id="10" name="Oval 9"/>
-          <p:cNvSpPr/>
-          <p:nvPr/>
-        </p:nvSpPr>
-        <p:spPr>
-          <a:xfrm>
-            <a:off x="6817866" y="3122676"/>
-            <a:ext cx="1737360" cy="1737360"/>
-          </a:xfrm>
-          <a:prstGeom prst="ellipse">
-            <a:avLst/>
-          </a:prstGeom>
-          <a:solidFill>
-            <a:srgbClr val="E7F3FD"/>
-          </a:solidFill>
-          <a:ln w="25400">
-            <a:solidFill>
-              <a:srgbClr val="5CB8F2"/>
-            </a:solidFill>
-          </a:ln>
-        </p:spPr>
-        <p:txBody>
-          <a:bodyPr rtlCol="0" anchor="ctr"/>
-          <a:lstStyle/>
-          <a:p>
-            <a:pPr algn="ctr"/>
-          </a:p>
-        </p:txBody>
-      </p:sp>
-      <p:sp>
-        <p:nvSpPr>
-          <p:cNvPr id="11" name="TextBox 10"/>
-          <p:cNvSpPr txBox="1"/>
-          <p:nvPr/>
-        </p:nvSpPr>
-        <p:spPr>
-          <a:xfrm>
-            <a:off x="6939482" y="3452774"/>
-            <a:ext cx="1494129" cy="1077163"/>
-          </a:xfrm>
-          <a:prstGeom prst="rect">
-            <a:avLst/>
-          </a:prstGeom>
-          <a:noFill/>
-        </p:spPr>
-        <p:txBody>
-          <a:bodyPr wrap="square" anchor="ctr"/>
-          <a:lstStyle/>
-          <a:p>
-            <a:pPr algn="ctr" eaLnBrk="0">
-              <a:lnSpc>
-                <a:spcPct val="110000"/>
-              </a:lnSpc>
-            </a:pPr>
-            <a:r>
-              <a:rPr sz="1400" b="1">
-                <a:solidFill>
-                  <a:srgbClr val="13294B"/>
-                </a:solidFill>
-                <a:latin typeface="맑은 고딕"/>
-                <a:ea typeface="맑은 고딕"/>
-                <a:cs typeface="맑은 고딕"/>
-              </a:rPr>
-              <a:t>고장 유형</a:t>
-            </a:r>
-          </a:p>
-          <a:p>
-            <a:pPr algn="ctr" eaLnBrk="0">
-              <a:lnSpc>
-                <a:spcPct val="110000"/>
-              </a:lnSpc>
-            </a:pPr>
-            <a:r>
-              <a:rPr sz="1100" b="0">
-                <a:solidFill>
-                  <a:srgbClr val="556175"/>
-                </a:solidFill>
-                <a:latin typeface="맑은 고딕"/>
-                <a:ea typeface="맑은 고딕"/>
-                <a:cs typeface="맑은 고딕"/>
-              </a:rPr>
-              <a:t>쿨러 냉각</a:t>
-            </a:r>
-          </a:p>
-          <a:p>
-            <a:pPr algn="ctr" eaLnBrk="0">
-              <a:lnSpc>
-                <a:spcPct val="110000"/>
-              </a:lnSpc>
-            </a:pPr>
-            <a:r>
-              <a:rPr sz="1100" b="0">
-                <a:solidFill>
-                  <a:srgbClr val="556175"/>
-                </a:solidFill>
-                <a:latin typeface="맑은 고딕"/>
-                <a:ea typeface="맑은 고딕"/>
-                <a:cs typeface="맑은 고딕"/>
-              </a:rPr>
-              <a:t>성능 상실</a:t>
-            </a:r>
-          </a:p>
-        </p:txBody>
-      </p:sp>
-      <p:sp>
-        <p:nvSpPr>
-          <p:cNvPr id="12" name="Oval 11"/>
-          <p:cNvSpPr/>
-          <p:nvPr/>
-        </p:nvSpPr>
-        <p:spPr>
-          <a:xfrm>
-            <a:off x="9905695" y="3122676"/>
-            <a:ext cx="1737360" cy="1737360"/>
-          </a:xfrm>
-          <a:prstGeom prst="ellipse">
-            <a:avLst/>
-          </a:prstGeom>
-          <a:solidFill>
-            <a:srgbClr val="E7F3FD"/>
-          </a:solidFill>
-          <a:ln w="25400">
-            <a:solidFill>
-              <a:srgbClr val="5CB8F2"/>
-            </a:solidFill>
-          </a:ln>
-        </p:spPr>
-        <p:txBody>
-          <a:bodyPr rtlCol="0" anchor="ctr"/>
-          <a:lstStyle/>
-          <a:p>
-            <a:pPr algn="ctr"/>
-          </a:p>
-        </p:txBody>
-      </p:sp>
-      <p:sp>
-        <p:nvSpPr>
-          <p:cNvPr id="13" name="TextBox 12"/>
-          <p:cNvSpPr txBox="1"/>
-          <p:nvPr/>
-        </p:nvSpPr>
-        <p:spPr>
-          <a:xfrm>
-            <a:off x="10027310" y="3452774"/>
-            <a:ext cx="1494129" cy="1077163"/>
-          </a:xfrm>
-          <a:prstGeom prst="rect">
-            <a:avLst/>
-          </a:prstGeom>
-          <a:noFill/>
-        </p:spPr>
-        <p:txBody>
-          <a:bodyPr wrap="square" anchor="ctr"/>
-          <a:lstStyle/>
-          <a:p>
-            <a:pPr algn="ctr" eaLnBrk="0">
-              <a:lnSpc>
-                <a:spcPct val="110000"/>
-              </a:lnSpc>
-            </a:pPr>
-            <a:r>
-              <a:rPr sz="1400" b="1">
-                <a:solidFill>
-                  <a:srgbClr val="13294B"/>
-                </a:solidFill>
-                <a:latin typeface="맑은 고딕"/>
-                <a:ea typeface="맑은 고딕"/>
-                <a:cs typeface="맑은 고딕"/>
-              </a:rPr>
-              <a:t>원인</a:t>
-            </a:r>
-          </a:p>
-          <a:p>
-            <a:pPr algn="ctr" eaLnBrk="0">
-              <a:lnSpc>
-                <a:spcPct val="110000"/>
-              </a:lnSpc>
-            </a:pPr>
-            <a:r>
-              <a:rPr sz="1100" b="0">
-                <a:solidFill>
-                  <a:srgbClr val="556175"/>
-                </a:solidFill>
-                <a:latin typeface="맑은 고딕"/>
-                <a:ea typeface="맑은 고딕"/>
-                <a:cs typeface="맑은 고딕"/>
-              </a:rPr>
-              <a:t>후보 셋</a:t>
+              <a:t>Cause</a:t>
             </a:r>
           </a:p>
         </p:txBody>
@@ -8982,9 +8892,9 @@
           <p:nvPr/>
         </p:nvCxnSpPr>
         <p:spPr>
-          <a:xfrm>
-            <a:off x="2331720" y="3991356"/>
-            <a:ext cx="1325166" cy="0"/>
+          <a:xfrm flipV="1">
+            <a:off x="2131734" y="3233674"/>
+            <a:ext cx="1731137" cy="1382981"/>
           </a:xfrm>
           <a:prstGeom prst="line">
             <a:avLst/>
@@ -9005,7 +8915,7 @@
         </p:nvSpPr>
         <p:spPr>
           <a:xfrm>
-            <a:off x="2483167" y="3625596"/>
+            <a:off x="2486167" y="3559404"/>
             <a:ext cx="1022271" cy="292608"/>
           </a:xfrm>
           <a:prstGeom prst="roundRect">
@@ -9038,7 +8948,7 @@
         </p:nvSpPr>
         <p:spPr>
           <a:xfrm>
-            <a:off x="2483167" y="3625596"/>
+            <a:off x="2486167" y="3559404"/>
             <a:ext cx="1022271" cy="292608"/>
           </a:xfrm>
           <a:prstGeom prst="rect">
@@ -9077,8 +8987,8 @@
         </p:nvCxnSpPr>
         <p:spPr>
           <a:xfrm>
-            <a:off x="5513118" y="3991356"/>
-            <a:ext cx="1231596" cy="0"/>
+            <a:off x="5304722" y="3226924"/>
+            <a:ext cx="1654641" cy="1361926"/>
           </a:xfrm>
           <a:prstGeom prst="line">
             <a:avLst/>
@@ -9099,7 +9009,7 @@
         </p:nvSpPr>
         <p:spPr>
           <a:xfrm>
-            <a:off x="5510931" y="3625596"/>
+            <a:off x="5514057" y="3542127"/>
             <a:ext cx="1235971" cy="292608"/>
           </a:xfrm>
           <a:prstGeom prst="roundRect">
@@ -9132,7 +9042,7 @@
         </p:nvSpPr>
         <p:spPr>
           <a:xfrm>
-            <a:off x="5510931" y="3625596"/>
+            <a:off x="5514057" y="3542127"/>
             <a:ext cx="1235971" cy="292608"/>
           </a:xfrm>
           <a:prstGeom prst="rect">
@@ -9171,8 +9081,8 @@
         </p:nvCxnSpPr>
         <p:spPr>
           <a:xfrm flipH="1">
-            <a:off x="8628378" y="3991356"/>
-            <a:ext cx="1231597" cy="0"/>
+            <a:off x="8413730" y="3226924"/>
+            <a:ext cx="1654641" cy="1361926"/>
           </a:xfrm>
           <a:prstGeom prst="line">
             <a:avLst/>
@@ -9193,7 +9103,7 @@
         </p:nvSpPr>
         <p:spPr>
           <a:xfrm>
-            <a:off x="8786466" y="3625596"/>
+            <a:off x="8783340" y="3542127"/>
             <a:ext cx="915421" cy="292608"/>
           </a:xfrm>
           <a:prstGeom prst="roundRect">
@@ -9226,7 +9136,7 @@
         </p:nvSpPr>
         <p:spPr>
           <a:xfrm>
-            <a:off x="8786466" y="3625596"/>
+            <a:off x="8783340" y="3542127"/>
             <a:ext cx="915421" cy="292608"/>
           </a:xfrm>
           <a:prstGeom prst="rect">
@@ -17568,8 +17478,8 @@
         </p:nvSpPr>
         <p:spPr>
           <a:xfrm>
-            <a:off x="548640" y="2193162"/>
-            <a:ext cx="2567863" cy="3596386"/>
+            <a:off x="548640" y="2200909"/>
+            <a:ext cx="2567863" cy="3580892"/>
           </a:xfrm>
           <a:prstGeom prst="roundRect">
             <a:avLst>
@@ -17601,7 +17511,7 @@
         </p:nvSpPr>
         <p:spPr>
           <a:xfrm>
-            <a:off x="777240" y="2394331"/>
+            <a:off x="777240" y="2402078"/>
             <a:ext cx="731520" cy="731520"/>
           </a:xfrm>
           <a:prstGeom prst="ellipse">
@@ -17631,14 +17541,14 @@
           <p:nvPr/>
         </p:nvPicPr>
         <p:blipFill>
-          <a:blip r:embed="rId3"/>
+          <a:blip r:embed="rIdTheory2_rId3"/>
           <a:stretch>
             <a:fillRect/>
           </a:stretch>
         </p:blipFill>
         <p:spPr>
           <a:xfrm>
-            <a:off x="930859" y="2547950"/>
+            <a:off x="930859" y="2555697"/>
             <a:ext cx="424281" cy="424281"/>
           </a:xfrm>
           <a:prstGeom prst="rect">
@@ -17654,8 +17564,8 @@
         </p:nvSpPr>
         <p:spPr>
           <a:xfrm>
-            <a:off x="713232" y="3217291"/>
-            <a:ext cx="2238679" cy="2069338"/>
+            <a:off x="713232" y="3225038"/>
+            <a:ext cx="2238679" cy="2053844"/>
           </a:xfrm>
           <a:prstGeom prst="rect">
             <a:avLst/>
@@ -17675,7 +17585,7 @@
               </a:spcAft>
             </a:pPr>
             <a:r>
-              <a:rPr sz="2050" b="1">
+              <a:rPr sz="2100" b="1">
                 <a:solidFill>
                   <a:srgbClr val="13294B"/>
                 </a:solidFill>
@@ -17683,11 +17593,11 @@
                 <a:ea typeface="맑은 고딕"/>
                 <a:cs typeface="맑은 고딕"/>
               </a:rPr>
-              <a:t>지식에서 판단까지</a:t>
-            </a:r>
-          </a:p>
-          <a:p>
-            <a:pPr algn="l" eaLnBrk="0" marL="188595" indent="-188595">
+              <a:t>지식과 판단</a:t>
+            </a:r>
+          </a:p>
+          <a:p>
+            <a:pPr algn="l" eaLnBrk="0" marL="194310" indent="-194310">
               <a:lnSpc>
                 <a:spcPct val="110000"/>
               </a:lnSpc>
@@ -17696,7 +17606,7 @@
               </a:spcAft>
             </a:pPr>
             <a:r>
-              <a:rPr sz="1650" b="0">
+              <a:rPr sz="1700" b="0">
                 <a:solidFill>
                   <a:srgbClr val="1F2A3A"/>
                 </a:solidFill>
@@ -17708,7 +17618,7 @@
             </a:r>
           </a:p>
           <a:p>
-            <a:pPr algn="l" eaLnBrk="0" marL="188595" indent="-188595">
+            <a:pPr algn="l" eaLnBrk="0" marL="194310" indent="-194310">
               <a:lnSpc>
                 <a:spcPct val="110000"/>
               </a:lnSpc>
@@ -17717,7 +17627,7 @@
               </a:spcAft>
             </a:pPr>
             <a:r>
-              <a:rPr sz="1650" b="0">
+              <a:rPr sz="1700" b="0">
                 <a:solidFill>
                   <a:srgbClr val="1F2A3A"/>
                 </a:solidFill>
@@ -17738,7 +17648,7 @@
         </p:nvSpPr>
         <p:spPr>
           <a:xfrm>
-            <a:off x="777240" y="5359781"/>
+            <a:off x="777240" y="5352034"/>
             <a:ext cx="1219199" cy="292608"/>
           </a:xfrm>
           <a:prstGeom prst="roundRect">
@@ -17769,7 +17679,7 @@
         </p:nvSpPr>
         <p:spPr>
           <a:xfrm>
-            <a:off x="777240" y="5359781"/>
+            <a:off x="777240" y="5352034"/>
             <a:ext cx="1219199" cy="292608"/>
           </a:xfrm>
           <a:prstGeom prst="rect">
@@ -17808,8 +17718,8 @@
         </p:nvSpPr>
         <p:spPr>
           <a:xfrm>
-            <a:off x="3390823" y="2193162"/>
-            <a:ext cx="2567863" cy="3596386"/>
+            <a:off x="3390823" y="2200909"/>
+            <a:ext cx="2567863" cy="3580892"/>
           </a:xfrm>
           <a:prstGeom prst="roundRect">
             <a:avLst>
@@ -17841,7 +17751,7 @@
         </p:nvSpPr>
         <p:spPr>
           <a:xfrm>
-            <a:off x="3619423" y="2394331"/>
+            <a:off x="3619423" y="2402078"/>
             <a:ext cx="731520" cy="731520"/>
           </a:xfrm>
           <a:prstGeom prst="ellipse">
@@ -17871,14 +17781,14 @@
           <p:nvPr/>
         </p:nvPicPr>
         <p:blipFill>
-          <a:blip r:embed="rId4"/>
+          <a:blip r:embed="rIdTheory2_rId4"/>
           <a:stretch>
             <a:fillRect/>
           </a:stretch>
         </p:blipFill>
         <p:spPr>
           <a:xfrm>
-            <a:off x="3773043" y="2547950"/>
+            <a:off x="3773043" y="2555697"/>
             <a:ext cx="424281" cy="424281"/>
           </a:xfrm>
           <a:prstGeom prst="rect">
@@ -17894,8 +17804,8 @@
         </p:nvSpPr>
         <p:spPr>
           <a:xfrm>
-            <a:off x="3555415" y="3217291"/>
-            <a:ext cx="2238679" cy="2069338"/>
+            <a:off x="3555415" y="3225038"/>
+            <a:ext cx="2238679" cy="2053844"/>
           </a:xfrm>
           <a:prstGeom prst="rect">
             <a:avLst/>
@@ -17915,7 +17825,7 @@
               </a:spcAft>
             </a:pPr>
             <a:r>
-              <a:rPr sz="2050" b="1">
+              <a:rPr sz="2100" b="1">
                 <a:solidFill>
                   <a:srgbClr val="13294B"/>
                 </a:solidFill>
@@ -17923,11 +17833,11 @@
                 <a:ea typeface="맑은 고딕"/>
                 <a:cs typeface="맑은 고딕"/>
               </a:rPr>
-              <a:t>제안에서 완료까지</a:t>
-            </a:r>
-          </a:p>
-          <a:p>
-            <a:pPr algn="l" eaLnBrk="0" marL="188595" indent="-188595">
+              <a:t>제안과 업무 완료</a:t>
+            </a:r>
+          </a:p>
+          <a:p>
+            <a:pPr algn="l" eaLnBrk="0" marL="194310" indent="-194310">
               <a:lnSpc>
                 <a:spcPct val="110000"/>
               </a:lnSpc>
@@ -17936,7 +17846,7 @@
               </a:spcAft>
             </a:pPr>
             <a:r>
-              <a:rPr sz="1650" b="0">
+              <a:rPr sz="1700" b="0">
                 <a:solidFill>
                   <a:srgbClr val="1F2A3A"/>
                 </a:solidFill>
@@ -17948,7 +17858,7 @@
             </a:r>
           </a:p>
           <a:p>
-            <a:pPr algn="l" eaLnBrk="0" marL="188595" indent="-188595">
+            <a:pPr algn="l" eaLnBrk="0" marL="194310" indent="-194310">
               <a:lnSpc>
                 <a:spcPct val="110000"/>
               </a:lnSpc>
@@ -17957,7 +17867,7 @@
               </a:spcAft>
             </a:pPr>
             <a:r>
-              <a:rPr sz="1650" b="0">
+              <a:rPr sz="1700" b="0">
                 <a:solidFill>
                   <a:srgbClr val="1F2A3A"/>
                 </a:solidFill>
@@ -17978,7 +17888,7 @@
         </p:nvSpPr>
         <p:spPr>
           <a:xfrm>
-            <a:off x="3619423" y="5359781"/>
+            <a:off x="3619423" y="5352034"/>
             <a:ext cx="1219199" cy="292608"/>
           </a:xfrm>
           <a:prstGeom prst="roundRect">
@@ -18009,7 +17919,7 @@
         </p:nvSpPr>
         <p:spPr>
           <a:xfrm>
-            <a:off x="3619423" y="5359781"/>
+            <a:off x="3619423" y="5352034"/>
             <a:ext cx="1219199" cy="292608"/>
           </a:xfrm>
           <a:prstGeom prst="rect">
@@ -18048,8 +17958,8 @@
         </p:nvSpPr>
         <p:spPr>
           <a:xfrm>
-            <a:off x="6233007" y="2193162"/>
-            <a:ext cx="2567863" cy="3596386"/>
+            <a:off x="6233007" y="2200909"/>
+            <a:ext cx="2567863" cy="3580892"/>
           </a:xfrm>
           <a:prstGeom prst="roundRect">
             <a:avLst>
@@ -18081,7 +17991,7 @@
         </p:nvSpPr>
         <p:spPr>
           <a:xfrm>
-            <a:off x="6461607" y="2394331"/>
+            <a:off x="6461607" y="2402078"/>
             <a:ext cx="731520" cy="731520"/>
           </a:xfrm>
           <a:prstGeom prst="ellipse">
@@ -18111,14 +18021,14 @@
           <p:nvPr/>
         </p:nvPicPr>
         <p:blipFill>
-          <a:blip r:embed="rId5"/>
+          <a:blip r:embed="rIdTheory2_rId5"/>
           <a:stretch>
             <a:fillRect/>
           </a:stretch>
         </p:blipFill>
         <p:spPr>
           <a:xfrm>
-            <a:off x="6615226" y="2547950"/>
+            <a:off x="6615226" y="2555697"/>
             <a:ext cx="424281" cy="424281"/>
           </a:xfrm>
           <a:prstGeom prst="rect">
@@ -18134,8 +18044,8 @@
         </p:nvSpPr>
         <p:spPr>
           <a:xfrm>
-            <a:off x="6397599" y="3217291"/>
-            <a:ext cx="2238679" cy="2069338"/>
+            <a:off x="6397599" y="3225038"/>
+            <a:ext cx="2238679" cy="2053844"/>
           </a:xfrm>
           <a:prstGeom prst="rect">
             <a:avLst/>
@@ -18155,7 +18065,7 @@
               </a:spcAft>
             </a:pPr>
             <a:r>
-              <a:rPr sz="2050" b="1">
+              <a:rPr sz="2100" b="1">
                 <a:solidFill>
                   <a:srgbClr val="13294B"/>
                 </a:solidFill>
@@ -18167,7 +18077,7 @@
             </a:r>
           </a:p>
           <a:p>
-            <a:pPr algn="l" eaLnBrk="0" marL="188595" indent="-188595">
+            <a:pPr algn="l" eaLnBrk="0" marL="194310" indent="-194310">
               <a:lnSpc>
                 <a:spcPct val="110000"/>
               </a:lnSpc>
@@ -18176,7 +18086,7 @@
               </a:spcAft>
             </a:pPr>
             <a:r>
-              <a:rPr sz="1650" b="0">
+              <a:rPr sz="1700" b="0">
                 <a:solidFill>
                   <a:srgbClr val="1F2A3A"/>
                 </a:solidFill>
@@ -18188,7 +18098,7 @@
             </a:r>
           </a:p>
           <a:p>
-            <a:pPr algn="l" eaLnBrk="0" marL="188595" indent="-188595">
+            <a:pPr algn="l" eaLnBrk="0" marL="194310" indent="-194310">
               <a:lnSpc>
                 <a:spcPct val="110000"/>
               </a:lnSpc>
@@ -18197,7 +18107,7 @@
               </a:spcAft>
             </a:pPr>
             <a:r>
-              <a:rPr sz="1650" b="0">
+              <a:rPr sz="1700" b="0">
                 <a:solidFill>
                   <a:srgbClr val="1F2A3A"/>
                 </a:solidFill>
@@ -18218,7 +18128,7 @@
         </p:nvSpPr>
         <p:spPr>
           <a:xfrm>
-            <a:off x="6461607" y="5359781"/>
+            <a:off x="6461607" y="5352034"/>
             <a:ext cx="1173480" cy="292608"/>
           </a:xfrm>
           <a:prstGeom prst="roundRect">
@@ -18249,7 +18159,7 @@
         </p:nvSpPr>
         <p:spPr>
           <a:xfrm>
-            <a:off x="6461607" y="5359781"/>
+            <a:off x="6461607" y="5352034"/>
             <a:ext cx="1173480" cy="292608"/>
           </a:xfrm>
           <a:prstGeom prst="rect">
@@ -18288,8 +18198,8 @@
         </p:nvSpPr>
         <p:spPr>
           <a:xfrm>
-            <a:off x="9075191" y="2193162"/>
-            <a:ext cx="2567863" cy="3596386"/>
+            <a:off x="9075191" y="2200909"/>
+            <a:ext cx="2567863" cy="3580892"/>
           </a:xfrm>
           <a:prstGeom prst="roundRect">
             <a:avLst>
@@ -18321,7 +18231,7 @@
         </p:nvSpPr>
         <p:spPr>
           <a:xfrm>
-            <a:off x="9303791" y="2394331"/>
+            <a:off x="9303791" y="2402078"/>
             <a:ext cx="731520" cy="731520"/>
           </a:xfrm>
           <a:prstGeom prst="ellipse">
@@ -18351,14 +18261,14 @@
           <p:nvPr/>
         </p:nvPicPr>
         <p:blipFill>
-          <a:blip r:embed="rId6"/>
+          <a:blip r:embed="rIdTheory2_rId6"/>
           <a:stretch>
             <a:fillRect/>
           </a:stretch>
         </p:blipFill>
         <p:spPr>
           <a:xfrm>
-            <a:off x="9457410" y="2547950"/>
+            <a:off x="9457410" y="2555697"/>
             <a:ext cx="424281" cy="424281"/>
           </a:xfrm>
           <a:prstGeom prst="rect">
@@ -18374,8 +18284,8 @@
         </p:nvSpPr>
         <p:spPr>
           <a:xfrm>
-            <a:off x="9239783" y="3217291"/>
-            <a:ext cx="2238679" cy="2069338"/>
+            <a:off x="9239783" y="3225038"/>
+            <a:ext cx="2238679" cy="2053844"/>
           </a:xfrm>
           <a:prstGeom prst="rect">
             <a:avLst/>
@@ -18395,7 +18305,7 @@
               </a:spcAft>
             </a:pPr>
             <a:r>
-              <a:rPr sz="2050" b="1">
+              <a:rPr sz="2100" b="1">
                 <a:solidFill>
                   <a:srgbClr val="13294B"/>
                 </a:solidFill>
@@ -18407,7 +18317,7 @@
             </a:r>
           </a:p>
           <a:p>
-            <a:pPr algn="l" eaLnBrk="0" marL="188595" indent="-188595">
+            <a:pPr algn="l" eaLnBrk="0" marL="194310" indent="-194310">
               <a:lnSpc>
                 <a:spcPct val="110000"/>
               </a:lnSpc>
@@ -18416,7 +18326,7 @@
               </a:spcAft>
             </a:pPr>
             <a:r>
-              <a:rPr sz="1650" b="0">
+              <a:rPr sz="1700" b="0">
                 <a:solidFill>
                   <a:srgbClr val="1F2A3A"/>
                 </a:solidFill>
@@ -18428,7 +18338,7 @@
             </a:r>
           </a:p>
           <a:p>
-            <a:pPr algn="l" eaLnBrk="0" marL="188595" indent="-188595">
+            <a:pPr algn="l" eaLnBrk="0" marL="194310" indent="-194310">
               <a:lnSpc>
                 <a:spcPct val="110000"/>
               </a:lnSpc>
@@ -18437,7 +18347,7 @@
               </a:spcAft>
             </a:pPr>
             <a:r>
-              <a:rPr sz="1650" b="0">
+              <a:rPr sz="1700" b="0">
                 <a:solidFill>
                   <a:srgbClr val="1F2A3A"/>
                 </a:solidFill>
@@ -18458,7 +18368,7 @@
         </p:nvSpPr>
         <p:spPr>
           <a:xfrm>
-            <a:off x="9303791" y="5359781"/>
+            <a:off x="9303791" y="5352034"/>
             <a:ext cx="1219199" cy="292608"/>
           </a:xfrm>
           <a:prstGeom prst="roundRect">
@@ -18489,7 +18399,7 @@
         </p:nvSpPr>
         <p:spPr>
           <a:xfrm>
-            <a:off x="9303791" y="5359781"/>
+            <a:off x="9303791" y="5352034"/>
             <a:ext cx="1219199" cy="292608"/>
           </a:xfrm>
           <a:prstGeom prst="rect">
@@ -21968,7 +21878,7 @@
                 <a:ea typeface="맑은 고딕"/>
                 <a:cs typeface="맑은 고딕"/>
               </a:rPr>
-              <a:t>닿은 끝 이벤트와 그때까지의 결과</a:t>
+              <a:t>진행한 경로와 그때까지의 업무 결과</a:t>
             </a:r>
           </a:p>
         </p:txBody>
@@ -24082,16 +23992,686 @@
         </p:nvSpPr>
         <p:spPr>
           <a:xfrm>
-            <a:off x="548640" y="1961387"/>
-            <a:ext cx="11094415" cy="347472"/>
+            <a:off x="594360" y="1828800"/>
+            <a:ext cx="5212080" cy="1965960"/>
           </a:xfrm>
           <a:prstGeom prst="roundRect">
             <a:avLst>
-              <a:gd name="adj" fmla="val 12000"/>
+              <a:gd name="adj" fmla="val 6000"/>
             </a:avLst>
           </a:prstGeom>
           <a:solidFill>
-            <a:srgbClr val="13294B"/>
+            <a:srgbClr val="FFFFFF"/>
+          </a:solidFill>
+          <a:ln w="15875">
+            <a:solidFill>
+              <a:srgbClr val="D3D9E1"/>
+            </a:solidFill>
+          </a:ln>
+        </p:spPr>
+        <p:txBody>
+          <a:bodyPr rtlCol="0" anchor="ctr"/>
+          <a:lstStyle/>
+          <a:p>
+            <a:pPr algn="ctr"/>
+          </a:p>
+        </p:txBody>
+      </p:sp>
+      <p:sp>
+        <p:nvSpPr>
+          <p:cNvPr id="7" name="TextBox 6"/>
+          <p:cNvSpPr txBox="1"/>
+          <p:nvPr/>
+        </p:nvSpPr>
+        <p:spPr>
+          <a:xfrm>
+            <a:off x="777240" y="1993392"/>
+            <a:ext cx="4846320" cy="365760"/>
+          </a:xfrm>
+          <a:prstGeom prst="rect">
+            <a:avLst/>
+          </a:prstGeom>
+          <a:noFill/>
+        </p:spPr>
+        <p:txBody>
+          <a:bodyPr wrap="square" anchor="t"/>
+          <a:lstStyle/>
+          <a:p>
+            <a:pPr algn="l" eaLnBrk="0">
+              <a:lnSpc>
+                <a:spcPct val="110000"/>
+              </a:lnSpc>
+            </a:pPr>
+            <a:r>
+              <a:rPr sz="1900" b="1">
+                <a:solidFill>
+                  <a:srgbClr val="13294B"/>
+                </a:solidFill>
+                <a:latin typeface="맑은 고딕"/>
+                <a:ea typeface="맑은 고딕"/>
+                <a:cs typeface="맑은 고딕"/>
+              </a:rPr>
+              <a:t>approval · chosen_skill</a:t>
+            </a:r>
+          </a:p>
+        </p:txBody>
+      </p:sp>
+      <p:sp>
+        <p:nvSpPr>
+          <p:cNvPr id="8" name="TextBox 7"/>
+          <p:cNvSpPr txBox="1"/>
+          <p:nvPr/>
+        </p:nvSpPr>
+        <p:spPr>
+          <a:xfrm>
+            <a:off x="777240" y="2514600"/>
+            <a:ext cx="4846320" cy="685800"/>
+          </a:xfrm>
+          <a:prstGeom prst="rect">
+            <a:avLst/>
+          </a:prstGeom>
+          <a:noFill/>
+        </p:spPr>
+        <p:txBody>
+          <a:bodyPr wrap="square" anchor="t"/>
+          <a:lstStyle/>
+          <a:p>
+            <a:pPr algn="l" eaLnBrk="0">
+              <a:lnSpc>
+                <a:spcPct val="110000"/>
+              </a:lnSpc>
+            </a:pPr>
+            <a:r>
+              <a:rPr sz="1700" b="0">
+                <a:solidFill>
+                  <a:srgbClr val="13294B"/>
+                </a:solidFill>
+                <a:latin typeface="맑은 고딕"/>
+                <a:ea typeface="맑은 고딕"/>
+                <a:cs typeface="맑은 고딕"/>
+              </a:rPr>
+              <a:t>승인이라는 결정과 고른 조치</a:t>
+            </a:r>
+          </a:p>
+          <a:p>
+            <a:pPr algn="l" eaLnBrk="0">
+              <a:lnSpc>
+                <a:spcPct val="110000"/>
+              </a:lnSpc>
+            </a:pPr>
+            <a:r>
+              <a:rPr sz="1700" b="0">
+                <a:solidFill>
+                  <a:srgbClr val="13294B"/>
+                </a:solidFill>
+                <a:latin typeface="맑은 고딕"/>
+                <a:ea typeface="맑은 고딕"/>
+                <a:cs typeface="맑은 고딕"/>
+              </a:rPr>
+              <a:t>선택 예: 승인 · 팬 최대 운전</a:t>
+            </a:r>
+          </a:p>
+        </p:txBody>
+      </p:sp>
+      <p:sp>
+        <p:nvSpPr>
+          <p:cNvPr id="9" name="TextBox 8"/>
+          <p:cNvSpPr txBox="1"/>
+          <p:nvPr/>
+        </p:nvSpPr>
+        <p:spPr>
+          <a:xfrm>
+            <a:off x="777240" y="3310128"/>
+            <a:ext cx="4846320" cy="320040"/>
+          </a:xfrm>
+          <a:prstGeom prst="rect">
+            <a:avLst/>
+          </a:prstGeom>
+          <a:noFill/>
+        </p:spPr>
+        <p:txBody>
+          <a:bodyPr wrap="square" anchor="t"/>
+          <a:lstStyle/>
+          <a:p>
+            <a:pPr algn="l" eaLnBrk="0">
+              <a:lnSpc>
+                <a:spcPct val="110000"/>
+              </a:lnSpc>
+            </a:pPr>
+            <a:r>
+              <a:rPr sz="1500" b="1">
+                <a:solidFill>
+                  <a:srgbClr val="1A6FC4"/>
+                </a:solidFill>
+                <a:latin typeface="맑은 고딕"/>
+                <a:ea typeface="맑은 고딕"/>
+                <a:cs typeface="맑은 고딕"/>
+              </a:rPr>
+              <a:t>운전원 승인 단계</a:t>
+            </a:r>
+          </a:p>
+        </p:txBody>
+      </p:sp>
+      <p:sp>
+        <p:nvSpPr>
+          <p:cNvPr id="10" name="Rounded Rectangle 9"/>
+          <p:cNvSpPr/>
+          <p:nvPr/>
+        </p:nvSpPr>
+        <p:spPr>
+          <a:xfrm>
+            <a:off x="6263640" y="1828800"/>
+            <a:ext cx="5212080" cy="1965960"/>
+          </a:xfrm>
+          <a:prstGeom prst="roundRect">
+            <a:avLst>
+              <a:gd name="adj" fmla="val 6000"/>
+            </a:avLst>
+          </a:prstGeom>
+          <a:solidFill>
+            <a:srgbClr val="E7F3FD"/>
+          </a:solidFill>
+          <a:ln w="15875">
+            <a:solidFill>
+              <a:srgbClr val="D3D9E1"/>
+            </a:solidFill>
+          </a:ln>
+        </p:spPr>
+        <p:txBody>
+          <a:bodyPr rtlCol="0" anchor="ctr"/>
+          <a:lstStyle/>
+          <a:p>
+            <a:pPr algn="ctr"/>
+          </a:p>
+        </p:txBody>
+      </p:sp>
+      <p:sp>
+        <p:nvSpPr>
+          <p:cNvPr id="11" name="TextBox 10"/>
+          <p:cNvSpPr txBox="1"/>
+          <p:nvPr/>
+        </p:nvSpPr>
+        <p:spPr>
+          <a:xfrm>
+            <a:off x="6446520" y="1993392"/>
+            <a:ext cx="4846320" cy="365760"/>
+          </a:xfrm>
+          <a:prstGeom prst="rect">
+            <a:avLst/>
+          </a:prstGeom>
+          <a:noFill/>
+        </p:spPr>
+        <p:txBody>
+          <a:bodyPr wrap="square" anchor="t"/>
+          <a:lstStyle/>
+          <a:p>
+            <a:pPr algn="l" eaLnBrk="0">
+              <a:lnSpc>
+                <a:spcPct val="110000"/>
+              </a:lnSpc>
+            </a:pPr>
+            <a:r>
+              <a:rPr sz="1900" b="1">
+                <a:solidFill>
+                  <a:srgbClr val="13294B"/>
+                </a:solidFill>
+                <a:latin typeface="맑은 고딕"/>
+                <a:ea typeface="맑은 고딕"/>
+                <a:cs typeface="맑은 고딕"/>
+              </a:rPr>
+              <a:t>approved_role</a:t>
+            </a:r>
+          </a:p>
+        </p:txBody>
+      </p:sp>
+      <p:sp>
+        <p:nvSpPr>
+          <p:cNvPr id="12" name="TextBox 11"/>
+          <p:cNvSpPr txBox="1"/>
+          <p:nvPr/>
+        </p:nvSpPr>
+        <p:spPr>
+          <a:xfrm>
+            <a:off x="6446520" y="2514600"/>
+            <a:ext cx="4846320" cy="685800"/>
+          </a:xfrm>
+          <a:prstGeom prst="rect">
+            <a:avLst/>
+          </a:prstGeom>
+          <a:noFill/>
+        </p:spPr>
+        <p:txBody>
+          <a:bodyPr wrap="square" anchor="t"/>
+          <a:lstStyle/>
+          <a:p>
+            <a:pPr algn="l" eaLnBrk="0">
+              <a:lnSpc>
+                <a:spcPct val="110000"/>
+              </a:lnSpc>
+            </a:pPr>
+            <a:r>
+              <a:rPr sz="1700" b="0">
+                <a:solidFill>
+                  <a:srgbClr val="13294B"/>
+                </a:solidFill>
+                <a:latin typeface="맑은 고딕"/>
+                <a:ea typeface="맑은 고딕"/>
+                <a:cs typeface="맑은 고딕"/>
+              </a:rPr>
+              <a:t>승인한 역할</a:t>
+            </a:r>
+          </a:p>
+          <a:p>
+            <a:pPr algn="l" eaLnBrk="0">
+              <a:lnSpc>
+                <a:spcPct val="110000"/>
+              </a:lnSpc>
+            </a:pPr>
+            <a:r>
+              <a:rPr sz="1700" b="0">
+                <a:solidFill>
+                  <a:srgbClr val="13294B"/>
+                </a:solidFill>
+                <a:latin typeface="맑은 고딕"/>
+                <a:ea typeface="맑은 고딕"/>
+                <a:cs typeface="맑은 고딕"/>
+              </a:rPr>
+              <a:t>역할 예: 운전원</a:t>
+            </a:r>
+          </a:p>
+        </p:txBody>
+      </p:sp>
+      <p:sp>
+        <p:nvSpPr>
+          <p:cNvPr id="13" name="TextBox 12"/>
+          <p:cNvSpPr txBox="1"/>
+          <p:nvPr/>
+        </p:nvSpPr>
+        <p:spPr>
+          <a:xfrm>
+            <a:off x="6446520" y="3310128"/>
+            <a:ext cx="4846320" cy="320040"/>
+          </a:xfrm>
+          <a:prstGeom prst="rect">
+            <a:avLst/>
+          </a:prstGeom>
+          <a:noFill/>
+        </p:spPr>
+        <p:txBody>
+          <a:bodyPr wrap="square" anchor="t"/>
+          <a:lstStyle/>
+          <a:p>
+            <a:pPr algn="l" eaLnBrk="0">
+              <a:lnSpc>
+                <a:spcPct val="110000"/>
+              </a:lnSpc>
+            </a:pPr>
+            <a:r>
+              <a:rPr sz="1500" b="1">
+                <a:solidFill>
+                  <a:srgbClr val="1A6FC4"/>
+                </a:solidFill>
+                <a:latin typeface="맑은 고딕"/>
+                <a:ea typeface="맑은 고딕"/>
+                <a:cs typeface="맑은 고딕"/>
+              </a:rPr>
+              <a:t>서버 · 에이전트는 못 쓴다</a:t>
+            </a:r>
+          </a:p>
+        </p:txBody>
+      </p:sp>
+      <p:sp>
+        <p:nvSpPr>
+          <p:cNvPr id="14" name="Rounded Rectangle 13"/>
+          <p:cNvSpPr/>
+          <p:nvPr/>
+        </p:nvSpPr>
+        <p:spPr>
+          <a:xfrm>
+            <a:off x="594360" y="4160520"/>
+            <a:ext cx="5212080" cy="1965960"/>
+          </a:xfrm>
+          <a:prstGeom prst="roundRect">
+            <a:avLst>
+              <a:gd name="adj" fmla="val 6000"/>
+            </a:avLst>
+          </a:prstGeom>
+          <a:solidFill>
+            <a:srgbClr val="FFFFFF"/>
+          </a:solidFill>
+          <a:ln w="15875">
+            <a:solidFill>
+              <a:srgbClr val="D3D9E1"/>
+            </a:solidFill>
+          </a:ln>
+        </p:spPr>
+        <p:txBody>
+          <a:bodyPr rtlCol="0" anchor="ctr"/>
+          <a:lstStyle/>
+          <a:p>
+            <a:pPr algn="ctr"/>
+          </a:p>
+        </p:txBody>
+      </p:sp>
+      <p:sp>
+        <p:nvSpPr>
+          <p:cNvPr id="15" name="TextBox 14"/>
+          <p:cNvSpPr txBox="1"/>
+          <p:nvPr/>
+        </p:nvSpPr>
+        <p:spPr>
+          <a:xfrm>
+            <a:off x="777240" y="4325112"/>
+            <a:ext cx="4846320" cy="365760"/>
+          </a:xfrm>
+          <a:prstGeom prst="rect">
+            <a:avLst/>
+          </a:prstGeom>
+          <a:noFill/>
+        </p:spPr>
+        <p:txBody>
+          <a:bodyPr wrap="square" anchor="t"/>
+          <a:lstStyle/>
+          <a:p>
+            <a:pPr algn="l" eaLnBrk="0">
+              <a:lnSpc>
+                <a:spcPct val="110000"/>
+              </a:lnSpc>
+            </a:pPr>
+            <a:r>
+              <a:rPr sz="1900" b="1">
+                <a:solidFill>
+                  <a:srgbClr val="13294B"/>
+                </a:solidFill>
+                <a:latin typeface="맑은 고딕"/>
+                <a:ea typeface="맑은 고딕"/>
+                <a:cs typeface="맑은 고딕"/>
+              </a:rPr>
+              <a:t>APPROVAL_ACCEPTED</a:t>
+            </a:r>
+          </a:p>
+        </p:txBody>
+      </p:sp>
+      <p:sp>
+        <p:nvSpPr>
+          <p:cNvPr id="16" name="TextBox 15"/>
+          <p:cNvSpPr txBox="1"/>
+          <p:nvPr/>
+        </p:nvSpPr>
+        <p:spPr>
+          <a:xfrm>
+            <a:off x="777240" y="4846320"/>
+            <a:ext cx="4846320" cy="685800"/>
+          </a:xfrm>
+          <a:prstGeom prst="rect">
+            <a:avLst/>
+          </a:prstGeom>
+          <a:noFill/>
+        </p:spPr>
+        <p:txBody>
+          <a:bodyPr wrap="square" anchor="t"/>
+          <a:lstStyle/>
+          <a:p>
+            <a:pPr algn="l" eaLnBrk="0">
+              <a:lnSpc>
+                <a:spcPct val="110000"/>
+              </a:lnSpc>
+            </a:pPr>
+            <a:r>
+              <a:rPr sz="1700" b="0">
+                <a:solidFill>
+                  <a:srgbClr val="13294B"/>
+                </a:solidFill>
+                <a:latin typeface="맑은 고딕"/>
+                <a:ea typeface="맑은 고딕"/>
+                <a:cs typeface="맑은 고딕"/>
+              </a:rPr>
+              <a:t>승인 접수 기록</a:t>
+            </a:r>
+          </a:p>
+          <a:p>
+            <a:pPr algn="l" eaLnBrk="0">
+              <a:lnSpc>
+                <a:spcPct val="110000"/>
+              </a:lnSpc>
+            </a:pPr>
+            <a:r>
+              <a:rPr sz="1700" b="0">
+                <a:solidFill>
+                  <a:srgbClr val="13294B"/>
+                </a:solidFill>
+                <a:latin typeface="맑은 고딕"/>
+                <a:ea typeface="맑은 고딕"/>
+                <a:cs typeface="맑은 고딕"/>
+              </a:rPr>
+              <a:t>역할과 판단 id</a:t>
+            </a:r>
+          </a:p>
+        </p:txBody>
+      </p:sp>
+      <p:sp>
+        <p:nvSpPr>
+          <p:cNvPr id="17" name="TextBox 16"/>
+          <p:cNvSpPr txBox="1"/>
+          <p:nvPr/>
+        </p:nvSpPr>
+        <p:spPr>
+          <a:xfrm>
+            <a:off x="777240" y="5641848"/>
+            <a:ext cx="4846320" cy="320040"/>
+          </a:xfrm>
+          <a:prstGeom prst="rect">
+            <a:avLst/>
+          </a:prstGeom>
+          <a:noFill/>
+        </p:spPr>
+        <p:txBody>
+          <a:bodyPr wrap="square" anchor="t"/>
+          <a:lstStyle/>
+          <a:p>
+            <a:pPr algn="l" eaLnBrk="0">
+              <a:lnSpc>
+                <a:spcPct val="110000"/>
+              </a:lnSpc>
+            </a:pPr>
+            <a:r>
+              <a:rPr sz="1500" b="1">
+                <a:solidFill>
+                  <a:srgbClr val="1A6FC4"/>
+                </a:solidFill>
+                <a:latin typeface="맑은 고딕"/>
+                <a:ea typeface="맑은 고딕"/>
+                <a:cs typeface="맑은 고딕"/>
+              </a:rPr>
+              <a:t>처리 기록</a:t>
+            </a:r>
+          </a:p>
+        </p:txBody>
+      </p:sp>
+      <p:sp>
+        <p:nvSpPr>
+          <p:cNvPr id="18" name="Rounded Rectangle 17"/>
+          <p:cNvSpPr/>
+          <p:nvPr/>
+        </p:nvSpPr>
+        <p:spPr>
+          <a:xfrm>
+            <a:off x="6263640" y="4160520"/>
+            <a:ext cx="5212080" cy="1965960"/>
+          </a:xfrm>
+          <a:prstGeom prst="roundRect">
+            <a:avLst>
+              <a:gd name="adj" fmla="val 6000"/>
+            </a:avLst>
+          </a:prstGeom>
+          <a:solidFill>
+            <a:srgbClr val="FFFFFF"/>
+          </a:solidFill>
+          <a:ln w="15875">
+            <a:solidFill>
+              <a:srgbClr val="D3D9E1"/>
+            </a:solidFill>
+          </a:ln>
+        </p:spPr>
+        <p:txBody>
+          <a:bodyPr rtlCol="0" anchor="ctr"/>
+          <a:lstStyle/>
+          <a:p>
+            <a:pPr algn="ctr"/>
+          </a:p>
+        </p:txBody>
+      </p:sp>
+      <p:sp>
+        <p:nvSpPr>
+          <p:cNvPr id="19" name="TextBox 18"/>
+          <p:cNvSpPr txBox="1"/>
+          <p:nvPr/>
+        </p:nvSpPr>
+        <p:spPr>
+          <a:xfrm>
+            <a:off x="6446520" y="4325112"/>
+            <a:ext cx="4846320" cy="365760"/>
+          </a:xfrm>
+          <a:prstGeom prst="rect">
+            <a:avLst/>
+          </a:prstGeom>
+          <a:noFill/>
+        </p:spPr>
+        <p:txBody>
+          <a:bodyPr wrap="square" anchor="t"/>
+          <a:lstStyle/>
+          <a:p>
+            <a:pPr algn="l" eaLnBrk="0">
+              <a:lnSpc>
+                <a:spcPct val="110000"/>
+              </a:lnSpc>
+            </a:pPr>
+            <a:r>
+              <a:rPr sz="1900" b="1">
+                <a:solidFill>
+                  <a:srgbClr val="13294B"/>
+                </a:solidFill>
+                <a:latin typeface="맑은 고딕"/>
+                <a:ea typeface="맑은 고딕"/>
+                <a:cs typeface="맑은 고딕"/>
+              </a:rPr>
+              <a:t>APPROVAL_DELIVERY</a:t>
+            </a:r>
+          </a:p>
+        </p:txBody>
+      </p:sp>
+      <p:sp>
+        <p:nvSpPr>
+          <p:cNvPr id="20" name="TextBox 19"/>
+          <p:cNvSpPr txBox="1"/>
+          <p:nvPr/>
+        </p:nvSpPr>
+        <p:spPr>
+          <a:xfrm>
+            <a:off x="6446520" y="4846320"/>
+            <a:ext cx="4846320" cy="685800"/>
+          </a:xfrm>
+          <a:prstGeom prst="rect">
+            <a:avLst/>
+          </a:prstGeom>
+          <a:noFill/>
+        </p:spPr>
+        <p:txBody>
+          <a:bodyPr wrap="square" anchor="t"/>
+          <a:lstStyle/>
+          <a:p>
+            <a:pPr algn="l" eaLnBrk="0">
+              <a:lnSpc>
+                <a:spcPct val="110000"/>
+              </a:lnSpc>
+            </a:pPr>
+            <a:r>
+              <a:rPr sz="1700" b="0">
+                <a:solidFill>
+                  <a:srgbClr val="13294B"/>
+                </a:solidFill>
+                <a:latin typeface="맑은 고딕"/>
+                <a:ea typeface="맑은 고딕"/>
+                <a:cs typeface="맑은 고딕"/>
+              </a:rPr>
+              <a:t>승인 전달 완료 기록</a:t>
+            </a:r>
+          </a:p>
+          <a:p>
+            <a:pPr algn="l" eaLnBrk="0">
+              <a:lnSpc>
+                <a:spcPct val="110000"/>
+              </a:lnSpc>
+            </a:pPr>
+            <a:r>
+              <a:rPr sz="1700" b="0">
+                <a:solidFill>
+                  <a:srgbClr val="13294B"/>
+                </a:solidFill>
+                <a:latin typeface="맑은 고딕"/>
+                <a:ea typeface="맑은 고딕"/>
+                <a:cs typeface="맑은 고딕"/>
+              </a:rPr>
+              <a:t>이 뒤에야 냉각 명령이 열린다</a:t>
+            </a:r>
+          </a:p>
+        </p:txBody>
+      </p:sp>
+      <p:sp>
+        <p:nvSpPr>
+          <p:cNvPr id="21" name="TextBox 20"/>
+          <p:cNvSpPr txBox="1"/>
+          <p:nvPr/>
+        </p:nvSpPr>
+        <p:spPr>
+          <a:xfrm>
+            <a:off x="6446520" y="5641848"/>
+            <a:ext cx="4846320" cy="320040"/>
+          </a:xfrm>
+          <a:prstGeom prst="rect">
+            <a:avLst/>
+          </a:prstGeom>
+          <a:noFill/>
+        </p:spPr>
+        <p:txBody>
+          <a:bodyPr wrap="square" anchor="t"/>
+          <a:lstStyle/>
+          <a:p>
+            <a:pPr algn="l" eaLnBrk="0">
+              <a:lnSpc>
+                <a:spcPct val="110000"/>
+              </a:lnSpc>
+            </a:pPr>
+            <a:r>
+              <a:rPr sz="1500" b="1">
+                <a:solidFill>
+                  <a:srgbClr val="1A6FC4"/>
+                </a:solidFill>
+                <a:latin typeface="맑은 고딕"/>
+                <a:ea typeface="맑은 고딕"/>
+                <a:cs typeface="맑은 고딕"/>
+              </a:rPr>
+              <a:t>처리 기록</a:t>
+            </a:r>
+          </a:p>
+        </p:txBody>
+      </p:sp>
+      <p:sp>
+        <p:nvSpPr>
+          <p:cNvPr id="22" name="Right Arrow 21"/>
+          <p:cNvSpPr/>
+          <p:nvPr/>
+        </p:nvSpPr>
+        <p:spPr>
+          <a:xfrm>
+            <a:off x="5879592" y="4983480"/>
+            <a:ext cx="320040" cy="201168"/>
+          </a:xfrm>
+          <a:prstGeom prst="rightArrow">
+            <a:avLst/>
+          </a:prstGeom>
+          <a:solidFill>
+            <a:srgbClr val="1A6FC4"/>
           </a:solidFill>
           <a:ln>
             <a:noFill/>
@@ -24102,805 +24682,6 @@
           <a:lstStyle/>
           <a:p>
             <a:pPr algn="ctr"/>
-          </a:p>
-        </p:txBody>
-      </p:sp>
-      <p:sp>
-        <p:nvSpPr>
-          <p:cNvPr id="7" name="TextBox 6"/>
-          <p:cNvSpPr txBox="1"/>
-          <p:nvPr/>
-        </p:nvSpPr>
-        <p:spPr>
-          <a:xfrm>
-            <a:off x="685800" y="1961387"/>
-            <a:ext cx="2514600" cy="347472"/>
-          </a:xfrm>
-          <a:prstGeom prst="rect">
-            <a:avLst/>
-          </a:prstGeom>
-          <a:noFill/>
-        </p:spPr>
-        <p:txBody>
-          <a:bodyPr wrap="square" anchor="ctr"/>
-          <a:lstStyle/>
-          <a:p>
-            <a:pPr algn="l" eaLnBrk="0">
-              <a:lnSpc>
-                <a:spcPct val="110000"/>
-              </a:lnSpc>
-            </a:pPr>
-            <a:r>
-              <a:rPr sz="1300" b="1">
-                <a:solidFill>
-                  <a:srgbClr val="FFFFFF"/>
-                </a:solidFill>
-                <a:latin typeface="맑은 고딕"/>
-                <a:ea typeface="맑은 고딕"/>
-                <a:cs typeface="맑은 고딕"/>
-              </a:rPr>
-              <a:t>남는 값</a:t>
-            </a:r>
-          </a:p>
-        </p:txBody>
-      </p:sp>
-      <p:sp>
-        <p:nvSpPr>
-          <p:cNvPr id="8" name="TextBox 7"/>
-          <p:cNvSpPr txBox="1"/>
-          <p:nvPr/>
-        </p:nvSpPr>
-        <p:spPr>
-          <a:xfrm>
-            <a:off x="3200400" y="1961387"/>
-            <a:ext cx="6248095" cy="347472"/>
-          </a:xfrm>
-          <a:prstGeom prst="rect">
-            <a:avLst/>
-          </a:prstGeom>
-          <a:noFill/>
-        </p:spPr>
-        <p:txBody>
-          <a:bodyPr wrap="square" anchor="ctr"/>
-          <a:lstStyle/>
-          <a:p>
-            <a:pPr algn="l" eaLnBrk="0">
-              <a:lnSpc>
-                <a:spcPct val="110000"/>
-              </a:lnSpc>
-            </a:pPr>
-            <a:r>
-              <a:rPr sz="1300" b="1">
-                <a:solidFill>
-                  <a:srgbClr val="FFFFFF"/>
-                </a:solidFill>
-                <a:latin typeface="맑은 고딕"/>
-                <a:ea typeface="맑은 고딕"/>
-                <a:cs typeface="맑은 고딕"/>
-              </a:rPr>
-              <a:t>뜻</a:t>
-            </a:r>
-          </a:p>
-        </p:txBody>
-      </p:sp>
-      <p:sp>
-        <p:nvSpPr>
-          <p:cNvPr id="9" name="TextBox 8"/>
-          <p:cNvSpPr txBox="1"/>
-          <p:nvPr/>
-        </p:nvSpPr>
-        <p:spPr>
-          <a:xfrm>
-            <a:off x="9448495" y="1961387"/>
-            <a:ext cx="2194560" cy="347472"/>
-          </a:xfrm>
-          <a:prstGeom prst="rect">
-            <a:avLst/>
-          </a:prstGeom>
-          <a:noFill/>
-        </p:spPr>
-        <p:txBody>
-          <a:bodyPr wrap="square" anchor="ctr"/>
-          <a:lstStyle/>
-          <a:p>
-            <a:pPr algn="l" eaLnBrk="0">
-              <a:lnSpc>
-                <a:spcPct val="110000"/>
-              </a:lnSpc>
-            </a:pPr>
-            <a:r>
-              <a:rPr sz="1300" b="1">
-                <a:solidFill>
-                  <a:srgbClr val="FFFFFF"/>
-                </a:solidFill>
-                <a:latin typeface="맑은 고딕"/>
-                <a:ea typeface="맑은 고딕"/>
-                <a:cs typeface="맑은 고딕"/>
-              </a:rPr>
-              <a:t>누가 채우나</a:t>
-            </a:r>
-          </a:p>
-        </p:txBody>
-      </p:sp>
-      <p:sp>
-        <p:nvSpPr>
-          <p:cNvPr id="10" name="Rounded Rectangle 9"/>
-          <p:cNvSpPr/>
-          <p:nvPr/>
-        </p:nvSpPr>
-        <p:spPr>
-          <a:xfrm>
-            <a:off x="548640" y="2395727"/>
-            <a:ext cx="11094415" cy="850392"/>
-          </a:xfrm>
-          <a:prstGeom prst="roundRect">
-            <a:avLst>
-              <a:gd name="adj" fmla="val 8000"/>
-            </a:avLst>
-          </a:prstGeom>
-          <a:solidFill>
-            <a:srgbClr val="F3F6F9"/>
-          </a:solidFill>
-          <a:ln>
-            <a:noFill/>
-          </a:ln>
-        </p:spPr>
-        <p:txBody>
-          <a:bodyPr rtlCol="0" anchor="ctr"/>
-          <a:lstStyle/>
-          <a:p>
-            <a:pPr algn="ctr"/>
-          </a:p>
-        </p:txBody>
-      </p:sp>
-      <p:sp>
-        <p:nvSpPr>
-          <p:cNvPr id="11" name="TextBox 10"/>
-          <p:cNvSpPr txBox="1"/>
-          <p:nvPr/>
-        </p:nvSpPr>
-        <p:spPr>
-          <a:xfrm>
-            <a:off x="685800" y="2363723"/>
-            <a:ext cx="2514600" cy="914400"/>
-          </a:xfrm>
-          <a:prstGeom prst="rect">
-            <a:avLst/>
-          </a:prstGeom>
-          <a:noFill/>
-        </p:spPr>
-        <p:txBody>
-          <a:bodyPr wrap="square" anchor="ctr"/>
-          <a:lstStyle/>
-          <a:p>
-            <a:pPr algn="l" eaLnBrk="0">
-              <a:lnSpc>
-                <a:spcPct val="110000"/>
-              </a:lnSpc>
-            </a:pPr>
-            <a:r>
-              <a:rPr sz="1600" b="1">
-                <a:solidFill>
-                  <a:srgbClr val="13294B"/>
-                </a:solidFill>
-                <a:latin typeface="맑은 고딕"/>
-                <a:ea typeface="맑은 고딕"/>
-                <a:cs typeface="맑은 고딕"/>
-              </a:rPr>
-              <a:t>approval · chosen_skill</a:t>
-            </a:r>
-          </a:p>
-        </p:txBody>
-      </p:sp>
-      <p:sp>
-        <p:nvSpPr>
-          <p:cNvPr id="12" name="TextBox 11"/>
-          <p:cNvSpPr txBox="1"/>
-          <p:nvPr/>
-        </p:nvSpPr>
-        <p:spPr>
-          <a:xfrm>
-            <a:off x="3200400" y="2363723"/>
-            <a:ext cx="6156655" cy="914400"/>
-          </a:xfrm>
-          <a:prstGeom prst="rect">
-            <a:avLst/>
-          </a:prstGeom>
-          <a:noFill/>
-        </p:spPr>
-        <p:txBody>
-          <a:bodyPr wrap="square" anchor="ctr"/>
-          <a:lstStyle/>
-          <a:p>
-            <a:pPr algn="l" eaLnBrk="0">
-              <a:lnSpc>
-                <a:spcPct val="110000"/>
-              </a:lnSpc>
-            </a:pPr>
-            <a:r>
-              <a:rPr sz="1400" b="0">
-                <a:solidFill>
-                  <a:srgbClr val="1F2A3A"/>
-                </a:solidFill>
-                <a:latin typeface="맑은 고딕"/>
-                <a:ea typeface="맑은 고딕"/>
-                <a:cs typeface="맑은 고딕"/>
-              </a:rPr>
-              <a:t>승인이라는 결정과 고른 조치</a:t>
-            </a:r>
-          </a:p>
-          <a:p>
-            <a:pPr algn="l" eaLnBrk="0">
-              <a:lnSpc>
-                <a:spcPct val="110000"/>
-              </a:lnSpc>
-            </a:pPr>
-            <a:r>
-              <a:rPr sz="1400" b="0">
-                <a:solidFill>
-                  <a:srgbClr val="1F2A3A"/>
-                </a:solidFill>
-                <a:latin typeface="맑은 고딕"/>
-                <a:ea typeface="맑은 고딕"/>
-                <a:cs typeface="맑은 고딕"/>
-              </a:rPr>
-              <a:t>선택 예: 승인 · 팬 최대 운전</a:t>
-            </a:r>
-          </a:p>
-        </p:txBody>
-      </p:sp>
-      <p:sp>
-        <p:nvSpPr>
-          <p:cNvPr id="13" name="TextBox 12"/>
-          <p:cNvSpPr txBox="1"/>
-          <p:nvPr/>
-        </p:nvSpPr>
-        <p:spPr>
-          <a:xfrm>
-            <a:off x="9448495" y="2363723"/>
-            <a:ext cx="2103120" cy="914400"/>
-          </a:xfrm>
-          <a:prstGeom prst="rect">
-            <a:avLst/>
-          </a:prstGeom>
-          <a:noFill/>
-        </p:spPr>
-        <p:txBody>
-          <a:bodyPr wrap="square" anchor="ctr"/>
-          <a:lstStyle/>
-          <a:p>
-            <a:pPr algn="l" eaLnBrk="0">
-              <a:lnSpc>
-                <a:spcPct val="110000"/>
-              </a:lnSpc>
-            </a:pPr>
-            <a:r>
-              <a:rPr sz="1250" b="1">
-                <a:solidFill>
-                  <a:srgbClr val="556175"/>
-                </a:solidFill>
-                <a:latin typeface="맑은 고딕"/>
-                <a:ea typeface="맑은 고딕"/>
-                <a:cs typeface="맑은 고딕"/>
-              </a:rPr>
-              <a:t>운전원 승인 단계</a:t>
-            </a:r>
-          </a:p>
-        </p:txBody>
-      </p:sp>
-      <p:sp>
-        <p:nvSpPr>
-          <p:cNvPr id="14" name="Rounded Rectangle 13"/>
-          <p:cNvSpPr/>
-          <p:nvPr/>
-        </p:nvSpPr>
-        <p:spPr>
-          <a:xfrm>
-            <a:off x="548640" y="3310127"/>
-            <a:ext cx="11094415" cy="850392"/>
-          </a:xfrm>
-          <a:prstGeom prst="roundRect">
-            <a:avLst>
-              <a:gd name="adj" fmla="val 8000"/>
-            </a:avLst>
-          </a:prstGeom>
-          <a:solidFill>
-            <a:srgbClr val="E7F3FD"/>
-          </a:solidFill>
-          <a:ln>
-            <a:noFill/>
-          </a:ln>
-        </p:spPr>
-        <p:txBody>
-          <a:bodyPr rtlCol="0" anchor="ctr"/>
-          <a:lstStyle/>
-          <a:p>
-            <a:pPr algn="ctr"/>
-          </a:p>
-        </p:txBody>
-      </p:sp>
-      <p:sp>
-        <p:nvSpPr>
-          <p:cNvPr id="15" name="TextBox 14"/>
-          <p:cNvSpPr txBox="1"/>
-          <p:nvPr/>
-        </p:nvSpPr>
-        <p:spPr>
-          <a:xfrm>
-            <a:off x="685800" y="3278123"/>
-            <a:ext cx="2514600" cy="914400"/>
-          </a:xfrm>
-          <a:prstGeom prst="rect">
-            <a:avLst/>
-          </a:prstGeom>
-          <a:noFill/>
-        </p:spPr>
-        <p:txBody>
-          <a:bodyPr wrap="square" anchor="ctr"/>
-          <a:lstStyle/>
-          <a:p>
-            <a:pPr algn="l" eaLnBrk="0">
-              <a:lnSpc>
-                <a:spcPct val="110000"/>
-              </a:lnSpc>
-            </a:pPr>
-            <a:r>
-              <a:rPr sz="1600" b="1">
-                <a:solidFill>
-                  <a:srgbClr val="13294B"/>
-                </a:solidFill>
-                <a:latin typeface="맑은 고딕"/>
-                <a:ea typeface="맑은 고딕"/>
-                <a:cs typeface="맑은 고딕"/>
-              </a:rPr>
-              <a:t>approved_role</a:t>
-            </a:r>
-          </a:p>
-        </p:txBody>
-      </p:sp>
-      <p:sp>
-        <p:nvSpPr>
-          <p:cNvPr id="16" name="TextBox 15"/>
-          <p:cNvSpPr txBox="1"/>
-          <p:nvPr/>
-        </p:nvSpPr>
-        <p:spPr>
-          <a:xfrm>
-            <a:off x="3200400" y="3278123"/>
-            <a:ext cx="6156655" cy="914400"/>
-          </a:xfrm>
-          <a:prstGeom prst="rect">
-            <a:avLst/>
-          </a:prstGeom>
-          <a:noFill/>
-        </p:spPr>
-        <p:txBody>
-          <a:bodyPr wrap="square" anchor="ctr"/>
-          <a:lstStyle/>
-          <a:p>
-            <a:pPr algn="l" eaLnBrk="0">
-              <a:lnSpc>
-                <a:spcPct val="110000"/>
-              </a:lnSpc>
-            </a:pPr>
-            <a:r>
-              <a:rPr sz="1400" b="0">
-                <a:solidFill>
-                  <a:srgbClr val="1F2A3A"/>
-                </a:solidFill>
-                <a:latin typeface="맑은 고딕"/>
-                <a:ea typeface="맑은 고딕"/>
-                <a:cs typeface="맑은 고딕"/>
-              </a:rPr>
-              <a:t>승인한 역할</a:t>
-            </a:r>
-          </a:p>
-          <a:p>
-            <a:pPr algn="l" eaLnBrk="0">
-              <a:lnSpc>
-                <a:spcPct val="110000"/>
-              </a:lnSpc>
-            </a:pPr>
-            <a:r>
-              <a:rPr sz="1400" b="0">
-                <a:solidFill>
-                  <a:srgbClr val="1F2A3A"/>
-                </a:solidFill>
-                <a:latin typeface="맑은 고딕"/>
-                <a:ea typeface="맑은 고딕"/>
-                <a:cs typeface="맑은 고딕"/>
-              </a:rPr>
-              <a:t>역할 예: 운전원</a:t>
-            </a:r>
-          </a:p>
-        </p:txBody>
-      </p:sp>
-      <p:sp>
-        <p:nvSpPr>
-          <p:cNvPr id="17" name="TextBox 16"/>
-          <p:cNvSpPr txBox="1"/>
-          <p:nvPr/>
-        </p:nvSpPr>
-        <p:spPr>
-          <a:xfrm>
-            <a:off x="9448495" y="3278123"/>
-            <a:ext cx="2103120" cy="914400"/>
-          </a:xfrm>
-          <a:prstGeom prst="rect">
-            <a:avLst/>
-          </a:prstGeom>
-          <a:noFill/>
-        </p:spPr>
-        <p:txBody>
-          <a:bodyPr wrap="square" anchor="ctr"/>
-          <a:lstStyle/>
-          <a:p>
-            <a:pPr algn="l" eaLnBrk="0">
-              <a:lnSpc>
-                <a:spcPct val="110000"/>
-              </a:lnSpc>
-            </a:pPr>
-            <a:r>
-              <a:rPr sz="1250" b="1">
-                <a:solidFill>
-                  <a:srgbClr val="1A6FC4"/>
-                </a:solidFill>
-                <a:latin typeface="맑은 고딕"/>
-                <a:ea typeface="맑은 고딕"/>
-                <a:cs typeface="맑은 고딕"/>
-              </a:rPr>
-              <a:t>서버</a:t>
-            </a:r>
-          </a:p>
-          <a:p>
-            <a:pPr algn="l" eaLnBrk="0">
-              <a:lnSpc>
-                <a:spcPct val="110000"/>
-              </a:lnSpc>
-            </a:pPr>
-            <a:r>
-              <a:rPr sz="1250" b="1">
-                <a:solidFill>
-                  <a:srgbClr val="1A6FC4"/>
-                </a:solidFill>
-                <a:latin typeface="맑은 고딕"/>
-                <a:ea typeface="맑은 고딕"/>
-                <a:cs typeface="맑은 고딕"/>
-              </a:rPr>
-              <a:t>에이전트는 못 쓴다</a:t>
-            </a:r>
-          </a:p>
-        </p:txBody>
-      </p:sp>
-      <p:sp>
-        <p:nvSpPr>
-          <p:cNvPr id="18" name="Rounded Rectangle 17"/>
-          <p:cNvSpPr/>
-          <p:nvPr/>
-        </p:nvSpPr>
-        <p:spPr>
-          <a:xfrm>
-            <a:off x="548640" y="4224527"/>
-            <a:ext cx="11094415" cy="850392"/>
-          </a:xfrm>
-          <a:prstGeom prst="roundRect">
-            <a:avLst>
-              <a:gd name="adj" fmla="val 8000"/>
-            </a:avLst>
-          </a:prstGeom>
-          <a:solidFill>
-            <a:srgbClr val="F3F6F9"/>
-          </a:solidFill>
-          <a:ln>
-            <a:noFill/>
-          </a:ln>
-        </p:spPr>
-        <p:txBody>
-          <a:bodyPr rtlCol="0" anchor="ctr"/>
-          <a:lstStyle/>
-          <a:p>
-            <a:pPr algn="ctr"/>
-          </a:p>
-        </p:txBody>
-      </p:sp>
-      <p:sp>
-        <p:nvSpPr>
-          <p:cNvPr id="19" name="TextBox 18"/>
-          <p:cNvSpPr txBox="1"/>
-          <p:nvPr/>
-        </p:nvSpPr>
-        <p:spPr>
-          <a:xfrm>
-            <a:off x="685800" y="4192523"/>
-            <a:ext cx="2514600" cy="914400"/>
-          </a:xfrm>
-          <a:prstGeom prst="rect">
-            <a:avLst/>
-          </a:prstGeom>
-          <a:noFill/>
-        </p:spPr>
-        <p:txBody>
-          <a:bodyPr wrap="square" anchor="ctr"/>
-          <a:lstStyle/>
-          <a:p>
-            <a:pPr algn="l" eaLnBrk="0">
-              <a:lnSpc>
-                <a:spcPct val="110000"/>
-              </a:lnSpc>
-            </a:pPr>
-            <a:r>
-              <a:rPr sz="1600" b="1">
-                <a:solidFill>
-                  <a:srgbClr val="13294B"/>
-                </a:solidFill>
-                <a:latin typeface="맑은 고딕"/>
-                <a:ea typeface="맑은 고딕"/>
-                <a:cs typeface="맑은 고딕"/>
-              </a:rPr>
-              <a:t>APPROVAL_ACCEPTED</a:t>
-            </a:r>
-          </a:p>
-        </p:txBody>
-      </p:sp>
-      <p:sp>
-        <p:nvSpPr>
-          <p:cNvPr id="20" name="TextBox 19"/>
-          <p:cNvSpPr txBox="1"/>
-          <p:nvPr/>
-        </p:nvSpPr>
-        <p:spPr>
-          <a:xfrm>
-            <a:off x="3200400" y="4192523"/>
-            <a:ext cx="6156655" cy="914400"/>
-          </a:xfrm>
-          <a:prstGeom prst="rect">
-            <a:avLst/>
-          </a:prstGeom>
-          <a:noFill/>
-        </p:spPr>
-        <p:txBody>
-          <a:bodyPr wrap="square" anchor="ctr"/>
-          <a:lstStyle/>
-          <a:p>
-            <a:pPr algn="l" eaLnBrk="0">
-              <a:lnSpc>
-                <a:spcPct val="110000"/>
-              </a:lnSpc>
-            </a:pPr>
-            <a:r>
-              <a:rPr sz="1400" b="0">
-                <a:solidFill>
-                  <a:srgbClr val="1F2A3A"/>
-                </a:solidFill>
-                <a:latin typeface="맑은 고딕"/>
-                <a:ea typeface="맑은 고딕"/>
-                <a:cs typeface="맑은 고딕"/>
-              </a:rPr>
-              <a:t>승인 접수 기록</a:t>
-            </a:r>
-          </a:p>
-          <a:p>
-            <a:pPr algn="l" eaLnBrk="0">
-              <a:lnSpc>
-                <a:spcPct val="110000"/>
-              </a:lnSpc>
-            </a:pPr>
-            <a:r>
-              <a:rPr sz="1400" b="0">
-                <a:solidFill>
-                  <a:srgbClr val="1F2A3A"/>
-                </a:solidFill>
-                <a:latin typeface="맑은 고딕"/>
-                <a:ea typeface="맑은 고딕"/>
-                <a:cs typeface="맑은 고딕"/>
-              </a:rPr>
-              <a:t>역할과 판단 id</a:t>
-            </a:r>
-          </a:p>
-        </p:txBody>
-      </p:sp>
-      <p:sp>
-        <p:nvSpPr>
-          <p:cNvPr id="21" name="TextBox 20"/>
-          <p:cNvSpPr txBox="1"/>
-          <p:nvPr/>
-        </p:nvSpPr>
-        <p:spPr>
-          <a:xfrm>
-            <a:off x="9448495" y="4192523"/>
-            <a:ext cx="2103120" cy="914400"/>
-          </a:xfrm>
-          <a:prstGeom prst="rect">
-            <a:avLst/>
-          </a:prstGeom>
-          <a:noFill/>
-        </p:spPr>
-        <p:txBody>
-          <a:bodyPr wrap="square" anchor="ctr"/>
-          <a:lstStyle/>
-          <a:p>
-            <a:pPr algn="l" eaLnBrk="0">
-              <a:lnSpc>
-                <a:spcPct val="110000"/>
-              </a:lnSpc>
-            </a:pPr>
-            <a:r>
-              <a:rPr sz="1250" b="1">
-                <a:solidFill>
-                  <a:srgbClr val="556175"/>
-                </a:solidFill>
-                <a:latin typeface="맑은 고딕"/>
-                <a:ea typeface="맑은 고딕"/>
-                <a:cs typeface="맑은 고딕"/>
-              </a:rPr>
-              <a:t>처리 기록</a:t>
-            </a:r>
-          </a:p>
-        </p:txBody>
-      </p:sp>
-      <p:sp>
-        <p:nvSpPr>
-          <p:cNvPr id="22" name="Rounded Rectangle 21"/>
-          <p:cNvSpPr/>
-          <p:nvPr/>
-        </p:nvSpPr>
-        <p:spPr>
-          <a:xfrm>
-            <a:off x="548640" y="5138927"/>
-            <a:ext cx="11094415" cy="850392"/>
-          </a:xfrm>
-          <a:prstGeom prst="roundRect">
-            <a:avLst>
-              <a:gd name="adj" fmla="val 8000"/>
-            </a:avLst>
-          </a:prstGeom>
-          <a:solidFill>
-            <a:srgbClr val="F3F6F9"/>
-          </a:solidFill>
-          <a:ln>
-            <a:noFill/>
-          </a:ln>
-        </p:spPr>
-        <p:txBody>
-          <a:bodyPr rtlCol="0" anchor="ctr"/>
-          <a:lstStyle/>
-          <a:p>
-            <a:pPr algn="ctr"/>
-          </a:p>
-        </p:txBody>
-      </p:sp>
-      <p:sp>
-        <p:nvSpPr>
-          <p:cNvPr id="23" name="TextBox 22"/>
-          <p:cNvSpPr txBox="1"/>
-          <p:nvPr/>
-        </p:nvSpPr>
-        <p:spPr>
-          <a:xfrm>
-            <a:off x="685800" y="5106923"/>
-            <a:ext cx="2514600" cy="914400"/>
-          </a:xfrm>
-          <a:prstGeom prst="rect">
-            <a:avLst/>
-          </a:prstGeom>
-          <a:noFill/>
-        </p:spPr>
-        <p:txBody>
-          <a:bodyPr wrap="square" anchor="ctr"/>
-          <a:lstStyle/>
-          <a:p>
-            <a:pPr algn="l" eaLnBrk="0">
-              <a:lnSpc>
-                <a:spcPct val="110000"/>
-              </a:lnSpc>
-            </a:pPr>
-            <a:r>
-              <a:rPr sz="1600" b="1">
-                <a:solidFill>
-                  <a:srgbClr val="13294B"/>
-                </a:solidFill>
-                <a:latin typeface="맑은 고딕"/>
-                <a:ea typeface="맑은 고딕"/>
-                <a:cs typeface="맑은 고딕"/>
-              </a:rPr>
-              <a:t>APPROVAL_DELIVERY</a:t>
-            </a:r>
-          </a:p>
-        </p:txBody>
-      </p:sp>
-      <p:sp>
-        <p:nvSpPr>
-          <p:cNvPr id="24" name="TextBox 23"/>
-          <p:cNvSpPr txBox="1"/>
-          <p:nvPr/>
-        </p:nvSpPr>
-        <p:spPr>
-          <a:xfrm>
-            <a:off x="3200400" y="5106923"/>
-            <a:ext cx="6156655" cy="914400"/>
-          </a:xfrm>
-          <a:prstGeom prst="rect">
-            <a:avLst/>
-          </a:prstGeom>
-          <a:noFill/>
-        </p:spPr>
-        <p:txBody>
-          <a:bodyPr wrap="square" anchor="ctr"/>
-          <a:lstStyle/>
-          <a:p>
-            <a:pPr algn="l" eaLnBrk="0">
-              <a:lnSpc>
-                <a:spcPct val="110000"/>
-              </a:lnSpc>
-            </a:pPr>
-            <a:r>
-              <a:rPr sz="1400" b="0">
-                <a:solidFill>
-                  <a:srgbClr val="1F2A3A"/>
-                </a:solidFill>
-                <a:latin typeface="맑은 고딕"/>
-                <a:ea typeface="맑은 고딕"/>
-                <a:cs typeface="맑은 고딕"/>
-              </a:rPr>
-              <a:t>승인 전달 완료 기록</a:t>
-            </a:r>
-          </a:p>
-          <a:p>
-            <a:pPr algn="l" eaLnBrk="0">
-              <a:lnSpc>
-                <a:spcPct val="110000"/>
-              </a:lnSpc>
-            </a:pPr>
-            <a:r>
-              <a:rPr sz="1400" b="0">
-                <a:solidFill>
-                  <a:srgbClr val="1F2A3A"/>
-                </a:solidFill>
-                <a:latin typeface="맑은 고딕"/>
-                <a:ea typeface="맑은 고딕"/>
-                <a:cs typeface="맑은 고딕"/>
-              </a:rPr>
-              <a:t>이 뒤에야 냉각 명령이 열린다</a:t>
-            </a:r>
-          </a:p>
-        </p:txBody>
-      </p:sp>
-      <p:sp>
-        <p:nvSpPr>
-          <p:cNvPr id="25" name="TextBox 24"/>
-          <p:cNvSpPr txBox="1"/>
-          <p:nvPr/>
-        </p:nvSpPr>
-        <p:spPr>
-          <a:xfrm>
-            <a:off x="9448495" y="5106923"/>
-            <a:ext cx="2103120" cy="914400"/>
-          </a:xfrm>
-          <a:prstGeom prst="rect">
-            <a:avLst/>
-          </a:prstGeom>
-          <a:noFill/>
-        </p:spPr>
-        <p:txBody>
-          <a:bodyPr wrap="square" anchor="ctr"/>
-          <a:lstStyle/>
-          <a:p>
-            <a:pPr algn="l" eaLnBrk="0">
-              <a:lnSpc>
-                <a:spcPct val="110000"/>
-              </a:lnSpc>
-            </a:pPr>
-            <a:r>
-              <a:rPr sz="1250" b="1">
-                <a:solidFill>
-                  <a:srgbClr val="556175"/>
-                </a:solidFill>
-                <a:latin typeface="맑은 고딕"/>
-                <a:ea typeface="맑은 고딕"/>
-                <a:cs typeface="맑은 고딕"/>
-              </a:rPr>
-              <a:t>처리 기록</a:t>
-            </a:r>
           </a:p>
         </p:txBody>
       </p:sp>
@@ -27894,7 +27675,7 @@
                 <a:ea typeface="맑은 고딕"/>
                 <a:cs typeface="맑은 고딕"/>
               </a:rPr>
-              <a:t>세 업무의 처리 건: 누구의 승인과 어떤 시스템 실행</a:t>
+              <a:t>세 업무의 승인 역할과 시스템 실행</a:t>
             </a:r>
           </a:p>
         </p:txBody>
@@ -29104,7 +28885,7 @@
                 <a:ea typeface="맑은 고딕"/>
                 <a:cs typeface="맑은 고딕"/>
               </a:rPr>
-              <a:t>처리 건 한 건에는 에이전트 쪽과 프로세스 쪽의 장치가 겹쳐 있어, 결과가 기대와 다를 때 어느 장치의 몫인지부터 가린다.</a:t>
+              <a:t>결과가 기대와 다르면 에이전트의 판단과 프로세스의 순서·책임 중 어느 쪽을 확인할지 가린다.</a:t>
             </a:r>
           </a:p>
         </p:txBody>
@@ -29246,7 +29027,7 @@
           <p:nvPr/>
         </p:nvPicPr>
         <p:blipFill>
-          <a:blip r:embed="rId3"/>
+          <a:blip r:embed="rIdTheory32_rId3"/>
           <a:stretch>
             <a:fillRect/>
           </a:stretch>
@@ -29525,7 +29306,7 @@
           <p:nvPr/>
         </p:nvPicPr>
         <p:blipFill>
-          <a:blip r:embed="rId4"/>
+          <a:blip r:embed="rIdTheory32_rId4"/>
           <a:stretch>
             <a:fillRect/>
           </a:stretch>
@@ -41817,7 +41598,7 @@
           <p:nvPr/>
         </p:nvPicPr>
         <p:blipFill>
-          <a:blip r:embed="rId2"/>
+          <a:blip r:embed="rIdTheory48_rId3"/>
           <a:stretch>
             <a:fillRect/>
           </a:stretch>
@@ -42014,7 +41795,7 @@
           <p:nvPr/>
         </p:nvPicPr>
         <p:blipFill>
-          <a:blip r:embed="rId3"/>
+          <a:blip r:embed="rIdTheory48_rId4"/>
           <a:stretch>
             <a:fillRect/>
           </a:stretch>
@@ -42232,7 +42013,7 @@
           <p:nvPr/>
         </p:nvPicPr>
         <p:blipFill>
-          <a:blip r:embed="rId4"/>
+          <a:blip r:embed="rIdTheory48_rId5"/>
           <a:stretch>
             <a:fillRect/>
           </a:stretch>
@@ -42450,7 +42231,7 @@
           <p:nvPr/>
         </p:nvPicPr>
         <p:blipFill>
-          <a:blip r:embed="rId5"/>
+          <a:blip r:embed="rIdTheory48_rId6"/>
           <a:stretch>
             <a:fillRect/>
           </a:stretch>
@@ -42649,7 +42430,7 @@
           <p:nvPr/>
         </p:nvPicPr>
         <p:blipFill>
-          <a:blip r:embed="rId6"/>
+          <a:blip r:embed="rIdTheory48_rId7"/>
           <a:stretch>
             <a:fillRect/>
           </a:stretch>
@@ -42722,7 +42503,7 @@
                 <a:ea typeface="맑은 고딕"/>
                 <a:cs typeface="맑은 고딕"/>
               </a:rPr>
-              <a:t>끝 이벤트에 닿아</a:t>
+              <a:t>필요한 흐름이 모두 끝나</a:t>
             </a:r>
           </a:p>
           <a:p>
@@ -43690,7 +43471,7 @@
                 <a:ea typeface="맑은 고딕"/>
                 <a:cs typeface="맑은 고딕"/>
               </a:rPr>
-              <a:t>BPMN 기반 멀티 에이전트 오케스트레이션: ProcessGPT</a:t>
+              <a:t>ProcessGPT: BPMN 기반 멀티 에이전트 조율</a:t>
             </a:r>
           </a:p>
         </p:txBody>
@@ -43994,7 +43775,7 @@
                 <a:ea typeface="맑은 고딕"/>
                 <a:cs typeface="맑은 고딕"/>
               </a:rPr>
-              <a:t>멀티 에이전트 / 오케스트레이션</a:t>
+              <a:t>멀티 에이전트 조율</a:t>
             </a:r>
           </a:p>
           <a:p>
@@ -51075,7 +50856,7 @@
                 <a:ea typeface="맑은 고딕"/>
                 <a:cs typeface="맑은 고딕"/>
               </a:rPr>
-              <a:t>핀 오염의 기준(냉각 효율 70 % 미만)을 읽었다</a:t>
+              <a:t>핀 오염 기준 등록(냉각 효율 70 % 미만)</a:t>
             </a:r>
           </a:p>
         </p:txBody>
@@ -52497,7 +52278,7 @@
                 <a:ea typeface="맑은 고딕"/>
                 <a:cs typeface="맑은 고딕"/>
               </a:rPr>
-              <a:t>에이전트의 결과에 반드시 있어야 할 항목과 형식의 약속</a:t>
+              <a:t>결과의 필수 항목·형식·의미와 처리 조건의 약속</a:t>
             </a:r>
           </a:p>
         </p:txBody>
@@ -53939,7 +53720,7 @@
                 <a:ea typeface="맑은 고딕"/>
                 <a:cs typeface="맑은 고딕"/>
               </a:rPr>
-              <a:t>에이전트가 원인을 쿨러 핀 오염으로 가리고 팬 최대 운전을 권하는 추천안을 제출했으며, 운전원은 아직 응답하지 않았다.</a:t>
+              <a:t>핀 오염에 팬 최대 운전을 권하는 추천안을 제출했고, 운전원은 아직 응답하지 않았다.</a:t>
             </a:r>
           </a:p>
         </p:txBody>
@@ -55665,7 +55446,7 @@
                 <a:ea typeface="맑은 고딕"/>
                 <a:cs typeface="맑은 고딕"/>
               </a:rPr>
-              <a:t>통제의 관점에서 가장 알맞은 판단은?</a:t>
+              <a:t>이 수업의 승인 정책에서 가장 알맞은 판단은?</a:t>
             </a:r>
           </a:p>
         </p:txBody>
@@ -55803,7 +55584,7 @@
                 <a:ea typeface="맑은 고딕"/>
                 <a:cs typeface="맑은 고딕"/>
               </a:rPr>
-              <a:t>발주의 등록은 승인 뒤의 프로세스 작업에 두고 에이전트는 읽기만 한다</a:t>
+              <a:t>발주는 승인 뒤 프로세스가 등록하고 에이전트는 업무 원천 조회와 제안 제출을 맡는다</a:t>
             </a:r>
           </a:p>
         </p:txBody>

--- a/산출물/통합반/이론/11회차/통합반_11일차.pptx
+++ b/산출물/통합반/이론/11회차/통합반_11일차.pptx
@@ -565,7 +565,7 @@
           <a:lstStyle/>
           <a:p>
             <a:r>
-              <a:t>안녕하세요. 이번 회차에서는 이 과정을 마무리합니다. 지금까지 쿨러 사건 하나를 붙잡고 세 영역을 나눠서 배웠죠. 판단의 재료가 되는 지식, 그 지식을 읽어서 추천안을 만드는 에이전트, 그리고 그 추천안을 사람의 승인과 시스템 실행으로 잇는 프로세스였어요. 사건을 한번 떠올려 볼까요? 쿨러에 이상이 생겨서 경보가 울렸고요, 에이전트가 원인을 가려서 조치를 추천했습니다. 운전원이 승인하자 시스템이 팬 속도를 올렸죠. 그런데 이 한 건 안에서 세 영역은 서로 무엇을 주고받았을까요? 그리고 이 구조를 쿨러가 아닌 내 업무에도 똑같이 세울 수 있을까요? 이번 회차에서는 먼저 쿨러 사건 한 건 위에서 세 영역이 주고받는 걸 되짚어 보고요, 그다음에 같은 구조로 생산·정비 조율 업무를 직접 만들어 보겠습니다. 마지막으로 실제 제품에서도 그 구조를 확인해 보겠습니다.</a:t>
+              <a:t>안녕하세요. 이번 회차에서는 쿨러 사건을 따라 지식, 에이전트, 프로세스가 무엇을 주고받는지 되짚습니다. 지식은 판단의 재료이고, 에이전트는 근거를 조회해 추천하며, 프로세스는 사람의 승인과 시스템 실행을 다음 차례로 잇습니다. 그 연결을 교대 인수인계에도 적용해 보겠습니다. 다음 교대에 전달할 메모를 실제 설비와 정비·재고 자료에 대조하고, 두 사람이 검토하고 보완하는 흐름을 만듭니다. 마지막에는 제품 시연에서 같은 역할과 구현 차이를 확인합니다.</a:t>
             </a:r>
           </a:p>
         </p:txBody>
@@ -1335,7 +1335,7 @@
           <a:lstStyle/>
           <a:p>
             <a:r>
-              <a:t>이번 회차의 학습목표부터 볼게요. 화면에 카드가 네 장 있습니다. 첫 번째 카드는 지식에서 판단까지예요. 에이전트가 도구마다 어떤 지식과 어떤 값을 읽는지 설명하고, 검토와 개정을 거쳐 관리하는 지식과 지금의 값, 그리고 출처가 각각 어디에 있는지 가려 봅니다. 두 번째 카드는 제안에서 완료까지입니다. 추천안이 사람의 승인과 시스템 실행을 거쳐서 끝난 업무가 되는 길을 설명하고요, 에이전트 쪽 장치와 프로세스 쪽 장치가 각각 무엇을 맡는지 나눠 봐요. 세 번째 카드는 내 주제에 적용하기예요. 친숙한 작은 업무 하나를 제가 골라서 명세, 지식 구조, 에이전트, 흐름까지 직접 만듭니다. 이때 에이전트는 확인된 것만 제안하고, 나머지는 보류하게 할 거예요. 마지막 카드는 제품에서 확인하기입니다. ProcessGPT 시연을 보면서 배운 구조가 그대로 있는 자리와 넓어진 범위를 가려 보고, 끝으로 학습 노트에 개념과 산출물을 이어 둡니다.</a:t>
+              <a:t>이번 회차의 학습목표를 보겠습니다. 첫째, 에이전트가 도구로 읽는 지식과 현재 값을 구별하고 판단의 출처를 확인합니다. 둘째, 제안과 사람의 승인, 시스템 실행, 결과 확인을 구분해 업무가 끝나는 과정을 설명합니다. 셋째, 교대 인수인계에서 제공된 문서와 에이전트, 흐름을 연결하고 실제 검토와 보완을 확인합니다. 마지막으로 제품 시연에서 같은 역할과 구현 차이를 살피고, 실습 결과를 학습 노트에 정리합니다.</a:t>
             </a:r>
           </a:p>
         </p:txBody>
@@ -1545,7 +1545,7 @@
           <a:lstStyle/>
           <a:p>
             <a:r>
-              <a:t>이번 시간에는 에이전트의 결과가 업무 완료로 이어지는 전체 구조를 되짚습니다. 앞 시간에는 에이전트가 지식과 값을 읽어서 추천안 한 건을 제출하는 데까지 따라왔죠. 이번 시간의 첫 단원, 목차의 네 번째 단원은 제안에서 완료까지, 승인과 시스템 실행이에요. 그 추천안을 누가 승인하고, 어떤 시스템이 무엇을 실행해야 이 일이 끝났다고 말할 수 있을까요? 이어서 같은 구조를 내 업무에 적용할 실습과 제품 시연의 관찰 기준까지 함께 준비하겠습니다. 아직 실습을 수행한 상태는 아니에요. 무엇을 만들고 어떤 결과로 확인할지를 먼저 연결해 두고, 실제 실습 뒤에 이번 회차를 마무리합니다.</a:t>
+              <a:t>이번 시간에는 에이전트의 결과가 업무 완료로 이어지는 전체 구조를 되짚습니다. 앞 시간에는 에이전트가 지식과 값을 읽어서 추천안 한 건을 제출하는 데까지 따라왔죠. 이번 시간의 첫 단원, 목차의 네 번째 단원은 제안에서 완료까지, 승인과 시스템 실행이에요. 그 추천안을 누가 승인하고, 어떤 시스템이 무엇을 실행해야 이 일이 끝났다고 말할 수 있을까요? 이어서 같은 구조를 교대 인수인계에 적용할 실습과 제품 시연의 관찰 기준까지 함께 준비하겠습니다. 아직 실습을 수행한 상태는 아니에요. 무엇을 만들고 어떤 결과로 확인할지를 먼저 연결해 두고, 실제 실습 뒤에 이번 회차를 마무리합니다.</a:t>
             </a:r>
           </a:p>
         </p:txBody>
@@ -2105,7 +2105,7 @@
           <a:lstStyle/>
           <a:p>
             <a:r>
-              <a:t>목차를 보면서 이번 회차의 순서를 잡아 볼게요. 화면에 여덟 줄이 있는데, 위의 다섯 줄이 이론입니다. 앞의 세 단원은 쿨러 사건의 경보 한 건이 추천안 한 건이 되기까지를 따라가요. 에이전트가 무엇을 받아서 시작하는지 보고, 그래프 질의와 증거로 원인을 가리는 과정, 그리고 조치를 정하고 출처를 남기는 방식을 차례로 봅니다. 넷째와 다섯째 단원은 그 추천안이 승인과 시스템 실행을 거쳐서 끝나기까지예요. 그 과정에 겹쳐 있는 에이전트 쪽 장치와 프로세스 쪽 장치를 나눠 봅니다. 아래 세 줄은 실습이에요. 같은 구조를 내 주제에 적용하는 실습 넷을 하고, ProcessGPT 시연을 본 다음, 학습 노트를 정리하면서 과정을 마칩니다. 이번 시간에는 그 가운데 앞의 세 단원, 현장 지식이 AI의 판단 근거가 되는 과정을 되짚습니다.</a:t>
+              <a:t>목차에서 앞의 다섯 단원은 이론입니다. 쿨러 경보가 추천안이 되기까지의 지식과 조회 근거를 보고, 그 뒤 승인과 시스템 실행으로 업무가 끝나는 과정을 살펴봅니다. 이어서 에이전트와 프로세스가 각각 맡는 일을 구분합니다. 실습에서는 교대 인수인계에 제공 문서, 에이전트와 흐름을 연결합니다. 그다음 ProcessGPT 시연에서 같은 구조가 어디에 나타나는지 보고, 결과를 학습 노트에 정리합니다.</a:t>
             </a:r>
           </a:p>
         </p:txBody>
@@ -3015,7 +3015,7 @@
           <a:lstStyle/>
           <a:p>
             <a:r>
-              <a:t>지금까지 쿨러 사건 한 건 위에서, 지식이 에이전트의 판단이 되고 그 판단이 사람의 승인과 시스템 실행을 거쳐 끝나는 길을 처음부터 끝까지 다시 따라왔죠. 이제 그 구조를 직접 세워 볼 차례입니다. 이번에는 HYD-02의 생산·정비 조율 업무 위에서요. 내 업무로 옮기는 실습은 넷이 이어지는데, 첫 실습에서는 내 주제의 자료와 업무 목표, 완료 조건을 정의합니다. 생산 일정과 정비 기한, 부품·작동유·인력의 확인 자료를 대조해 후보를 제안하는 업무입니다. 회의록을 요약하는 데서 끝내지 않고, 어떤 안건을 결정해야 하는지 근거와 함께 남깁니다. 고른 업무를 화면의 카드 네 장에 맞춰 적어요. 첫 카드는 무엇을 받아 시작하고 어디서 정보를 읽을 수 있는지, 둘째는 에이전트가 무엇을 내는지, 셋째는 어느 결과를 누가 확인하는지, 마지막 카드는 무엇이 되면 끝났다고 보는지예요. 에이전트가 할 일은 읽기, 분류, 추천 가운데서 이 회차 안에 끝까지 만들 수 있는 크기로 줄입니다. 이 실습에서 남는 건 업무 명세 한 장이에요. 필요한 항목이 갖춰지고 각 조건을 원문과 결과로 확인할 수 있어야 합니다. 「잘 정리된다」가 아니라, 무엇이 남으면 끝인지가 보여야 해요. 하지 못한 일을 어떻게 남길지도 적혀 있어야 하고요. 이 명세 한 장이 뒤의 세 실습이 따를 기준이 되거든요. 실제 실습에서는 이 명세부터 적겠습니다. 이어지는 지식 구조와 에이전트, 흐름이 무엇을 위해 필요한지 판단할 기준이 되는 한 장이에요.</a:t>
+              <a:t>지금까지 쿨러 사건에서 지식이 판단의 근거가 되고, 사람의 승인을 거쳐 시스템이 실행하는 흐름을 살펴봤습니다. 이제 교대 인수인계를 통해 같은 연결을 적용합니다. 한 근무자가 전달받은 작업 메모를 다음 근무자에게 넘기는 장면입니다. 메모에 정비가 끝났다고 쓰여 있어도 열린 작업지시가 남아 있다면 둘을 따로 확인해야 합니다. 먼저 대상 설비와 교대, 기준 시각, 작업 메모를 정리합니다. 제공 점검 문서와 설비 이력, 정비·재고 자료가 확인할 출처입니다. 에이전트가 근거를 읽어 인계안 초안을 만들고, 인계자와 인수자가 차례로 검토합니다. 끝난 인계 기록에는 확인된 근거뿐 아니라 미확인 항목과 다음 사람이 할 확인도 남아야 합니다. 인수 확인은 정비 완료나 설비 조치가 아닙니다.</a:t>
             </a:r>
           </a:p>
         </p:txBody>
@@ -3085,7 +3085,7 @@
           <a:lstStyle/>
           <a:p>
             <a:r>
-              <a:t>두 번째로 준비할 실습은 내 문서에서 주요 정보를 뽑아 작은 지식 구조를 만드는 일입니다. 첫 실습에서 작성할 명세에는 정보를 어디서 읽을지 적게 됩니다. 쿨러 사건에서 에이전트가 지식 그래프를 읽었던 것처럼, 내 에이전트에게도 읽을 지식이 있어야 합니다. 화면의 카드 네 장을 보세요. 입력은 명세에 적은 정보원 가운데 문서 하나예요. 제공된 문서도 좋고, 공개해도 되는 내 자료도 좋아요. 그 문서로 답하고 싶은 질문도 함께 정해 둡니다. 범위는 그 질문에 필요한 핵심 개념과 속성, 관계까지예요. 문서 전체를 옮기는 게 아니라, 질문에 답하는 데 필요한 만큼만 가려 냅니다. 남는 건 셋입니다. 개념과 관계를 정의한 스키마, 문서에 나오는 대상을 적은 샘플 인스턴스, 그리고 질문의 조회문이에요. 인스턴스마다 식별자를 붙이고, 어느 문서의 어느 대목에서 왔는지 출처도 붙입니다. 성공 기준은 마지막 카드예요. 만든 지식을 수업의 기준 그래프와 섞이지 않게 따로 둔 이름 공간에 넣고, 정한 질문이 조회로 풀리면 성공입니다. 여기서 만든 지식이 그다음 실습에서 만들 에이전트의 입력이 돼요. 문서의 답과 조회 결과가 같은지 비교해야, 데이터가 들어갔다는 확인에서 한 걸음 더 나아가 질문에 답할 수 있는 지식인지 확인할 수 있습니다.</a:t>
+              <a:t>41~42장 통합 발화는 41장 발표자 노트를 따른다.</a:t>
             </a:r>
           </a:p>
         </p:txBody>
@@ -3155,7 +3155,7 @@
           <a:lstStyle/>
           <a:p>
             <a:r>
-              <a:t>세 번째 실습에서는 만들어 둘 지식 구조를 읽는 에이전트를 붙입니다. 앞 실습에서 질문이 조회로 풀리는지 확인한 뒤에, 그 조회 결과를 사용해 제안하게 할 거예요. 화면의 카드 네 장을 보세요. 입력은 앞에서 만든 스키마와 자료, 그리고 쓸 수 있는 읽기 도구예요. 범위는 에이전트에 목표와 스킬을 적고, 읽기 도구를 MCP로 연결하는 데까지입니다. 에이전트는 바이브 코딩으로 구성해요. 남는 건 에이전트 정의와 스킬, 그리고 최초 자료와 후속 자료의 제안·보류 결과예요. 이 에이전트가 지킬 규칙은 하나입니다. 확인된 정보로만 제안하고, 확인하지 못한 값이나 권한 밖의 작업은 지어내지 않고 보류로 냅니다. 이번 업무에서는 정비 시간 후보를 비교합니다. 생산 시간이 비어 있어도 필요한 자원 확인이 남아 있으면 적합한 후보로 확정할 수 없어요. 보류 이유를 남기고 후속 확인 자료가 들어왔을 때 같은 조건을 다시 평가해야 합니다. 그래서 성공 기준은 마지막 카드의 두 가지예요. 제안의 근거가 실제로 읽은 값이고, 확인하지 못한 것은 보류로 남았으면 성공입니다. 최초 자료와 후속 확인 자료의 결과를 비교하면서, 바뀐 판단에는 새 근거가 있고 유지돼야 할 조건은 그대로인지 확인합니다.</a:t>
+              <a:t>다음으로 인계에 사용할 보충 점검 문서를 기존 지식에 연결합니다. 강사가 제공한 HI-01 문서에는 설비 상태, 열린 작업지시, 부품 상태, 작업 메모를 대조하는 절차가 있습니다. 추출 결과의 각 절차가 원문의 어느 부분에서 왔는지 사람이 먼저 확인합니다. 같은 제공 문서와 추출 조건에서는 준비된 검토본을 재사용하지만, 사람이 확인하고 적재하는 단계는 남아 있습니다. 원문과 맞지 않거나 부족한 항목을 발견하면 그대로 적재하지 말고 확인해야 합니다. 기존 쿨러·정비·구매 지식은 그대로 두고 보충 문서만 추가합니다. 이 실습은 학생의 임의 문서를 무제한으로 추출하는 경로가 아닙니다.</a:t>
             </a:r>
           </a:p>
         </p:txBody>
@@ -3225,7 +3225,7 @@
           <a:lstStyle/>
           <a:p>
             <a:r>
-              <a:t>네 번째 실습은 직접 그린 흐름으로 에이전트를 실행하는 일입니다. 앞 실습에서 만들 에이전트는 제안이나 보류 한 건을 내는 데서 멈춥니다. 쿨러 사건에서도 에이전트의 일은 추천안을 제출하면서 끝났고, 그 뒤를 이은 건 프로세스였죠. 내 업무도 마찬가지예요. 에이전트가 낸 제안이나 보류를 누가 확인하고 어떻게 끝낼지는 흐름이 정합니다. 작은 업무의 흐름은 bpmn.io로 그리고요, 화면의 다섯 칸, 시작, 에이전트 작업, 필요한 자리의 사람 확인, 결과 보고, 종료입니다. 그린 흐름을 준비된 연결 방식의 범위에서 등록하고 실행하면, 앞에서 만든 에이전트가 그 단계에서 일하고 처리 건 하나가 기록으로 남아요. 등록된 흐름과 그 처리 건의 기록이 이 실습에서 남는 것입니다. 이때 지킬 게 하나 있습니다. 일정 등록이나 메일 발송처럼 준비된 범위 밖의 외부 시스템 쓰기는 성공한 것처럼 적지 않아요. 하지 못한 일로 결과 보고에 남깁니다. 필요한 흐름이 모두 끝나 다른 열린 작업 없이 처리 건이 닫히고, 사람 확인이 필요한 자리에 실제로 있었고, 결과 보고에 한 일과 하지 못한 일이 함께 남았으면 성공이에요. 단, 등록할 수 있는 연결이 먼저 준비돼 있어야 합니다. 수업 예제에는 제가 실제 도구와 결과 형식에 맞게 채울 자리도 있어요. 연결이 없는 기능을 성공으로 꾸미지 말고, 확인 가능한 범위와 막힌 이유를 결과로 남겨야 합니다.</a:t>
+              <a:t>43~44장 통합 발화는 43장 발표자 노트를 따른다.</a:t>
             </a:r>
           </a:p>
         </p:txBody>
@@ -3295,7 +3295,7 @@
           <a:lstStyle/>
           <a:p>
             <a:r>
-              <a:t>이제 ProcessGPT 시연을 볼 기준을 준비하겠습니다. 앞에서 안내한 네 실습은 작은 업무 하나를 명세, 지식, 에이전트, 흐름으로 연결하는 과정이었죠. 그럼 같은 구조가 실제 제품에서는 어떻게 나타날까요? 시연으로 지식, 에이전트, 프로세스의 연결을 확인하기 전에, 몇 장으로 짚고 시작할게요.</a:t>
+              <a:t>이제 교대 인계안을 작성할 에이전트와 스킬을 구성합니다. 입력은 대상 설비와 인계할 교대, 기준 시각, 작업 메모입니다. 에이전트는 허용된 읽기 도구로 설비 상태와 열린 작업지시, 실제 재고와 입고 예정 자료를 조회합니다. 메모에서 정비가 완료됐다고 전했더라도 실제 작업지시가 열려 있다면 그 차이를 불일치로 남겨야 합니다. 입고 예정과 현재 재고도 같은 말이 아닙니다. 조회 결과가 없거나 조회 자체가 실패한 경우에는 확인이 필요한 이유와 다음 확인을 남깁니다. 실제 조회한 도구와 결과가 인계안의 근거가 되어야 합니다. 학생은 에이전트의 이름과 설명을 이해하기 쉽게 작성할 수 있지만 도구 서버나 모델을 임의로 바꾸지는 않습니다.</a:t>
             </a:r>
           </a:p>
         </p:txBody>
@@ -3365,7 +3365,7 @@
           <a:lstStyle/>
           <a:p>
             <a:r>
-              <a:t>ProcessGPT는 BPMN으로 업무 흐름을 표현하고 여러 에이전트의 일을 조율하는 오픈소스 프로젝트입니다. 개발사의 공식 소개에서 확인할 수 있는 방향이에요. 여기서 볼 핵심은 제품 이름보다 오케스트레이션이라는 역할입니다. 여러 수행자가 각자의 일을 하더라도, 누가 언제 시작하고 어떤 결과를 다음에 넘길지는 조율해야 하죠. HYD에서 프로세스 엔진이 맡았던 역할입니다. 수행자가 여러 전문 에이전트로 늘어나도, 이 연결과 책임을 설계해야 한다는 점은 같습니다. 공식 소개에는 자연어로 프로세스를 정의하는 기능도 나옵니다. 업무를 말로 설명해 초안을 만드는 길이 열리는 거예요. 그렇다고 생성된 그림이 내 업무의 완료 조건이나 승인 규칙까지 자동으로 맞췄다는 뜻은 아닙니다. 사람이 의도를 검토하고 실제 실행 결과를 확인해야 하죠. 시연에서는 기능의 수보다 그 연결을 보겠습니다. 일을 맡기는 설계는 어디에 있고, 실제로 진행되는 한 건은 어디에 있으며, 결과를 낸 뒤 다음 차례를 누가 여는지요. 이 질문은 다른 제품을 볼 때도 그대로 사용할 수 있습니다.</a:t>
+              <a:t>45~46장 통합 발화는 45장 발표자 노트를 따른다.</a:t>
             </a:r>
           </a:p>
         </p:txBody>
@@ -3435,7 +3435,7 @@
           <a:lstStyle/>
           <a:p>
             <a:r>
-              <a:t>우리가 만든 건 제품의 어느 자리에 해당할까요? 짝을 맞춰 보겠습니다. 표의 왼쪽 칸이 이 과정에서 만든 것, 가운데 칸이 ProcessGPT에서 그게 나타나는 자리, 오른쪽 칸이 그 구실이에요. 첫 줄은 판단에 필요한 지식의 자리입니다. 제품의 공개 구조에는 지식 그래프뿐 아니라 문서 검색을 위한 구성도 있어요. 이 표는 HYD 제작 때 참고한 제품 구조와의 대응입니다. 둘째 줄, 에이전트는 사람과 같은 사용자 목록의 한 행으로 등록되고, 쓸 도구는 조직 단위로 등록한 MCP 서버에서 나옵니다. 우리 시스템도 같은 방식으로 에이전트를 등록했어요. 셋째 줄부터 프로세스 쪽인데, 이름이 조금 달라요. 흐름과 판본은 프로세스 정의와 정의 버전입니다. 강조한 두 줄을 보세요. 처리 건은 프로세스 인스턴스, 단계는 워크아이템이라고 불러요. 마지막 줄, 사람에게 맡겨진 워크아이템이 모이는 곳이 내 작업함입니다. 이름은 달라도 구실은 같아요. 그러니까 처리 건과 단계를 구별하던 질문을 제품의 인스턴스와 워크아이템에도 적용할 수 있습니다. 상태 이름이 비슷해도 실제 완료 의미는 해당 제품의 정의와 결과 기록을 확인해야 해요.</a:t>
+              <a:t>마지막으로 제공된 교대 흐름을 포털에 연결해 한 처리 건을 진행합니다. bpmn.io에서 시작과 인계안 작성, 인계자 검토, 인수자 확인 또는 보완, 종료의 연결을 확인합니다. 포털에는 시작 입력과 역할, 각 작업에 담당할 에이전트를 연결한 뒤 검사를 통과한 판본을 등록합니다. 시작하면 에이전트가 실제 자료를 조회해 초안을 만들고 인계자가 확인합니다. 다음으로 인수자가 내용을 살펴보고 보완이 필요하면 사유를 적어 같은 처리 건으로 돌려보냅니다. 보완된 초안을 인계자가 다시 검토하고 인수자가 확인하면 인계 기록이 끝납니다. 이 확인은 사람 사이에 내용을 전달했다는 뜻이며, 설비가 조치됐거나 발주와 정비가 완료됐다는 뜻은 아닙니다.</a:t>
             </a:r>
           </a:p>
         </p:txBody>
@@ -3505,7 +3505,7 @@
           <a:lstStyle/>
           <a:p>
             <a:r>
-              <a:t>이 대응이 실제로 어떻게 움직이는지, HYD가 참고한 제품의 작업 전달 구조를 한 그림으로 놓았습니다. 이 그림은 실제 제품의 쿨러 실행 화면이 아니라, 배운 사례를 구조에 대응시킨 설명입니다. 왼쪽이 실행 엔진, 가운데가 워크아이템 목록, 오른쪽이 수행자예요. 실행 엔진은 프로세스 정의를 읽고, 수행할 작업을 워크아이템으로 관리하고, 다음 차례의 작업을 진행 상태로 엽니다. 예정 작업을 미리 목록에 만들어 둘 수도 있어요. 오른쪽 수행자는 자기에게 맡겨진 워크아이템을 처리해서 결과를 제출하고요. 엔진은 그 결과를 받아서 다음 워크아이템을 엽니다. 쿨러 사건으로 읽어 볼까요? 목록 맨 위, 진단 · 조치 제안은 에이전트가 끝내서 완료 상태예요. 가운데 운전원 승인은 사람에게 맡겨져서 처리 중이고, 이 워크아이템이 운전원의 작업함에 놓여 있습니다. 맨 아래 다음 작업은 아직 차례가 오지 않은 예정 상태고요. 에이전트가 결과를 제출하면 엔진이 이어받는다는 걸 앞에서 봤죠. 제품에서도 그 구조가 그대로입니다. 에이전트든 사람이든 수행자는 자기 워크아이템만 처리하고, 다음을 여는 건 엔진이에요.</a:t>
+              <a:t>47~48장 통합 발화는 47장 발표자 노트를 따른다.</a:t>
             </a:r>
           </a:p>
         </p:txBody>
@@ -3575,7 +3575,7 @@
           <a:lstStyle/>
           <a:p>
             <a:r>
-              <a:t>왼쪽은 HYD가 제품 구조를 참고한 부분입니다. 프로세스 정의와 판본, 실제 인스턴스, 수행자에게 맡기는 작업을 구별했어요. 에이전트가 결과를 제출하고 엔진이 그 결과를 받아 다음 작업을 여는 구조도 참고했습니다. 제품을 그대로 설치해 쓴 것과는 구별해야 해요. 교육용으로 직접 구현한 부분과 적용 범위가 있기 때문입니다. 오른쪽은 제품을 평가할 때 더 살펴볼 범위예요. 자연어로 만든 정의를 어떻게 검토하는지, 여러 에이전트와 하위 프로세스를 어떻게 관리하는지, 지식을 어떤 방식으로 검색하는지, 운영 중에는 권한과 실패를 어떻게 다루는지입니다. 기능이 소개돼 있는 것과 우리 환경에서 그 기능을 검증한 것은 다릅니다. 특히 수업에서 역할을 골라 승인한 경험을 실제 사용자 인증과 혼동하지 마세요. 기업에서는 누가 접속했는지 확인하고, 그 신원에 어떤 권한이 있는지 연결해야 합니다. 같은 승인 상자가 있어도 이 연결이 빠지면 책임을 확인할 수 없죠. 제품이 바뀌었을 때도 살펴봐야 하는 것은 바로 이런 역할과 통제의 실제 연결입니다.</a:t>
+              <a:t>이어서 ProcessGPT 시연을 볼 기준을 준비합니다. 앞의 교대 실습에서는 제공 문서와 실제 조회를 인계안에 연결하고, 두 사람의 검토와 보완을 하나의 처리 건으로 이어 봅니다. 이제 제품에서는 지식, 에이전트, 프로세스가 각각 어디에 나타나고 다음 차례가 어떻게 열리는지 살펴보겠습니다.</a:t>
             </a:r>
           </a:p>
         </p:txBody>
@@ -3715,7 +3715,7 @@
           <a:lstStyle/>
           <a:p>
             <a:r>
-              <a:t>기업 업무에 적용할 때는 표의 여섯 항목을 질문으로 바꿔 보면 좋습니다. 사람 승인은 효과를 내기 전에 필요한 결정이 있었는지, 권한은 그 결정을 할 사람이 맞는지를 묻습니다. 승인 버튼이 보인다는 것만으로 두 질문이 해결되지는 않아요. 감사 추적은 누가 무엇을 결정하고 어떤 실행이 일어났는지 되짚는 길입니다. 제안, 승인, 명령과 결과가 서로 이어져 있어야 원인을 추적할 수 있죠. 이미 한 작업을 다시 시도해도 되는지 판단할 때도 이 기록이 필요합니다. 보상은 실패 뒤에 남은 효과를 정리하는 일입니다. 모든 작업을 과거로 되돌리는 만능 취소가 아니에요. 예를 들어 발주 뒤 다음 단계가 실패했다면, 발주 취소가 가능한지 확인하고 취소 요청이나 정정 절차를 실행해야 합니다. 이미 발송한 안내를 없던 일로 만들 수 없다면 정정 안내가 필요할 수 있고요. BPMN도 보상 작업을 표현할 수 있지만, 무엇을 어떻게 보상할지는 업무별로 설계해야 합니다. 실행 격리는 에이전트와 도구가 접근할 데이터와 기능을 제한합니다. 읽기 도구의 범위, 계정 권한, 연결 가능한 시스템을 함께 봐야 해요. 변경 통제는 어떤 판본으로 실행 중인지와 새 정의를 언제 적용할지를 관리합니다. 처리 건의 판본을 고정해도 센서 값이나 현재 권한까지 고정되는 것은 아닙니다. 오른쪽 칸은 HYD에서 이 원리를 살펴본 자리와 추가로 확인할 지점입니다. 제품을 도입할 때도 각 항목이 실제 설정과 시험에서 어떻게 지켜지는지 확인하세요. 제품 이름이 같다는 이유만으로 우리 업무에 필요한 통제가 모두 갖춰졌다고 결론 내리지 않는 겁니다.</a:t>
+              <a:t>ProcessGPT는 BPMN으로 업무 흐름을 표현하고 여러 에이전트의 일을 조율하는 오픈소스 프로젝트입니다. 개발사의 공식 소개에서 확인할 수 있는 방향이에요. 여기서 볼 핵심은 제품 이름보다 오케스트레이션이라는 역할입니다. 여러 수행자가 각자의 일을 하더라도, 누가 언제 시작하고 어떤 결과를 다음에 넘길지는 조율해야 하죠. HYD에서 프로세스 엔진이 맡았던 역할입니다. 수행자가 여러 전문 에이전트로 늘어나도, 이 연결과 책임을 설계해야 한다는 점은 같습니다. 공식 소개에는 자연어로 프로세스를 정의하는 기능도 나옵니다. 업무를 말로 설명해 초안을 만드는 길이 열리는 거예요. 그렇다고 생성된 그림이 내 업무의 완료 조건이나 승인 규칙까지 자동으로 맞췄다는 뜻은 아닙니다. 사람이 의도를 검토하고 실제 실행 결과를 확인해야 하죠. 시연에서는 기능의 수보다 그 연결을 보겠습니다. 일을 맡기는 설계는 어디에 있고, 실제로 진행되는 한 건은 어디에 있으며, 결과를 낸 뒤 다음 차례를 누가 여는지요. 이 질문은 다른 제품을 볼 때도 그대로 사용할 수 있습니다.</a:t>
             </a:r>
           </a:p>
         </p:txBody>
@@ -3785,7 +3785,7 @@
           <a:lstStyle/>
           <a:p>
             <a:r>
-              <a:t>시연을 시작하기 전에 무엇을 볼지 정리해 두겠습니다. 화면의 카드 네 장이 눈여겨볼 것들이에요. 첫째, 지식과 에이전트와 프로세스가 제품에서 어떤 이름으로 나타나는지. 둘째, 정의 하나에서 열린 인스턴스가 에이전트 작업과 사람 작업으로 어떻게 이어지는지예요. 셋째는 배운 구조 위에 더해진 것들입니다. 말로 만드는 정의나 여러 에이전트의 협업 같은 거요. 넷째는 승인과 권한, 감사 추적 같은 통제가 흐름의 어디에 놓이는지예요. 시연을 본 뒤에는 화면에서 세 가지를 가려낼 수 있어야 합니다. 눈앞의 것이 정의인지 인스턴스인지, 지금이 누구의 차례인지, 사람이 결정하는 자리가 어디인지요. 실제 시연에서는 이 네 가지를 제품 화면에 대어 확인합니다. 준비된 환경에서 확인하지 못한 것은 미확인으로 남기면 됩니다.</a:t>
+              <a:t>우리가 만든 건 제품의 어느 자리에 해당할까요? 짝을 맞춰 보겠습니다. 표의 왼쪽 칸이 이 과정에서 만든 것, 가운데 칸이 ProcessGPT에서 그게 나타나는 자리, 오른쪽 칸이 그 구실이에요. 첫 줄은 판단에 필요한 지식의 자리입니다. 제품의 공개 구조에는 지식 그래프뿐 아니라 문서 검색을 위한 구성도 있어요. 이 표는 HYD 제작 때 참고한 제품 구조와의 대응입니다. 둘째 줄, 에이전트는 사람과 같은 사용자 목록의 한 행으로 등록되고, 쓸 도구는 조직 단위로 등록한 MCP 서버에서 나옵니다. 우리 시스템도 같은 방식으로 에이전트를 등록했어요. 셋째 줄부터 프로세스 쪽인데, 이름이 조금 달라요. 흐름과 판본은 프로세스 정의와 정의 버전입니다. 강조한 두 줄을 보세요. 처리 건은 프로세스 인스턴스, 단계는 워크아이템이라고 불러요. 마지막 줄, 사람에게 맡겨진 워크아이템이 모이는 곳이 내 작업함입니다. 이름은 달라도 구실은 같아요. 그러니까 처리 건과 단계를 구별하던 질문을 제품의 인스턴스와 워크아이템에도 적용할 수 있습니다. 상태 이름이 비슷해도 실제 완료 의미는 해당 제품의 정의와 결과 기록을 확인해야 해요.</a:t>
             </a:r>
           </a:p>
         </p:txBody>
@@ -3855,7 +3855,7 @@
           <a:lstStyle/>
           <a:p>
             <a:r>
-              <a:t>마지막으로 준비할 실습은 학습 내용과 결과를 개인 지식 자산으로 정리하는 일입니다. 제품 시연까지 마친 뒤에는 정의와 인스턴스, 담당과 결정의 자리를 어디에서 확인했는지도 남길 수 있겠죠. 남은 건 이 모든 걸 내 것으로 묶어 두는 일이에요. 과정을 시작할 때 만든 Notion 학습 노트로 돌아갑니다. 노트에 네 가지를 서로 이어서 기록합니다. 화면의 카드 순서대로, 자신의 문장으로 다시 쓴 개념, 그 개념이 나온 참고 자료, 이번 회차에 만든 명세와 스키마와 에이전트와 흐름 같은 실습 산출물, 그리고 그게 정한 대로 동작했는지의 검증 결과예요. 왜 이렇게 이어 둘까요? 개념만 적힌 노트는 무엇을 알았는지를 보여 줍니다. 그런데 산출물과 검증 결과가 이어진 노트는 무엇을 할 수 있는지를 보여 줘요. 수업 계정에서 Notion 연결과 쓰기 권한이 확인되면 MCP로 연동해서 기록하는 모습을 보여 드리고요, 그렇지 않은 환경에서는 준비한 Markdown을 Notion에 직접 정리합니다. 개념에서 출처와 산출물로, 산출물에서 검증 결과로 끊기지 않고 이어지면 이 노트는 완성입니다. 이제 실제 실습과 시연에서는 안내한 순서대로 결과를 확인하고, 마지막에 네 가지를 이어 기록하겠습니다. 마치고 돌아오면 복습과 퀴즈로 과정을 정리합니다.</a:t>
+              <a:t>이 대응이 실제로 어떻게 움직이는지, HYD가 참고한 제품의 작업 전달 구조를 한 그림으로 놓았습니다. 이 그림은 실제 제품의 쿨러 실행 화면이 아니라, 배운 사례를 구조에 대응시킨 설명입니다. 왼쪽이 실행 엔진, 가운데가 워크아이템 목록, 오른쪽이 수행자예요. 실행 엔진은 프로세스 정의를 읽고, 수행할 작업을 워크아이템으로 관리하고, 다음 차례의 작업을 진행 상태로 엽니다. 예정 작업을 미리 목록에 만들어 둘 수도 있어요. 오른쪽 수행자는 자기에게 맡겨진 워크아이템을 처리해서 결과를 제출하고요. 엔진은 그 결과를 받아서 다음 워크아이템을 엽니다. 쿨러 사건으로 읽어 볼까요? 목록 맨 위, 진단 · 조치 제안은 에이전트가 끝내서 완료 상태예요. 가운데 운전원 승인은 사람에게 맡겨져서 처리 중이고, 이 워크아이템이 운전원의 작업함에 놓여 있습니다. 맨 아래 다음 작업은 아직 차례가 오지 않은 예정 상태고요. 에이전트가 결과를 제출하면 엔진이 이어받는다는 걸 앞에서 봤죠. 제품에서도 그 구조가 그대로입니다. 에이전트든 사람이든 수행자는 자기 워크아이템만 처리하고, 다음을 여는 건 엔진이에요.</a:t>
             </a:r>
           </a:p>
         </p:txBody>
@@ -3925,7 +3925,7 @@
           <a:lstStyle/>
           <a:p>
             <a:r>
-              <a:t>실습과 시연에서 남긴 기록으로 돌아왔습니다. 이제 복습과 용어 정리, 퀴즈로 이번 회차를 마무리하겠습니다. 학습 노트에는 완성한 결과와 아직 확인하지 못한 것을 구분해 두겠습니다. 먼저 이번 회차에 배운 흐름을 쿨러 사건으로 복습해 보겠습니다. 표에 쿨러 사건의 다섯 순간을 놓았어요. 답과 근거 칸은 잠깐 가려 둘게요. 순간마다 지식, 에이전트, 프로세스 가운데 어느 영역의 일인지 먼저 골라 보세요. 왜 그 영역인지 근거도 같이 생각해 보시고요. 답을 맞춰 볼까요? 첫째, 핀 오염을 판단할 기준을 등록해 관리하는 일은 지식의 영역입니다. 기준은 매뉴얼과 정책을 검토해 관리하고 개정하는 지식이죠. 둘째, 지금의 냉각 효율을 읽어서 기준에 댄 건 에이전트의 일이에요. 값은 도구로 읽은 현재 값이고, 그걸 기준에 대어 판단하는 게 에이전트의 몫이니까요. 셋째, 쿨러 핀 세척을 설비보전팀장이 승인한다는 건 다시 지식입니다. 승인 역할은 조치에 적힌 지식이었죠. 넷째, 운전원 승인 뒤에 냉각 명령이 열린 건 프로세스의 일이에요. 단계 사이의 순서는 엔진이 지킵니다. 다섯째가 헷갈리기 쉬워요. 내려간 유온을 다시 읽고 작업지시를 등록한 건 프로세스의 일입니다. 둘째 순간처럼 시계열 DB를 읽긴 하는데, 판단의 재료를 읽은 게 아니라 승인 뒤 실행의 결과를 확인한 서비스 작업이거든요. 결국 같은 값을 읽어도, 누가 무엇을 위해 읽었는지에 따라 영역이 갈립니다. 이 HYD 사례에서는 진단 도구를 통한 대조와 승인 뒤 재관측 서비스의 역할이 다릅니다. 다른 시스템에서는 배치가 달라질 수 있어도, 판단 근거를 읽는 일과 실행 결과를 확인하는 일을 구별하는 질문은 유효합니다.</a:t>
+              <a:t>왼쪽은 HYD가 제품 구조를 참고한 부분입니다. 프로세스 정의와 판본, 실제 인스턴스, 수행자에게 맡기는 작업을 구별했어요. 에이전트가 결과를 제출하고 엔진이 그 결과를 받아 다음 작업을 여는 구조도 참고했습니다. 제품을 그대로 설치해 쓴 것과는 구별해야 해요. 교육용으로 직접 구현한 부분과 적용 범위가 있기 때문입니다. 오른쪽은 제품을 평가할 때 더 살펴볼 범위예요. 자연어로 만든 정의를 어떻게 검토하는지, 여러 에이전트와 하위 프로세스를 어떻게 관리하는지, 지식을 어떤 방식으로 검색하는지, 운영 중에는 권한과 실패를 어떻게 다루는지입니다. 기능이 소개돼 있는 것과 우리 환경에서 그 기능을 검증한 것은 다릅니다. 특히 수업에서 역할을 골라 승인한 경험을 실제 사용자 인증과 혼동하지 마세요. 기업에서는 누가 접속했는지 확인하고, 그 신원에 어떤 권한이 있는지 연결해야 합니다. 같은 승인 상자가 있어도 이 연결이 빠지면 책임을 확인할 수 없죠. 제품이 바뀌었을 때도 살펴봐야 하는 것은 바로 이런 역할과 통제의 실제 연결입니다.</a:t>
             </a:r>
           </a:p>
         </p:txBody>
@@ -3995,7 +3995,7 @@
           <a:lstStyle/>
           <a:p>
             <a:r>
-              <a:t>흐름을 되짚었으니, 이번엔 용어의 이름과 뜻을 정리하겠습니다. 표에 이번 회차에서 다시 쓰고 새로 세운 용어 일곱 개가 있어요. 스킬은 에이전트가 업무를 수행하는 순서와 요령을 적은 재사용 지침입니다. MCP는 에이전트가 외부 시스템의 도구를 같은 방식으로 부르게 하는 연결 규약이에요. 출력 계약은 결과의 필수 항목과 형식, 의미와 처리 조건에 대한 약속입니다. HITL은 사람의 판단이나 피드백을 과정 안에 넣는 방식입니다. 이 수업에서는 실행 전에 승인하거나 거절하는 자리로 구체화했고요. 프로세스 인스턴스는 프로세스 정의에 따라 실제로 도는 한 건이에요. 우리가 처리 건이라고 불러 온 거죠. 워크아이템은 인스턴스 안에서 수행자에게 맡겨지는 작업 하나, 우리가 단계라고 부른 겁니다. 마지막으로 멀티 에이전트 오케스트레이션은 한 프로세스 안에서 여러 에이전트의 순서와 호출을 조율하는 일입니다.</a:t>
+              <a:t>기업 업무에 적용할 때는 표의 여섯 항목을 질문으로 바꿔 보면 좋습니다. 사람 승인은 효과를 내기 전에 필요한 결정이 있었는지, 권한은 그 결정을 할 사람이 맞는지를 묻습니다. 승인 버튼이 보인다는 것만으로 두 질문이 해결되지는 않아요. 감사 추적은 누가 무엇을 결정하고 어떤 실행이 일어났는지 되짚는 길입니다. 제안, 승인, 명령과 결과가 서로 이어져 있어야 원인을 추적할 수 있죠. 이미 한 작업을 다시 시도해도 되는지 판단할 때도 이 기록이 필요합니다. 보상은 실패 뒤에 남은 효과를 정리하는 일입니다. 모든 작업을 과거로 되돌리는 만능 취소가 아니에요. 예를 들어 발주 뒤 다음 단계가 실패했다면, 발주 취소가 가능한지 확인하고 취소 요청이나 정정 절차를 실행해야 합니다. 이미 발송한 안내를 없던 일로 만들 수 없다면 정정 안내가 필요할 수 있고요. BPMN도 보상 작업을 표현할 수 있지만, 무엇을 어떻게 보상할지는 업무별로 설계해야 합니다. 실행 격리는 에이전트와 도구가 접근할 데이터와 기능을 제한합니다. 읽기 도구의 범위, 계정 권한, 연결 가능한 시스템을 함께 봐야 해요. 변경 통제는 어떤 판본으로 실행 중인지와 새 정의를 언제 적용할지를 관리합니다. 처리 건의 판본을 고정해도 센서 값이나 현재 권한까지 고정되는 것은 아닙니다. 오른쪽 칸은 HYD에서 이 원리를 살펴본 자리와 추가로 확인할 지점입니다. 제품을 도입할 때도 각 항목이 실제 설정과 시험에서 어떻게 지켜지는지 확인하세요. 제품 이름이 같다는 이유만으로 우리 업무에 필요한 통제가 모두 갖춰졌다고 결론 내리지 않는 겁니다.</a:t>
             </a:r>
           </a:p>
         </p:txBody>
@@ -4065,7 +4065,7 @@
           <a:lstStyle/>
           <a:p>
             <a:r>
-              <a:t>배운 내용을 판단에 쓸 수 있는지, 퀴즈 세 문제로 확인해 보겠습니다. 보기의 말을 기억하는 것보다, 그 판단이 어느 영역의 몫인지 근거를 댈 수 있는지가 중요해요. 문제마다 보기를 읽고 나면 잠깐 멈출 테니, 그때 답을 골라 보세요. 정답과 까닭은 세 문제를 다 푼 뒤에 함께 확인하겠습니다.</a:t>
+              <a:t>시연을 시작하기 전에 무엇을 볼지 정리해 두겠습니다. 화면의 카드 네 장이 눈여겨볼 것들이에요. 첫째, 지식과 에이전트와 프로세스가 제품에서 어떤 이름으로 나타나는지. 둘째, 정의 하나에서 열린 인스턴스가 에이전트 작업과 사람 작업으로 어떻게 이어지는지예요. 셋째는 배운 구조 위에 더해진 것들입니다. 말로 만드는 정의나 여러 에이전트의 협업 같은 거요. 넷째는 승인과 권한, 감사 추적 같은 통제가 흐름의 어디에 놓이는지예요. 시연을 본 뒤에는 화면에서 세 가지를 가려낼 수 있어야 합니다. 눈앞의 것이 정의인지 인스턴스인지, 지금이 누구의 차례인지, 사람이 결정하는 자리가 어디인지요. 실제 시연에서는 이 네 가지를 제품 화면에 대어 확인합니다. 준비된 환경에서 확인하지 못한 것은 미확인으로 남기면 됩니다.</a:t>
             </a:r>
           </a:p>
         </p:txBody>
@@ -4135,7 +4135,7 @@
           <a:lstStyle/>
           <a:p>
             <a:r>
-              <a:t>첫 번째 문제입니다. 상황부터 볼게요. 에이전트가 원인을 쿨러 핀 오염으로 가리고, 팬 최대 운전을 권하는 추천안을 제출했습니다. 운전원은 아직 응답하지 않았어요. 이 시점의 처리 건에 대한 설명으로 옳은 건 무엇일까요? 1번, 추천안이 제출됐으니 팬 속도는 이미 100퍼센트로 올라갔다. 2번, 에이전트가 승인 결과를 기다리며 다음 도구를 부르고 있다. 3번, 에이전트의 일은 끝났고 엔진이 운전원 승인을 열어 기다린다. 4번, 운전원이 응답하지 않으면 추천대로 자동 실행된다.</a:t>
+              <a:t>마지막으로 학습 내용과 결과를 다시 찾아볼 수 있게 정리합니다. 개념을 자신의 말로 적고, 그 개념이 나온 자료와 이번에 작성한 교대 에이전트·흐름·인계 처리 건을 연결합니다. 확인한 조회 근거와 사람의 검토, 보완 후에도 남은 미확인 항목을 함께 기록합니다. 학습 노트에 적힌 내용과 실제 처리 건의 결과를 구분하면 무엇을 배웠고 무엇을 확인했는지 다시 찾을 수 있습니다. 수업 계정의 연결과 쓰기 권한이 확인된 경우에만 Notion 연동을 시연하고, 그렇지 않으면 준비한 Markdown을 직접 정리합니다.</a:t>
             </a:r>
           </a:p>
         </p:txBody>
@@ -4205,7 +4205,7 @@
           <a:lstStyle/>
           <a:p>
             <a:r>
-              <a:t>두 번째 문제입니다. 매뉴얼이 개정돼서, 쿨러 핀 오염을 가리는 냉각 효율의 기준값이 달라졌어요. 그런데 에이전트는 여전히 예전 기준으로 판단합니다. 조회 구조와 기준의 단위는 그대로라고 할 때, 새 기준이 판단에 쓰이게 하려면, 먼저 고칠 곳은 어디일까요? 1번, 스킬의 절차에 새 기준값을 문장으로 적어 넣는다. 2번, 개정된 문서를 검토해 증거 기준을 다시 적재한다. 3번, 프로세스 정의의 게이트웨이 조건을 새 기준값으로 바꾼다. 4번, 운전원이 승인할 때마다 새 기준값을 확인하게 한다.</a:t>
+              <a:t>56~57장 통합 발화는 56장 발표자 노트를 따른다.</a:t>
             </a:r>
           </a:p>
         </p:txBody>
@@ -4275,7 +4275,7 @@
           <a:lstStyle/>
           <a:p>
             <a:r>
-              <a:t>마지막 문제입니다. 재고 보충을 빨리 끝내려고, 구매 에이전트에게 발주를 직접 등록하는 쓰기 도구를 연결하자는 의견이 나왔어요. 이 수업의 승인 정책에서 가장 알맞은 판단은 무엇일까요? 1번, 발주는 승인 뒤 프로세스가 등록하고 에이전트는 업무 원천을 조회해 제안을 제출한다. 2번, 스킬에 승인 뒤에만 발주한다고 적어 두면 쓰기 도구를 연결해도 된다. 3번, 발주한 뒤에 감사 기록이 남으니 쓰기 도구를 연결해도 문제없다. 4번, 발주 수량을 규칙으로 계산하게 하면 사람의 승인은 필요 없다.</a:t>
+              <a:t>실습과 시연에서 남긴 기록으로 돌아왔습니다. 이제 복습과 용어 정리, 퀴즈로 이번 회차를 마무리하겠습니다. 학습 노트에는 완성한 결과와 아직 확인하지 못한 것을 구분해 두겠습니다. 먼저 이번 회차에 배운 흐름을 쿨러 사건으로 복습해 보겠습니다. 표에 쿨러 사건의 다섯 순간을 놓았어요. 답과 근거 칸은 잠깐 가려 둘게요. 순간마다 지식, 에이전트, 프로세스 가운데 어느 영역의 일인지 먼저 골라 보세요. 왜 그 영역인지 근거도 같이 생각해 보시고요. 답을 맞춰 볼까요? 첫째, 핀 오염을 판단할 기준을 등록해 관리하는 일은 지식의 영역입니다. 기준은 매뉴얼과 정책을 검토해 관리하고 개정하는 지식이죠. 둘째, 지금의 냉각 효율을 읽어서 기준에 댄 건 에이전트의 일이에요. 값은 도구로 읽은 현재 값이고, 그걸 기준에 대어 판단하는 게 에이전트의 몫이니까요. 셋째, 쿨러 핀 세척을 설비보전팀장이 승인한다는 건 다시 지식입니다. 승인 역할은 조치에 적힌 지식이었죠. 넷째, 운전원 승인 뒤에 냉각 명령이 열린 건 프로세스의 일이에요. 단계 사이의 순서는 엔진이 지킵니다. 다섯째가 헷갈리기 쉬워요. 내려간 유온을 다시 읽고 작업지시를 등록한 건 프로세스의 일입니다. 둘째 순간처럼 시계열 DB를 읽긴 하는데, 판단의 재료를 읽은 게 아니라 승인 뒤 실행의 결과를 확인한 서비스 작업이거든요. 결국 같은 값을 읽어도, 누가 무엇을 위해 읽었는지에 따라 영역이 갈립니다. 이 HYD 사례에서는 진단 도구를 통한 대조와 승인 뒤 재관측 서비스의 역할이 다릅니다. 다른 시스템에서는 배치가 달라질 수 있어도, 판단 근거를 읽는 일과 실행 결과를 확인하는 일을 구별하는 질문은 유효합니다.</a:t>
             </a:r>
           </a:p>
         </p:txBody>
@@ -4345,7 +4345,7 @@
           <a:lstStyle/>
           <a:p>
             <a:r>
-              <a:t>정답을 확인해 보겠습니다. 고른 답과 근거를 같이 대조해 보세요. 첫 문항의 정답은 3번이에요. 에이전트의 일은 추천안을 제출하는 데서 끝나고, 운전원 승인 단계를 여는 건 엔진입니다. 설비 명령은 승인이 전달된 뒤에만 나가니까, 이 시점에 팬은 아직 그대로예요. 1번은 제출과 실행을 같은 걸로 본 보기예요. 2번은 에이전트가 승인을 기다린다고 본 건데, 에이전트는 다음에 누가 무엇을 하는지 몰라도 됩니다. 4번은 응답 없음을 승인으로 읽은 거예요. 응답이 없으면 지연 알림만 나가고, 처리 건은 계속 기다리죠. 둘째 문항의 정답은 2번입니다. 증거 기준은 매뉴얼에서 뽑아 적재한 지식이고, 진단 도구가 판단할 때마다 그 기준을 읽어요. 이 문제처럼 조회 구조와 기준의 단위가 유지된다면, 개정된 문서를 검토해 기준을 다시 적재하고 판단에 반영됐는지 확인합니다. 1번처럼 스킬에 적으면 기준이 두 곳에 생겨서, 문서가 다시 바뀔 때 어긋나요. 3번의 게이트웨이는 승인과 회복을 가르는 조건이라 원인의 기준과는 관계가 없습니다. 4번은 기준을 사람의 기억에 맡기는 셈이고요. 셋째 문항의 정답은 1번입니다. 업무 시스템에 쓰는 일은 승인 뒤의 프로세스 작업에 두고, 이 사례의 에이전트에는 읽기와 제안 제출에 필요한 권한을 둡니다. 2번은 스킬에 적은 순서를 엔진이 지키는 순서와 헷갈린 보기예요. 지침은 따르는 쪽에 맡겨질 뿐, 보장되지 않죠. 3번의 감사 기록은 일이 벌어진 뒤에 남는 거라서 승인을 대신하지 못하고요, 4번은 계산이 아무리 정확해도 책임질 사람의 결정이 빠집니다. 여기까지가 이번 회차입니다. 그리고 이 회차로 과정 전체를 마칩니다. 앞으로 다른 제품이나 도구를 만나더라도, 이 과정에서 익힌 원리와 역할의 구분은 그대로 쓸 수 있을 거예요. 이번 회차에 정리한 학습 노트, 그리고 직접 만든 명세와 에이전트와 흐름이 각자의 업무에서 다음 일을 시작하는 출발점이 되면 좋겠습니다. 그동안 수고 많으셨습니다. 감사합니다.</a:t>
+              <a:t>흐름을 되짚었으니, 이번엔 용어의 이름과 뜻을 정리하겠습니다. 표에 이번 회차에서 다시 쓰고 새로 세운 용어 일곱 개가 있어요. 스킬은 에이전트가 업무를 수행하는 순서와 요령을 적은 재사용 지침입니다. MCP는 에이전트가 외부 시스템의 도구를 같은 방식으로 부르게 하는 연결 규약이에요. 출력 계약은 결과의 필수 항목과 형식, 의미와 처리 조건에 대한 약속입니다. HITL은 사람의 판단이나 피드백을 과정 안에 넣는 방식입니다. 이 수업에서는 실행 전에 승인하거나 거절하는 자리로 구체화했고요. 프로세스 인스턴스는 프로세스 정의에 따라 실제로 도는 한 건이에요. 우리가 처리 건이라고 불러 온 거죠. 워크아이템은 인스턴스 안에서 수행자에게 맡겨지는 작업 하나, 우리가 단계라고 부른 겁니다. 마지막으로 멀티 에이전트 오케스트레이션은 한 프로세스 안에서 여러 에이전트의 순서와 호출을 조율하는 일입니다.</a:t>
             </a:r>
           </a:p>
         </p:txBody>
@@ -4485,7 +4485,7 @@
           <a:lstStyle/>
           <a:p>
             <a:r>
-              <a:t>41~42장 통합 발화는 41장 발표자 노트를 따른다.</a:t>
+              <a:t>배운 내용을 판단에 쓸 수 있는지, 퀴즈 세 문제로 확인해 보겠습니다. 보기의 말을 기억하는 것보다, 그 판단이 어느 영역의 몫인지 근거를 댈 수 있는지가 중요해요. 문제마다 보기를 읽고 나면 잠깐 멈출 테니, 그때 답을 골라 보세요. 정답과 까닭은 세 문제를 다 푼 뒤에 함께 확인하겠습니다.</a:t>
             </a:r>
           </a:p>
         </p:txBody>
@@ -4555,7 +4555,7 @@
           <a:lstStyle/>
           <a:p>
             <a:r>
-              <a:t>43~44장 통합 발화는 43장 발표자 노트를 따른다.</a:t>
+              <a:t>첫 번째 문제입니다. 상황부터 볼게요. 에이전트가 원인을 쿨러 핀 오염으로 가리고, 팬 최대 운전을 권하는 추천안을 제출했습니다. 운전원은 아직 응답하지 않았어요. 이 시점의 처리 건에 대한 설명으로 옳은 건 무엇일까요? 1번, 추천안이 제출됐으니 팬 속도는 이미 100퍼센트로 올라갔다. 2번, 에이전트가 승인 결과를 기다리며 다음 도구를 부르고 있다. 3번, 에이전트의 일은 끝났고 엔진이 운전원 승인을 열어 기다린다. 4번, 운전원이 응답하지 않으면 추천대로 자동 실행된다.</a:t>
             </a:r>
           </a:p>
         </p:txBody>
@@ -4625,7 +4625,7 @@
           <a:lstStyle/>
           <a:p>
             <a:r>
-              <a:t>45~46장 통합 발화는 45장 발표자 노트를 따른다.</a:t>
+              <a:t>두 번째 문제입니다. 매뉴얼이 개정돼서, 쿨러 핀 오염을 가리는 냉각 효율의 기준값이 달라졌어요. 그런데 에이전트는 여전히 예전 기준으로 판단합니다. 조회 구조와 기준의 단위는 그대로라고 할 때, 새 기준이 판단에 쓰이게 하려면, 먼저 고칠 곳은 어디일까요? 1번, 스킬의 절차에 새 기준값을 문장으로 적어 넣는다. 2번, 개정된 문서를 검토해 증거 기준을 다시 적재한다. 3번, 프로세스 정의의 게이트웨이 조건을 새 기준값으로 바꾼다. 4번, 운전원이 승인할 때마다 새 기준값을 확인하게 한다.</a:t>
             </a:r>
           </a:p>
         </p:txBody>
@@ -4695,7 +4695,7 @@
           <a:lstStyle/>
           <a:p>
             <a:r>
-              <a:t>47~48장 통합 발화는 47장 발표자 노트를 따른다.</a:t>
+              <a:t>마지막 문제입니다. 재고 보충을 빨리 끝내려고, 구매 에이전트에게 발주를 직접 등록하는 쓰기 도구를 연결하자는 의견이 나왔어요. 이 수업의 승인 정책에서 가장 알맞은 판단은 무엇일까요? 1번, 발주는 승인 뒤 프로세스가 등록하고 에이전트는 업무 원천을 조회해 제안을 제출한다. 2번, 스킬에 승인 뒤에만 발주한다고 적어 두면 쓰기 도구를 연결해도 된다. 3번, 발주한 뒤에 감사 기록이 남으니 쓰기 도구를 연결해도 문제없다. 4번, 발주 수량을 규칙으로 계산하게 하면 사람의 승인은 필요 없다.</a:t>
             </a:r>
           </a:p>
         </p:txBody>
@@ -4765,7 +4765,7 @@
           <a:lstStyle/>
           <a:p>
             <a:r>
-              <a:t>56~57장 통합 발화는 56장 발표자 노트를 따른다.</a:t>
+              <a:t>정답을 확인해 보겠습니다. 고른 답과 근거를 같이 대조해 보세요. 첫 문항의 정답은 3번이에요. 에이전트의 일은 추천안을 제출하는 데서 끝나고, 운전원 승인 단계를 여는 건 엔진입니다. 설비 명령은 승인이 전달된 뒤에만 나가니까, 이 시점에 팬은 아직 그대로예요. 1번은 제출과 실행을 같은 걸로 본 보기예요. 2번은 에이전트가 승인을 기다린다고 본 건데, 에이전트는 다음에 누가 무엇을 하는지 몰라도 됩니다. 4번은 응답 없음을 승인으로 읽은 거예요. 응답이 없으면 지연 알림만 나가고, 처리 건은 계속 기다리죠. 둘째 문항의 정답은 2번입니다. 증거 기준은 매뉴얼에서 뽑아 적재한 지식이고, 진단 도구가 판단할 때마다 그 기준을 읽어요. 이 문제처럼 조회 구조와 기준의 단위가 유지된다면, 개정된 문서를 검토해 기준을 다시 적재하고 판단에 반영됐는지 확인합니다. 1번처럼 스킬에 적으면 기준이 두 곳에 생겨서, 문서가 다시 바뀔 때 어긋나요. 3번의 게이트웨이는 승인과 회복을 가르는 조건이라 원인의 기준과는 관계가 없습니다. 4번은 기준을 사람의 기억에 맡기는 셈이고요. 셋째 문항의 정답은 1번입니다. 업무 시스템에 쓰는 일은 승인 뒤의 프로세스 작업에 두고, 이 사례의 에이전트에는 읽기와 제안 제출에 필요한 권한을 둡니다. 2번은 스킬에 적은 순서를 엔진이 지키는 순서와 헷갈린 보기예요. 지침은 따르는 쪽에 맡겨질 뿐, 보장되지 않죠. 3번의 감사 기록은 일이 벌어진 뒤에 남는 거라서 승인을 대신하지 못하고요, 4번은 계산이 아무리 정확해도 책임질 사람의 결정이 빠집니다. 여기까지가 이번 회차입니다. 그리고 이 회차로 과정 전체를 마칩니다. 앞으로 다른 제품이나 도구를 만나더라도, 이 과정에서 익힌 원리와 역할의 구분은 그대로 쓸 수 있을 거예요. 이번 회차에 정리한 학습 노트, 그리고 직접 만든 명세와 에이전트와 흐름이 각자의 업무에서 다음 일을 시작하는 출발점이 되면 좋겠습니다. 그동안 수고 많으셨습니다. 감사합니다.</a:t>
             </a:r>
           </a:p>
         </p:txBody>
@@ -8091,7 +8091,7 @@
                 <a:ea typeface="맑은 고딕"/>
                 <a:cs typeface="맑은 고딕"/>
               </a:rPr>
-              <a:t>온톨로지 · 에이전트 · 프로세스를 내 주제에 적용하고 마무리하기</a:t>
+              <a:t>온톨로지 · 에이전트 · 프로세스를 교대 인수인계에 적용하기</a:t>
             </a:r>
           </a:p>
         </p:txBody>
@@ -8187,7 +8187,7 @@
                 <a:ea typeface="맑은 고딕"/>
                 <a:cs typeface="맑은 고딕"/>
               </a:rPr>
-              <a:t>쿨러 사건 한 건으로 세 영역의 연결을 되짚고, 같은 구조를 내 주제와 제품에 대어 본다</a:t>
+              <a:t>쿨러 사건 한 건으로 세 영역의 연결을 되짚고, 같은 구조를 교대 인수인계와 제품에 대어 본다</a:t>
             </a:r>
           </a:p>
         </p:txBody>
@@ -17397,7 +17397,7 @@
                 <a:ea typeface="맑은 고딕"/>
                 <a:cs typeface="맑은 고딕"/>
               </a:rPr>
-              <a:t>쿨러 사건 한 건에서 지식, 에이전트, 프로세스가 주고받는 것을 설명하고, 같은 구조를 내 주제와 제품에 대어 본다.</a:t>
+              <a:t>쿨러 사건과 교대 인계로 지식·에이전트·프로세스의 연결을 설명한다.</a:t>
             </a:r>
           </a:p>
         </p:txBody>
@@ -17541,7 +17541,7 @@
           <p:nvPr/>
         </p:nvPicPr>
         <p:blipFill>
-          <a:blip r:embed="rIdTheory2_rId3"/>
+          <a:blip r:embed="rId3"/>
           <a:stretch>
             <a:fillRect/>
           </a:stretch>
@@ -17781,7 +17781,7 @@
           <p:nvPr/>
         </p:nvPicPr>
         <p:blipFill>
-          <a:blip r:embed="rIdTheory2_rId4"/>
+          <a:blip r:embed="rId4"/>
           <a:stretch>
             <a:fillRect/>
           </a:stretch>
@@ -18021,7 +18021,7 @@
           <p:nvPr/>
         </p:nvPicPr>
         <p:blipFill>
-          <a:blip r:embed="rIdTheory2_rId5"/>
+          <a:blip r:embed="rId5"/>
           <a:stretch>
             <a:fillRect/>
           </a:stretch>
@@ -18073,7 +18073,7 @@
                 <a:ea typeface="맑은 고딕"/>
                 <a:cs typeface="맑은 고딕"/>
               </a:rPr>
-              <a:t>내 주제에 적용</a:t>
+              <a:t>교대 인수인계</a:t>
             </a:r>
           </a:p>
           <a:p>
@@ -18094,7 +18094,7 @@
                 <a:ea typeface="맑은 고딕"/>
                 <a:cs typeface="맑은 고딕"/>
               </a:rPr>
-              <a:t>• 명세 · 지식 · 에이전트 · 흐름을 만든다</a:t>
+              <a:t>• 제공 문서 · 에이전트 · 흐름을 연결한다</a:t>
             </a:r>
           </a:p>
           <a:p>
@@ -18115,7 +18115,7 @@
                 <a:ea typeface="맑은 고딕"/>
                 <a:cs typeface="맑은 고딕"/>
               </a:rPr>
-              <a:t>• 제안과 보류를 검증한다</a:t>
+              <a:t>• 검토와 보완을 확인한다</a:t>
             </a:r>
           </a:p>
         </p:txBody>
@@ -18261,7 +18261,7 @@
           <p:nvPr/>
         </p:nvPicPr>
         <p:blipFill>
-          <a:blip r:embed="rIdTheory2_rId6"/>
+          <a:blip r:embed="rId6"/>
           <a:stretch>
             <a:fillRect/>
           </a:stretch>
@@ -20612,7 +20612,7 @@
       </p:sp>
       <p:pic>
         <p:nvPicPr>
-          <p:cNvPr id="6" name="삽화:사건선_지식에서판단.svg" descr="illust_7223998276485619802_1792243894.png"/>
+          <p:cNvPr id="6" name="삽화:사건선_지식에서판단.svg" descr="illust_517454378178096295_1793003853.png"/>
           <p:cNvPicPr>
             <a:picLocks noChangeAspect="1"/>
           </p:cNvPicPr>
@@ -24859,7 +24859,7 @@
       </p:sp>
       <p:pic>
         <p:nvPicPr>
-          <p:cNvPr id="6" name="삽화:시스템실행.svg" descr="illust_3666384504035103020_1792243894.png"/>
+          <p:cNvPr id="6" name="삽화:시스템실행.svg" descr="illust_8748433149265919179_1793003853.png"/>
           <p:cNvPicPr>
             <a:picLocks noChangeAspect="1"/>
           </p:cNvPicPr>
@@ -27147,7 +27147,7 @@
                 <a:ea typeface="맑은 고딕"/>
                 <a:cs typeface="맑은 고딕"/>
               </a:rPr>
-              <a:t>업무 명세 · 지식 구조 · 제안 에이전트 · 흐름 실행</a:t>
+              <a:t>교대 인수인계: 문서 · 에이전트 · 흐름 실행</a:t>
             </a:r>
           </a:p>
         </p:txBody>
@@ -29027,7 +29027,7 @@
           <p:nvPr/>
         </p:nvPicPr>
         <p:blipFill>
-          <a:blip r:embed="rIdTheory32_rId3"/>
+          <a:blip r:embed="rId3"/>
           <a:stretch>
             <a:fillRect/>
           </a:stretch>
@@ -29306,7 +29306,7 @@
           <p:nvPr/>
         </p:nvPicPr>
         <p:blipFill>
-          <a:blip r:embed="rIdTheory32_rId4"/>
+          <a:blip r:embed="rId4"/>
           <a:stretch>
             <a:fillRect/>
           </a:stretch>
@@ -29756,7 +29756,7 @@
       </p:sp>
       <p:pic>
         <p:nvPicPr>
-          <p:cNvPr id="6" name="삽화:장치자리.svg" descr="illust_5096401292042459925_1792243894.png"/>
+          <p:cNvPr id="6" name="삽화:장치자리.svg" descr="illust_1837816691667695515_1793003853.png"/>
           <p:cNvPicPr>
             <a:picLocks noChangeAspect="1"/>
           </p:cNvPicPr>
@@ -36686,7 +36686,7 @@
       </p:sp>
       <p:pic>
         <p:nvPicPr>
-          <p:cNvPr id="6" name="삽화:세영역.svg" descr="illust_5154019262014234687_1792243894.png"/>
+          <p:cNvPr id="6" name="삽화:세영역.svg" descr="illust_302325041450131729_1793003853.png"/>
           <p:cNvPicPr>
             <a:picLocks noChangeAspect="1"/>
           </p:cNvPicPr>
@@ -37256,7 +37256,7 @@
                 <a:ea typeface="맑은 고딕"/>
                 <a:cs typeface="맑은 고딕"/>
               </a:rPr>
-              <a:t>실습: 내 주제의 업무 명세 작성</a:t>
+              <a:t>실습: 다음 교대를 위한 인계 업무 정하기</a:t>
             </a:r>
           </a:p>
         </p:txBody>
@@ -37391,7 +37391,7 @@
                 <a:ea typeface="맑은 고딕"/>
                 <a:cs typeface="맑은 고딕"/>
               </a:rPr>
-              <a:t>업무 명세 한 장에 적는 것</a:t>
+              <a:t>인계안에 담을 입력과 확인</a:t>
             </a:r>
           </a:p>
         </p:txBody>
@@ -37430,7 +37430,7 @@
                 <a:ea typeface="맑은 고딕"/>
                 <a:cs typeface="맑은 고딕"/>
               </a:rPr>
-              <a:t>친숙한 작은 업무 하나를 골라 입력과 정보원, 에이전트 산출물, 사람 확인, 완료 조건을 적은 업무 명세 한 장을 만든다.</a:t>
+              <a:t>대상과 작업 메모를 실제 자료와 대조해 다음 교대가 확인할 일을 남긴다.</a:t>
             </a:r>
           </a:p>
         </p:txBody>
@@ -37511,8 +37511,8 @@
         </p:nvSpPr>
         <p:spPr>
           <a:xfrm>
-            <a:off x="548640" y="2313241"/>
-            <a:ext cx="2567863" cy="3356229"/>
+            <a:off x="548640" y="2510790"/>
+            <a:ext cx="2567863" cy="2961132"/>
           </a:xfrm>
           <a:prstGeom prst="roundRect">
             <a:avLst>
@@ -37544,7 +37544,7 @@
         </p:nvSpPr>
         <p:spPr>
           <a:xfrm>
-            <a:off x="777240" y="2514409"/>
+            <a:off x="777240" y="2711958"/>
             <a:ext cx="731520" cy="731520"/>
           </a:xfrm>
           <a:prstGeom prst="ellipse">
@@ -37574,14 +37574,14 @@
           <p:nvPr/>
         </p:nvPicPr>
         <p:blipFill>
-          <a:blip r:embed="rId2"/>
+          <a:blip r:embed="rId3"/>
           <a:stretch>
             <a:fillRect/>
           </a:stretch>
         </p:blipFill>
         <p:spPr>
           <a:xfrm>
-            <a:off x="930859" y="2668028"/>
+            <a:off x="930859" y="2865577"/>
             <a:ext cx="424281" cy="424281"/>
           </a:xfrm>
           <a:prstGeom prst="rect">
@@ -37597,8 +37597,8 @@
         </p:nvSpPr>
         <p:spPr>
           <a:xfrm>
-            <a:off x="713232" y="3337369"/>
-            <a:ext cx="2238679" cy="1829181"/>
+            <a:off x="713232" y="3534918"/>
+            <a:ext cx="2238679" cy="1434084"/>
           </a:xfrm>
           <a:prstGeom prst="rect">
             <a:avLst/>
@@ -37618,7 +37618,7 @@
               </a:spcAft>
             </a:pPr>
             <a:r>
-              <a:rPr sz="2150" b="1">
+              <a:rPr sz="1950" b="1">
                 <a:solidFill>
                   <a:srgbClr val="13294B"/>
                 </a:solidFill>
@@ -37626,11 +37626,11 @@
                 <a:ea typeface="맑은 고딕"/>
                 <a:cs typeface="맑은 고딕"/>
               </a:rPr>
-              <a:t>입력과 정보원</a:t>
-            </a:r>
-          </a:p>
-          <a:p>
-            <a:pPr algn="l" eaLnBrk="0" marL="200025" indent="-200025">
+              <a:t>입력</a:t>
+            </a:r>
+          </a:p>
+          <a:p>
+            <a:pPr algn="l" eaLnBrk="0" marL="177165" indent="-177165">
               <a:lnSpc>
                 <a:spcPct val="110000"/>
               </a:lnSpc>
@@ -37639,7 +37639,7 @@
               </a:spcAft>
             </a:pPr>
             <a:r>
-              <a:rPr sz="1750" b="0">
+              <a:rPr sz="1550" b="0">
                 <a:solidFill>
                   <a:srgbClr val="1F2A3A"/>
                 </a:solidFill>
@@ -37647,11 +37647,11 @@
                 <a:ea typeface="맑은 고딕"/>
                 <a:cs typeface="맑은 고딕"/>
               </a:rPr>
-              <a:t>• 무엇을 받아 시작하는가</a:t>
-            </a:r>
-          </a:p>
-          <a:p>
-            <a:pPr algn="l" eaLnBrk="0" marL="200025" indent="-200025">
+              <a:t>• 설비 · 교대 · 기준 시각</a:t>
+            </a:r>
+          </a:p>
+          <a:p>
+            <a:pPr algn="l" eaLnBrk="0" marL="177165" indent="-177165">
               <a:lnSpc>
                 <a:spcPct val="110000"/>
               </a:lnSpc>
@@ -37660,7 +37660,7 @@
               </a:spcAft>
             </a:pPr>
             <a:r>
-              <a:rPr sz="1750" b="0">
+              <a:rPr sz="1550" b="0">
                 <a:solidFill>
                   <a:srgbClr val="1F2A3A"/>
                 </a:solidFill>
@@ -37668,7 +37668,7 @@
                 <a:ea typeface="맑은 고딕"/>
                 <a:cs typeface="맑은 고딕"/>
               </a:rPr>
-              <a:t>• 어디에서 읽을 수 있는가</a:t>
+              <a:t>• 전달받은 작업 메모</a:t>
             </a:r>
           </a:p>
         </p:txBody>
@@ -37681,7 +37681,7 @@
         </p:nvSpPr>
         <p:spPr>
           <a:xfrm>
-            <a:off x="777240" y="5239702"/>
+            <a:off x="777240" y="5042154"/>
             <a:ext cx="822960" cy="292608"/>
           </a:xfrm>
           <a:prstGeom prst="roundRect">
@@ -37712,7 +37712,7 @@
         </p:nvSpPr>
         <p:spPr>
           <a:xfrm>
-            <a:off x="777240" y="5239702"/>
+            <a:off x="777240" y="5042154"/>
             <a:ext cx="822960" cy="292608"/>
           </a:xfrm>
           <a:prstGeom prst="rect">
@@ -37751,8 +37751,8 @@
         </p:nvSpPr>
         <p:spPr>
           <a:xfrm>
-            <a:off x="3390823" y="2313241"/>
-            <a:ext cx="2567863" cy="3356229"/>
+            <a:off x="3390823" y="2510790"/>
+            <a:ext cx="2567863" cy="2961132"/>
           </a:xfrm>
           <a:prstGeom prst="roundRect">
             <a:avLst>
@@ -37784,7 +37784,7 @@
         </p:nvSpPr>
         <p:spPr>
           <a:xfrm>
-            <a:off x="3619423" y="2514409"/>
+            <a:off x="3619423" y="2711958"/>
             <a:ext cx="731520" cy="731520"/>
           </a:xfrm>
           <a:prstGeom prst="ellipse">
@@ -37814,14 +37814,14 @@
           <p:nvPr/>
         </p:nvPicPr>
         <p:blipFill>
-          <a:blip r:embed="rId3"/>
+          <a:blip r:embed="rId4"/>
           <a:stretch>
             <a:fillRect/>
           </a:stretch>
         </p:blipFill>
         <p:spPr>
           <a:xfrm>
-            <a:off x="3773043" y="2668028"/>
+            <a:off x="3773043" y="2865577"/>
             <a:ext cx="424281" cy="424281"/>
           </a:xfrm>
           <a:prstGeom prst="rect">
@@ -37837,8 +37837,8 @@
         </p:nvSpPr>
         <p:spPr>
           <a:xfrm>
-            <a:off x="3555415" y="3337369"/>
-            <a:ext cx="2238679" cy="1829181"/>
+            <a:off x="3555415" y="3534918"/>
+            <a:ext cx="2238679" cy="1434084"/>
           </a:xfrm>
           <a:prstGeom prst="rect">
             <a:avLst/>
@@ -37858,7 +37858,7 @@
               </a:spcAft>
             </a:pPr>
             <a:r>
-              <a:rPr sz="2150" b="1">
+              <a:rPr sz="1950" b="1">
                 <a:solidFill>
                   <a:srgbClr val="13294B"/>
                 </a:solidFill>
@@ -37866,11 +37866,11 @@
                 <a:ea typeface="맑은 고딕"/>
                 <a:cs typeface="맑은 고딕"/>
               </a:rPr>
-              <a:t>에이전트 산출물</a:t>
-            </a:r>
-          </a:p>
-          <a:p>
-            <a:pPr algn="l" eaLnBrk="0" marL="200025" indent="-200025">
+              <a:t>정보원</a:t>
+            </a:r>
+          </a:p>
+          <a:p>
+            <a:pPr algn="l" eaLnBrk="0" marL="177165" indent="-177165">
               <a:lnSpc>
                 <a:spcPct val="110000"/>
               </a:lnSpc>
@@ -37879,7 +37879,7 @@
               </a:spcAft>
             </a:pPr>
             <a:r>
-              <a:rPr sz="1750" b="0">
+              <a:rPr sz="1550" b="0">
                 <a:solidFill>
                   <a:srgbClr val="1F2A3A"/>
                 </a:solidFill>
@@ -37887,11 +37887,11 @@
                 <a:ea typeface="맑은 고딕"/>
                 <a:cs typeface="맑은 고딕"/>
               </a:rPr>
-              <a:t>• 읽기, 분류, 추천 가운데</a:t>
-            </a:r>
-          </a:p>
-          <a:p>
-            <a:pPr algn="l" eaLnBrk="0" marL="200025" indent="-200025">
+              <a:t>• 점검 문서와 설비 이력</a:t>
+            </a:r>
+          </a:p>
+          <a:p>
+            <a:pPr algn="l" eaLnBrk="0" marL="177165" indent="-177165">
               <a:lnSpc>
                 <a:spcPct val="110000"/>
               </a:lnSpc>
@@ -37900,7 +37900,7 @@
               </a:spcAft>
             </a:pPr>
             <a:r>
-              <a:rPr sz="1750" b="0">
+              <a:rPr sz="1550" b="0">
                 <a:solidFill>
                   <a:srgbClr val="1F2A3A"/>
                 </a:solidFill>
@@ -37908,7 +37908,7 @@
                 <a:ea typeface="맑은 고딕"/>
                 <a:cs typeface="맑은 고딕"/>
               </a:rPr>
-              <a:t>• 무엇을 내는가</a:t>
+              <a:t>• 정비 · 재고 자료</a:t>
             </a:r>
           </a:p>
         </p:txBody>
@@ -37921,7 +37921,7 @@
         </p:nvSpPr>
         <p:spPr>
           <a:xfrm>
-            <a:off x="3619423" y="5239702"/>
+            <a:off x="3619423" y="5042154"/>
             <a:ext cx="822960" cy="292608"/>
           </a:xfrm>
           <a:prstGeom prst="roundRect">
@@ -37952,7 +37952,7 @@
         </p:nvSpPr>
         <p:spPr>
           <a:xfrm>
-            <a:off x="3619423" y="5239702"/>
+            <a:off x="3619423" y="5042154"/>
             <a:ext cx="822960" cy="292608"/>
           </a:xfrm>
           <a:prstGeom prst="rect">
@@ -37978,7 +37978,7 @@
                 <a:ea typeface="맑은 고딕"/>
                 <a:cs typeface="맑은 고딕"/>
               </a:rPr>
-              <a:t>산출물</a:t>
+              <a:t>정보원</a:t>
             </a:r>
           </a:p>
         </p:txBody>
@@ -37991,8 +37991,8 @@
         </p:nvSpPr>
         <p:spPr>
           <a:xfrm>
-            <a:off x="6233007" y="2313241"/>
-            <a:ext cx="2567863" cy="3356229"/>
+            <a:off x="6233007" y="2510790"/>
+            <a:ext cx="2567863" cy="2961132"/>
           </a:xfrm>
           <a:prstGeom prst="roundRect">
             <a:avLst>
@@ -38024,7 +38024,7 @@
         </p:nvSpPr>
         <p:spPr>
           <a:xfrm>
-            <a:off x="6461607" y="2514409"/>
+            <a:off x="6461607" y="2711958"/>
             <a:ext cx="731520" cy="731520"/>
           </a:xfrm>
           <a:prstGeom prst="ellipse">
@@ -38054,14 +38054,14 @@
           <p:nvPr/>
         </p:nvPicPr>
         <p:blipFill>
-          <a:blip r:embed="rId4"/>
+          <a:blip r:embed="rId5"/>
           <a:stretch>
             <a:fillRect/>
           </a:stretch>
         </p:blipFill>
         <p:spPr>
           <a:xfrm>
-            <a:off x="6615226" y="2668028"/>
+            <a:off x="6615226" y="2865577"/>
             <a:ext cx="424281" cy="424281"/>
           </a:xfrm>
           <a:prstGeom prst="rect">
@@ -38077,8 +38077,8 @@
         </p:nvSpPr>
         <p:spPr>
           <a:xfrm>
-            <a:off x="6397599" y="3337369"/>
-            <a:ext cx="2238679" cy="1829181"/>
+            <a:off x="6397599" y="3534918"/>
+            <a:ext cx="2238679" cy="1434084"/>
           </a:xfrm>
           <a:prstGeom prst="rect">
             <a:avLst/>
@@ -38098,7 +38098,7 @@
               </a:spcAft>
             </a:pPr>
             <a:r>
-              <a:rPr sz="2150" b="1">
+              <a:rPr sz="1950" b="1">
                 <a:solidFill>
                   <a:srgbClr val="13294B"/>
                 </a:solidFill>
@@ -38110,7 +38110,7 @@
             </a:r>
           </a:p>
           <a:p>
-            <a:pPr algn="l" eaLnBrk="0" marL="200025" indent="-200025">
+            <a:pPr algn="l" eaLnBrk="0" marL="177165" indent="-177165">
               <a:lnSpc>
                 <a:spcPct val="110000"/>
               </a:lnSpc>
@@ -38119,7 +38119,7 @@
               </a:spcAft>
             </a:pPr>
             <a:r>
-              <a:rPr sz="1750" b="0">
+              <a:rPr sz="1550" b="0">
                 <a:solidFill>
                   <a:srgbClr val="1F2A3A"/>
                 </a:solidFill>
@@ -38127,11 +38127,11 @@
                 <a:ea typeface="맑은 고딕"/>
                 <a:cs typeface="맑은 고딕"/>
               </a:rPr>
-              <a:t>• 어느 결과를</a:t>
-            </a:r>
-          </a:p>
-          <a:p>
-            <a:pPr algn="l" eaLnBrk="0" marL="200025" indent="-200025">
+              <a:t>• 인계자가 검토</a:t>
+            </a:r>
+          </a:p>
+          <a:p>
+            <a:pPr algn="l" eaLnBrk="0" marL="177165" indent="-177165">
               <a:lnSpc>
                 <a:spcPct val="110000"/>
               </a:lnSpc>
@@ -38140,7 +38140,7 @@
               </a:spcAft>
             </a:pPr>
             <a:r>
-              <a:rPr sz="1750" b="0">
+              <a:rPr sz="1550" b="0">
                 <a:solidFill>
                   <a:srgbClr val="1F2A3A"/>
                 </a:solidFill>
@@ -38148,7 +38148,7 @@
                 <a:ea typeface="맑은 고딕"/>
                 <a:cs typeface="맑은 고딕"/>
               </a:rPr>
-              <a:t>• 누가 확인하는가</a:t>
+              <a:t>• 인수자가 확인</a:t>
             </a:r>
           </a:p>
         </p:txBody>
@@ -38161,7 +38161,7 @@
         </p:nvSpPr>
         <p:spPr>
           <a:xfrm>
-            <a:off x="6461607" y="5239702"/>
+            <a:off x="6461607" y="5042154"/>
             <a:ext cx="822960" cy="292608"/>
           </a:xfrm>
           <a:prstGeom prst="roundRect">
@@ -38192,7 +38192,7 @@
         </p:nvSpPr>
         <p:spPr>
           <a:xfrm>
-            <a:off x="6461607" y="5239702"/>
+            <a:off x="6461607" y="5042154"/>
             <a:ext cx="822960" cy="292608"/>
           </a:xfrm>
           <a:prstGeom prst="rect">
@@ -38231,8 +38231,8 @@
         </p:nvSpPr>
         <p:spPr>
           <a:xfrm>
-            <a:off x="9075191" y="2313241"/>
-            <a:ext cx="2567863" cy="3356229"/>
+            <a:off x="9075191" y="2510790"/>
+            <a:ext cx="2567863" cy="2961132"/>
           </a:xfrm>
           <a:prstGeom prst="roundRect">
             <a:avLst>
@@ -38264,7 +38264,7 @@
         </p:nvSpPr>
         <p:spPr>
           <a:xfrm>
-            <a:off x="9303791" y="2514409"/>
+            <a:off x="9303791" y="2711958"/>
             <a:ext cx="731520" cy="731520"/>
           </a:xfrm>
           <a:prstGeom prst="ellipse">
@@ -38294,14 +38294,14 @@
           <p:nvPr/>
         </p:nvPicPr>
         <p:blipFill>
-          <a:blip r:embed="rId5"/>
+          <a:blip r:embed="rId6"/>
           <a:stretch>
             <a:fillRect/>
           </a:stretch>
         </p:blipFill>
         <p:spPr>
           <a:xfrm>
-            <a:off x="9457410" y="2668028"/>
+            <a:off x="9457410" y="2865577"/>
             <a:ext cx="424281" cy="424281"/>
           </a:xfrm>
           <a:prstGeom prst="rect">
@@ -38317,8 +38317,8 @@
         </p:nvSpPr>
         <p:spPr>
           <a:xfrm>
-            <a:off x="9239783" y="3337369"/>
-            <a:ext cx="2238679" cy="1829181"/>
+            <a:off x="9239783" y="3534918"/>
+            <a:ext cx="2238679" cy="1434084"/>
           </a:xfrm>
           <a:prstGeom prst="rect">
             <a:avLst/>
@@ -38338,7 +38338,7 @@
               </a:spcAft>
             </a:pPr>
             <a:r>
-              <a:rPr sz="2150" b="1">
+              <a:rPr sz="1950" b="1">
                 <a:solidFill>
                   <a:srgbClr val="13294B"/>
                 </a:solidFill>
@@ -38350,7 +38350,7 @@
             </a:r>
           </a:p>
           <a:p>
-            <a:pPr algn="l" eaLnBrk="0" marL="200025" indent="-200025">
+            <a:pPr algn="l" eaLnBrk="0" marL="177165" indent="-177165">
               <a:lnSpc>
                 <a:spcPct val="110000"/>
               </a:lnSpc>
@@ -38359,7 +38359,7 @@
               </a:spcAft>
             </a:pPr>
             <a:r>
-              <a:rPr sz="1750" b="0">
+              <a:rPr sz="1550" b="0">
                 <a:solidFill>
                   <a:srgbClr val="1F2A3A"/>
                 </a:solidFill>
@@ -38367,11 +38367,11 @@
                 <a:ea typeface="맑은 고딕"/>
                 <a:cs typeface="맑은 고딕"/>
               </a:rPr>
-              <a:t>• 무엇이 되면 끝났다고 보는가</a:t>
-            </a:r>
-          </a:p>
-          <a:p>
-            <a:pPr algn="l" eaLnBrk="0" marL="200025" indent="-200025">
+              <a:t>• 근거와 미확인 항목</a:t>
+            </a:r>
+          </a:p>
+          <a:p>
+            <a:pPr algn="l" eaLnBrk="0" marL="177165" indent="-177165">
               <a:lnSpc>
                 <a:spcPct val="110000"/>
               </a:lnSpc>
@@ -38380,7 +38380,7 @@
               </a:spcAft>
             </a:pPr>
             <a:r>
-              <a:rPr sz="1750" b="0">
+              <a:rPr sz="1550" b="0">
                 <a:solidFill>
                   <a:srgbClr val="1F2A3A"/>
                 </a:solidFill>
@@ -38388,7 +38388,7 @@
                 <a:ea typeface="맑은 고딕"/>
                 <a:cs typeface="맑은 고딕"/>
               </a:rPr>
-              <a:t>• 하지 못한 일은 어떻게 남기는가</a:t>
+              <a:t>• 다음 확인할 일 기록</a:t>
             </a:r>
           </a:p>
         </p:txBody>
@@ -38401,7 +38401,7 @@
         </p:nvSpPr>
         <p:spPr>
           <a:xfrm>
-            <a:off x="9303791" y="5239702"/>
+            <a:off x="9303791" y="5042154"/>
             <a:ext cx="1021080" cy="292608"/>
           </a:xfrm>
           <a:prstGeom prst="roundRect">
@@ -38432,7 +38432,7 @@
         </p:nvSpPr>
         <p:spPr>
           <a:xfrm>
-            <a:off x="9303791" y="5239702"/>
+            <a:off x="9303791" y="5042154"/>
             <a:ext cx="1021080" cy="292608"/>
           </a:xfrm>
           <a:prstGeom prst="rect">
@@ -38591,7 +38591,7 @@
                 <a:ea typeface="맑은 고딕"/>
                 <a:cs typeface="맑은 고딕"/>
               </a:rPr>
-              <a:t>실습: 내 문서로 만드는 작은 지식 구조</a:t>
+              <a:t>실습: 제공 점검 문서를 지식으로 연결하기</a:t>
             </a:r>
           </a:p>
         </p:txBody>
@@ -38726,7 +38726,7 @@
                 <a:ea typeface="맑은 고딕"/>
                 <a:cs typeface="맑은 고딕"/>
               </a:rPr>
-              <a:t>스키마와 샘플 인스턴스, 그리고 질문의 조회</a:t>
+              <a:t>문서의 절차를 원문과 대조해 추가한다</a:t>
             </a:r>
           </a:p>
         </p:txBody>
@@ -38765,7 +38765,7 @@
                 <a:ea typeface="맑은 고딕"/>
                 <a:cs typeface="맑은 고딕"/>
               </a:rPr>
-              <a:t>내 문서에서 뽑은 스키마와 샘플 인스턴스는 출처와 식별자를 붙여, 수업용으로 따로 둔 이름 공간에서 조회로 확인한다.</a:t>
+              <a:t>제공된 보충 문서에서 추출한 절차와 출처를 검토한 뒤 기존 지식에 추가한다.</a:t>
             </a:r>
           </a:p>
         </p:txBody>
@@ -38846,8 +38846,8 @@
         </p:nvSpPr>
         <p:spPr>
           <a:xfrm>
-            <a:off x="548640" y="2448814"/>
-            <a:ext cx="2567863" cy="3085084"/>
+            <a:off x="548640" y="2371343"/>
+            <a:ext cx="2567863" cy="3240024"/>
           </a:xfrm>
           <a:prstGeom prst="roundRect">
             <a:avLst>
@@ -38879,7 +38879,7 @@
         </p:nvSpPr>
         <p:spPr>
           <a:xfrm>
-            <a:off x="777240" y="2649982"/>
+            <a:off x="777240" y="2572511"/>
             <a:ext cx="731520" cy="731520"/>
           </a:xfrm>
           <a:prstGeom prst="ellipse">
@@ -38909,14 +38909,14 @@
           <p:nvPr/>
         </p:nvPicPr>
         <p:blipFill>
-          <a:blip r:embed="rId2"/>
+          <a:blip r:embed="rId3"/>
           <a:stretch>
             <a:fillRect/>
           </a:stretch>
         </p:blipFill>
         <p:spPr>
           <a:xfrm>
-            <a:off x="930859" y="2803601"/>
+            <a:off x="930859" y="2726131"/>
             <a:ext cx="424281" cy="424281"/>
           </a:xfrm>
           <a:prstGeom prst="rect">
@@ -38932,8 +38932,8 @@
         </p:nvSpPr>
         <p:spPr>
           <a:xfrm>
-            <a:off x="713232" y="3472942"/>
-            <a:ext cx="2238679" cy="1558036"/>
+            <a:off x="713232" y="3395471"/>
+            <a:ext cx="2238679" cy="1712976"/>
           </a:xfrm>
           <a:prstGeom prst="rect">
             <a:avLst/>
@@ -38953,7 +38953,7 @@
               </a:spcAft>
             </a:pPr>
             <a:r>
-              <a:rPr sz="1800" b="1">
+              <a:rPr sz="2000" b="1">
                 <a:solidFill>
                   <a:srgbClr val="13294B"/>
                 </a:solidFill>
@@ -38965,7 +38965,7 @@
             </a:r>
           </a:p>
           <a:p>
-            <a:pPr algn="l" eaLnBrk="0" marL="160020" indent="-160020">
+            <a:pPr algn="l" eaLnBrk="0" marL="182880" indent="-182880">
               <a:lnSpc>
                 <a:spcPct val="110000"/>
               </a:lnSpc>
@@ -38974,7 +38974,7 @@
               </a:spcAft>
             </a:pPr>
             <a:r>
-              <a:rPr sz="1400" b="0">
+              <a:rPr sz="1600" b="0">
                 <a:solidFill>
                   <a:srgbClr val="1F2A3A"/>
                 </a:solidFill>
@@ -38982,11 +38982,11 @@
                 <a:ea typeface="맑은 고딕"/>
                 <a:cs typeface="맑은 고딕"/>
               </a:rPr>
-              <a:t>• 제공된 문서나 공개할 수 있는 내 자료</a:t>
-            </a:r>
-          </a:p>
-          <a:p>
-            <a:pPr algn="l" eaLnBrk="0" marL="160020" indent="-160020">
+              <a:t>• 제공된 HI-01</a:t>
+            </a:r>
+          </a:p>
+          <a:p>
+            <a:pPr algn="l" eaLnBrk="0" marL="182880" indent="-182880">
               <a:lnSpc>
                 <a:spcPct val="110000"/>
               </a:lnSpc>
@@ -38995,7 +38995,7 @@
               </a:spcAft>
             </a:pPr>
             <a:r>
-              <a:rPr sz="1400" b="0">
+              <a:rPr sz="1600" b="0">
                 <a:solidFill>
                   <a:srgbClr val="1F2A3A"/>
                 </a:solidFill>
@@ -39003,7 +39003,7 @@
                 <a:ea typeface="맑은 고딕"/>
                 <a:cs typeface="맑은 고딕"/>
               </a:rPr>
-              <a:t>• 문서마다 답할 질문</a:t>
+              <a:t>• 점검 보충 문서</a:t>
             </a:r>
           </a:p>
         </p:txBody>
@@ -39016,7 +39016,7 @@
         </p:nvSpPr>
         <p:spPr>
           <a:xfrm>
-            <a:off x="777240" y="5104130"/>
+            <a:off x="777240" y="5181600"/>
             <a:ext cx="822960" cy="292608"/>
           </a:xfrm>
           <a:prstGeom prst="roundRect">
@@ -39047,7 +39047,7 @@
         </p:nvSpPr>
         <p:spPr>
           <a:xfrm>
-            <a:off x="777240" y="5104130"/>
+            <a:off x="777240" y="5181600"/>
             <a:ext cx="822960" cy="292608"/>
           </a:xfrm>
           <a:prstGeom prst="rect">
@@ -39086,8 +39086,8 @@
         </p:nvSpPr>
         <p:spPr>
           <a:xfrm>
-            <a:off x="3390823" y="2448814"/>
-            <a:ext cx="2567863" cy="3085084"/>
+            <a:off x="3390823" y="2371343"/>
+            <a:ext cx="2567863" cy="3240024"/>
           </a:xfrm>
           <a:prstGeom prst="roundRect">
             <a:avLst>
@@ -39119,7 +39119,7 @@
         </p:nvSpPr>
         <p:spPr>
           <a:xfrm>
-            <a:off x="3619423" y="2649982"/>
+            <a:off x="3619423" y="2572511"/>
             <a:ext cx="731520" cy="731520"/>
           </a:xfrm>
           <a:prstGeom prst="ellipse">
@@ -39149,14 +39149,14 @@
           <p:nvPr/>
         </p:nvPicPr>
         <p:blipFill>
-          <a:blip r:embed="rId3"/>
+          <a:blip r:embed="rId4"/>
           <a:stretch>
             <a:fillRect/>
           </a:stretch>
         </p:blipFill>
         <p:spPr>
           <a:xfrm>
-            <a:off x="3773043" y="2803601"/>
+            <a:off x="3773043" y="2726131"/>
             <a:ext cx="424281" cy="424281"/>
           </a:xfrm>
           <a:prstGeom prst="rect">
@@ -39172,8 +39172,8 @@
         </p:nvSpPr>
         <p:spPr>
           <a:xfrm>
-            <a:off x="3555415" y="3472942"/>
-            <a:ext cx="2238679" cy="1558036"/>
+            <a:off x="3555415" y="3395471"/>
+            <a:ext cx="2238679" cy="1712976"/>
           </a:xfrm>
           <a:prstGeom prst="rect">
             <a:avLst/>
@@ -39193,7 +39193,7 @@
               </a:spcAft>
             </a:pPr>
             <a:r>
-              <a:rPr sz="1800" b="1">
+              <a:rPr sz="2000" b="1">
                 <a:solidFill>
                   <a:srgbClr val="13294B"/>
                 </a:solidFill>
@@ -39205,7 +39205,7 @@
             </a:r>
           </a:p>
           <a:p>
-            <a:pPr algn="l" eaLnBrk="0" marL="148590" indent="-148590">
+            <a:pPr algn="l" eaLnBrk="0" marL="182880" indent="-182880">
               <a:lnSpc>
                 <a:spcPct val="110000"/>
               </a:lnSpc>
@@ -39214,7 +39214,7 @@
               </a:spcAft>
             </a:pPr>
             <a:r>
-              <a:rPr sz="1300" b="0">
+              <a:rPr sz="1600" b="0">
                 <a:solidFill>
                   <a:srgbClr val="1F2A3A"/>
                 </a:solidFill>
@@ -39222,11 +39222,11 @@
                 <a:ea typeface="맑은 고딕"/>
                 <a:cs typeface="맑은 고딕"/>
               </a:rPr>
-              <a:t>• 질문에 필요한 핵심 개념</a:t>
-            </a:r>
-          </a:p>
-          <a:p>
-            <a:pPr algn="l" eaLnBrk="0" marL="148590" indent="-148590">
+              <a:t>• 설비 · 작업지시 · 부품</a:t>
+            </a:r>
+          </a:p>
+          <a:p>
+            <a:pPr algn="l" eaLnBrk="0" marL="182880" indent="-182880">
               <a:lnSpc>
                 <a:spcPct val="110000"/>
               </a:lnSpc>
@@ -39235,7 +39235,7 @@
               </a:spcAft>
             </a:pPr>
             <a:r>
-              <a:rPr sz="1300" b="0">
+              <a:rPr sz="1600" b="0">
                 <a:solidFill>
                   <a:srgbClr val="1F2A3A"/>
                 </a:solidFill>
@@ -39243,7 +39243,7 @@
                 <a:ea typeface="맑은 고딕"/>
                 <a:cs typeface="맑은 고딕"/>
               </a:rPr>
-              <a:t>• 그 개념의 속성과 관계</a:t>
+              <a:t>• 작업 메모 확인 절차</a:t>
             </a:r>
           </a:p>
         </p:txBody>
@@ -39256,7 +39256,7 @@
         </p:nvSpPr>
         <p:spPr>
           <a:xfrm>
-            <a:off x="3619423" y="5104130"/>
+            <a:off x="3619423" y="5181600"/>
             <a:ext cx="822960" cy="292608"/>
           </a:xfrm>
           <a:prstGeom prst="roundRect">
@@ -39287,7 +39287,7 @@
         </p:nvSpPr>
         <p:spPr>
           <a:xfrm>
-            <a:off x="3619423" y="5104130"/>
+            <a:off x="3619423" y="5181600"/>
             <a:ext cx="822960" cy="292608"/>
           </a:xfrm>
           <a:prstGeom prst="rect">
@@ -39326,8 +39326,8 @@
         </p:nvSpPr>
         <p:spPr>
           <a:xfrm>
-            <a:off x="6233007" y="2448814"/>
-            <a:ext cx="2567863" cy="3085084"/>
+            <a:off x="6233007" y="2371343"/>
+            <a:ext cx="2567863" cy="3240024"/>
           </a:xfrm>
           <a:prstGeom prst="roundRect">
             <a:avLst>
@@ -39359,7 +39359,7 @@
         </p:nvSpPr>
         <p:spPr>
           <a:xfrm>
-            <a:off x="6461607" y="2649982"/>
+            <a:off x="6461607" y="2572511"/>
             <a:ext cx="731520" cy="731520"/>
           </a:xfrm>
           <a:prstGeom prst="ellipse">
@@ -39389,14 +39389,14 @@
           <p:nvPr/>
         </p:nvPicPr>
         <p:blipFill>
-          <a:blip r:embed="rId4"/>
+          <a:blip r:embed="rId5"/>
           <a:stretch>
             <a:fillRect/>
           </a:stretch>
         </p:blipFill>
         <p:spPr>
           <a:xfrm>
-            <a:off x="6615226" y="2803601"/>
+            <a:off x="6615226" y="2726131"/>
             <a:ext cx="424281" cy="424281"/>
           </a:xfrm>
           <a:prstGeom prst="rect">
@@ -39412,8 +39412,8 @@
         </p:nvSpPr>
         <p:spPr>
           <a:xfrm>
-            <a:off x="6397599" y="3472942"/>
-            <a:ext cx="2238679" cy="1558036"/>
+            <a:off x="6397599" y="3395471"/>
+            <a:ext cx="2238679" cy="1712976"/>
           </a:xfrm>
           <a:prstGeom prst="rect">
             <a:avLst/>
@@ -39433,7 +39433,7 @@
               </a:spcAft>
             </a:pPr>
             <a:r>
-              <a:rPr sz="1800" b="1">
+              <a:rPr sz="2000" b="1">
                 <a:solidFill>
                   <a:srgbClr val="13294B"/>
                 </a:solidFill>
@@ -39441,11 +39441,11 @@
                 <a:ea typeface="맑은 고딕"/>
                 <a:cs typeface="맑은 고딕"/>
               </a:rPr>
-              <a:t>산출물</a:t>
-            </a:r>
-          </a:p>
-          <a:p>
-            <a:pPr algn="l" eaLnBrk="0" marL="160020" indent="-160020">
+              <a:t>검토</a:t>
+            </a:r>
+          </a:p>
+          <a:p>
+            <a:pPr algn="l" eaLnBrk="0" marL="182880" indent="-182880">
               <a:lnSpc>
                 <a:spcPct val="110000"/>
               </a:lnSpc>
@@ -39454,7 +39454,7 @@
               </a:spcAft>
             </a:pPr>
             <a:r>
-              <a:rPr sz="1400" b="0">
+              <a:rPr sz="1600" b="0">
                 <a:solidFill>
                   <a:srgbClr val="1F2A3A"/>
                 </a:solidFill>
@@ -39462,11 +39462,11 @@
                 <a:ea typeface="맑은 고딕"/>
                 <a:cs typeface="맑은 고딕"/>
               </a:rPr>
-              <a:t>• 스키마</a:t>
-            </a:r>
-          </a:p>
-          <a:p>
-            <a:pPr algn="l" eaLnBrk="0" marL="160020" indent="-160020">
+              <a:t>• 추출된 내용과</a:t>
+            </a:r>
+          </a:p>
+          <a:p>
+            <a:pPr algn="l" eaLnBrk="0" marL="182880" indent="-182880">
               <a:lnSpc>
                 <a:spcPct val="110000"/>
               </a:lnSpc>
@@ -39475,7 +39475,7 @@
               </a:spcAft>
             </a:pPr>
             <a:r>
-              <a:rPr sz="1400" b="0">
+              <a:rPr sz="1600" b="0">
                 <a:solidFill>
                   <a:srgbClr val="1F2A3A"/>
                 </a:solidFill>
@@ -39483,28 +39483,7 @@
                 <a:ea typeface="맑은 고딕"/>
                 <a:cs typeface="맑은 고딕"/>
               </a:rPr>
-              <a:t>• 식별자와 출처를 붙인 샘플 인스턴스</a:t>
-            </a:r>
-          </a:p>
-          <a:p>
-            <a:pPr algn="l" eaLnBrk="0" marL="160020" indent="-160020">
-              <a:lnSpc>
-                <a:spcPct val="110000"/>
-              </a:lnSpc>
-              <a:spcAft>
-                <a:spcPts val="400"/>
-              </a:spcAft>
-            </a:pPr>
-            <a:r>
-              <a:rPr sz="1400" b="0">
-                <a:solidFill>
-                  <a:srgbClr val="1F2A3A"/>
-                </a:solidFill>
-                <a:latin typeface="맑은 고딕"/>
-                <a:ea typeface="맑은 고딕"/>
-                <a:cs typeface="맑은 고딕"/>
-              </a:rPr>
-              <a:t>• 질문의 조회문</a:t>
+              <a:t>• 원문 위치를 대조</a:t>
             </a:r>
           </a:p>
         </p:txBody>
@@ -39517,7 +39496,7 @@
         </p:nvSpPr>
         <p:spPr>
           <a:xfrm>
-            <a:off x="6461607" y="5104130"/>
+            <a:off x="6461607" y="5181600"/>
             <a:ext cx="822960" cy="292608"/>
           </a:xfrm>
           <a:prstGeom prst="roundRect">
@@ -39548,7 +39527,7 @@
         </p:nvSpPr>
         <p:spPr>
           <a:xfrm>
-            <a:off x="6461607" y="5104130"/>
+            <a:off x="6461607" y="5181600"/>
             <a:ext cx="822960" cy="292608"/>
           </a:xfrm>
           <a:prstGeom prst="rect">
@@ -39574,7 +39553,7 @@
                 <a:ea typeface="맑은 고딕"/>
                 <a:cs typeface="맑은 고딕"/>
               </a:rPr>
-              <a:t>산출물</a:t>
+              <a:t>검토</a:t>
             </a:r>
           </a:p>
         </p:txBody>
@@ -39587,8 +39566,8 @@
         </p:nvSpPr>
         <p:spPr>
           <a:xfrm>
-            <a:off x="9075191" y="2448814"/>
-            <a:ext cx="2567863" cy="3085084"/>
+            <a:off x="9075191" y="2371343"/>
+            <a:ext cx="2567863" cy="3240024"/>
           </a:xfrm>
           <a:prstGeom prst="roundRect">
             <a:avLst>
@@ -39620,7 +39599,7 @@
         </p:nvSpPr>
         <p:spPr>
           <a:xfrm>
-            <a:off x="9303791" y="2649982"/>
+            <a:off x="9303791" y="2572511"/>
             <a:ext cx="731520" cy="731520"/>
           </a:xfrm>
           <a:prstGeom prst="ellipse">
@@ -39650,14 +39629,14 @@
           <p:nvPr/>
         </p:nvPicPr>
         <p:blipFill>
-          <a:blip r:embed="rId5"/>
+          <a:blip r:embed="rId6"/>
           <a:stretch>
             <a:fillRect/>
           </a:stretch>
         </p:blipFill>
         <p:spPr>
           <a:xfrm>
-            <a:off x="9457410" y="2803601"/>
+            <a:off x="9457410" y="2726131"/>
             <a:ext cx="424281" cy="424281"/>
           </a:xfrm>
           <a:prstGeom prst="rect">
@@ -39673,8 +39652,8 @@
         </p:nvSpPr>
         <p:spPr>
           <a:xfrm>
-            <a:off x="9239783" y="3472942"/>
-            <a:ext cx="2238679" cy="1558036"/>
+            <a:off x="9239783" y="3395471"/>
+            <a:ext cx="2238679" cy="1712976"/>
           </a:xfrm>
           <a:prstGeom prst="rect">
             <a:avLst/>
@@ -39694,7 +39673,7 @@
               </a:spcAft>
             </a:pPr>
             <a:r>
-              <a:rPr sz="1800" b="1">
+              <a:rPr sz="2000" b="1">
                 <a:solidFill>
                   <a:srgbClr val="13294B"/>
                 </a:solidFill>
@@ -39706,7 +39685,7 @@
             </a:r>
           </a:p>
           <a:p>
-            <a:pPr algn="l" eaLnBrk="0" marL="160020" indent="-160020">
+            <a:pPr algn="l" eaLnBrk="0" marL="182880" indent="-182880">
               <a:lnSpc>
                 <a:spcPct val="110000"/>
               </a:lnSpc>
@@ -39715,7 +39694,7 @@
               </a:spcAft>
             </a:pPr>
             <a:r>
-              <a:rPr sz="1400" b="0">
+              <a:rPr sz="1600" b="0">
                 <a:solidFill>
                   <a:srgbClr val="1F2A3A"/>
                 </a:solidFill>
@@ -39723,11 +39702,11 @@
                 <a:ea typeface="맑은 고딕"/>
                 <a:cs typeface="맑은 고딕"/>
               </a:rPr>
-              <a:t>• 따로 둔 이름 공간에 넣는다</a:t>
-            </a:r>
-          </a:p>
-          <a:p>
-            <a:pPr algn="l" eaLnBrk="0" marL="160020" indent="-160020">
+              <a:t>• 검토한 절차를 추가</a:t>
+            </a:r>
+          </a:p>
+          <a:p>
+            <a:pPr algn="l" eaLnBrk="0" marL="182880" indent="-182880">
               <a:lnSpc>
                 <a:spcPct val="110000"/>
               </a:lnSpc>
@@ -39736,7 +39715,7 @@
               </a:spcAft>
             </a:pPr>
             <a:r>
-              <a:rPr sz="1400" b="0">
+              <a:rPr sz="1600" b="0">
                 <a:solidFill>
                   <a:srgbClr val="1F2A3A"/>
                 </a:solidFill>
@@ -39744,7 +39723,7 @@
                 <a:ea typeface="맑은 고딕"/>
                 <a:cs typeface="맑은 고딕"/>
               </a:rPr>
-              <a:t>• 정한 질문이 조회로 풀린다</a:t>
+              <a:t>• 기존 지식은 유지</a:t>
             </a:r>
           </a:p>
         </p:txBody>
@@ -39757,7 +39736,7 @@
         </p:nvSpPr>
         <p:spPr>
           <a:xfrm>
-            <a:off x="9303791" y="5104130"/>
+            <a:off x="9303791" y="5181600"/>
             <a:ext cx="1021080" cy="292608"/>
           </a:xfrm>
           <a:prstGeom prst="roundRect">
@@ -39788,7 +39767,7 @@
         </p:nvSpPr>
         <p:spPr>
           <a:xfrm>
-            <a:off x="9303791" y="5104130"/>
+            <a:off x="9303791" y="5181600"/>
             <a:ext cx="1021080" cy="292608"/>
           </a:xfrm>
           <a:prstGeom prst="rect">
@@ -39947,7 +39926,7 @@
                 <a:ea typeface="맑은 고딕"/>
                 <a:cs typeface="맑은 고딕"/>
               </a:rPr>
-              <a:t>실습: 내 지식을 읽어 제안하는 에이전트</a:t>
+              <a:t>실습: 교대 인계안을 작성할 에이전트 만들기</a:t>
             </a:r>
           </a:p>
         </p:txBody>
@@ -40082,7 +40061,7 @@
                 <a:ea typeface="맑은 고딕"/>
                 <a:cs typeface="맑은 고딕"/>
               </a:rPr>
-              <a:t>확인된 것만 제안하는 에이전트의 구성</a:t>
+              <a:t>네 영역을 확인하고 불일치를 남긴다</a:t>
             </a:r>
           </a:p>
         </p:txBody>
@@ -40121,7 +40100,7 @@
                 <a:ea typeface="맑은 고딕"/>
                 <a:cs typeface="맑은 고딕"/>
               </a:rPr>
-              <a:t>이 실습의 작은 에이전트는 확인된 정보로만 제안하고, 미확인 값과 권한 밖의 작업은 지어내지 않고 보류로 낸다.</a:t>
+              <a:t>실제 조회 결과와 작업 메모를 대조해 확인된 것과 확인할 일을 구분한다.</a:t>
             </a:r>
           </a:p>
         </p:txBody>
@@ -40202,8 +40181,8 @@
         </p:nvSpPr>
         <p:spPr>
           <a:xfrm>
-            <a:off x="548640" y="2557272"/>
-            <a:ext cx="2567863" cy="2868168"/>
+            <a:off x="548640" y="2313241"/>
+            <a:ext cx="2567863" cy="3356229"/>
           </a:xfrm>
           <a:prstGeom prst="roundRect">
             <a:avLst>
@@ -40235,7 +40214,7 @@
         </p:nvSpPr>
         <p:spPr>
           <a:xfrm>
-            <a:off x="777240" y="2758440"/>
+            <a:off x="777240" y="2514409"/>
             <a:ext cx="731520" cy="731520"/>
           </a:xfrm>
           <a:prstGeom prst="ellipse">
@@ -40265,14 +40244,14 @@
           <p:nvPr/>
         </p:nvPicPr>
         <p:blipFill>
-          <a:blip r:embed="rId2"/>
+          <a:blip r:embed="rId3"/>
           <a:stretch>
             <a:fillRect/>
           </a:stretch>
         </p:blipFill>
         <p:spPr>
           <a:xfrm>
-            <a:off x="930859" y="2912059"/>
+            <a:off x="930859" y="2668028"/>
             <a:ext cx="424281" cy="424281"/>
           </a:xfrm>
           <a:prstGeom prst="rect">
@@ -40288,8 +40267,8 @@
         </p:nvSpPr>
         <p:spPr>
           <a:xfrm>
-            <a:off x="713232" y="3581400"/>
-            <a:ext cx="2238679" cy="1341120"/>
+            <a:off x="713232" y="3337369"/>
+            <a:ext cx="2238679" cy="1829181"/>
           </a:xfrm>
           <a:prstGeom prst="rect">
             <a:avLst/>
@@ -40309,7 +40288,7 @@
               </a:spcAft>
             </a:pPr>
             <a:r>
-              <a:rPr sz="1800" b="1">
+              <a:rPr sz="2150" b="1">
                 <a:solidFill>
                   <a:srgbClr val="13294B"/>
                 </a:solidFill>
@@ -40321,7 +40300,7 @@
             </a:r>
           </a:p>
           <a:p>
-            <a:pPr algn="l" eaLnBrk="0" marL="148590" indent="-148590">
+            <a:pPr algn="l" eaLnBrk="0" marL="200025" indent="-200025">
               <a:lnSpc>
                 <a:spcPct val="110000"/>
               </a:lnSpc>
@@ -40330,7 +40309,7 @@
               </a:spcAft>
             </a:pPr>
             <a:r>
-              <a:rPr sz="1300" b="0">
+              <a:rPr sz="1750" b="0">
                 <a:solidFill>
                   <a:srgbClr val="1F2A3A"/>
                 </a:solidFill>
@@ -40338,11 +40317,11 @@
                 <a:ea typeface="맑은 고딕"/>
                 <a:cs typeface="맑은 고딕"/>
               </a:rPr>
-              <a:t>• 앞서 만든 스키마와 자료</a:t>
-            </a:r>
-          </a:p>
-          <a:p>
-            <a:pPr algn="l" eaLnBrk="0" marL="148590" indent="-148590">
+              <a:t>• 대상 · 교대 · 기준 시각</a:t>
+            </a:r>
+          </a:p>
+          <a:p>
+            <a:pPr algn="l" eaLnBrk="0" marL="200025" indent="-200025">
               <a:lnSpc>
                 <a:spcPct val="110000"/>
               </a:lnSpc>
@@ -40351,7 +40330,7 @@
               </a:spcAft>
             </a:pPr>
             <a:r>
-              <a:rPr sz="1300" b="0">
+              <a:rPr sz="1750" b="0">
                 <a:solidFill>
                   <a:srgbClr val="1F2A3A"/>
                 </a:solidFill>
@@ -40359,7 +40338,7 @@
                 <a:ea typeface="맑은 고딕"/>
                 <a:cs typeface="맑은 고딕"/>
               </a:rPr>
-              <a:t>• 쓸 수 있는 읽기 MCP</a:t>
+              <a:t>• 전달받은 작업 메모</a:t>
             </a:r>
           </a:p>
         </p:txBody>
@@ -40372,7 +40351,7 @@
         </p:nvSpPr>
         <p:spPr>
           <a:xfrm>
-            <a:off x="777240" y="4995672"/>
+            <a:off x="777240" y="5239702"/>
             <a:ext cx="822960" cy="292608"/>
           </a:xfrm>
           <a:prstGeom prst="roundRect">
@@ -40403,7 +40382,7 @@
         </p:nvSpPr>
         <p:spPr>
           <a:xfrm>
-            <a:off x="777240" y="4995672"/>
+            <a:off x="777240" y="5239702"/>
             <a:ext cx="822960" cy="292608"/>
           </a:xfrm>
           <a:prstGeom prst="rect">
@@ -40442,8 +40421,8 @@
         </p:nvSpPr>
         <p:spPr>
           <a:xfrm>
-            <a:off x="3390823" y="2557272"/>
-            <a:ext cx="2567863" cy="2868168"/>
+            <a:off x="3390823" y="2313241"/>
+            <a:ext cx="2567863" cy="3356229"/>
           </a:xfrm>
           <a:prstGeom prst="roundRect">
             <a:avLst>
@@ -40475,7 +40454,7 @@
         </p:nvSpPr>
         <p:spPr>
           <a:xfrm>
-            <a:off x="3619423" y="2758440"/>
+            <a:off x="3619423" y="2514409"/>
             <a:ext cx="731520" cy="731520"/>
           </a:xfrm>
           <a:prstGeom prst="ellipse">
@@ -40505,14 +40484,14 @@
           <p:nvPr/>
         </p:nvPicPr>
         <p:blipFill>
-          <a:blip r:embed="rId3"/>
+          <a:blip r:embed="rId4"/>
           <a:stretch>
             <a:fillRect/>
           </a:stretch>
         </p:blipFill>
         <p:spPr>
           <a:xfrm>
-            <a:off x="3773043" y="2912059"/>
+            <a:off x="3773043" y="2668028"/>
             <a:ext cx="424281" cy="424281"/>
           </a:xfrm>
           <a:prstGeom prst="rect">
@@ -40528,8 +40507,8 @@
         </p:nvSpPr>
         <p:spPr>
           <a:xfrm>
-            <a:off x="3555415" y="3581400"/>
-            <a:ext cx="2238679" cy="1341120"/>
+            <a:off x="3555415" y="3337369"/>
+            <a:ext cx="2238679" cy="1829181"/>
           </a:xfrm>
           <a:prstGeom prst="rect">
             <a:avLst/>
@@ -40549,7 +40528,7 @@
               </a:spcAft>
             </a:pPr>
             <a:r>
-              <a:rPr sz="1800" b="1">
+              <a:rPr sz="2150" b="1">
                 <a:solidFill>
                   <a:srgbClr val="13294B"/>
                 </a:solidFill>
@@ -40557,11 +40536,11 @@
                 <a:ea typeface="맑은 고딕"/>
                 <a:cs typeface="맑은 고딕"/>
               </a:rPr>
-              <a:t>범위</a:t>
-            </a:r>
-          </a:p>
-          <a:p>
-            <a:pPr algn="l" eaLnBrk="0" marL="160020" indent="-160020">
+              <a:t>조회</a:t>
+            </a:r>
+          </a:p>
+          <a:p>
+            <a:pPr algn="l" eaLnBrk="0" marL="200025" indent="-200025">
               <a:lnSpc>
                 <a:spcPct val="110000"/>
               </a:lnSpc>
@@ -40570,7 +40549,7 @@
               </a:spcAft>
             </a:pPr>
             <a:r>
-              <a:rPr sz="1400" b="0">
+              <a:rPr sz="1750" b="0">
                 <a:solidFill>
                   <a:srgbClr val="1F2A3A"/>
                 </a:solidFill>
@@ -40578,11 +40557,11 @@
                 <a:ea typeface="맑은 고딕"/>
                 <a:cs typeface="맑은 고딕"/>
               </a:rPr>
-              <a:t>• 목표와 스킬 작성</a:t>
-            </a:r>
-          </a:p>
-          <a:p>
-            <a:pPr algn="l" eaLnBrk="0" marL="160020" indent="-160020">
+              <a:t>• 설비와 작업지시</a:t>
+            </a:r>
+          </a:p>
+          <a:p>
+            <a:pPr algn="l" eaLnBrk="0" marL="200025" indent="-200025">
               <a:lnSpc>
                 <a:spcPct val="110000"/>
               </a:lnSpc>
@@ -40591,7 +40570,7 @@
               </a:spcAft>
             </a:pPr>
             <a:r>
-              <a:rPr sz="1400" b="0">
+              <a:rPr sz="1750" b="0">
                 <a:solidFill>
                   <a:srgbClr val="1F2A3A"/>
                 </a:solidFill>
@@ -40599,7 +40578,7 @@
                 <a:ea typeface="맑은 고딕"/>
                 <a:cs typeface="맑은 고딕"/>
               </a:rPr>
-              <a:t>• 읽기 MCP 연결</a:t>
+              <a:t>• 재고와 입고 예정</a:t>
             </a:r>
           </a:p>
         </p:txBody>
@@ -40612,7 +40591,7 @@
         </p:nvSpPr>
         <p:spPr>
           <a:xfrm>
-            <a:off x="3619423" y="4995672"/>
+            <a:off x="3619423" y="5239702"/>
             <a:ext cx="822960" cy="292608"/>
           </a:xfrm>
           <a:prstGeom prst="roundRect">
@@ -40643,7 +40622,7 @@
         </p:nvSpPr>
         <p:spPr>
           <a:xfrm>
-            <a:off x="3619423" y="4995672"/>
+            <a:off x="3619423" y="5239702"/>
             <a:ext cx="822960" cy="292608"/>
           </a:xfrm>
           <a:prstGeom prst="rect">
@@ -40669,7 +40648,7 @@
                 <a:ea typeface="맑은 고딕"/>
                 <a:cs typeface="맑은 고딕"/>
               </a:rPr>
-              <a:t>범위</a:t>
+              <a:t>조회</a:t>
             </a:r>
           </a:p>
         </p:txBody>
@@ -40682,8 +40661,8 @@
         </p:nvSpPr>
         <p:spPr>
           <a:xfrm>
-            <a:off x="6233007" y="2557272"/>
-            <a:ext cx="2567863" cy="2868168"/>
+            <a:off x="6233007" y="2313241"/>
+            <a:ext cx="2567863" cy="3356229"/>
           </a:xfrm>
           <a:prstGeom prst="roundRect">
             <a:avLst>
@@ -40715,7 +40694,7 @@
         </p:nvSpPr>
         <p:spPr>
           <a:xfrm>
-            <a:off x="6461607" y="2758440"/>
+            <a:off x="6461607" y="2514409"/>
             <a:ext cx="731520" cy="731520"/>
           </a:xfrm>
           <a:prstGeom prst="ellipse">
@@ -40745,14 +40724,14 @@
           <p:nvPr/>
         </p:nvPicPr>
         <p:blipFill>
-          <a:blip r:embed="rId4"/>
+          <a:blip r:embed="rId5"/>
           <a:stretch>
             <a:fillRect/>
           </a:stretch>
         </p:blipFill>
         <p:spPr>
           <a:xfrm>
-            <a:off x="6615226" y="2912059"/>
+            <a:off x="6615226" y="2668028"/>
             <a:ext cx="424281" cy="424281"/>
           </a:xfrm>
           <a:prstGeom prst="rect">
@@ -40768,8 +40747,8 @@
         </p:nvSpPr>
         <p:spPr>
           <a:xfrm>
-            <a:off x="6397599" y="3581400"/>
-            <a:ext cx="2238679" cy="1341120"/>
+            <a:off x="6397599" y="3337369"/>
+            <a:ext cx="2238679" cy="1829181"/>
           </a:xfrm>
           <a:prstGeom prst="rect">
             <a:avLst/>
@@ -40789,7 +40768,7 @@
               </a:spcAft>
             </a:pPr>
             <a:r>
-              <a:rPr sz="1800" b="1">
+              <a:rPr sz="2150" b="1">
                 <a:solidFill>
                   <a:srgbClr val="13294B"/>
                 </a:solidFill>
@@ -40801,7 +40780,7 @@
             </a:r>
           </a:p>
           <a:p>
-            <a:pPr algn="l" eaLnBrk="0" marL="160020" indent="-160020">
+            <a:pPr algn="l" eaLnBrk="0" marL="200025" indent="-200025">
               <a:lnSpc>
                 <a:spcPct val="110000"/>
               </a:lnSpc>
@@ -40810,7 +40789,7 @@
               </a:spcAft>
             </a:pPr>
             <a:r>
-              <a:rPr sz="1400" b="0">
+              <a:rPr sz="1750" b="0">
                 <a:solidFill>
                   <a:srgbClr val="1F2A3A"/>
                 </a:solidFill>
@@ -40818,11 +40797,11 @@
                 <a:ea typeface="맑은 고딕"/>
                 <a:cs typeface="맑은 고딕"/>
               </a:rPr>
-              <a:t>• 에이전트 정의와 스킬</a:t>
-            </a:r>
-          </a:p>
-          <a:p>
-            <a:pPr algn="l" eaLnBrk="0" marL="160020" indent="-160020">
+              <a:t>• 네 영역의 인계안</a:t>
+            </a:r>
+          </a:p>
+          <a:p>
+            <a:pPr algn="l" eaLnBrk="0" marL="200025" indent="-200025">
               <a:lnSpc>
                 <a:spcPct val="110000"/>
               </a:lnSpc>
@@ -40831,7 +40810,7 @@
               </a:spcAft>
             </a:pPr>
             <a:r>
-              <a:rPr sz="1400" b="0">
+              <a:rPr sz="1750" b="0">
                 <a:solidFill>
                   <a:srgbClr val="1F2A3A"/>
                 </a:solidFill>
@@ -40839,7 +40818,7 @@
                 <a:ea typeface="맑은 고딕"/>
                 <a:cs typeface="맑은 고딕"/>
               </a:rPr>
-              <a:t>• 제안이나 보류가 담긴 결과 한 건</a:t>
+              <a:t>• 실제 조회 근거</a:t>
             </a:r>
           </a:p>
         </p:txBody>
@@ -40852,7 +40831,7 @@
         </p:nvSpPr>
         <p:spPr>
           <a:xfrm>
-            <a:off x="6461607" y="4995672"/>
+            <a:off x="6461607" y="5239702"/>
             <a:ext cx="822960" cy="292608"/>
           </a:xfrm>
           <a:prstGeom prst="roundRect">
@@ -40883,7 +40862,7 @@
         </p:nvSpPr>
         <p:spPr>
           <a:xfrm>
-            <a:off x="6461607" y="4995672"/>
+            <a:off x="6461607" y="5239702"/>
             <a:ext cx="822960" cy="292608"/>
           </a:xfrm>
           <a:prstGeom prst="rect">
@@ -40922,8 +40901,8 @@
         </p:nvSpPr>
         <p:spPr>
           <a:xfrm>
-            <a:off x="9075191" y="2557272"/>
-            <a:ext cx="2567863" cy="2868168"/>
+            <a:off x="9075191" y="2313241"/>
+            <a:ext cx="2567863" cy="3356229"/>
           </a:xfrm>
           <a:prstGeom prst="roundRect">
             <a:avLst>
@@ -40955,7 +40934,7 @@
         </p:nvSpPr>
         <p:spPr>
           <a:xfrm>
-            <a:off x="9303791" y="2758440"/>
+            <a:off x="9303791" y="2514409"/>
             <a:ext cx="731520" cy="731520"/>
           </a:xfrm>
           <a:prstGeom prst="ellipse">
@@ -40985,14 +40964,14 @@
           <p:nvPr/>
         </p:nvPicPr>
         <p:blipFill>
-          <a:blip r:embed="rId5"/>
+          <a:blip r:embed="rId6"/>
           <a:stretch>
             <a:fillRect/>
           </a:stretch>
         </p:blipFill>
         <p:spPr>
           <a:xfrm>
-            <a:off x="9457410" y="2912059"/>
+            <a:off x="9457410" y="2668028"/>
             <a:ext cx="424281" cy="424281"/>
           </a:xfrm>
           <a:prstGeom prst="rect">
@@ -41008,8 +40987,8 @@
         </p:nvSpPr>
         <p:spPr>
           <a:xfrm>
-            <a:off x="9239783" y="3581400"/>
-            <a:ext cx="2238679" cy="1341120"/>
+            <a:off x="9239783" y="3337369"/>
+            <a:ext cx="2238679" cy="1829181"/>
           </a:xfrm>
           <a:prstGeom prst="rect">
             <a:avLst/>
@@ -41029,7 +41008,7 @@
               </a:spcAft>
             </a:pPr>
             <a:r>
-              <a:rPr sz="1800" b="1">
+              <a:rPr sz="2150" b="1">
                 <a:solidFill>
                   <a:srgbClr val="13294B"/>
                 </a:solidFill>
@@ -41041,7 +41020,7 @@
             </a:r>
           </a:p>
           <a:p>
-            <a:pPr algn="l" eaLnBrk="0" marL="160020" indent="-160020">
+            <a:pPr algn="l" eaLnBrk="0" marL="200025" indent="-200025">
               <a:lnSpc>
                 <a:spcPct val="110000"/>
               </a:lnSpc>
@@ -41050,7 +41029,7 @@
               </a:spcAft>
             </a:pPr>
             <a:r>
-              <a:rPr sz="1400" b="0">
+              <a:rPr sz="1750" b="0">
                 <a:solidFill>
                   <a:srgbClr val="1F2A3A"/>
                 </a:solidFill>
@@ -41058,11 +41037,11 @@
                 <a:ea typeface="맑은 고딕"/>
                 <a:cs typeface="맑은 고딕"/>
               </a:rPr>
-              <a:t>• 제안의 근거는 읽은 값</a:t>
-            </a:r>
-          </a:p>
-          <a:p>
-            <a:pPr algn="l" eaLnBrk="0" marL="160020" indent="-160020">
+              <a:t>• 불일치 · 누락 · 조회 시점</a:t>
+            </a:r>
+          </a:p>
+          <a:p>
+            <a:pPr algn="l" eaLnBrk="0" marL="200025" indent="-200025">
               <a:lnSpc>
                 <a:spcPct val="110000"/>
               </a:lnSpc>
@@ -41071,7 +41050,7 @@
               </a:spcAft>
             </a:pPr>
             <a:r>
-              <a:rPr sz="1400" b="0">
+              <a:rPr sz="1750" b="0">
                 <a:solidFill>
                   <a:srgbClr val="1F2A3A"/>
                 </a:solidFill>
@@ -41079,7 +41058,7 @@
                 <a:ea typeface="맑은 고딕"/>
                 <a:cs typeface="맑은 고딕"/>
               </a:rPr>
-              <a:t>• 미확인 값과 권한 밖 작업은 보류</a:t>
+              <a:t>• 다음 확인을 기록</a:t>
             </a:r>
           </a:p>
         </p:txBody>
@@ -41092,7 +41071,7 @@
         </p:nvSpPr>
         <p:spPr>
           <a:xfrm>
-            <a:off x="9303791" y="4995672"/>
+            <a:off x="9303791" y="5239702"/>
             <a:ext cx="1021080" cy="292608"/>
           </a:xfrm>
           <a:prstGeom prst="roundRect">
@@ -41123,7 +41102,7 @@
         </p:nvSpPr>
         <p:spPr>
           <a:xfrm>
-            <a:off x="9303791" y="4995672"/>
+            <a:off x="9303791" y="5239702"/>
             <a:ext cx="1021080" cy="292608"/>
           </a:xfrm>
           <a:prstGeom prst="rect">
@@ -41282,7 +41261,7 @@
                 <a:ea typeface="맑은 고딕"/>
                 <a:cs typeface="맑은 고딕"/>
               </a:rPr>
-              <a:t>실습: 직접 그린 흐름으로 내 에이전트 실행</a:t>
+              <a:t>실습: 교대 흐름을 연결해 인계 확인하기</a:t>
             </a:r>
           </a:p>
         </p:txBody>
@@ -41417,7 +41396,7 @@
                 <a:ea typeface="맑은 고딕"/>
                 <a:cs typeface="맑은 고딕"/>
               </a:rPr>
-              <a:t>내 에이전트를 단계로 둔 흐름과 남는 처리 건</a:t>
+              <a:t>초안에서 두 사람의 확인까지</a:t>
             </a:r>
           </a:p>
         </p:txBody>
@@ -41456,7 +41435,7 @@
                 <a:ea typeface="맑은 고딕"/>
                 <a:cs typeface="맑은 고딕"/>
               </a:rPr>
-              <a:t>준비된 연결로 흐름을 등록·실행하고, 처리 건의 실제 결과와 미확인 범위를 구분해 기록한다.</a:t>
+              <a:t>제공 흐름을 연결해 같은 처리 건에서 검토·보완하고 인수를 확인한다.</a:t>
             </a:r>
           </a:p>
         </p:txBody>
@@ -41537,8 +41516,8 @@
         </p:nvSpPr>
         <p:spPr>
           <a:xfrm>
-            <a:off x="548640" y="2550541"/>
-            <a:ext cx="1911644" cy="2881629"/>
+            <a:off x="548640" y="2670619"/>
+            <a:ext cx="1911644" cy="2641473"/>
           </a:xfrm>
           <a:prstGeom prst="roundRect">
             <a:avLst>
@@ -41568,7 +41547,7 @@
         </p:nvSpPr>
         <p:spPr>
           <a:xfrm>
-            <a:off x="1138702" y="2733421"/>
+            <a:off x="1138702" y="2853499"/>
             <a:ext cx="731520" cy="731520"/>
           </a:xfrm>
           <a:prstGeom prst="ellipse">
@@ -41598,14 +41577,14 @@
           <p:nvPr/>
         </p:nvPicPr>
         <p:blipFill>
-          <a:blip r:embed="rIdTheory48_rId3"/>
+          <a:blip r:embed="rId3"/>
           <a:stretch>
             <a:fillRect/>
           </a:stretch>
         </p:blipFill>
         <p:spPr>
           <a:xfrm>
-            <a:off x="1292321" y="2887040"/>
+            <a:off x="1292321" y="3007118"/>
             <a:ext cx="424281" cy="424281"/>
           </a:xfrm>
           <a:prstGeom prst="rect">
@@ -41621,8 +41600,8 @@
         </p:nvSpPr>
         <p:spPr>
           <a:xfrm>
-            <a:off x="621792" y="3538093"/>
-            <a:ext cx="1765340" cy="1820925"/>
+            <a:off x="621792" y="3658171"/>
+            <a:ext cx="1765340" cy="1580768"/>
           </a:xfrm>
           <a:prstGeom prst="rect">
             <a:avLst/>
@@ -41671,7 +41650,7 @@
                 <a:ea typeface="맑은 고딕"/>
                 <a:cs typeface="맑은 고딕"/>
               </a:rPr>
-              <a:t>업무를 여는</a:t>
+              <a:t>설비 · 교대</a:t>
             </a:r>
           </a:p>
           <a:p>
@@ -41692,7 +41671,7 @@
                 <a:ea typeface="맑은 고딕"/>
                 <a:cs typeface="맑은 고딕"/>
               </a:rPr>
-              <a:t>사건을 정한다</a:t>
+              <a:t>시각 · 메모</a:t>
             </a:r>
           </a:p>
         </p:txBody>
@@ -41734,8 +41713,8 @@
         </p:nvSpPr>
         <p:spPr>
           <a:xfrm>
-            <a:off x="2844332" y="2550541"/>
-            <a:ext cx="1911644" cy="2881629"/>
+            <a:off x="2844332" y="2670619"/>
+            <a:ext cx="1911644" cy="2641473"/>
           </a:xfrm>
           <a:prstGeom prst="roundRect">
             <a:avLst>
@@ -41765,7 +41744,7 @@
         </p:nvSpPr>
         <p:spPr>
           <a:xfrm>
-            <a:off x="3434394" y="2733421"/>
+            <a:off x="3434394" y="2853499"/>
             <a:ext cx="731520" cy="731520"/>
           </a:xfrm>
           <a:prstGeom prst="ellipse">
@@ -41795,14 +41774,14 @@
           <p:nvPr/>
         </p:nvPicPr>
         <p:blipFill>
-          <a:blip r:embed="rIdTheory48_rId4"/>
+          <a:blip r:embed="rId4"/>
           <a:stretch>
             <a:fillRect/>
           </a:stretch>
         </p:blipFill>
         <p:spPr>
           <a:xfrm>
-            <a:off x="3588014" y="2887040"/>
+            <a:off x="3588014" y="3007118"/>
             <a:ext cx="424281" cy="424281"/>
           </a:xfrm>
           <a:prstGeom prst="rect">
@@ -41818,8 +41797,8 @@
         </p:nvSpPr>
         <p:spPr>
           <a:xfrm>
-            <a:off x="2917484" y="3538093"/>
-            <a:ext cx="1765340" cy="1820925"/>
+            <a:off x="2917484" y="3658171"/>
+            <a:ext cx="1765340" cy="1580768"/>
           </a:xfrm>
           <a:prstGeom prst="rect">
             <a:avLst/>
@@ -41847,7 +41826,7 @@
                 <a:ea typeface="맑은 고딕"/>
                 <a:cs typeface="맑은 고딕"/>
               </a:rPr>
-              <a:t>에이전트 작업</a:t>
+              <a:t>인계안</a:t>
             </a:r>
           </a:p>
           <a:p>
@@ -41868,7 +41847,7 @@
                 <a:ea typeface="맑은 고딕"/>
                 <a:cs typeface="맑은 고딕"/>
               </a:rPr>
-              <a:t>앞서 만든</a:t>
+              <a:t>에이전트가</a:t>
             </a:r>
           </a:p>
           <a:p>
@@ -41889,28 +41868,7 @@
                 <a:ea typeface="맑은 고딕"/>
                 <a:cs typeface="맑은 고딕"/>
               </a:rPr>
-              <a:t>에이전트에게</a:t>
-            </a:r>
-          </a:p>
-          <a:p>
-            <a:pPr algn="ctr" eaLnBrk="0">
-              <a:lnSpc>
-                <a:spcPct val="110000"/>
-              </a:lnSpc>
-              <a:spcAft>
-                <a:spcPts val="400"/>
-              </a:spcAft>
-            </a:pPr>
-            <a:r>
-              <a:rPr sz="1550" b="0">
-                <a:solidFill>
-                  <a:srgbClr val="1F2A3A"/>
-                </a:solidFill>
-                <a:latin typeface="맑은 고딕"/>
-                <a:ea typeface="맑은 고딕"/>
-                <a:cs typeface="맑은 고딕"/>
-              </a:rPr>
-              <a:t>맡긴다</a:t>
+              <a:t>근거를 조회</a:t>
             </a:r>
           </a:p>
         </p:txBody>
@@ -41952,8 +41910,8 @@
         </p:nvSpPr>
         <p:spPr>
           <a:xfrm>
-            <a:off x="5140025" y="2550541"/>
-            <a:ext cx="1911644" cy="2881629"/>
+            <a:off x="5140025" y="2670619"/>
+            <a:ext cx="1911644" cy="2641473"/>
           </a:xfrm>
           <a:prstGeom prst="roundRect">
             <a:avLst>
@@ -41983,7 +41941,7 @@
         </p:nvSpPr>
         <p:spPr>
           <a:xfrm>
-            <a:off x="5730087" y="2733421"/>
+            <a:off x="5730087" y="2853499"/>
             <a:ext cx="731520" cy="731520"/>
           </a:xfrm>
           <a:prstGeom prst="ellipse">
@@ -42013,14 +41971,14 @@
           <p:nvPr/>
         </p:nvPicPr>
         <p:blipFill>
-          <a:blip r:embed="rIdTheory48_rId5"/>
+          <a:blip r:embed="rId5"/>
           <a:stretch>
             <a:fillRect/>
           </a:stretch>
         </p:blipFill>
         <p:spPr>
           <a:xfrm>
-            <a:off x="5883706" y="2887040"/>
+            <a:off x="5883706" y="3007118"/>
             <a:ext cx="424281" cy="424281"/>
           </a:xfrm>
           <a:prstGeom prst="rect">
@@ -42036,8 +41994,8 @@
         </p:nvSpPr>
         <p:spPr>
           <a:xfrm>
-            <a:off x="5213177" y="3538093"/>
-            <a:ext cx="1765340" cy="1820925"/>
+            <a:off x="5213177" y="3658171"/>
+            <a:ext cx="1765340" cy="1580768"/>
           </a:xfrm>
           <a:prstGeom prst="rect">
             <a:avLst/>
@@ -42065,7 +42023,7 @@
                 <a:ea typeface="맑은 고딕"/>
                 <a:cs typeface="맑은 고딕"/>
               </a:rPr>
-              <a:t>사람 확인</a:t>
+              <a:t>인계자</a:t>
             </a:r>
           </a:p>
           <a:p>
@@ -42086,7 +42044,7 @@
                 <a:ea typeface="맑은 고딕"/>
                 <a:cs typeface="맑은 고딕"/>
               </a:rPr>
-              <a:t>필요한 자리에</a:t>
+              <a:t>초안과</a:t>
             </a:r>
           </a:p>
           <a:p>
@@ -42107,28 +42065,7 @@
                 <a:ea typeface="맑은 고딕"/>
                 <a:cs typeface="맑은 고딕"/>
               </a:rPr>
-              <a:t>사람 작업을</a:t>
-            </a:r>
-          </a:p>
-          <a:p>
-            <a:pPr algn="ctr" eaLnBrk="0">
-              <a:lnSpc>
-                <a:spcPct val="110000"/>
-              </a:lnSpc>
-              <a:spcAft>
-                <a:spcPts val="400"/>
-              </a:spcAft>
-            </a:pPr>
-            <a:r>
-              <a:rPr sz="1550" b="0">
-                <a:solidFill>
-                  <a:srgbClr val="1F2A3A"/>
-                </a:solidFill>
-                <a:latin typeface="맑은 고딕"/>
-                <a:ea typeface="맑은 고딕"/>
-                <a:cs typeface="맑은 고딕"/>
-              </a:rPr>
-              <a:t>둔다</a:t>
+              <a:t>불일치 검토</a:t>
             </a:r>
           </a:p>
         </p:txBody>
@@ -42170,8 +42107,8 @@
         </p:nvSpPr>
         <p:spPr>
           <a:xfrm>
-            <a:off x="7435717" y="2550541"/>
-            <a:ext cx="1911644" cy="2881629"/>
+            <a:off x="7435717" y="2670619"/>
+            <a:ext cx="1911644" cy="2641473"/>
           </a:xfrm>
           <a:prstGeom prst="roundRect">
             <a:avLst>
@@ -42201,7 +42138,7 @@
         </p:nvSpPr>
         <p:spPr>
           <a:xfrm>
-            <a:off x="8025780" y="2733421"/>
+            <a:off x="8025780" y="2853499"/>
             <a:ext cx="731520" cy="731520"/>
           </a:xfrm>
           <a:prstGeom prst="ellipse">
@@ -42231,14 +42168,14 @@
           <p:nvPr/>
         </p:nvPicPr>
         <p:blipFill>
-          <a:blip r:embed="rIdTheory48_rId6"/>
+          <a:blip r:embed="rId6"/>
           <a:stretch>
             <a:fillRect/>
           </a:stretch>
         </p:blipFill>
         <p:spPr>
           <a:xfrm>
-            <a:off x="8179399" y="2887040"/>
+            <a:off x="8179399" y="3007118"/>
             <a:ext cx="424281" cy="424281"/>
           </a:xfrm>
           <a:prstGeom prst="rect">
@@ -42254,8 +42191,8 @@
         </p:nvSpPr>
         <p:spPr>
           <a:xfrm>
-            <a:off x="7508869" y="3538093"/>
-            <a:ext cx="1765340" cy="1820925"/>
+            <a:off x="7508869" y="3658171"/>
+            <a:ext cx="1765340" cy="1580768"/>
           </a:xfrm>
           <a:prstGeom prst="rect">
             <a:avLst/>
@@ -42283,7 +42220,7 @@
                 <a:ea typeface="맑은 고딕"/>
                 <a:cs typeface="맑은 고딕"/>
               </a:rPr>
-              <a:t>결과 보고</a:t>
+              <a:t>인수자</a:t>
             </a:r>
           </a:p>
           <a:p>
@@ -42304,7 +42241,7 @@
                 <a:ea typeface="맑은 고딕"/>
                 <a:cs typeface="맑은 고딕"/>
               </a:rPr>
-              <a:t>한 일과 하지 못한</a:t>
+              <a:t>확인 또는</a:t>
             </a:r>
           </a:p>
           <a:p>
@@ -42325,7 +42262,7 @@
                 <a:ea typeface="맑은 고딕"/>
                 <a:cs typeface="맑은 고딕"/>
               </a:rPr>
-              <a:t>일을 함께 알린다</a:t>
+              <a:t>보완 요청</a:t>
             </a:r>
           </a:p>
         </p:txBody>
@@ -42367,8 +42304,8 @@
         </p:nvSpPr>
         <p:spPr>
           <a:xfrm>
-            <a:off x="9731410" y="2550541"/>
-            <a:ext cx="1911644" cy="2881629"/>
+            <a:off x="9731410" y="2670619"/>
+            <a:ext cx="1911644" cy="2641473"/>
           </a:xfrm>
           <a:prstGeom prst="roundRect">
             <a:avLst>
@@ -42400,7 +42337,7 @@
         </p:nvSpPr>
         <p:spPr>
           <a:xfrm>
-            <a:off x="10321472" y="2733421"/>
+            <a:off x="10321472" y="2853499"/>
             <a:ext cx="731520" cy="731520"/>
           </a:xfrm>
           <a:prstGeom prst="ellipse">
@@ -42430,14 +42367,14 @@
           <p:nvPr/>
         </p:nvPicPr>
         <p:blipFill>
-          <a:blip r:embed="rIdTheory48_rId7"/>
+          <a:blip r:embed="rId7"/>
           <a:stretch>
             <a:fillRect/>
           </a:stretch>
         </p:blipFill>
         <p:spPr>
           <a:xfrm>
-            <a:off x="10475092" y="2887040"/>
+            <a:off x="10475092" y="3007118"/>
             <a:ext cx="424281" cy="424281"/>
           </a:xfrm>
           <a:prstGeom prst="rect">
@@ -42453,8 +42390,8 @@
         </p:nvSpPr>
         <p:spPr>
           <a:xfrm>
-            <a:off x="9804562" y="3538093"/>
-            <a:ext cx="1765340" cy="1820925"/>
+            <a:off x="9804562" y="3658171"/>
+            <a:ext cx="1765340" cy="1580768"/>
           </a:xfrm>
           <a:prstGeom prst="rect">
             <a:avLst/>
@@ -42503,7 +42440,7 @@
                 <a:ea typeface="맑은 고딕"/>
                 <a:cs typeface="맑은 고딕"/>
               </a:rPr>
-              <a:t>필요한 흐름이 모두 끝나</a:t>
+              <a:t>인계 확인과</a:t>
             </a:r>
           </a:p>
           <a:p>
@@ -42524,7 +42461,7 @@
                 <a:ea typeface="맑은 고딕"/>
                 <a:cs typeface="맑은 고딕"/>
               </a:rPr>
-              <a:t>처리 건이 닫힌다</a:t>
+              <a:t>남은 일 기록</a:t>
             </a:r>
           </a:p>
         </p:txBody>
@@ -42906,7 +42843,7 @@
       </p:sp>
       <p:pic>
         <p:nvPicPr>
-          <p:cNvPr id="6" name="삽화:사건선_전체.svg" descr="illust_9220388101328140836_1792243894.png"/>
+          <p:cNvPr id="6" name="삽화:사건선_전체.svg" descr="illust_362663970001902619_1793003853.png"/>
           <p:cNvPicPr>
             <a:picLocks noChangeAspect="1"/>
           </p:cNvPicPr>
@@ -45432,7 +45369,7 @@
       </p:sp>
       <p:pic>
         <p:nvPicPr>
-          <p:cNvPr id="6" name="삽화:작업목록.svg" descr="illust_6321520322374784129_1792243894.png"/>
+          <p:cNvPr id="6" name="삽화:작업목록.svg" descr="illust_4144048635385471968_1793003853.png"/>
           <p:cNvPicPr>
             <a:picLocks noChangeAspect="1"/>
           </p:cNvPicPr>
@@ -49519,8 +49456,8 @@
         </p:nvSpPr>
         <p:spPr>
           <a:xfrm>
-            <a:off x="548640" y="2510790"/>
-            <a:ext cx="2567863" cy="2961132"/>
+            <a:off x="548640" y="2630868"/>
+            <a:ext cx="2567863" cy="2720975"/>
           </a:xfrm>
           <a:prstGeom prst="roundRect">
             <a:avLst>
@@ -49552,7 +49489,7 @@
         </p:nvSpPr>
         <p:spPr>
           <a:xfrm>
-            <a:off x="777240" y="2711958"/>
+            <a:off x="777240" y="2832036"/>
             <a:ext cx="731520" cy="731520"/>
           </a:xfrm>
           <a:prstGeom prst="ellipse">
@@ -49582,14 +49519,14 @@
           <p:nvPr/>
         </p:nvPicPr>
         <p:blipFill>
-          <a:blip r:embed="rId2"/>
+          <a:blip r:embed="rId3"/>
           <a:stretch>
             <a:fillRect/>
           </a:stretch>
         </p:blipFill>
         <p:spPr>
           <a:xfrm>
-            <a:off x="930859" y="2865577"/>
+            <a:off x="930859" y="2985655"/>
             <a:ext cx="424281" cy="424281"/>
           </a:xfrm>
           <a:prstGeom prst="rect">
@@ -49605,8 +49542,8 @@
         </p:nvSpPr>
         <p:spPr>
           <a:xfrm>
-            <a:off x="713232" y="3534918"/>
-            <a:ext cx="2238679" cy="1434084"/>
+            <a:off x="713232" y="3654996"/>
+            <a:ext cx="2238679" cy="1193927"/>
           </a:xfrm>
           <a:prstGeom prst="rect">
             <a:avLst/>
@@ -49689,7 +49626,7 @@
         </p:nvSpPr>
         <p:spPr>
           <a:xfrm>
-            <a:off x="777240" y="5042154"/>
+            <a:off x="777240" y="4922075"/>
             <a:ext cx="822960" cy="292608"/>
           </a:xfrm>
           <a:prstGeom prst="roundRect">
@@ -49720,7 +49657,7 @@
         </p:nvSpPr>
         <p:spPr>
           <a:xfrm>
-            <a:off x="777240" y="5042154"/>
+            <a:off x="777240" y="4922075"/>
             <a:ext cx="822960" cy="292608"/>
           </a:xfrm>
           <a:prstGeom prst="rect">
@@ -49759,8 +49696,8 @@
         </p:nvSpPr>
         <p:spPr>
           <a:xfrm>
-            <a:off x="3390823" y="2510790"/>
-            <a:ext cx="2567863" cy="2961132"/>
+            <a:off x="3390823" y="2630868"/>
+            <a:ext cx="2567863" cy="2720975"/>
           </a:xfrm>
           <a:prstGeom prst="roundRect">
             <a:avLst>
@@ -49792,7 +49729,7 @@
         </p:nvSpPr>
         <p:spPr>
           <a:xfrm>
-            <a:off x="3619423" y="2711958"/>
+            <a:off x="3619423" y="2832036"/>
             <a:ext cx="731520" cy="731520"/>
           </a:xfrm>
           <a:prstGeom prst="ellipse">
@@ -49822,14 +49759,14 @@
           <p:nvPr/>
         </p:nvPicPr>
         <p:blipFill>
-          <a:blip r:embed="rId3"/>
+          <a:blip r:embed="rId4"/>
           <a:stretch>
             <a:fillRect/>
           </a:stretch>
         </p:blipFill>
         <p:spPr>
           <a:xfrm>
-            <a:off x="3773043" y="2865577"/>
+            <a:off x="3773043" y="2985655"/>
             <a:ext cx="424281" cy="424281"/>
           </a:xfrm>
           <a:prstGeom prst="rect">
@@ -49845,8 +49782,8 @@
         </p:nvSpPr>
         <p:spPr>
           <a:xfrm>
-            <a:off x="3555415" y="3534918"/>
-            <a:ext cx="2238679" cy="1434084"/>
+            <a:off x="3555415" y="3654996"/>
+            <a:ext cx="2238679" cy="1193927"/>
           </a:xfrm>
           <a:prstGeom prst="rect">
             <a:avLst/>
@@ -49929,7 +49866,7 @@
         </p:nvSpPr>
         <p:spPr>
           <a:xfrm>
-            <a:off x="3619423" y="5042154"/>
+            <a:off x="3619423" y="4922075"/>
             <a:ext cx="822960" cy="292608"/>
           </a:xfrm>
           <a:prstGeom prst="roundRect">
@@ -49960,7 +49897,7 @@
         </p:nvSpPr>
         <p:spPr>
           <a:xfrm>
-            <a:off x="3619423" y="5042154"/>
+            <a:off x="3619423" y="4922075"/>
             <a:ext cx="822960" cy="292608"/>
           </a:xfrm>
           <a:prstGeom prst="rect">
@@ -49999,8 +49936,8 @@
         </p:nvSpPr>
         <p:spPr>
           <a:xfrm>
-            <a:off x="6233007" y="2510790"/>
-            <a:ext cx="2567863" cy="2961132"/>
+            <a:off x="6233007" y="2630868"/>
+            <a:ext cx="2567863" cy="2720975"/>
           </a:xfrm>
           <a:prstGeom prst="roundRect">
             <a:avLst>
@@ -50032,7 +49969,7 @@
         </p:nvSpPr>
         <p:spPr>
           <a:xfrm>
-            <a:off x="6461607" y="2711958"/>
+            <a:off x="6461607" y="2832036"/>
             <a:ext cx="731520" cy="731520"/>
           </a:xfrm>
           <a:prstGeom prst="ellipse">
@@ -50062,14 +49999,14 @@
           <p:nvPr/>
         </p:nvPicPr>
         <p:blipFill>
-          <a:blip r:embed="rId4"/>
+          <a:blip r:embed="rId5"/>
           <a:stretch>
             <a:fillRect/>
           </a:stretch>
         </p:blipFill>
         <p:spPr>
           <a:xfrm>
-            <a:off x="6615226" y="2865577"/>
+            <a:off x="6615226" y="2985655"/>
             <a:ext cx="424281" cy="424281"/>
           </a:xfrm>
           <a:prstGeom prst="rect">
@@ -50085,8 +50022,8 @@
         </p:nvSpPr>
         <p:spPr>
           <a:xfrm>
-            <a:off x="6397599" y="3534918"/>
-            <a:ext cx="2238679" cy="1434084"/>
+            <a:off x="6397599" y="3654996"/>
+            <a:ext cx="2238679" cy="1193927"/>
           </a:xfrm>
           <a:prstGeom prst="rect">
             <a:avLst/>
@@ -50135,7 +50072,7 @@
                 <a:ea typeface="맑은 고딕"/>
                 <a:cs typeface="맑은 고딕"/>
               </a:rPr>
-              <a:t>• 명세, 스키마, 에이전트,</a:t>
+              <a:t>• 인계안과 에이전트,</a:t>
             </a:r>
           </a:p>
           <a:p>
@@ -50156,7 +50093,7 @@
                 <a:ea typeface="맑은 고딕"/>
                 <a:cs typeface="맑은 고딕"/>
               </a:rPr>
-              <a:t>• 흐름 같은 결과물</a:t>
+              <a:t>• 흐름 · 처리 건</a:t>
             </a:r>
           </a:p>
         </p:txBody>
@@ -50169,7 +50106,7 @@
         </p:nvSpPr>
         <p:spPr>
           <a:xfrm>
-            <a:off x="6461607" y="5042154"/>
+            <a:off x="6461607" y="4922075"/>
             <a:ext cx="822960" cy="292608"/>
           </a:xfrm>
           <a:prstGeom prst="roundRect">
@@ -50200,7 +50137,7 @@
         </p:nvSpPr>
         <p:spPr>
           <a:xfrm>
-            <a:off x="6461607" y="5042154"/>
+            <a:off x="6461607" y="4922075"/>
             <a:ext cx="822960" cy="292608"/>
           </a:xfrm>
           <a:prstGeom prst="rect">
@@ -50239,8 +50176,8 @@
         </p:nvSpPr>
         <p:spPr>
           <a:xfrm>
-            <a:off x="9075191" y="2510790"/>
-            <a:ext cx="2567863" cy="2961132"/>
+            <a:off x="9075191" y="2630868"/>
+            <a:ext cx="2567863" cy="2720975"/>
           </a:xfrm>
           <a:prstGeom prst="roundRect">
             <a:avLst>
@@ -50272,7 +50209,7 @@
         </p:nvSpPr>
         <p:spPr>
           <a:xfrm>
-            <a:off x="9303791" y="2711958"/>
+            <a:off x="9303791" y="2832036"/>
             <a:ext cx="731520" cy="731520"/>
           </a:xfrm>
           <a:prstGeom prst="ellipse">
@@ -50302,14 +50239,14 @@
           <p:nvPr/>
         </p:nvPicPr>
         <p:blipFill>
-          <a:blip r:embed="rId5"/>
+          <a:blip r:embed="rId6"/>
           <a:stretch>
             <a:fillRect/>
           </a:stretch>
         </p:blipFill>
         <p:spPr>
           <a:xfrm>
-            <a:off x="9457410" y="2865577"/>
+            <a:off x="9457410" y="2985655"/>
             <a:ext cx="424281" cy="424281"/>
           </a:xfrm>
           <a:prstGeom prst="rect">
@@ -50325,8 +50262,8 @@
         </p:nvSpPr>
         <p:spPr>
           <a:xfrm>
-            <a:off x="9239783" y="3534918"/>
-            <a:ext cx="2238679" cy="1434084"/>
+            <a:off x="9239783" y="3654996"/>
+            <a:ext cx="2238679" cy="1193927"/>
           </a:xfrm>
           <a:prstGeom prst="rect">
             <a:avLst/>
@@ -50409,7 +50346,7 @@
         </p:nvSpPr>
         <p:spPr>
           <a:xfrm>
-            <a:off x="9303791" y="5042154"/>
+            <a:off x="9303791" y="4922075"/>
             <a:ext cx="822960" cy="292608"/>
           </a:xfrm>
           <a:prstGeom prst="roundRect">
@@ -50440,7 +50377,7 @@
         </p:nvSpPr>
         <p:spPr>
           <a:xfrm>
-            <a:off x="9303791" y="5042154"/>
+            <a:off x="9303791" y="4922075"/>
             <a:ext cx="822960" cy="292608"/>
           </a:xfrm>
           <a:prstGeom prst="rect">
@@ -52965,7 +52902,7 @@
       </p:sp>
       <p:pic>
         <p:nvPicPr>
-          <p:cNvPr id="6" name="삽화:사건선_영역.svg" descr="illust_6855758207263699367_1792243894.png"/>
+          <p:cNvPr id="6" name="삽화:사건선_영역.svg" descr="illust_5259675158869045562_1793003853.png"/>
           <p:cNvPicPr>
             <a:picLocks noChangeAspect="1"/>
           </p:cNvPicPr>
@@ -57511,7 +57448,7 @@
       </p:sp>
       <p:pic>
         <p:nvPicPr>
-          <p:cNvPr id="6" name="삽화:스킬도구.svg" descr="illust_2659105247243488785_1792243894.png"/>
+          <p:cNvPr id="6" name="삽화:스킬도구.svg" descr="illust_460370959206957816_1793003853.png"/>
           <p:cNvPicPr>
             <a:picLocks noChangeAspect="1"/>
           </p:cNvPicPr>

--- a/산출물/통합반/이론/11회차/통합반_11일차.pptx
+++ b/산출물/통합반/이론/11회차/통합반_11일차.pptx
@@ -565,7 +565,27 @@
           <a:lstStyle/>
           <a:p>
             <a:r>
-              <a:t>안녕하세요. 이번 회차에서는 쿨러 사건을 따라 지식, 에이전트, 프로세스가 무엇을 주고받는지 되짚습니다. 지식은 판단의 재료이고, 에이전트는 근거를 조회해 추천하며, 프로세스는 사람의 승인과 시스템 실행을 다음 차례로 잇습니다. 그 연결을 교대 인수인계에도 적용해 보겠습니다. 다음 교대에 전달할 메모를 실제 설비와 정비·재고 자료에 대조하고, 두 사람이 검토하고 보완하는 흐름을 만듭니다. 마지막에는 제품 시연에서 같은 역할과 구현 차이를 확인합니다.</a:t>
+              <a:t>[짚을 곳] 큰 제목 → 부제</a:t>
+            </a:r>
+          </a:p>
+          <a:p>
+            <a:r>
+              <a:t>· 이번 회차의 물음: 쿨러 사건 한 건에서 지식 · 에이전트 · 프로세스는 무엇을 주고받았나</a:t>
+            </a:r>
+          </a:p>
+          <a:p>
+            <a:r>
+              <a:t>· 세 영역의 몫: 지식은 판단의 재료, 에이전트는 근거를 조회해 추천, 프로세스는 사람의 승인과 시스템 실행을 다음 차례로 잇는다</a:t>
+            </a:r>
+          </a:p>
+          <a:p>
+            <a:r>
+              <a:t>· 흐름: 쿨러 사건으로 세 영역의 연결을 되짚기 → 교대 인수인계에 적용(메모를 설비 · 정비 · 재고 자료와 대조, 두 사람의 검토와 보완) → 제품 시연에서 같은 역할과 구현 차이 확인</a:t>
+            </a:r>
+          </a:p>
+          <a:p>
+            <a:r>
+              <a:t>[다음] 이번 회차의 목표</a:t>
             </a:r>
           </a:p>
         </p:txBody>
@@ -635,7 +655,37 @@
           <a:lstStyle/>
           <a:p>
             <a:r>
-              <a:t>먼저 짚을 게 있어요. 경보 메시지와 지식 그래프는 서로 다른 곳에서 만들어졌습니다. 경보는 감지 서비스가 냈고, 그래프는 사람이 정의하고 적재했죠. 이 둘이 만나는 지점은 딱 값 하나예요. 경보의 패턴 칸에 쿨러 성능 저하를 뜻하는 코드가 적혀 있었죠. 그래프의 이상 패턴 노드에도 같은 코드가 속성으로 들어 있습니다. 진단 도구는 이 코드로 그래프의 출발 노드를 찾아요. 화면 맨 왼쪽 아래 동그라미가 그 노드입니다. 노드에는 클래스 이름을 적었고, 가운데 진한 노드는 여러 관계가 모이는 고장 유형이에요. 거기서부터는 관계를 따라가요. 이상 패턴이 증상을 감지하고, 증상이 고장 유형을 가리킵니다. 유온 상승이라는 증상을 거쳐서 쿨러 냉각 성능 상실이라는 고장 유형에 닿는 거죠. 그런데 마지막 화살표를 보세요. 방향이 반대예요. 원인이 고장 유형을 일으킨다는 관계라서, 원인 쪽에서 고장 유형 쪽으로 향합니다. 진단 도구는 이 화살표를 거슬러 올라가서 원인 후보를 얻어요. 후보는 셋입니다. 쿨러 핀 오염, 팬 구동 불량, 주변 온도 상승이죠. 앞에서 경보 메시지에는 원인이 없다고 했는데, 그 빈칸에 들어갈 수 있는 답들이 여기서 처음 나온 거예요. 만약 경보의 코드와 그래프의 코드가 달랐다면 어떻게 됐을까요? 진단 도구는 출발 노드부터 찾지 못했을 겁니다. 여러 저장소가 같은 대상을 같은 값으로 가리키도록 식별자를 맞춰 둔 까닭이, 바로 여기서 드러나는 거예요.</a:t>
+              <a:t>[짚을 곳] 왼쪽 아래 AnomalyPattern → Symptom → 가운데 진한 FailureMode ← Cause</a:t>
+            </a:r>
+          </a:p>
+          <a:p>
+            <a:r>
+              <a:t>· 경보(감지 서비스가 냄)와 지식 그래프(사람이 정의 · 적재)는 따로 만들어졌고, 만나는 지점은 값 하나</a:t>
+            </a:r>
+          </a:p>
+          <a:p>
+            <a:r>
+              <a:t>· 경보의 pattern 코드 = 이상 패턴 노드의 code 속성 → 진단 도구가 출발 노드를 찾는다</a:t>
+            </a:r>
+          </a:p>
+          <a:p>
+            <a:r>
+              <a:t>· 이상 패턴 -감지→ 증상(유온 상승) -가리킴→ 고장 유형(쿨러 냉각 성능 상실)</a:t>
+            </a:r>
+          </a:p>
+          <a:p>
+            <a:r>
+              <a:t>· 마지막 화살표는 반대 방향(원인이 고장 유형을 일으킨다) → 거슬러 올라가 원인 후보 셋: 쿨러 핀 오염, 팬 구동 불량, 주변 온도 상승</a:t>
+            </a:r>
+          </a:p>
+          <a:p>
+            <a:r>
+              <a:t>· 코드가 달랐다면 출발 노드부터 못 찾는다 — 저장소끼리 식별자를 맞춰 둔 까닭</a:t>
+            </a:r>
+          </a:p>
+          <a:p>
+            <a:r>
+              <a:t>[다음] 이 길의 질의문</a:t>
             </a:r>
           </a:p>
         </p:txBody>
@@ -705,7 +755,37 @@
           <a:lstStyle/>
           <a:p>
             <a:r>
-              <a:t>방금 화살표로 따라간 길이 실제로는 어떤 질의로 적힐까요? 화면 왼쪽이 진단 도구가 원인 후보를 찾을 때 그래프 DB에 보내는 Cypher 조회문입니다. 그 길을 네 줄로 적은 거예요. 첫 줄에 달러 표시가 붙은 자리가 있죠. 여기에 경보의 패턴 코드가 들어갑니다. 그 코드를 가진 이상 패턴 노드에서 출발하라는 뜻이에요. 둘째 줄은 감지 관계로 증상에, 셋째 줄은 가리킴 관계로 고장 유형에 간다는 뜻이고요. 마지막 줄은 일으킴 관계를 거꾸로 거슬러서 원인에 닿는다는 뜻입니다. 화살표 방향이 앞 줄과 반대로 적힌 게 보이시죠? 이 조회문은 에이전트가 그때그때 지어서 쓰는 게 아니에요. 진단 도구 안에 미리 정해져 있고, 에이전트가 하는 일은 경보의 패턴 코드를 넘겨주는 것뿐입니다. 같은 조회 조건과 같은 데이터라면 같은 후보 집합을 찾을 수 있죠. 그 뒤의 진단 결과는 센서 값이나 기준이 바뀌면 달라질 수 있습니다. 어느 길로 후보를 찾았는지 재현할 수 있다는 점이 이 조회의 가치예요. 여기 나온 이상 패턴, 증상, 고장 유형, 원인은 스키마에 정의한 클래스예요. 관계의 이름과 방향도 스키마에서 정했고요. 그러니까 길은 스키마가 정했고, 그 길을 따라 돌아오는 건 쿨러 핀 오염 같은 인스턴스입니다. 여기서는 관계를 설계한 것과 실제 데이터를 연결한 것을 나눠 보세요. 스키마에 관계를 정의했더라도, 적재된 데이터에 그 연결이 없으면 이 조회에서 후보가 빠질 수 있습니다. 반대로 관계를 잘못 설계하거나 질의를 틀리게 쓰면 검증 오류가 날 수도 있죠. 후보가 없다는 결과만으로 실제 원인이 없다고 결론 내리지 말고, 조회 조건과 적재된 연결을 함께 확인해야 합니다.</a:t>
+              <a:t>[짚을 곳] 왼쪽 Cypher 네 줄 → 오른쪽 세 줄</a:t>
+            </a:r>
+          </a:p>
+          <a:p>
+            <a:r>
+              <a:t>· 1줄 $pattern 자리에 경보의 패턴 코드, 2줄 DETECTS로 증상, 3줄 INDICATES로 고장 유형, 4줄 CAUSES를 거슬러(화살표 방향 반대) 원인</a:t>
+            </a:r>
+          </a:p>
+          <a:p>
+            <a:r>
+              <a:t>· 질의문은 진단 도구 안에 미리 정해져 있고, 에이전트는 패턴 코드만 넘긴다 → 같은 조건 · 같은 데이터면 같은 후보 집합, 어느 길로 찾았는지 재현 가능</a:t>
+            </a:r>
+          </a:p>
+          <a:p>
+            <a:r>
+              <a:t>· 진단 결과는 센서 값이나 기준이 바뀌면 달라질 수 있다</a:t>
+            </a:r>
+          </a:p>
+          <a:p>
+            <a:r>
+              <a:t>· 클래스와 관계의 이름 · 방향은 스키마가 정했고, 돌아오는 것은 쿨러 핀 오염 같은 인스턴스</a:t>
+            </a:r>
+          </a:p>
+          <a:p>
+            <a:r>
+              <a:t>· 관계를 정의한 것 ≠ 데이터에 연결이 적재된 것. 후보가 없으면 원인이 없다고 단정하지 말고 질의 조건과 적재된 연결부터 확인</a:t>
+            </a:r>
+          </a:p>
+          <a:p>
+            <a:r>
+              <a:t>[다음] 기준과 현재 값</a:t>
             </a:r>
           </a:p>
         </p:txBody>
@@ -775,7 +855,37 @@
           <a:lstStyle/>
           <a:p>
             <a:r>
-              <a:t>후보 셋을 찾았으니 이제 어떤 후보를 근거가 지지하는지 봅니다. 화면 왼쪽은 판단 기준이고, 오른쪽은 그 기준에 대어 볼 관측값이에요. 같은 숫자처럼 보여도 역할이 다릅니다. 왼쪽은 수업에서 사용하는 설비 매뉴얼의 기준입니다. 쿨러 핀 오염을 지지하는 조건은 최근 냉각 효율 평균이 70퍼센트 미만이고, 팬 진동 평균이 초당 0.9밀리미터 미만인 경우예요. 냉각 효율은 냉각 성능이 떨어졌는지를 보고, 팬 진동은 다른 후보인 팬 구동 불량의 기준과 구별하는 데 씁니다. 팬 구동 불량 쪽은 같은 진동 기준 이상, 주변 온도 상승 쪽은 캐비닛 온도 35도 이상을 봅니다. 이 수치가 모든 설비에 통하는 진단 법칙은 아니에요. 이 수업 사례에 등록된 후보와 기준입니다. 진동이 낮다는 사실 하나로 팬의 모든 고장을 배제할 수도 없죠. 적용할 설비와 측정 조건을 확인한 기준이어야 판단에 쓸 수 있습니다. 오른쪽은 당시 판단에 사용한 관측값입니다. 냉각 효율은 46퍼센트쯤이고, 팬 진동은 기준 아래였어요. 캐비닛 온도도 30도가 안 됐습니다. 이 값을 각각의 조건에 대면, 등록된 후보 가운데 쿨러 핀 오염 쪽의 근거가 맞습니다. 다른 두 후보는 이때의 기준을 충족하지 못했고요. 여기서 얻는 것은 관측과 등록 지식에 근거한 진단입니다. 현장에 있을 수 있는 모든 원인을 검사했다는 뜻은 아닙니다. HYD는 기준과 관계를 그래프에서 관리하고, 자주 바뀌는 관측값은 시계열 DB에서 읽도록 나눴습니다. 그래프에 시간과 값을 저장할 수 없어서가 아니에요. 기준을 누가 개정하는지와 측정값이 어디에서 갱신되는지를 분명하게 관리하려는 선택입니다. 기준은 검토를 거쳐 개정하고, 값은 읽은 시각과 측정 조건까지 확인해야 하죠. 값이 새로 왔다고 기준을 덮어쓰거나, 오래된 값을 현재 값처럼 쓰면 두 역할이 섞입니다. 원인 후보를 구별하는 이유도 분명해요. 핀 오염에는 세척이, 팬 문제에는 팬 점검이, 주변 온도 문제에는 환기 개선이 필요하니까요. 진단 도구는 관계로 후보를 찾고, 기준과 관측을 대조해 그때 지지되는 후보를 제시합니다. 어떤 판단이든 이 근거의 범위까지 함께 읽어야 합니다.</a:t>
+              <a:t>[짚을 곳] 왼쪽 지식 그래프의 증거 기준 → 오른쪽 시계열 DB의 현재 값</a:t>
+            </a:r>
+          </a:p>
+          <a:p>
+            <a:r>
+              <a:t>· 기준(수업 설비 매뉴얼): 핀 오염 = 냉각 효율 평균 70 % 미만 + 팬 진동 평균 0.9 mm/s 미만, 팬 구동 불량 = 팬 진동 0.9 mm/s 이상, 주변 온도 상승 = 캐비닛 온도 35 ℃ 이상</a:t>
+            </a:r>
+          </a:p>
+          <a:p>
+            <a:r>
+              <a:t>· 진동 기준은 핀 오염과 팬 구동 불량을 가르는 데 쓴다. 모든 설비에 통하는 법칙이 아니라 이 사례에 등록된 후보와 기준</a:t>
+            </a:r>
+          </a:p>
+          <a:p>
+            <a:r>
+              <a:t>· 관측값: 냉각 효율 46.2 %, 팬 진동 약 0.58 mm/s, 캐비닛 온도 28 ℃ → 등록된 후보 가운데 핀 오염의 근거가 맞고 나머지 둘은 기준 미충족</a:t>
+            </a:r>
+          </a:p>
+          <a:p>
+            <a:r>
+              <a:t>· 등록 지식과 관측에 근거한 진단일 뿐, 현장의 모든 원인을 검사한 것은 아니다</a:t>
+            </a:r>
+          </a:p>
+          <a:p>
+            <a:r>
+              <a:t>· 기준은 그래프(검토 · 개정), 값은 시계열 DB(읽은 시각 · 측정 조건 확인)로 나눈 것은 갱신 책임을 가르려는 선택</a:t>
+            </a:r>
+          </a:p>
+          <a:p>
+            <a:r>
+              <a:t>[다음] 조치의 판단으로</a:t>
             </a:r>
           </a:p>
         </p:txBody>
@@ -845,7 +955,27 @@
           <a:lstStyle/>
           <a:p>
             <a:r>
-              <a:t>원인이 정해졌으니 다음은 조치예요. 세 번째 단원은 조치의 판단과 출처입니다. 쿨러 핀 오염이라는 원인 앞에서 무엇을 해야 할까요? 그리고 그 판단의 근거는 어디까지 거슬러 볼 수 있을까요? 조치 후보를 견주는 판단, 그리고 추천안에 근거가 남는 방식을 따라가 보겠습니다.</a:t>
+              <a:t>[짚을 곳] 단원명 → 부제</a:t>
+            </a:r>
+          </a:p>
+          <a:p>
+            <a:r>
+              <a:t>· 단원의 물음: 쿨러 핀 오염이라는 원인 앞에서 무엇을 해야 하나, 그 판단의 근거는 어디까지 거슬러 볼 수 있나</a:t>
+            </a:r>
+          </a:p>
+          <a:p>
+            <a:r>
+              <a:t>· 따라갈 것: 조치 후보를 견주는 판단, 추천안에 근거가 남는 방식</a:t>
+            </a:r>
+          </a:p>
+          <a:p>
+            <a:r>
+              <a:t>· 원인 후보마다 필요한 조치가 다르다(핀 오염 → 세척, 팬 → 팬 점검, 주변 온도 → 환기 개선)</a:t>
+            </a:r>
+          </a:p>
+          <a:p>
+            <a:r>
+              <a:t>[다음] 설비 바깥의 값</a:t>
             </a:r>
           </a:p>
         </p:txBody>
@@ -915,7 +1045,37 @@
           <a:lstStyle/>
           <a:p>
             <a:r>
-              <a:t>조치를 견주려면 설비 안의 값만으로는 모자라요. 스킬의 순서를 다시 떠올려 보면, 진단 뒤에 필요하면 업무 값을 조회하도록 안내했죠. 생산 오더의 납기, 그리고 품질 로트의 사정 같은 설비 바깥 사정이에요. 이 값들은 업무 DB에 있습니다. 화면에 네 줄로 정리해 놓았어요. 위의 두 줄은 에이전트가 부르는 업무 조회 도구예요. 첫 줄은 생산 실행 시스템, MES에 해당하는 업무 DB에서 HYD-01에 걸린 생산 오더를 읽습니다. 납기까지 남은 시간과 남은 수량 같은 거죠. 둘째 줄은 품질 관리 시스템, QMS에 해당하는 업무 DB에서 이 설비의 품질 로트를 읽어요. 고온 구간에 생산된 로트와 검사 비용 같은 겁니다. 셋째 줄, 강조해 둔 줄을 보세요. 이런 값은 계속 바뀌니까 지식 그래프에 값으로 넣어 두지 않았어요. 대신 업무 데이터베이스를 등록할 때, 어느 표의 어느 열에 이 값이 있고 어떻게 읽는지를 입력 데이터의 자리로 만들어 뒀습니다. 그러니까 지식에 등록된 건 값이 아니라, 값이 놓인 자리예요. 넷째 줄은 이 자리를 쓰는 또 하나의 도구, 곧이어 부를 조치 평가 도구입니다. 평가 도구는 에이전트가 조회해 둔 값을 넘겨받지 않아요. 이 자리를 따라 판단하는 순간의 값을 직접 읽어서 순위에 넣습니다. 쿨러 사건에서는 납기가 여섯 시간이 채 안 남은 오더, 늦어지면 시간마다 적지 않은 지연 보상이 붙는 계약, 그리고 출하를 기다리는 로트 수백 개가 읽혔어요. 그럼 업무 조회 도구는 왜 따로 있을까요? 같은 자리를 읽어서, 에이전트가 그날의 사정을 확인하고 추천안의 설명에 담기 위해서예요. 그리고 평가 도구가 읽은 값은 값마다 어느 시스템에서 어떻게, 언제 읽었는지가 처리 기록에 남습니다. 같은 설비에 같은 원인이라도 그날의 납기 사정에 따라 순위가 달라질 수 있고, 왜 달라졌는지도 기록에서 확인할 수 있는 거죠. 이런 값을 지식처럼 한 번 적어 두고 쓰지 않고, 판단할 때마다 새로 읽는 까닭입니다.</a:t>
+              <a:t>[짚을 곳] 네 줄 위에서부터, 셋째 줄(강조)</a:t>
+            </a:r>
+          </a:p>
+          <a:p>
+            <a:r>
+              <a:t>· 조치를 견주려면 설비 안의 값만으로는 모자라다 — 납기와 품질 같은 설비 바깥 사정은 업무 DB에 있다</a:t>
+            </a:r>
+          </a:p>
+          <a:p>
+            <a:r>
+              <a:t>· mes_orders: MES에 해당하는 업무 DB에서 HYD-01의 생산 오더(납기까지 남은 시간, 남은 수량), qms_lots: QMS에서 품질 로트(고온 구간 로트, 검사 비용)</a:t>
+            </a:r>
+          </a:p>
+          <a:p>
+            <a:r>
+              <a:t>· 지식에 등록된 것은 값이 아니라 값이 놓인 자리와 읽는 방법(업무 DB를 등록할 때 열마다 입력 데이터의 자리)</a:t>
+            </a:r>
+          </a:p>
+          <a:p>
+            <a:r>
+              <a:t>· 조치 평가 도구는 에이전트가 조회한 값을 넘겨받지 않고 같은 자리를 따라 판단 순간의 값을 직접 읽는다. 이 사건: 납기까지 약 6시간, 지연 보상 시간당 120만 원, 출하 대기 로트 800개</a:t>
+            </a:r>
+          </a:p>
+          <a:p>
+            <a:r>
+              <a:t>· 읽은 값마다 시스템 · 방법 · 시각이 처리 기록에 남아, 같은 원인이라도 그날 사정에 따라 순위가 바뀐 까닭을 확인할 수 있다</a:t>
+            </a:r>
+          </a:p>
+          <a:p>
+            <a:r>
+              <a:t>[다음] 평가 결과</a:t>
             </a:r>
           </a:p>
         </p:txBody>
@@ -985,7 +1145,37 @@
           <a:lstStyle/>
           <a:p>
             <a:r>
-              <a:t>이제 조치 평가 도구를 부를 차례예요. 이 도구를 한 번 불러서 받은 결과가 이 표입니다. 앞 장 넷째 줄의 도구 이름에 카드라는 말이 들어 있었죠? 조치 후보 하나하나를 카드라고 부릅니다. 후보는 넷이고, 칸은 순위, 조치와 점수와 판단 규칙, 승인 역할 세 칸이에요. 후보는 어디서 왔을까요? 쿨러 냉각 성능 상실이라는 고장 유형에 이어진 SOP가 넷이었고, 그 넷이 그대로 후보가 됐습니다. 먼저 DMN 결정표로 적은 판단 규칙이, 지금 설비 상태에서 각 후보를 해도 되는지 가렸어요. 가운데 칸의 둘째 줄을 보세요. 원격으로 하는 위의 세 조치는 설비가 원격 자동으로 운전 중일 때만 할 수 있는데, 이 사례에서는 그 조건을 충족했습니다. 실제 허용 여부는 운전 모드만이 아니라 각 조치에 연결된 나머지 조건도 함께 확인한 결과예요. 맨 아래 핀 세척은 작업지시라서 운전 모드와 상관없이 남고요. 그다음 BSC 관점으로 정한 KPI, 곧 성과 기준이 남은 후보의 순위를 매겼어요. 앞 장에서 본 납기 사정도 여기서 점수에 들어갑니다. 맨 윗줄, 1순위가 팬 최대 운전이고 점수가 가장 높습니다. 납기처럼 생산을 유지하는 데 가치를 두는 성과 기준이 반영된 결과예요. 한 조건만으로 순위가 정해지는 것은 아닙니다. 부하를 낮추는 두 후보는 점수가 똑같아서 공동 2순위고요. 맨 아랫줄, 원인을 없애는 쿨러 핀 세척은 당시 평가 결과에서는 점수가 마이너스였습니다. 이 점수는 그때 정한 성과 기준으로 비교한 결과이지, 조치 자체가 언제나 가치 없다는 뜻은 아니에요. 그래서 4순위예요. 이 순위와 점수를 어떻게 계산했는지는 조치 판단을 다룬 회차에서 자세히 봤죠. 그런데 4순위라고 해서 버려지는 조치는 아니에요. SOP를 배울 때 즉시 완화 조치와 근본 조치를 나눴던 걸 떠올려 보세요. 팬 최대 운전은 지금 오르는 유온을 누르는 완화 조치고, 쿨러 핀 세척은 원인을 없애는 근본 조치입니다. 당장의 순위에서는 밀렸지만, 이 세척은 뒤에서 작업지시로 다시 나타나요. 이번에는 오른쪽 승인 역할 칸을 함께 보겠습니다. 위의 세 후보는 운전원이 승인하는데, 맨 아래 쿨러 핀 세척만 설비보전팀장이 승인해요. 설비를 세우고 정비하는 일이라 승인하는 사람이 다른 겁니다. 여기서 중요한 게 있어요. 누가 승인할지를 에이전트가 판단한 게 아니라는 겁니다. 승인 역할은 조치 방법에 붙어 있는 지식이고, 에이전트는 그걸 읽어서 결과에 실었을 뿐이에요. 실제로 승인할 수 있는지는 이 정책과 처리 건의 담당, 현재 조건을 함께 확인합니다. 추천안에 역할 이름이 들어 있다고 그것만으로 승인 권한이 생기지는 않아요.</a:t>
+              <a:t>[짚을 곳] 네 줄 위에서부터 → 가운데 칸 둘째 줄 → 오른쪽 승인 역할 칸</a:t>
+            </a:r>
+          </a:p>
+          <a:p>
+            <a:r>
+              <a:t>· 후보 넷 = 쿨러 냉각 성능 상실에 이어진 SOP 넷(조치 후보 하나하나를 카드라 부른다)</a:t>
+            </a:r>
+          </a:p>
+          <a:p>
+            <a:r>
+              <a:t>· DMN 판단 규칙이 먼저 할 수 있는지 가린다: 원격 조치 셋은 원격 자동 운전일 때만, 나머지 연결 조건도 함께 확인. 핀 세척은 작업지시라 운전 모드와 무관</a:t>
+            </a:r>
+          </a:p>
+          <a:p>
+            <a:r>
+              <a:t>· 그다음 BSC 관점의 KPI(성과 기준)가 순위: 1순위 팬 최대 운전 +3.38(생산 유지에 둔 가치), 부하를 낮추는 둘 +2.75 공동 2순위, 핀 세척 -1.58 4순위 — 그때의 기준으로 비교한 결과일 뿐</a:t>
+            </a:r>
+          </a:p>
+          <a:p>
+            <a:r>
+              <a:t>· 팬 최대 운전 = 완화 조치, 핀 세척 = 근본 조치 → 세척은 뒤에서 작업지시로 다시 나타난다</a:t>
+            </a:r>
+          </a:p>
+          <a:p>
+            <a:r>
+              <a:t>· 승인 역할: 위 셋 운전원, 핀 세척만 설비보전팀장. 에이전트가 정한 것이 아니라 조치에 붙은 지식을 읽어 실은 것. 실제 승인 권한은 정책 · 담당 · 현재 조건을 함께 확인</a:t>
+            </a:r>
+          </a:p>
+          <a:p>
+            <a:r>
+              <a:t>[다음] 도구 사이로 넘어간 것</a:t>
             </a:r>
           </a:p>
         </p:txBody>
@@ -1055,7 +1245,37 @@
           <a:lstStyle/>
           <a:p>
             <a:r>
-              <a:t>평가까지 마친 결과는 제출 도구로 넘어갑니다. 그런데 도구와 도구 사이로는 무엇이 넘어갔을까요? 지금까지 거친 도구 사이를 넘어 다닌 걸 화면에 한 줄로 놓았습니다. 칸마다 아래에 적힌 게 그 칸을 가리키는 식별자예요. 여기서 볼 건, 넘어가는 게 쿨러 핀 오염이라는 말이 아니라 이 식별자라는 점입니다. 맨 왼쪽이 경보예요. 경보의 식별자가 진단 도구에 들어가면 둘째와 셋째 칸, 고장 유형과 원인의 식별자가 나옵니다. 이 예의 식별자 접두사는 고장 유형과 원인을 구별하는 표기 관례예요. 접두사 자체가 데이터의 종류나 정확성을 보장하는 것은 아닙니다. 그 두 식별자가 조치 평가 도구에 들어가서 넷째 칸이 나옵니다. 방금 본 1순위 조치 방법, 팬 최대 운전의 식별자예요. 마지막으로 제출 도구가 이것들을 묶어서 추천안 하나로 제출하면, 그 추천안에 판단 번호가 붙습니다. 맨 오른쪽 칸이에요. 식별자 대신 말로 넘기면 어떻게 될까요? 쿨러 핀 오염과 이름이 비슷한 원인이 그래프에 하나 더 있다고 해 보죠. 뒤의 도구는 어느 쪽을 읽어야 할지 알 수가 없습니다. 식별자로 넘기면 앞의 도구가 가리킨 바로 그 노드를 뒤의 도구가 읽어요. 사람이 나중에 추천안을 거슬러 볼 때도 같은 식별자로 같은 대상을 찾아갈 수 있고요.</a:t>
+              <a:t>[짚을 곳] 다섯 칸 왼쪽부터, 칸 아래 식별자 → 칸 사이 도구 이름</a:t>
+            </a:r>
+          </a:p>
+          <a:p>
+            <a:r>
+              <a:t>· 넘어가는 것은 「쿨러 핀 오염」이라는 말이 아니라 식별자</a:t>
+            </a:r>
+          </a:p>
+          <a:p>
+            <a:r>
+              <a:t>· 경보 ALT-…0014 → diagnose → 고장 유형 fm:cooler-performance-loss · 원인 cause:cooler-fin-fouling → evaluate → 조치 방법 skill:sop-cool-11(1순위 팬 최대 운전) → submit → 추천안 판단 번호 DEC-…408b</a:t>
+            </a:r>
+          </a:p>
+          <a:p>
+            <a:r>
+              <a:t>· 접두사(fm: · cause:)는 표기 관례일 뿐, 데이터의 종류나 정확성을 보장하지 않는다</a:t>
+            </a:r>
+          </a:p>
+          <a:p>
+            <a:r>
+              <a:t>· 말로 넘기면: 이름이 비슷한 원인이 하나 더 있을 때 뒤의 도구가 어느 쪽을 읽을지 모른다 → 식별자면 앞의 도구가 가리킨 바로 그 노드를 읽는다</a:t>
+            </a:r>
+          </a:p>
+          <a:p>
+            <a:r>
+              <a:t>· 사람이 추천안을 거슬러 볼 때도 같은 식별자로 같은 대상을 찾아간다</a:t>
+            </a:r>
+          </a:p>
+          <a:p>
+            <a:r>
+              <a:t>[다음] 추천안 열어 보기</a:t>
             </a:r>
           </a:p>
         </p:txBody>
@@ -1125,7 +1345,37 @@
           <a:lstStyle/>
           <a:p>
             <a:r>
-              <a:t>그 판단 번호가 붙은 추천안을 열어 볼게요. 화면 왼쪽이 제출 도구로 낸 추천안을 항목별로 나눠 적은 거예요. 맨 위가 방금 본 판단 번호고요. 그 아래 항목들이 앞의 도구들이 읽고 계산한 결과를 어떻게 담고 있는지 볼게요. 원인은 쿨러 핀 오염입니다. 그 아래 근거에는 팬 진동은 정상인데 냉각 효율이 절반에 못 미치는 46퍼센트쯤으로 떨어져 있다는 값이 적혔어요. 진단 도구가 시계열 DB에서 읽은 값이죠. 배제 칸에는 맞지 않은 후보 둘, 팬 구동 불량과 주변 온도 상승이 적혔습니다. 다른 두 후보가 등록된 기준을 충족하지 못한 이유까지 남긴 거예요. 추천은 팬 최대 운전이고, 평가에서 받은 점수가 같이 실렸습니다. 그 아래 예측은, 이 조치를 하면 주어진 가정에서 유온이 50도 조금 아래로 내려갈 것으로 본 계산 결과고요. 예측값은 실제로 측정한 회복 온도와 구별해야 합니다. 예측이 좋아 보여도 실행 뒤에는 다시 관측해야 해요. 마지막 줄이 출처예요. 매뉴얼의 즉시 완화 조치 절을 가리킵니다. 승인하는 사람 입장에서 생각해 볼까요? 원인과 추천만 있다면 믿을지 말지 정할 근거가 없습니다. 근거가 된 값, 배제한 후보, 예측, 출처가 함께 있으니까, 무엇을 보고 이렇게 판단했는지 확인할 수 있는 거예요.</a:t>
+              <a:t>[짚을 곳] 왼쪽 추천안 항목 위에서부터 → 오른쪽 세 줄</a:t>
+            </a:r>
+          </a:p>
+          <a:p>
+            <a:r>
+              <a:t>· 원인 쿨러 핀 오염, 근거: 팬 진동은 기준 미만 · 냉각 효율 약 46 %(진단 도구가 시계열 DB에서 읽은 값)</a:t>
+            </a:r>
+          </a:p>
+          <a:p>
+            <a:r>
+              <a:t>· 배제: 팬 구동 불량 · 주변 온도 상승 — 등록된 기준을 충족하지 못한 이유까지</a:t>
+            </a:r>
+          </a:p>
+          <a:p>
+            <a:r>
+              <a:t>· 추천 팬 최대 운전 · 점수 3.38, 예측 유온 약 50 ℃(주어진 가정의 계산) — 실제로 측정한 회복 온도와 구별, 실행 뒤에는 다시 관측</a:t>
+            </a:r>
+          </a:p>
+          <a:p>
+            <a:r>
+              <a:t>· 출처: 매뉴얼의 즉시 완화 조치 절</a:t>
+            </a:r>
+          </a:p>
+          <a:p>
+            <a:r>
+              <a:t>· 승인자 입장: 원인과 추천만 있으면 믿을 근거가 없다. 근거 값 · 배제 후보 · 예측 · 출처가 함께 있어야 무엇을 보고 판단했는지 확인한다</a:t>
+            </a:r>
+          </a:p>
+          <a:p>
+            <a:r>
+              <a:t>[다음] 출처는 어디서 왔나</a:t>
             </a:r>
           </a:p>
         </p:txBody>
@@ -1195,7 +1445,42 @@
           <a:lstStyle/>
           <a:p>
             <a:r>
-              <a:t>추천안 맨 아래의 출처는 어떻게 여기까지 실려 왔을까요? 판단하는 자리에서 새로 만든 게 아닙니다. 매뉴얼을 지식으로 옮기는 인제스천 과정에서 미리 남겨 둔 연결을 따라온 거예요. 화면의 다섯 칸을 왼쪽부터 따라가 볼게요. 첫 칸은 매뉴얼 원문입니다. 원인과 증거 기준은 원인과 증거를 다룬 절에, 팬 최대 운전 같은 조치는 즉시 완화 조치를 다룬 절에 적혀 있었어요. 둘째 칸에서 원문 문장을 읽어 지식 후보를 뽑고, 사람이 원문과 대조해서 검토하고 승인하는 절차를 거칩니다. 왜 굳이 사람이 볼까요? 앞에서 그래프의 기준은 여러 판단이 함께 쓴다고 했죠. 잘못 뽑힌 기준 하나가 적재되면, 그 뒤의 판단이 전부 그 기준을 따르게 됩니다. 그래서 들어가기 전에 한 번 거르는 거예요. 셋째 칸, 적재에서는 후보만 넣은 게 아니에요. 문서의 절을 노드로 두고, 작업 단계는 그 절을 참조한다는 관계로, 판단 규칙은 그 절에서 나왔다는 관계로 이어 뒀습니다. 앞에서 본 원인의 증거 기준도 마찬가지예요. 원인과 증거를 다룬 절과 원문 인용 구간이 붙은 채로 적재됐습니다. 출처는 조치에만 있는 게 아니라 원인을 가린 기준에도 있는 거죠. 넷째 칸의 HYD 판단 경로는 이 사례에서 문서를 새로 검색하는 대신 적재된 관계를 읽습니다. 규칙과 SOP를 관계를 따라 읽으니까, 그 규칙이 이어진 절이 같이 딸려 오는 거죠. 그래서 마지막 칸, 추천안의 출처에 즉시 완화 조치 절이 실린 겁니다. 출처가 있으면 승인하는 사람이 추천안에서 출발해서 매뉴얼의 그 절까지 거슬러 갈 수 있어요. 반대로 적재할 때 출처 관계를 안 남겼다면 어떨까요? 판단은 똑같이 나와도 근거 문서는 비어 있겠죠. 출처 연결은 판단을 검토할 길을 열어 줍니다. 링크가 있다는 것만으로 내용이 맞는 건 아니에요. 문서 판본과 적용 대상, 인용한 문장이 실제로 그 기준을 뒷받침하는지까지 대조할 수 있어야 합니다.</a:t>
+              <a:t>[짚을 곳] 다섯 칸 왼쪽부터</a:t>
+            </a:r>
+          </a:p>
+          <a:p>
+            <a:r>
+              <a:t>· 출처는 판단하는 자리에서 새로 만든 것이 아니라 인제스천 때 미리 남긴 연결을 따라온 것</a:t>
+            </a:r>
+          </a:p>
+          <a:p>
+            <a:r>
+              <a:t>· 원문: HM-8.4 원인과 증거, HM-8.5 즉시 완화 조치</a:t>
+            </a:r>
+          </a:p>
+          <a:p>
+            <a:r>
+              <a:t>· 추출과 검토: 원문 문장에서 지식 후보를 뽑고 사람이 원문과 대조해 승인 — 잘못 뽑힌 기준 하나가 적재되면 뒤의 판단이 전부 따른다</a:t>
+            </a:r>
+          </a:p>
+          <a:p>
+            <a:r>
+              <a:t>· 적재: 절을 노드로, 작업 단계는 그 절을 참조(REFERS_TO), 판단 규칙은 그 절에서 나왔다(DERIVED_FROM). 원인의 증거 기준에도 절과 인용 구간이 붙는다</a:t>
+            </a:r>
+          </a:p>
+          <a:p>
+            <a:r>
+              <a:t>· 판단: 이 사례는 문서를 새로 검색하지 않고 적재된 관계를 읽는다 → 규칙이 이어진 절이 같이 딸려 와 추천안 출처 「HM-8.5」</a:t>
+            </a:r>
+          </a:p>
+          <a:p>
+            <a:r>
+              <a:t>· 링크가 있다고 내용이 맞는 것은 아니다. 판본 · 적용 대상 · 인용 문장까지 대조</a:t>
+            </a:r>
+          </a:p>
+          <a:p>
+            <a:r>
+              <a:t>[다음] 지식이 비었을 때</a:t>
             </a:r>
           </a:p>
         </p:txBody>
@@ -1265,7 +1550,37 @@
           <a:lstStyle/>
           <a:p>
             <a:r>
-              <a:t>표는 지식이나 값이 비었을 때 먼저 살펴볼 곳입니다. 출력이 이상하다고 곧바로 에이전트의 문장부터 고치면, 원래 원인을 놓칠 수 있어요. 위 두 줄은 후보가 빠지는 경우입니다. 질의가 따라갈 데이터의 관계가 없거나, SOP와 고장 유형의 연결이 없으면 후보가 누락될 수 있어요. 조회가 정상 종료돼도 답이 빈 경우가 있다는 뜻입니다. 다만 빈 결과는 연결 누락만의 증거는 아니에요. 조회 조건, 접근 권한, 적재 대상도 살펴봐야 합니다. 반대로 형식 오류라면 검사에서 바로 거절될 수 있고요. 가운데 두 줄은 판단 근거를 충분히 확보하지 못한 경우예요. HYD 진단 도구는 증거가 부족하거나 데이터 신선도 검사를 통과하지 못하면 보류를 반환합니다. 스킬에도 모르는 값을 꾸미지 말고 보류 이유를 내도록 정해 뒀죠. 지침을 적었다고 모델이 언제나 지킨다고 믿는 대신, 도구의 검사와 실제 제출 결과를 함께 확인합니다. 보류가 나오면 무엇을 더 확인해야 하는지가 남아야 합니다. 원천 연결을 복구해야 하는지, 새 값을 기다려야 하는지, 기준을 다시 검토해야 하는지가 달라요. 재시도나 재평가를 할 때는 그 이유를 해결했는지 먼저 봅니다. 보류는 업무 완료와도 다르고, 틀린 값을 넣어 빈칸을 채우라는 요청도 아닙니다. 마지막 줄은 출처입니다. 규칙에서 원문 절로 이어지는 관계가 빠지면 추천은 나와도 그 기준의 근거를 추적하기 어렵습니다. 후보의 누락, 근거 부족, 출처 누락을 나눠 보면 확인할 자리도 구체적으로 좁힐 수 있어요.</a:t>
+              <a:t>[짚을 곳] 표 다섯 줄 위에서부터, 넷째 줄(강조)</a:t>
+            </a:r>
+          </a:p>
+          <a:p>
+            <a:r>
+              <a:t>· 출력이 이상하다고 곧바로 에이전트의 문장부터 고치면 원래 원인을 놓친다</a:t>
+            </a:r>
+          </a:p>
+          <a:p>
+            <a:r>
+              <a:t>· 위 두 줄 후보 누락: 데이터의 관계나 SOP와 고장 유형의 연결이 없으면 조회가 정상 종료돼도 답이 빈다. 빈 결과는 연결 누락만의 증거가 아니다(조회 조건 · 접근 권한 · 적재 대상)</a:t>
+            </a:r>
+          </a:p>
+          <a:p>
+            <a:r>
+              <a:t>· 가운데 두 줄 근거 부족: 증거가 모자라거나 데이터 신선도 검사를 통과하지 못하면 HYD 진단 도구는 보류. 스킬의 보류 지침과 함께 도구의 검사와 실제 제출 결과를 확인</a:t>
+            </a:r>
+          </a:p>
+          <a:p>
+            <a:r>
+              <a:t>· 보류 뒤 남길 것: 원천 연결 복구인지, 새 값을 기다릴지, 기준 재검토인지. 보류 ≠ 업무 완료</a:t>
+            </a:r>
+          </a:p>
+          <a:p>
+            <a:r>
+              <a:t>· 마지막 줄 출처 누락: 규칙에서 원문 절로 가는 관계가 빠지면 추천은 나와도 근거 추적이 어렵다</a:t>
+            </a:r>
+          </a:p>
+          <a:p>
+            <a:r>
+              <a:t>[다음] 고칠 곳 가르기</a:t>
             </a:r>
           </a:p>
         </p:txBody>
@@ -1335,7 +1650,32 @@
           <a:lstStyle/>
           <a:p>
             <a:r>
-              <a:t>이번 회차의 학습목표를 보겠습니다. 첫째, 에이전트가 도구로 읽는 지식과 현재 값을 구별하고 판단의 출처를 확인합니다. 둘째, 제안과 사람의 승인, 시스템 실행, 결과 확인을 구분해 업무가 끝나는 과정을 설명합니다. 셋째, 교대 인수인계에서 제공된 문서와 에이전트, 흐름을 연결하고 실제 검토와 보완을 확인합니다. 마지막으로 제품 시연에서 같은 역할과 구현 차이를 살피고, 실습 결과를 학습 노트에 정리합니다.</a:t>
+              <a:t>[짚을 곳] 카드 넷 왼쪽부터(수업 순서)</a:t>
+            </a:r>
+          </a:p>
+          <a:p>
+            <a:r>
+              <a:t>· 지식과 판단: 에이전트가 도구로 읽는 지식과 현재 값을 구별하고 판단의 출처를 확인</a:t>
+            </a:r>
+          </a:p>
+          <a:p>
+            <a:r>
+              <a:t>· 제안과 업무 완료: 제안 · 사람의 승인 · 시스템 실행 · 결과 확인을 구분해 업무가 끝나는 과정을 설명</a:t>
+            </a:r>
+          </a:p>
+          <a:p>
+            <a:r>
+              <a:t>· 교대 인수인계: 제공된 문서 · 에이전트 · 흐름을 연결하고 실제 검토와 보완을 확인</a:t>
+            </a:r>
+          </a:p>
+          <a:p>
+            <a:r>
+              <a:t>· 제품에서 확인: 시연에서 같은 역할과 구현 차이를 살피고 실습 결과를 학습 노트에 정리</a:t>
+            </a:r>
+          </a:p>
+          <a:p>
+            <a:r>
+              <a:t>[다음] 여덟 단원</a:t>
             </a:r>
           </a:p>
         </p:txBody>
@@ -1405,7 +1745,32 @@
           <a:lstStyle/>
           <a:p>
             <a:r>
-              <a:t>고칠 곳은 무엇이 바뀌었느냐에 따라 달라요. 화면 왼쪽이 지식을 고치는 경우, 오른쪽이 에이전트를 고치는 경우입니다. 매뉴얼이 개정돼서 기준값이 바뀌었다고 해 보죠. 조치 방법이나 승인 역할이 바뀐 경우도 마찬가지예요. 이때는 지식을 고칩니다. 개정된 문서를 다시 인제스천해서 검토하고 적재하면 돼요. 조회 방식과 데이터 계약이 유지된다면, 같은 진단 도구가 개정된 기준을 읽게 할 수 있습니다. 기준의 단위나 뜻, 관계 구조까지 바뀌었다면 도구와 명세도 함께 점검해야 해요. 적재 뒤에는 대표 사례를 다시 판단시켜 개정이 의도대로 반영됐는지 확인합니다. 반대로 일하는 순서나 결과의 모양을 바꾸고 싶을 때가 있죠. 업무 값을 먼저 읽게 한다든지, 추천안에 새 항목을 넣는다든지요. 이때는 스킬을 고치고, 명세와 시나리오로 바뀐 행동을 확인합니다. 그 변경이 읽는 지식의 구조에도 영향을 주는지는 함께 확인하고요. 여기서 흔히 하는 실수가 하나 있어요. 기준값이 바뀌었는데 스킬 문장에 새 기준을 적어 넣는 겁니다. 당장은 맞게 돌아갈 수도 있어요. 그런데 기준이 그래프와 스킬, 두 곳에 생기죠. 문서가 다시 바뀌면 두 곳이 어긋납니다. 그러니까 어느 곳이 기준의 정본인지 정하고, 에이전트와 도구가 그 기준을 읽게 해야 해요. 여러 곳에 복사본이 필요하더라도 판본과 갱신 책임을 관리해야 서로 다른 기준으로 판단하는 일을 줄일 수 있습니다.</a:t>
+              <a:t>[짚을 곳] 왼쪽 「지식을 고친다」 → 오른쪽 「에이전트를 고친다」</a:t>
+            </a:r>
+          </a:p>
+          <a:p>
+            <a:r>
+              <a:t>· 기준값 · 조치 방법 · 승인 역할이 바뀌면 지식: 개정 문서를 다시 인제스천해 검토 · 적재. 조회 방식과 데이터 계약이 그대로면 같은 진단 도구가 개정된 기준을 읽는다</a:t>
+            </a:r>
+          </a:p>
+          <a:p>
+            <a:r>
+              <a:t>· 단위 · 뜻 · 관계 구조까지 바뀌면 도구와 명세도 점검, 적재 뒤 대표 사례를 다시 판단시켜 반영 확인</a:t>
+            </a:r>
+          </a:p>
+          <a:p>
+            <a:r>
+              <a:t>· 일하는 순서나 결과의 모양이 바뀌면 에이전트: 스킬을 고치고 명세 · 시나리오로 바뀐 행동 확인, 읽는 지식의 구조에 주는 영향도 확인</a:t>
+            </a:r>
+          </a:p>
+          <a:p>
+            <a:r>
+              <a:t>· 흔한 실수: 기준값을 스킬 문장에 적는 것 → 기준이 그래프와 스킬 두 곳에 생겨 문서가 다시 바뀌면 어긋난다. 기준의 정본을 정하고 그것을 읽게 한다</a:t>
+            </a:r>
+          </a:p>
+          <a:p>
+            <a:r>
+              <a:t>[다음] 추천안을 둘로 가르기</a:t>
             </a:r>
           </a:p>
         </p:txBody>
@@ -1475,7 +1840,37 @@
           <a:lstStyle/>
           <a:p>
             <a:r>
-              <a:t>앞의 세 단원을 닫기 전에, 추천안 한 건에 들어간 걸 한번 갈라 볼게요. 무엇이 읽어 온 것이고, 무엇을 에이전트가 정했을까요? 출처에 따라 카드 세 장으로 나눴습니다. 카드 아래 꼬리표는 그 내용이 언제 바뀌는지를 적은 거예요. 첫 카드는 지식에서 읽은 것입니다. 원인 후보와 증거 기준, 조치 후보와 판단 규칙, 승인 역할과 근거 문서의 절이에요. 승인된 기준이나 정책이 개정될 때 바뀝니다. 정적 지식이라는 말은 영원히 고정된다는 뜻이 아니에요. 둘째 카드는 원천에서 읽은 값이에요. 냉각 효율과 팬 진동, 생산 오더와 품질 로트죠. 이건 계속 바뀝니다. 셋째 카드가 에이전트가 스스로 정한 거예요. 어느 도구를 어떤 순서로 부를지, 근거를 어떤 문장으로 설명할지입니다. 업무 값 조회를 할지 말지, 한다면 언제 할지 같은 게 여기 들어가요. 그래서 실행할 때마다 달라질 수 있습니다. 정리하면, 실행마다 설명의 문장은 달라질 수 있어도, 후보와 기준, 그리고 읽어 온 값은 에이전트가 정하지 않는다는 거예요. 판단의 근거를 지식과 원천으로 확인할 수 있게 하고, 에이전트는 그걸 읽어서 엮는 역할입니다. 현장 지식이 AI의 판단 근거가 된다는 말은, 바로 이 구조를 가리키는 겁니다. 이어서 이 추천안이 운전원의 승인과 시스템 실행을 거쳐 끝난 업무가 되기까지를 따라갑니다.</a:t>
+              <a:t>[짚을 곳] 카드 셋 왼쪽부터, 카드 아래 꼬리표(언제 바뀌나)</a:t>
+            </a:r>
+          </a:p>
+          <a:p>
+            <a:r>
+              <a:t>· 지식에서 읽은 것: 원인 후보와 증거 기준, 조치 후보와 판단 규칙, 승인 역할과 근거 문서의 절 — 승인된 기준이나 정책이 개정될 때 바뀐다(정적 지식 ≠ 영원히 고정)</a:t>
+            </a:r>
+          </a:p>
+          <a:p>
+            <a:r>
+              <a:t>· 원천에서 읽은 값: 냉각 효율 46.2 % · 팬 진동, 생산 오더와 품질 로트 — 계속 바뀐다</a:t>
+            </a:r>
+          </a:p>
+          <a:p>
+            <a:r>
+              <a:t>· 에이전트가 정한 것: 어느 도구를 어떤 순서로 부를지(업무 값 조회를 할지 · 언제), 근거를 어떤 문장으로 설명할지 — 실행마다 다를 수 있다</a:t>
+            </a:r>
+          </a:p>
+          <a:p>
+            <a:r>
+              <a:t>· 정리: 설명의 문장은 달라져도 후보 · 기준 · 값은 에이전트가 정하지 않는다. 현장 지식이 AI의 판단 근거가 된다는 말은 이 구조를 가리킨다</a:t>
+            </a:r>
+          </a:p>
+          <a:p>
+            <a:r>
+              <a:t>· 앞 세 단원의 마무리 — 이 추천안이 승인과 시스템 실행을 거쳐 끝난 업무가 되는 과정으로 이어진다</a:t>
+            </a:r>
+          </a:p>
+          <a:p>
+            <a:r>
+              <a:t>[다음] 제안에서 완료까지</a:t>
             </a:r>
           </a:p>
         </p:txBody>
@@ -1545,7 +1940,27 @@
           <a:lstStyle/>
           <a:p>
             <a:r>
-              <a:t>이번 시간에는 에이전트의 결과가 업무 완료로 이어지는 전체 구조를 되짚습니다. 앞 시간에는 에이전트가 지식과 값을 읽어서 추천안 한 건을 제출하는 데까지 따라왔죠. 이번 시간의 첫 단원, 목차의 네 번째 단원은 제안에서 완료까지, 승인과 시스템 실행이에요. 그 추천안을 누가 승인하고, 어떤 시스템이 무엇을 실행해야 이 일이 끝났다고 말할 수 있을까요? 이어서 같은 구조를 교대 인수인계에 적용할 실습과 제품 시연의 관찰 기준까지 함께 준비하겠습니다. 아직 실습을 수행한 상태는 아니에요. 무엇을 만들고 어떤 결과로 확인할지를 먼저 연결해 두고, 실제 실습 뒤에 이번 회차를 마무리합니다.</a:t>
+              <a:t>[짚을 곳] 단원명 → 부제</a:t>
+            </a:r>
+          </a:p>
+          <a:p>
+            <a:r>
+              <a:t>· 이어 받는 지점: 에이전트가 지식과 값을 읽어 추천안 한 건을 제출한 데까지</a:t>
+            </a:r>
+          </a:p>
+          <a:p>
+            <a:r>
+              <a:t>· 단원의 물음: 그 추천안을 누가 승인하고, 어떤 시스템이 무엇을 실행해야 일이 끝났다고 말할 수 있나</a:t>
+            </a:r>
+          </a:p>
+          <a:p>
+            <a:r>
+              <a:t>· 이 단원 뒤: 같은 구조를 교대 인수인계 실습에 적용하고, 제품 시연의 관찰 기준을 준비 — 실습은 아직 수행 전, 무엇을 만들고 어떤 결과로 확인할지만 먼저 연결</a:t>
+            </a:r>
+          </a:p>
+          <a:p>
+            <a:r>
+              <a:t>[다음] 제출 순간의 처리 건</a:t>
             </a:r>
           </a:p>
         </p:txBody>
@@ -1615,7 +2030,32 @@
           <a:lstStyle/>
           <a:p>
             <a:r>
-              <a:t>사건의 줄을 다시 가져왔습니다. 이번엔 추천안이 제출된 바로 그 순간이에요. 화면을 보면 왼쪽 두 자리만 진하고, 나머지는 회색이죠. 진한 두 자리가 경보, 그리고 에이전트의 진단과 제안입니다. 왼쪽 아래 지식 상자에서 올라온 파란 화살표가 에이전트 자리에 닿아 있죠. 지식과 값을 도구로 읽어서 추천안을 제출하기까지, 앞 시간에 따라온 일이 여기서 다 끝났어요. 위에 완료 구간이라고 적은 곳이죠. 그런데 이 순간 설비는 어떤 상태일까요? 팬은 여전히 60퍼센트로 돌고 있고, 유온은 계속 오르고 있습니다. 실제로 승인하는 순간엔 유온이 60도를 넘어 있었어요. 경보가 났을 때보다 몇 도나 더 오른 거죠. 추천안은 판단의 결과일 뿐이에요. 설비에는 아직 아무 변화도 일으키지 않았습니다. 회색으로 남은 미실행 구간이 승인, 냉각 명령, 재관측, 작업지시, 결과 보고예요. 누군가 이 자리들을 정해진 순서로 채워야 업무가 끝납니다.</a:t>
+              <a:t>[짚을 곳] 사건의 줄, 진한 왼쪽 두 자리 → 회색 나머지</a:t>
+            </a:r>
+          </a:p>
+          <a:p>
+            <a:r>
+              <a:t>· 완료 구간: 경보, 에이전트의 진단 · 제안 — 지식 상자의 파란 화살표가 에이전트 자리에 닿아 추천안 제출까지 끝남</a:t>
+            </a:r>
+          </a:p>
+          <a:p>
+            <a:r>
+              <a:t>· 이 순간 설비: 팬은 여전히 60 %, 유온은 계속 오른다. 실제 승인 순간 유온은 60 ℃를 넘어 경보 때보다 몇 도 더 올라 있었다</a:t>
+            </a:r>
+          </a:p>
+          <a:p>
+            <a:r>
+              <a:t>· 추천안은 판단의 결과일 뿐, 설비에는 아무 변화도 일으키지 않았다</a:t>
+            </a:r>
+          </a:p>
+          <a:p>
+            <a:r>
+              <a:t>· 미실행 구간: 승인, 냉각 명령, 재관측, 작업지시, 결과 보고 — 누군가 정해진 순서로 채워야 업무가 끝난다</a:t>
+            </a:r>
+          </a:p>
+          <a:p>
+            <a:r>
+              <a:t>[다음] 남은 자리를 누가 맡나</a:t>
             </a:r>
           </a:p>
         </p:txBody>
@@ -1685,7 +2125,37 @@
           <a:lstStyle/>
           <a:p>
             <a:r>
-              <a:t>이 자리는 누가 맡고, 무엇을 기준으로 채울까요? 추천안이 제출된 뒤에 남은 다섯 자리를 표로 놓았습니다. 가운데 칸이 그 자리를 맡는 쪽, 오른쪽 칸이 그 일의 기준이에요. 첫 줄, 승인은 운전원이 맡습니다. 기준은 조치에 정해진 승인 역할이에요. 팬 최대 운전의 승인 역할이 운전원이라서 운전원에게 간 거죠. 둘째 줄부터는 맡는 쪽이 모두 프로세스 엔진이에요. 냉각 명령은 엔진이 SCADA를 거쳐 PLC에 보냅니다. 기준은 승인된 조치, 곧 팬 속도 100퍼센트고요. 재관측은 엔진이 시계열 DB에서 값을 다시 읽는 일이에요. 유온이 55도 미만으로 내려오고 경보가 해제돼야 회복으로 봅니다. 조건을 둘로 둔 데는 까닭이 있어요. 값이 기준 아래로 한 번 내려간 것만 보고 회복이라고 하지 않으려는 거죠. 경보를 냈던 감지 쪽에서도 이상이 풀렸다고 해제를 내 줘야 하는 거예요. 작업지시 등록은, 회복을 확인한 뒤에 엔진이 정비 관리 시스템, CMMS에 등록해요. 결과 보고는 진행한 경로와 그때까지의 업무 결과를 알리는 일입니다. 보고 뒤에 끝 이벤트로 이어지는지도 확인합니다. 가운데 칸의 화살표 방향도 보세요. 명령과 작업지시는 엔진에서 바깥으로 나가는 쓰기고요, 재관측만 바깥에서 엔진으로 들어오는 읽기예요. 이 다섯 자리를 정해진 순서로 잇는 게 바로 프로세스입니다.</a:t>
+              <a:t>[짚을 곳] 표 다섯 줄 위에서부터, 가운데 칸 화살표 방향</a:t>
+            </a:r>
+          </a:p>
+          <a:p>
+            <a:r>
+              <a:t>· 승인: 운전원 — 기준은 조치에 정해진 승인 역할(팬 최대 운전의 승인 역할이 운전원)</a:t>
+            </a:r>
+          </a:p>
+          <a:p>
+            <a:r>
+              <a:t>· 냉각 명령: 엔진 → SCADA → PLC, 기준은 승인된 조치 팬 속도 100 %</a:t>
+            </a:r>
+          </a:p>
+          <a:p>
+            <a:r>
+              <a:t>· 재관측: 엔진 ← 시계열 DB, 유온 55 ℃ 미만 + 경보 해제 — 둘을 둔 까닭은 값이 한 번 내려간 것만 보고 회복이라 하지 않으려는 것, 감지 쪽의 해제도 필요</a:t>
+            </a:r>
+          </a:p>
+          <a:p>
+            <a:r>
+              <a:t>· 작업지시 등록: 회복 확인 뒤 엔진 → CMMS. 결과 보고: 진행한 경로와 그때까지의 업무 결과, 끝 이벤트로 이어지는지도 확인</a:t>
+            </a:r>
+          </a:p>
+          <a:p>
+            <a:r>
+              <a:t>· 명령 · 작업지시는 바깥으로 나가는 쓰기, 재관측만 들어오는 읽기. 다섯 자리를 정해진 순서로 잇는 것이 프로세스</a:t>
+            </a:r>
+          </a:p>
+          <a:p>
+            <a:r>
+              <a:t>[다음] 에이전트 단계와 승인 사이</a:t>
             </a:r>
           </a:p>
         </p:txBody>
@@ -1755,7 +2225,37 @@
           <a:lstStyle/>
           <a:p>
             <a:r>
-              <a:t>그렇다면 에이전트 자리에서 첫 자리인 승인으로는 어떻게 넘어갈까요? 에이전트 쪽과 프로세스 쪽이 만나는 자리, 그게 제출이에요. 화면의 네 칸을 왼쪽부터 따라가 볼게요. 첫 칸에서 엔진이 에이전트 단계를 엽니다. 이 단계를 냉각 대응 에이전트에게 맡기죠. 둘째 칸에서 에이전트가 스킬과 도구로 추천안을 만들어요. 앞 시간에 본 진단, 업무 조회, 평가, 제출이 전부 이 칸 안에서 일어난 겁니다. 셋째 칸이 경계예요. 에이전트가 결과를 내면 그 단계는 제출됨 상태가 되고, 에이전트의 일은 거기서 끝납니다. 제출됨이란, 에이전트는 손을 뗐지만 엔진은 아직 이어받기 전인 짧은 틈이에요. 결과를 내는 일과 흐름을 앞으로 보내는 일이, 이 상태를 사이에 두고 둘로 나뉘어 있는 거죠. 넷째 칸에서 엔진이 제출된 결과를 확인하고, 결과를 프로세스 변수에 담은 다음, 운전원 승인 단계를 열어요. 눈여겨볼 점은, 에이전트가 다음 단계를 직접 열지 않는다는 거예요. 다음에 누가 무엇을 하는지 몰라도 돼요. 이 HYD 흐름에서 다음 단계를 여는 쪽은 엔진이고, 엔진은 프로세스 정의를 읽고 엽니다. 에이전트가 흐름을 마음대로 건너뛸 수 없는 이유죠.</a:t>
+              <a:t>[짚을 곳] 네 칸 왼쪽부터, 셋째 칸이 경계</a:t>
+            </a:r>
+          </a:p>
+          <a:p>
+            <a:r>
+              <a:t>· 1 엔진이 에이전트 단계를 열어 냉각 대응 에이전트(agent:cooling)에게 맡긴다</a:t>
+            </a:r>
+          </a:p>
+          <a:p>
+            <a:r>
+              <a:t>· 2 에이전트가 스킬과 도구로 추천안을 만든다 — 진단 · 업무 조회 · 평가 · 제출이 모두 이 칸 안</a:t>
+            </a:r>
+          </a:p>
+          <a:p>
+            <a:r>
+              <a:t>· 3 결과를 내면 단계는 SUBMITTED, 에이전트의 일은 끝. 손을 뗐지만 엔진이 이어받기 전의 짧은 틈 — 결과를 내는 일과 흐름을 보내는 일이 나뉜다</a:t>
+            </a:r>
+          </a:p>
+          <a:p>
+            <a:r>
+              <a:t>· 4 엔진이 제출된 결과를 확인해 프로세스 변수에 담고 운전원 승인 단계를 연다</a:t>
+            </a:r>
+          </a:p>
+          <a:p>
+            <a:r>
+              <a:t>· 에이전트는 다음 단계를 직접 열지 않는다(다음에 누가 무엇을 하는지 몰라도 된다). 엔진이 프로세스 정의를 읽고 연다 → 흐름을 마음대로 건너뛸 수 없다</a:t>
+            </a:r>
+          </a:p>
+          <a:p>
+            <a:r>
+              <a:t>[다음] 무엇을 어떤 이름으로 담나</a:t>
             </a:r>
           </a:p>
         </p:txBody>
@@ -1825,7 +2325,37 @@
           <a:lstStyle/>
           <a:p>
             <a:r>
-              <a:t>엔진이 결과를 변수에 담는다고 했는데요, 그러면 무엇을 어떤 이름으로 담을지는 미리 약속돼 있어야겠죠? 처리 건이 들고 다니는 변수 가운데 넷을 골라 표로 놓았습니다. 왼쪽이 변수 이름, 가운데가 그 변수를 만든 단계, 오른쪽이 그 변수를 읽는 쪽이에요. 첫 줄의 추천안 변수는 에이전트의 진단 · 제안 단계가 만들었습니다. 이 변수가 운전원 승인 단계에 놓이고, 운전원은 그 안의 추천과 대안을 보고 결정해요. 둘째 줄의 승인 결과는 운전원 승인 단계가 만들고, 승인이냐고 묻는 게이트웨이가 읽습니다. 셋째 줄의 회복 여부는 재관측이 만들고, 유온이 정상이냐고 묻는 게이트웨이가 읽어요. 넷째 줄의 작업지시 번호는 작업지시 등록이 만들고, 결과 보고가 읽어서 보고에 싣습니다. 쿨러 사건에 대어 볼까요? 승인 결과에는 승인이 들어갔고, 그래서 승인 갈림은 냉각 명령 쪽으로 갔어요. 회복 여부에는 회복됐다는 값이 들어갔고, 그래서 다음 갈림은 작업지시 쪽으로 갔습니다. 만약 회복되지 않았다면 이 갈림은 작업지시 대신, 기준에 못 미쳤다는 결과 보고로 보냈을 거예요. 결국 앞 단계가 낸 이름을 뒤 단계가 그대로 찾아 읽는 구조예요. 게다가 엔진은 단계마다 내겠다고 선언해 둔 출력 항목만 처리 건 변수에 합칩니다. 에이전트의 결과 항목 이름이 선언과 다르면 필요한 값이 전달되지 않을 수 있어요. 그러면 뒤 단계에서 멈추거나 잘못된 기본값을 읽을 위험이 있죠. 이름뿐 아니라 형식과 의미도 명세대로 전달되는지 검사해야 합니다. 명세에서 정한 출력 계약이 에이전트 혼자 지키는 약속이 아니라, 프로세스와 맺은 약속인 이유예요.</a:t>
+              <a:t>[짚을 곳] 표 네 줄, 왼쪽 변수 → 가운데 만든 단계 → 오른쪽 읽는 쪽</a:t>
+            </a:r>
+          </a:p>
+          <a:p>
+            <a:r>
+              <a:t>· decision: 진단 · 제안 단계가 만들고 운전원 승인 단계에 놓여, 운전원이 추천과 대안을 보고 결정</a:t>
+            </a:r>
+          </a:p>
+          <a:p>
+            <a:r>
+              <a:t>· approval → 게이트웨이 「승인?」, recovered → 게이트웨이 「유온 정상?」, work_order → 결과 보고</a:t>
+            </a:r>
+          </a:p>
+          <a:p>
+            <a:r>
+              <a:t>· 쿨러 사건: 승인이 들어가 냉각 명령 쪽, 회복됐다는 값이 들어가 작업지시 쪽. 회복되지 않았다면 작업지시 대신 기준 미달의 결과 보고</a:t>
+            </a:r>
+          </a:p>
+          <a:p>
+            <a:r>
+              <a:t>· 엔진은 단계마다 선언한 출력 항목만 처리 건 변수에 합친다 → 이름이 다르면 값이 전달되지 않아 멈추거나 잘못된 기본값을 읽는다. 형식과 의미까지 명세대로인지 검사</a:t>
+            </a:r>
+          </a:p>
+          <a:p>
+            <a:r>
+              <a:t>· 출력 계약은 에이전트 혼자 지키는 약속이 아니라 프로세스와 맺은 약속</a:t>
+            </a:r>
+          </a:p>
+          <a:p>
+            <a:r>
+              <a:t>[다음] 승인이 남기는 값</a:t>
             </a:r>
           </a:p>
         </p:txBody>
@@ -1895,7 +2425,37 @@
           <a:lstStyle/>
           <a:p>
             <a:r>
-              <a:t>그 약속대로 놓인 추천안을 운전원이 승인하면, 처리 건에 새 값이 남습니다. 위쪽 두 칸은 프로세스 변수고, 아래쪽 화살표는 처리 기록이 남는 순서예요. 첫 줄은 승인이라는 결정과 고른 조치입니다. 쿨러 사건에서는 추천안 그대로 팬 최대 운전을 골랐어요. 이 그림은 그 선택을 같은 흐름의 변수와 기록 항목에 대응시킨 예입니다. 운전원 승인 단계가 채우는 값이죠. 위쪽 오른편의 강조한 칸이 승인한 역할이에요. 이 값은 승인하는 순간 서버가 채웁니다. 에이전트는 자기 결과에 이 값을 써넣을 수 없어요. 에이전트의 제안과 승인 처리 경로를 분리한 거죠. 수업 환경에서는 화면에서 고른 역할로 흐름을 경험합니다. 실제 업무에서는 로그인한 신원과 그 역할의 권한을 연결해서 확인해야 누가 승인했는지 책임을 물을 수 있어요. 아래쪽은 처리 기록이 남는 순서입니다. 왼쪽은 승인이 접수됐다는 기록이에요. 승인한 역할과 판단 번호가 같이 남습니다. 이 기록이 있어야 나중에 누가, 어떤 근거로, 무엇을 승인했는지 되짚을 수 있어요. 판단 번호로 추천안과 이어져 있으니까, 승인에서 추천안으로, 추천안에서 근거와 출처로 거슬러 갈 수 있는 거죠. 오른쪽은 승인이 다음 단계로 전달됐다는 기록입니다. 이 전달이 성공한 뒤에야 냉각 명령이 시작돼요. 승인 시점의 조건도 다시 확인해야 합니다. 추천을 만든 뒤에 설비 상태나 정책이 바뀔 수 있으니까요. HYD도 현재 조건을 확인하지 못하거나 허용하지 않는 경우에는 그대로 실행에 넘기지 않도록 검사합니다. 과거의 추천이 있었다는 사실만으로 지금의 실행을 허용하지 않는 겁니다.</a:t>
+              <a:t>[짚을 곳] 위쪽 두 칸(프로세스 변수) → 아래쪽 화살표(처리 기록의 순서)</a:t>
+            </a:r>
+          </a:p>
+          <a:p>
+            <a:r>
+              <a:t>· approval · chosen_skill: 승인이라는 결정과 고른 조치, 쿨러 사건은 추천안 그대로 팬 최대 운전</a:t>
+            </a:r>
+          </a:p>
+          <a:p>
+            <a:r>
+              <a:t>· approved_role(강조): 승인하는 순간 서버가 채운다. 에이전트는 써넣을 수 없다 — 제안과 승인 처리 경로를 분리</a:t>
+            </a:r>
+          </a:p>
+          <a:p>
+            <a:r>
+              <a:t>· 수업에서는 화면에서 고른 역할로 흐름을 경험. 실제 업무에서는 로그인한 신원과 그 역할의 권한을 연결해야 승인의 책임을 물을 수 있다</a:t>
+            </a:r>
+          </a:p>
+          <a:p>
+            <a:r>
+              <a:t>· APPROVAL_ACCEPTED(역할과 판단 번호) → 승인에서 추천안, 추천안에서 근거와 출처로 거슬러 간다. APPROVAL_DELIVERY 성공 뒤에야 냉각 명령</a:t>
+            </a:r>
+          </a:p>
+          <a:p>
+            <a:r>
+              <a:t>· 승인 시점의 조건도 다시 확인: 현재 조건을 확인 못 하거나 허용되지 않으면 실행으로 넘기지 않는다</a:t>
+            </a:r>
+          </a:p>
+          <a:p>
+            <a:r>
+              <a:t>[다음] 승인 뒤의 실행 셋</a:t>
             </a:r>
           </a:p>
         </p:txBody>
@@ -1965,7 +2525,37 @@
           <a:lstStyle/>
           <a:p>
             <a:r>
-              <a:t>승인 뒤에 엔진이 연 서비스 작업 셋입니다. 왼쪽 운전원 승인에서 가운데 엔진으로, 엔진에서 오른쪽 세 곳으로 화살표가 이어지죠. 파란 화살표는 쓰기, 남색 화살표는 읽기예요. 오른쪽 맨 위가 냉각 명령입니다. 엔진이 SCADA를 거쳐 설비에 팬 속도 100퍼센트를 지시했고요, 설비는 실행을 마쳤다고 답했습니다. 인터록 검사도 통과했어요. 가운데가 재관측이에요. 이 화살표만 방향이 반대죠? 재관측은 쓰는 일이 아니라 값을 읽어 오는 일이라서 그렇습니다. 엔진이 시계열 DB에서 유온을 다시 읽었더니, 60도를 넘던 유온이 51도 남짓까지 내려와 있었어요. 회복 기준인 55도 아래로 들어왔고, 경보도 해제됐습니다. 이 판정은 명령 직후에 한 번 읽고 끝내는 게 아니에요. 팬을 올려도 유온이 내려오는 데는 시간이 걸리니까, 정해 둔 시간 동안 지켜본 다음에 판정합니다. 맨 아래가 작업지시 등록이에요. 팬을 올려서 온도는 내렸지만, 핀 오염이라는 원인은 그대로 남아 있죠. 그래서 엔진이 CMMS에 쿨러 핀 세척 작업지시를 등록했습니다. 이건 팬 최대 운전을 승인한 흐름에 설계된 후속 작업지시예요. 앞 표의 핀 세척 조치 자체를 직접 선택해 승인하는 경우와는 구별합니다. 작업지시를 등록했다는 사실도 현장에서 세척을 끝냈다는 뜻은 아닙니다. 그 정비의 실제 완료는 별도 결과로 확인해야 해요. 여기서 두 가지를 구분해 두세요. 명령이 실행됐다는 응답과 문제가 풀렸다는 확인은 다른 일이에요. 그래서 명령 뒤에 재관측이 따로 있습니다. 그리고 증상이 가라앉은 것과 원인이 없어진 것도 다르죠. 그래서 회복 뒤에도 작업지시가 남는 겁니다.</a:t>
+              <a:t>[짚을 곳] 왼쪽 승인 → 가운데 엔진 → 오른쪽 세 곳, 파란 화살표 쓰기 · 남색 화살표 읽기</a:t>
+            </a:r>
+          </a:p>
+          <a:p>
+            <a:r>
+              <a:t>· 냉각 명령 CMD-…b94a: 엔진이 SCADA를 거쳐 팬 속도 100 % 지시, 확인 응답 DONE, 인터록 PASS</a:t>
+            </a:r>
+          </a:p>
+          <a:p>
+            <a:r>
+              <a:t>· 재관측(화살표 방향 반대 = 읽기): 유온 61.4 → 51.5 ℃, 기준 55 ℃ 미만 · 경보 해제. 명령 직후 한 번이 아니라 정해 둔 시간 동안 지켜본 뒤 판정</a:t>
+            </a:r>
+          </a:p>
+          <a:p>
+            <a:r>
+              <a:t>· 작업지시 WO-…C058(CMMS): 온도는 내렸지만 핀 오염은 남아 쿨러 핀 세척. 팬 최대 운전 승인 흐름에 설계된 후속 작업지시 — 핀 세척을 직접 골라 승인하는 경우와 구별</a:t>
+            </a:r>
+          </a:p>
+          <a:p>
+            <a:r>
+              <a:t>· 작업지시 등록 ≠ 현장 세척 완료, 정비 완료는 별도 결과로 확인</a:t>
+            </a:r>
+          </a:p>
+          <a:p>
+            <a:r>
+              <a:t>· 명령 실행 응답 ≠ 문제 해결(그래서 재관측), 증상 완화 ≠ 원인 제거(그래서 작업지시)</a:t>
+            </a:r>
+          </a:p>
+          <a:p>
+            <a:r>
+              <a:t>[다음] 승인하지 않으면</a:t>
             </a:r>
           </a:p>
         </p:txBody>
@@ -2035,7 +2625,42 @@
           <a:lstStyle/>
           <a:p>
             <a:r>
-              <a:t>여기까지는 운전원이 승인한 경우였어요. 승인하지 않으면 어떻게 될까요? 같은 추천안이라도 사람의 결정에 따라 결말이 셋으로 갈립니다. 표의 가운데 칸, 시스템 실행의 수를 견줘 보세요. 첫 줄, 이 사례의 정상 경로에서는 승인 뒤 명령이 실행되고, 회복을 확인한 다음 작업지시가 등록돼 정상 종료로 닫혔고 결과 보고도 정상이었습니다. 승인만으로 정상 종료가 보장되는 건 아니에요. 회복 기준을 충족하지 못하면 미달 결과를 남기는 다른 경로로 갑니다. 둘째 줄, 거절하면 시스템 실행이 한 건도 없어요. 설비 명령도 작업지시도 나가지 않고, 거절의 끝으로 닫힙니다. 결과 보고에는 반려, 그리고 설비 명령은 내지 않았다는 사실이 남아요. 기록을 열어 보면 가지 않은 단계들, 냉각 명령과 재관측과 작업지시는 취소 상태로 남아 있고, 거절의 사유도 함께 남습니다. 어느 갈래로 갔는지가 기록에 그대로 보이는 거죠. 그런데 여기서 조심할 게 있습니다. 이때도 처리 건의 상태는 완료로 표시돼요. 그러니까 일이 실제로 이뤄졌는지는 어느 끝에 닿았는지와 결과 보고로 읽어야 합니다. 셋째 줄, 응답이 없으면 정해 둔 기한이 지난 뒤 승인 지연 알림만 나갑니다. 처리 건은 자동으로 승인되지도, 취소되거나 거절되지도 않아요. 승인을 계속 기다립니다. 늦게 승인하더라도 그때의 조건을 다시 확인해 허용되는 경우에 실행을 이어갑니다. 왜 기한이 지나면 알아서 승인하거나 취소하게 두지 않았을까요? 자동으로 승인하면, 아무도 결정하지 않은 조치가 설비를 움직이게 됩니다. 사람의 승인을 둔 의미가 사라지죠. 반대로 자동으로 취소하면, 유온이 오르고 있는데 필요한 조치가 조용히 사라져요. 그래서 결정은 끝까지 사람에게 남겨 두고, 늦어졌다는 사실만 알려서 사람을 다시 부르는 겁니다. 이 표는 서로 다른 실행 기록에서 승인 여부에 따른 경로를 비교한 것입니다. 추천안의 모든 내용과 입력이 같았다는 뜻은 아니에요. 사람의 결정에 따라 실행을 허용하거나 보류하는 구조를 보세요. 그리고 그 결정에 따라 어디로 갈지는 프로세스 정의가 정해 둔 길입니다.</a:t>
+              <a:t>[짚을 곳] 표 세 줄, 가운데 시스템 실행의 수 견주기</a:t>
+            </a:r>
+          </a:p>
+          <a:p>
+            <a:r>
+              <a:t>· 승인 · 회복 확인: 명령 1건 + 작업지시 1건, E_end · 결과 보고 정상. 승인만으로 정상 종료가 보장되지는 않는다 — 회복 기준 미달이면 미달 결과를 남기는 경로</a:t>
+            </a:r>
+          </a:p>
+          <a:p>
+            <a:r>
+              <a:t>· 거절: 시스템 실행 0건, E_rejected · 결과 보고 반려. 가지 않은 단계(냉각 명령 · 재관측 · 작업지시)는 취소 상태, 거절 사유도 남는다</a:t>
+            </a:r>
+          </a:p>
+          <a:p>
+            <a:r>
+              <a:t>· 거절도 처리 건 상태는 완료로 표시 → 일이 이뤄졌는지는 닿은 끝과 결과 보고로 읽는다</a:t>
+            </a:r>
+          </a:p>
+          <a:p>
+            <a:r>
+              <a:t>· 응답 없음: 기한 뒤 승인 지연 알림만, 자동 승인 · 자동 취소 · 거절 없이 계속 대기. 늦게 승인하면 그때의 조건을 다시 확인해 이어 간다</a:t>
+            </a:r>
+          </a:p>
+          <a:p>
+            <a:r>
+              <a:t>· 자동 승인 = 아무도 결정하지 않은 조치가 설비를 움직임, 자동 취소 = 필요한 조치가 조용히 사라짐 → 결정은 사람에게, 늦어졌다는 사실만 알린다</a:t>
+            </a:r>
+          </a:p>
+          <a:p>
+            <a:r>
+              <a:t>· 서로 다른 실행 기록의 비교이며, 추천안의 모든 입력이 같았다는 뜻은 아니다</a:t>
+            </a:r>
+          </a:p>
+          <a:p>
+            <a:r>
+              <a:t>[다음] 다른 두 업무에서도</a:t>
             </a:r>
           </a:p>
         </p:txBody>
@@ -2105,7 +2730,27 @@
           <a:lstStyle/>
           <a:p>
             <a:r>
-              <a:t>목차에서 앞의 다섯 단원은 이론입니다. 쿨러 경보가 추천안이 되기까지의 지식과 조회 근거를 보고, 그 뒤 승인과 시스템 실행으로 업무가 끝나는 과정을 살펴봅니다. 이어서 에이전트와 프로세스가 각각 맡는 일을 구분합니다. 실습에서는 교대 인수인계에 제공 문서, 에이전트와 흐름을 연결합니다. 그다음 ProcessGPT 시연에서 같은 구조가 어디에 나타나는지 보고, 결과를 학습 노트에 정리합니다.</a:t>
+              <a:t>[짚을 곳] 목차 여덟 줄, 위 다섯 줄 「이론」 · 아래 세 줄 「실습」</a:t>
+            </a:r>
+          </a:p>
+          <a:p>
+            <a:r>
+              <a:t>· 1 · 2 · 3: 쿨러 경보가 추천안이 되기까지의 지식과 조회 근거</a:t>
+            </a:r>
+          </a:p>
+          <a:p>
+            <a:r>
+              <a:t>· 4: 승인과 시스템 실행으로 업무가 끝나는 과정, 5: 에이전트와 프로세스가 각각 맡는 일의 구분</a:t>
+            </a:r>
+          </a:p>
+          <a:p>
+            <a:r>
+              <a:t>· 6 교대 인수인계에 제공 문서 · 에이전트 · 흐름 연결, 7 ProcessGPT 시연에서 같은 구조의 자리, 8 결과를 학습 노트에 정리</a:t>
+            </a:r>
+          </a:p>
+          <a:p>
+            <a:r>
+              <a:t>[다음] 첫 단원</a:t>
             </a:r>
           </a:p>
         </p:txBody>
@@ -2175,7 +2820,37 @@
           <a:lstStyle/>
           <a:p>
             <a:r>
-              <a:t>지금까지는 쿨러 사건 하나로 봤어요. 다른 업무에서도 이 구분이 그대로 맞을까요? 프로세스 영역에서 다룬 세 업무를 한 표에 놓았습니다. 줄마다 시작 사건, 에이전트의 추천안과 승인하는 사람, 승인 뒤의 시스템 실행이 차례로 놓여 있어요. 첫 줄이 쿨러 사건이에요. 쿨러 성능 저하 경보로 시작해서, 냉각 대응 에이전트가 냉각 조치를 추천하고 운전원이 승인합니다. 승인 뒤에는 명령, 재관측, 작업지시가 이어지죠. 둘째 줄은 정기 점검입니다. 운전시간이 정비 주기에 가까워졌다는 사건으로 시작해요. 정비 계획 에이전트가 언제 정비할지를 추천하고, 승인은 설비보전팀장이 합니다. 승인 뒤에는 CMMS에 정비 오더가 등록되고, 생산팀에 공지 메일이 나가요. 셋째 줄은 재고 보충이에요. 예비품 재고가 재주문점 아래로 내려간 사건으로 시작합니다. 구매 에이전트가 발주 수량과 공급사를 추천하고, 구매 담당이 승인하면 ERP에 발주가 등록돼요. 이어서 공급사 통지와 입고 확인이 따라오고요. 참고로 수업 환경에서는 공급사와 실제로 거래하지 않습니다. 기업 시스템을 흉내 낸 시뮬레이션과 가상 메일 주소를 써요. 왼쪽 칸, 시작 사건도 한번 견줘 보세요. 첫 줄은 설비의 센서 값이 일을 시작시키고, 아래 두 줄은 운전시간과 재고 같은 업무 데이터가 시작시켜요. 수업에서는 버튼이 그 신호를 대신 내 주지만요. 그런데도 세 처리 건은 모두 같은 모양의 경보 한 건으로 열립니다. 무엇이 일을 시작시키든, 처리 건으로 들어오는 입구는 하나로 맞춰 둔 거죠. 시작 사건도, 에이전트도, 승인자도, 실행 시스템도 업무마다 다릅니다. 그런데 자리는 똑같아요. 에이전트는 둘째 자리에서 추천안을 내는 데까지만 합니다. 그 추천안을 정해진 사람의 승인으로 잇고, 승인된 뒤에 업무 시스템을 움직여서 일을 끝내는 건 프로세스예요. 업무가 달라져도 제안, 결정, 실행과 결과 확인을 나눠 설계하는 원리는 사용할 수 있습니다. 모든 업무가 반드시 같은 단계 수나 같은 승인 방식을 가져야 하는 것은 아니에요.</a:t>
+              <a:t>[짚을 곳] 표 세 줄, 칸은 시작 사건 → 추천안과 승인자 → 승인 뒤 실행</a:t>
+            </a:r>
+          </a:p>
+          <a:p>
+            <a:r>
+              <a:t>· 쿨러: 성능 저하 경보, agent:cooling이 냉각 조치 → 운전원, 명령 · 재관측 · 작업지시(CMMS)</a:t>
+            </a:r>
+          </a:p>
+          <a:p>
+            <a:r>
+              <a:t>· 정기 점검: 운전시간이 정비 주기에 가까워짐, agent:pm-plan이 정비할 시간 → 설비보전팀장, CMMS 정비 오더 · 생산팀 공지 메일</a:t>
+            </a:r>
+          </a:p>
+          <a:p>
+            <a:r>
+              <a:t>· 재고 보충: 예비품이 재주문점 아래, agent:spare-buy가 발주 수량과 공급사 → 구매 담당, ERP 발주 · 공급사 통지 · 입고 확인. 수업은 시뮬레이션과 가상 메일 주소, 실제 거래 없음</a:t>
+            </a:r>
+          </a:p>
+          <a:p>
+            <a:r>
+              <a:t>· 시작 신호는 센서 값 또는 업무 데이터(수업은 버튼이 대신)지만 세 처리 건 모두 같은 모양의 경보 한 건으로 열린다 — 입구는 하나</a:t>
+            </a:r>
+          </a:p>
+          <a:p>
+            <a:r>
+              <a:t>· 업무마다 주체는 달라도 자리는 같다: 에이전트는 추천안까지, 승인과 실행 · 결과 확인은 프로세스. 모든 업무가 같은 단계 수 · 승인 방식이어야 하는 것은 아니다</a:t>
+            </a:r>
+          </a:p>
+          <a:p>
+            <a:r>
+              <a:t>[다음] 두 쪽의 장치</a:t>
             </a:r>
           </a:p>
         </p:txBody>
@@ -2245,7 +2920,27 @@
           <a:lstStyle/>
           <a:p>
             <a:r>
-              <a:t>마지막 이론 단원으로 넘어가죠. 주제는 에이전트 쪽 장치와 프로세스 쪽 장치예요. 에이전트 영역에서는 스킬, MCP, 명세, 시나리오를 배웠고, 프로세스 영역에서는 정의, 인스턴스, 승인, 시스템 실행을 배웠죠. 같은 처리 건 안에서 이 장치들은 각각 무엇을 맡고, 무엇을 지킬까요? 지금까지 사건의 자리를 따라왔다면, 이번엔 같은 처리 건을 그 안에서 일한 장치의 눈으로 보겠습니다.</a:t>
+              <a:t>[짚을 곳] 단원명 → 부제</a:t>
+            </a:r>
+          </a:p>
+          <a:p>
+            <a:r>
+              <a:t>· 에이전트 영역에서 배운 장치: 스킬, MCP, 명세, 시나리오</a:t>
+            </a:r>
+          </a:p>
+          <a:p>
+            <a:r>
+              <a:t>· 프로세스 영역에서 배운 장치: 정의, 인스턴스, 승인, 시스템 실행</a:t>
+            </a:r>
+          </a:p>
+          <a:p>
+            <a:r>
+              <a:t>· 단원의 물음: 같은 처리 건 안에서 이 장치들은 각각 무엇을 맡고 무엇을 지키나 — 사건의 자리를 따라온 데서, 이번엔 그 안에서 일한 장치의 눈으로</a:t>
+            </a:r>
+          </a:p>
+          <a:p>
+            <a:r>
+              <a:t>[다음] 두 쪽으로 나누기</a:t>
             </a:r>
           </a:p>
         </p:txBody>
@@ -2315,7 +3010,37 @@
           <a:lstStyle/>
           <a:p>
             <a:r>
-              <a:t>배운 장치를 두 쪽으로 나눴습니다. 화면 왼쪽이 에이전트 쪽, 오른쪽이 프로세스 쪽이에요. 아래 꼬리표는 각 쪽이 지키는 걸 한마디로 적은 겁니다. 왼쪽, 에이전트 쪽에는 에이전트 실행, 스킬, MCP가 있고, 명세를 기준으로 개발하는 SDD와, 구체적인 행동 예로 기대 결과를 합의하고 검증하는 BDD가 있어요. 이 장치들은 한 단계 안에서 추천안 하나를 제대로 만들게 합니다. 그래서 지키는 건 판단의 품질이에요. 오른쪽, 프로세스 쪽에는 BPMN으로 그린 프로세스 정의와 그 정의로 열린 인스턴스, 사람의 승인인 HITL, 그리고 시스템 실행이 있습니다. 이 장치들은 단계와 단계를 이어서 업무를 끝내요. 지키는 건 순서와 책임입니다. 두 꼬리표를 쿨러 사건에 대어 보면 이렇습니다. 판단의 품질은 등록된 근거가 지지하는 원인을 가리고, 근거와 배제한 후보, 출처까지 추천안에 남긴 것이에요. 순서와 책임은 운전원이 승인하기 전에는 팬 속도를 바꾸는 명령이 나가지 않았고, 누가 승인했는지가 기록으로 남은 것이고요. 그리고 두 쪽은 서로를 대신하지 못합니다. 스킬을 아무리 잘 써도, 승인 없이 명령이 나가는 걸 막을 수는 없습니다. 프로세스를 아무리 잘 그려도, 에이전트가 근거 없는 원인을 내는 걸 막을 수는 없고요. 결과가 기대와 다를 때 어느 쪽 몫인지부터 가려야 하는 이유예요.</a:t>
+              <a:t>[짚을 곳] 왼쪽 에이전트 쪽 → 오른쪽 프로세스 쪽, 아래 꼬리표</a:t>
+            </a:r>
+          </a:p>
+          <a:p>
+            <a:r>
+              <a:t>· 에이전트 쪽: 에이전트 실행 · 스킬 · MCP, 명세 기반 개발(SDD) · 행동 예로 기대 결과를 합의 · 검증하는 BDD → 한 단계 안에서 추천안 하나를 제대로 만든다 = 판단의 품질</a:t>
+            </a:r>
+          </a:p>
+          <a:p>
+            <a:r>
+              <a:t>· 프로세스 쪽: BPMN 정의와 인스턴스, 사람의 승인(HITL), 시스템 실행 → 단계와 단계를 이어 업무를 끝낸다 = 순서와 책임</a:t>
+            </a:r>
+          </a:p>
+          <a:p>
+            <a:r>
+              <a:t>· 쿨러 사건에서: 판단의 품질 = 근거가 지지하는 원인, 근거 · 배제 후보 · 출처를 남긴 추천안</a:t>
+            </a:r>
+          </a:p>
+          <a:p>
+            <a:r>
+              <a:t>순서와 책임 = 승인 전에는 팬 명령이 나가지 않았고 누가 승인했는지 기록</a:t>
+            </a:r>
+          </a:p>
+          <a:p>
+            <a:r>
+              <a:t>· 두 쪽은 서로를 대신하지 못한다(스킬로 무승인 명령을 못 막고, 프로세스로 근거 없는 원인을 못 막는다) → 결과가 다를 때 어느 쪽 몫인지부터 가린다</a:t>
+            </a:r>
+          </a:p>
+          <a:p>
+            <a:r>
+              <a:t>[다음] 실제 처리 건의 자리</a:t>
             </a:r>
           </a:p>
         </p:txBody>
@@ -2385,7 +3110,42 @@
           <a:lstStyle/>
           <a:p>
             <a:r>
-              <a:t>실제 처리 건에서 이 장치들은 어디서 일했을까요? 같은 사건의 줄 위에 두 쪽 장치가 일한 자리를 표시했습니다. 위쪽이 프로세스 쪽, 아래쪽이 에이전트 쪽이에요. 아래쪽부터 볼게요. 파란 상자로 두른 둘째 자리가 에이전트 쪽입니다. 냉각 대응 에이전트가 이 한 자리에서 냉각 긴급 대응 스킬을 따라 일했고요, 판단 엔진과 업무 DB의 MCP 도구를 사용할 수 있도록 연결했습니다. 지식 그래프는 판단 엔진의 진단 도구가 안에서 읽습니다. 이 처리 건의 요약에는 도구 호출 열 번이 남아 있어요. 다만 이 정본 사건의 호출별 상세 기록은 없어서, 연결된 도구를 모두 실제로 호출했다고 단정하지는 않습니다. 왼쪽 아래 문서 그림은 명세와 시나리오예요. 이건 실행 중에 일한 게 아닙니다. 결과에 무엇이 있어야 하는지, 어떤 상황에서 어떻게 행동해야 하는지를 실행에 앞서 정해 둔 거죠. 이번엔 위쪽이에요. 남색 긴 괄호가 프로세스 정의와 인스턴스입니다. 냉각 긴급 대응 정의에는 작업 아홉, 분기 둘, 타이머 하나가 그려져 있고요, 그 정의로 열린 인스턴스 하나가 경보에서 정상 종료까지를 덮었습니다. 정의는 하나지만, 경보가 날 때마다 인스턴스가 새로 하나씩 열려요. 서로 다른 사건 식별자를 가진 쿨러 성능 저하 경보 세 건이 시작 조건을 충족하면 처리 건도 셋이 되고, 저마다 따로 진행되고 따로 기록이 남습니다. HYD는 같은 테넌트와 프로세스 정의, 사건 식별자의 중복 시작을 검사합니다. 이것만으로 외부 명령이 반드시 한 번만 실행된다고 보장하는 것은 아니에요. 명령 재시도와 중복 효과는 별도 확인이 필요합니다. 괄호 아래를 보면, 승인 위의 선이 운전원 역할로 남은 승인 기록이고, 냉각 명령에서 작업지시까지 걸친 파란 괄호가 설비 명령과 작업지시를 남긴 시스템 실행이에요. 한눈에 보이시죠? 에이전트 쪽 장치는 줄의 한 자리에만 있고, 프로세스 쪽 장치는 줄 전체를 덮습니다.</a:t>
+              <a:t>[짚을 곳] 아래쪽(에이전트 쪽) → 왼쪽 아래 문서 → 위쪽(프로세스 쪽) 괄호</a:t>
+            </a:r>
+          </a:p>
+          <a:p>
+            <a:r>
+              <a:t>· 에이전트 쪽: 둘째 자리 하나. 냉각 대응 에이전트가 냉각 긴급 대응 스킬을 따르고, 판단 엔진 · 업무 DB의 MCP 도구를 연결. 지식 그래프는 진단 도구가 안에서 읽는다</a:t>
+            </a:r>
+          </a:p>
+          <a:p>
+            <a:r>
+              <a:t>· 처리 건 요약에 도구 호출 10회, 이 정본 사건은 호출별 상세 기록이 없어 연결된 도구를 모두 실제로 불렀다고 단정하지 않는다</a:t>
+            </a:r>
+          </a:p>
+          <a:p>
+            <a:r>
+              <a:t>· 명세와 시나리오(SDD · BDD): 실행 중이 아니라 실행에 앞서 정해 둔 것</a:t>
+            </a:r>
+          </a:p>
+          <a:p>
+            <a:r>
+              <a:t>· 프로세스 쪽: 정의 c3_cooling(작업 9 · 분기 2 · 타이머 1), 인스턴스 1건이 경보에서 정상 종료까지. 경보마다 인스턴스가 새로 — 사건 식별자가 다른 경보 세 건이면 처리 건 셋</a:t>
+            </a:r>
+          </a:p>
+          <a:p>
+            <a:r>
+              <a:t>· 중복 시작 검사(테넌트 · 정의 · 사건 식별자)가 외부 명령의 단 한 번 실행까지 보장하지는 않는다. 승인 기록 role:operator, 시스템 실행 CMD-…b94a · WO-…C058</a:t>
+            </a:r>
+          </a:p>
+          <a:p>
+            <a:r>
+              <a:t>· 에이전트 쪽은 한 자리, 프로세스 쪽은 줄 전체</a:t>
+            </a:r>
+          </a:p>
+          <a:p>
+            <a:r>
+              <a:t>[다음] 순서를 적은 두 문서</a:t>
             </a:r>
           </a:p>
         </p:txBody>
@@ -2455,7 +3215,37 @@
           <a:lstStyle/>
           <a:p>
             <a:r>
-              <a:t>이 차이는 순서를 적은 문서에서도 드러납니다. 순서를 적은 문서는 둘이에요. 화면 왼쪽의 스킬, 오른쪽의 프로세스 정의입니다. 둘 다 순서를 정하지만, 다루는 범위와 지키는 방식이 달라요. 스킬은 에이전트가 읽는 지침입니다. 한 단계 안에서 어떤 도구를 어떤 순서로 부를지를 적어요. 냉각 긴급 대응 스킬에는 진단, 업무 값 조회, 대안 평가, 제출이 적혀 있죠. 업무 값 조회처럼 필요할 때만 하는 단계도 있어서, 에이전트가 상황에 맞게 고릅니다. 프로세스 정의는 엔진이 읽는 설계도예요. 단계와 단계 사이의 순서를 정합니다. 제안 뒤에 승인, 승인 뒤에 명령, 그다음 재관측과 작업지시죠. HYD 엔진은 지원하는 정의와 조건을 해석해 실행하고, 승인이라는 조건을 지나지 않으면 다음으로 넘어가지 않아요. 그럼 스킬에 승인을 받은 뒤에 명령하라고 적어 두면 어떨까요? 에이전트가 그 문장을 따를 수는 있습니다. 하지만 반드시 지킨다는 보장은 없어요. 지침은 읽는 쪽이 따르는 거니까요. 반면에 단계 사이의 순서는 엔진이 지킵니다. 이 예에서는 승인 경로 검사와 실행 권한 검사까지 갖춰 승인 없이 명령으로 넘어가는 길을 막습니다. 그림에 사람 작업을 하나 넣은 것만으로 통제가 완성되지는 않아요. 그렇다고 스킬의 순서가 쓸모없다는 말은 아니에요. 업무 값을 읽을지 말지처럼 그때 상황을 보고 정해야 하는 순서는 오히려 스킬에 두는 게 맞습니다. 프로세스도 분기 조건을 둘 수 있지만, 모든 세부 조회를 고정해 관리할 필요는 없으니까요. 반드시 지킬 순서는 정의에, 상황에 따라 고를 순서는 스킬에, 이렇게 나눠 두는 겁니다.</a:t>
+              <a:t>[짚을 곳] 왼쪽 스킬 → 오른쪽 프로세스 정의, 아래 꼬리표</a:t>
+            </a:r>
+          </a:p>
+          <a:p>
+            <a:r>
+              <a:t>· 스킬: 에이전트가 읽는 지침, 한 단계 안의 도구 순서(진단 → 필요 시 업무 조회 → 평가 → 제출). 필요할 때만 하는 단계는 에이전트가 고른다</a:t>
+            </a:r>
+          </a:p>
+          <a:p>
+            <a:r>
+              <a:t>· 프로세스 정의: 엔진이 읽는 설계도, 단계 사이의 순서(제안 → 승인 → 명령 → 재관측 → 작업지시). 승인 조건을 지나지 않으면 넘어가지 않는다</a:t>
+            </a:r>
+          </a:p>
+          <a:p>
+            <a:r>
+              <a:t>· 스킬에 「승인 뒤 명령」을 적어도 지킨다는 보장은 없다(지침은 읽는 쪽이 따르는 것). 단계 사이의 순서는 엔진이 지키고, 승인 경로 검사 · 실행 권한 검사로 막는다</a:t>
+            </a:r>
+          </a:p>
+          <a:p>
+            <a:r>
+              <a:t>· 그림에 사람 작업 하나를 넣었다고 통제가 완성되지는 않는다</a:t>
+            </a:r>
+          </a:p>
+          <a:p>
+            <a:r>
+              <a:t>· 나눔: 반드시 지킬 순서는 정의에, 상황을 보고 고를 순서(업무 값을 읽을지)는 스킬에</a:t>
+            </a:r>
+          </a:p>
+          <a:p>
+            <a:r>
+              <a:t>[다음] 외부 시스템에 닿는 길</a:t>
             </a:r>
           </a:p>
         </p:txBody>
@@ -2525,7 +3315,37 @@
           <a:lstStyle/>
           <a:p>
             <a:r>
-              <a:t>외부 시스템에 닿는 길도 두 쪽이 다르게 나뉘어 있습니다. 왼쪽은 에이전트가 MCP로 연결된 도구를 쓰는 길, 오른쪽은 프로세스가 서비스 작업으로 시스템을 부르는 길이에요. 왼쪽부터 보죠. 이 HYD 에이전트에 제공한 업무 도구는 주로 지식과 값을 읽는 도구입니다. MCP 자체가 읽기 전용 규약인 것은 아니에요. 쓰기 도구도 연결할 수 있어서 어떤 기능과 권한을 제공할지가 설계의 핵심입니다. 진단, 조치 평가, 생산 오더와 품질 로트 조회가 그렇죠. 쓰기는 추천안 제출 하나뿐이에요. 그 제출도 판단 기록 한 건을 남기는 일일 뿐, 설비나 업무 시스템을 바꾸지는 않습니다. 그리고 제출 결과에 허용되지 않은 실행 지시가 들어오는지도 정해진 계약으로 검사합니다. 모든 위험한 문장을 알아보는 만능 검사라고 이해하면 안 됩니다. 오른쪽, 설비와 업무 시스템을 실제로 바꾸는 쓰기는 프로세스의 서비스 작업에 있어요. 팬 속도를 100퍼센트로 바꾸는 냉각 명령, 쿨러 핀 세척 작업지시 등록이 그렇습니다. 이 작업은 승인이 전달된 뒤에만 열려요. 이렇게 나눠 두면 에이전트가 판단을 잘못해도 그 판단만으로는 아무것도 바뀌지 않습니다. 승인 단계에서는 추천의 근거와 현재 조건을 검토해야 하고요, 승인되지 않은 추천안으로는 쓰기에 닿을 길이 없어요. 그러니까 읽기와 쓰기를 가르는 경계가 곧 책임의 경계입니다.</a:t>
+              <a:t>[짚을 곳] 왼쪽 에이전트의 업무 도구 → 오른쪽 프로세스의 서비스 작업</a:t>
+            </a:r>
+          </a:p>
+          <a:p>
+            <a:r>
+              <a:t>· MCP 자체가 읽기 전용 규약은 아니다 — 쓰기 도구도 이을 수 있어 어떤 기능과 권한을 줄지가 설계의 핵심</a:t>
+            </a:r>
+          </a:p>
+          <a:p>
+            <a:r>
+              <a:t>· HYD 에이전트 도구: 진단 · 조치 평가 · 생산 오더와 품질 로트 조회(읽기), 쓰기는 추천안 제출 하나(판단 기록 한 건, 설비 · 업무 시스템은 그대로)</a:t>
+            </a:r>
+          </a:p>
+          <a:p>
+            <a:r>
+              <a:t>· 제출 결과에 허용되지 않은 실행 지시가 들어오는지 정해진 계약으로 검사 — 모든 위험한 문장을 알아보는 만능 검사는 아니다</a:t>
+            </a:r>
+          </a:p>
+          <a:p>
+            <a:r>
+              <a:t>· 실제 쓰기는 서비스 작업: 팬 속도 100 % 냉각 명령, 쿨러 핀 세척 작업지시 등록 — 승인이 전달된 뒤에만 열린다</a:t>
+            </a:r>
+          </a:p>
+          <a:p>
+            <a:r>
+              <a:t>· 에이전트가 잘못 판단해도 그 판단만으로는 아무것도 바뀌지 않는다. 읽기와 쓰기의 경계 = 책임의 경계</a:t>
+            </a:r>
+          </a:p>
+          <a:p>
+            <a:r>
+              <a:t>[다음] 경계를 확인하는 시나리오</a:t>
             </a:r>
           </a:p>
         </p:txBody>
@@ -2595,7 +3415,37 @@
           <a:lstStyle/>
           <a:p>
             <a:r>
-              <a:t>이 경계가 실제로 지켜지는지 확인하는 장치를 에이전트 영역에서 이미 써 봤죠. 거절 상황을 적은 시나리오예요. 화면 왼쪽처럼 Given, When, Then으로 나눠 적었습니다. 이 시나리오가 무엇을 확인하는지 다시 보겠습니다. Given은 전제예요. 에이전트가 추천안을 내서 승인 단계가 열려 있는 상태죠. 이 전제가 서려면 에이전트 단계가 끝나고, 명세의 출력 계약대로 추천안이 놓여 있어야 합니다. When은 확인하려는 행동이에요. 승인 권한이 있는 담당자가 사유를 적고 거절합니다. Then은 기대 결과고요. 설비 명령이 만들어지지 않고, 업무 처리도 일어나지 않고, 처리 건이 거절로 닫혀야 해요. Then부터 아래 세 줄을 다시 보세요. 에이전트의 문장이 어땠는지는 하나도 묻지 않습니다. 전부 처리 건 전체가 어떻게 움직였는지를 묻죠. 이 예의 명세에는 출력 계약뿐 아니라 승인 전 실행 금지 같은 요구도 들어갑니다. 시나리오는 그 요구가 실제 행동으로 지켜지는지 확인할 예를 제공하죠. SDD나 BDD가 에이전트에만 쓰이는 방법은 아닙니다. 무엇을 유지하고 무엇을 바꿀지 명세로 합의하고, 정상·거절·실패 상황을 실행해 결과와 부수 효과를 확인하는 데 가치가 있어요. 시나리오 문서를 써 놓은 것과 그 검증을 통과한 것은 구별해야 합니다.</a:t>
+              <a:t>[짚을 곳] 왼쪽 Given · When · Then → 오른쪽 세 줄, 셋째 줄(강조)</a:t>
+            </a:r>
+          </a:p>
+          <a:p>
+            <a:r>
+              <a:t>· Given: 추천안이 나와 승인 단계가 열린 상태 — 에이전트 단계가 끝나 출력 계약대로 추천안이 놓여 있어야 성립</a:t>
+            </a:r>
+          </a:p>
+          <a:p>
+            <a:r>
+              <a:t>· When: 승인 권한이 있는 담당자가 사유를 적고 거절</a:t>
+            </a:r>
+          </a:p>
+          <a:p>
+            <a:r>
+              <a:t>· Then: 설비 명령 없음, 업무 처리 없음, 처리 건이 거절로 닫힘</a:t>
+            </a:r>
+          </a:p>
+          <a:p>
+            <a:r>
+              <a:t>· Then은 에이전트의 문장을 묻지 않고 처리 건 전체의 움직임을 묻는다. 이 예의 명세에는 출력 계약 외에 승인 전 실행 금지 같은 요구도 들어간다</a:t>
+            </a:r>
+          </a:p>
+          <a:p>
+            <a:r>
+              <a:t>· SDD · BDD는 에이전트 전용이 아니다. 정상 · 거절 · 실패를 실행해 결과와 부수 효과를 확인하는 데 가치 — 시나리오 문서를 써 둔 것 ≠ 검증을 통과한 것</a:t>
+            </a:r>
+          </a:p>
+          <a:p>
+            <a:r>
+              <a:t>[다음] 승인 자리를 지키는 검사</a:t>
             </a:r>
           </a:p>
         </p:txBody>
@@ -2665,7 +3515,37 @@
           <a:lstStyle/>
           <a:p>
             <a:r>
-              <a:t>시나리오가 확인한 거절의 길은 사람의 결정이 흐름 안에 있어야 성립합니다. 사람의 승인, HITL은 프로세스 그림에서 사람 작업 하나로 그려지는데요, 그 자리가 그림에 반드시 있도록 지키는 검사가 셋 있어요. 화면의 카드 세 장입니다. 앞의 두 카드는 정의를 등록하기 전에 하는 검사예요. 첫째, 설비 명령 앞의 경로에 사람의 승인이 없으면 그 정의는 등록되지 않습니다. 둘째, 승인 조건을 지나지 않고 실행에 닿는 길이 하나라도 있으면 역시 등록되지 않아요. 거절 갈래에서 명령으로 가는 선을 잘못 그린 경우가 여기 걸립니다. 셋째 카드는 실행 중에 하는 검사예요. 승인하려는 사람이 그 조치의 지정 역할이나 허용된 역할 조건과 작업 담당 조건을 충족하지 못하면, 승인은 거부되고 거부됐다는 사실이 기록으로 남습니다. 예를 들어 운전원이 설비보전팀장 승인이 필요한 조치를 고르면, 그 역할을 임의로 대신할 수는 없습니다. 사람의 승인을 두자고 말로만 약속하면, 누군가 그림을 고치다가 빠뜨릴 수 있어요. 그 실수가 실행 중에야 드러나면, 그땐 이미 명령이 나간 뒤일 수도 있죠. 그래서 그림을 등록하는 순간과 실행하는 순간에 기계적으로 검사하는 겁니다.</a:t>
+              <a:t>[짚을 곳] 카드 셋, 아래 꼬리표(등록 전 · 실행 중)</a:t>
+            </a:r>
+          </a:p>
+          <a:p>
+            <a:r>
+              <a:t>· HITL은 프로세스 그림에서 사람 작업 하나로 그려진다 → 그 자리가 반드시 있도록 지키는 검사 셋</a:t>
+            </a:r>
+          </a:p>
+          <a:p>
+            <a:r>
+              <a:t>· 등록 전 1: 설비 명령 앞의 경로에 사람의 승인이 없으면 정의를 등록하지 않는다</a:t>
+            </a:r>
+          </a:p>
+          <a:p>
+            <a:r>
+              <a:t>· 등록 전 2: 승인 조건을 지나지 않고 실행에 닿는 길이 하나라도 있으면 등록하지 않는다(거절 갈래에서 명령으로 잘못 그린 선)</a:t>
+            </a:r>
+          </a:p>
+          <a:p>
+            <a:r>
+              <a:t>· 실행 중: 지정 · 허용 역할과 작업 담당 조건을 못 채우면 승인 거부 + 기록. 운전원이 설비보전팀장 승인이 필요한 조치를 골라도 그 역할을 대신할 수 없다</a:t>
+            </a:r>
+          </a:p>
+          <a:p>
+            <a:r>
+              <a:t>· 말로만 약속하면 그림을 고치다 빠뜨릴 수 있고, 실행 중에 드러나면 이미 명령이 나간 뒤일 수 있다 → 등록과 실행 순간에 기계적으로 검사</a:t>
+            </a:r>
+          </a:p>
+          <a:p>
+            <a:r>
+              <a:t>[다음] 장치의 짝</a:t>
             </a:r>
           </a:p>
         </p:txBody>
@@ -2735,7 +3615,37 @@
           <a:lstStyle/>
           <a:p>
             <a:r>
-              <a:t>이렇게 위험을 막는 장치는 에이전트 쪽에도 있습니다. 두 쪽의 장치를 위험별로 짝지어 봤어요. 윗줄이 에이전트 쪽 장치, 아랫줄이 프로세스 쪽 장치입니다. 그리고 둘을 잇는 세로선에 붙은 이름이, 두 장치가 함께 막는 위험이에요. 왼쪽 짝이 막는 건 근거가 모자란 추천안입니다. 도구는 증거와 값의 상태를 검사하고, 에이전트에는 근거가 부족하면 이유를 적어 보류하도록 지침을 둡니다. 사람도 추천안의 근거를 검토하도록 해서 놓친 부분을 다시 살펴요. 가운데 짝은 승인 없는 쓰기예요. 에이전트의 업무 도구 접근을 읽기와 제안 제출로 제한하고, 프로세스에서는 승인 조건의 갈림을 지나야만 실행에 닿게 합니다. 오른쪽 짝은 드러나지 않은 채 길어지는 대기예요. 에이전트 쪽에서는 실행 시간과 재시도에 한도가 있어서, 멈춘 작업이 드러나고 사람이 닫을 수 있습니다. 프로세스 쪽에서는 승인 지연 타이머가 사람의 응답이 늦어졌다는 걸 알려요. 타이머가 알림을 보냈다고 대기가 자동 해결되지는 않습니다. 누가 확인하고 어떻게 다시 처리할지도 정해야 하죠. 이 짝이 말하는 건 한 장치만 믿지 않는다는 거예요. 보류 지침처럼 모델 판단에 기대는 부분과 도구 권한처럼 기계적으로 제한하는 부분을 구별해야 합니다. 프로세스의 승인 검사는 실행 전에 권한과 조건을 확인하고, 지연 타이머는 응답이 늦어진 상태를 알립니다. 각 장치가 작동하는 시점과 막는 위험이 다른 거죠.</a:t>
+              <a:t>[짚을 곳] 윗줄 에이전트 쪽 → 아랫줄 프로세스 쪽, 세로선의 이름(함께 막는 위험)</a:t>
+            </a:r>
+          </a:p>
+          <a:p>
+            <a:r>
+              <a:t>· 근거가 모자란 추천안: 도구가 증거와 값의 상태를 검사하고 에이전트는 이유를 적어 보류 ↔ 사람이 추천안의 근거를 검토</a:t>
+            </a:r>
+          </a:p>
+          <a:p>
+            <a:r>
+              <a:t>· 승인 없는 쓰기: 업무 도구를 읽기와 제안 제출로 제한 ↔ 승인 조건의 갈림을 지나야 실행</a:t>
+            </a:r>
+          </a:p>
+          <a:p>
+            <a:r>
+              <a:t>· 드러나지 않은 대기: 실행 시간 · 재시도의 한도로 멈춘 작업이 드러나 사람이 닫는다 ↔ 승인 지연 타이머가 늦은 응답을 알린다. 알림이 대기를 자동 해결하지는 않는다 — 누가 확인해 어떻게 다시 처리할지도 정한다</a:t>
+            </a:r>
+          </a:p>
+          <a:p>
+            <a:r>
+              <a:t>· 한 장치만 믿지 않는다. 모델 판단에 기대는 부분(보류 지침)과 기계적으로 제한하는 부분(도구 권한)을 구별</a:t>
+            </a:r>
+          </a:p>
+          <a:p>
+            <a:r>
+              <a:t>· 장치마다 작동하는 시점과 막는 위험이 다르다</a:t>
+            </a:r>
+          </a:p>
+          <a:p>
+            <a:r>
+              <a:t>[다음] 어디부터 살펴보나</a:t>
             </a:r>
           </a:p>
         </p:txBody>
@@ -2805,7 +3715,37 @@
           <a:lstStyle/>
           <a:p>
             <a:r>
-              <a:t>역할을 이렇게 나눠 두면, 문제가 생겼을 때 어디를 볼지도 좁혀집니다. 결과가 기대와 다를 때 드러나는 증상 여섯을 표로 놓았어요. 가운데 칸이 먼저 살펴볼 곳, 오른쪽 칸이 그 영역입니다. 위의 네 줄, 지식과 에이전트의 몫은 앞 시간에 본 구분 그대로예요. 기준값이나 승인자가 틀리면 지식을, 읽을 값을 읽지 않았거나 결과 항목의 이름이 다르면 스킬과 명세를 봅니다. 이번에 더한 건 아래 두 줄, 프로세스의 몫이에요. 승인 없이 다음 단계가 열렸다면 프로세스 정의의 갈림 조건을 살펴요. 끝났는데 결과를 알 수 없다면 끝 이벤트와 결과 보고를 봅니다. 거절된 처리 건도 상태는 완료로 표시됐으니까, 상태만 봐서는 일이 이뤄졌는지 알 수 없었죠. 증상에서 영역부터 가리면, 고치지 않아도 될 곳을 건드리지 않게 됩니다. 예를 들어 승인자가 틀리면 조치의 정책부터 보되, 정책이 맞다면 역할 연결이나 작업 담당도 확인합니다. 표는 첫 조사 지점이지 원인을 한 곳으로 확정하는 답안은 아니에요. 실제로 값이 어디에서 잘못 넘어갔는지 기록을 따라 확인합니다.</a:t>
+              <a:t>[짚을 곳] 표 여섯 줄, 위 넷(지식 · 에이전트) → 아래 둘(프로세스)</a:t>
+            </a:r>
+          </a:p>
+          <a:p>
+            <a:r>
+              <a:t>· 원인 후보나 기준값이 틀리다 → 인스턴스 데이터와 근거 문서(지식), 승인자가 맞지 않는다 → 조치 정책 → 역할 연결 · 담당</a:t>
+            </a:r>
+          </a:p>
+          <a:p>
+            <a:r>
+              <a:t>· 읽어야 할 값을 안 읽었다 → 스킬의 절차와 도구 연결, 결과 항목 이름이 다르다 → 명세의 출력 계약(에이전트)</a:t>
+            </a:r>
+          </a:p>
+          <a:p>
+            <a:r>
+              <a:t>· 승인 없이 다음 단계가 열렸다 → 정의의 갈림 조건, 끝났는데 결과를 모른다 → 끝 이벤트와 결과 보고(프로세스). 거절된 건도 상태는 완료였다</a:t>
+            </a:r>
+          </a:p>
+          <a:p>
+            <a:r>
+              <a:t>· 증상에서 영역부터 가리면 고치지 않아도 될 곳을 건드리지 않는다</a:t>
+            </a:r>
+          </a:p>
+          <a:p>
+            <a:r>
+              <a:t>· 표는 첫 조사 지점일 뿐 원인을 확정하는 답안이 아니다 — 값이 어디서 잘못 넘어갔는지 기록을 따라 확인</a:t>
+            </a:r>
+          </a:p>
+          <a:p>
+            <a:r>
+              <a:t>[다음] 세 영역을 한 그림으로</a:t>
             </a:r>
           </a:p>
         </p:txBody>
@@ -2875,7 +3815,27 @@
           <a:lstStyle/>
           <a:p>
             <a:r>
-              <a:t>목차의 첫 줄부터 시작하겠습니다. 첫 번째 단원은 경보에서 추천안까지, 에이전트가 읽는 지식이에요. 물음부터 하나 드릴게요. 에이전트가 받은 건 경보 한 건뿐이었습니다. 그런데 무엇을 읽어서 원인과 조치까지 담긴 판단을 만들었을까요? 지식 영역을 마무리할 때는 판단에 쓸 재료가 저마다 제자리에 놓여 있다는 데까지 정리했죠. 이번 회차에서는 거기서 한 걸음 더 갑니다. 클래스나 스키마의 정의를 처음부터 다시 외우자는 게 아니에요. 지식이 어떤 길로 에이전트의 입력이 되는지, 그 길을 따라가 보자는 겁니다.</a:t>
+              <a:t>[짚을 곳] 단원명 → 부제</a:t>
+            </a:r>
+          </a:p>
+          <a:p>
+            <a:r>
+              <a:t>· 단원의 물음: 에이전트가 받은 것은 경보 한 건뿐 — 무엇을 읽어서 원인과 조치까지 담긴 판단을 만들었나</a:t>
+            </a:r>
+          </a:p>
+          <a:p>
+            <a:r>
+              <a:t>· 지식 영역의 마무리 지점: 판단에 쓸 재료가 저마다 제자리에 놓여 있다</a:t>
+            </a:r>
+          </a:p>
+          <a:p>
+            <a:r>
+              <a:t>· 이번에 더 가는 곳: 클래스 · 스키마 정의를 다시 외우는 것이 아니라, 지식이 어떤 길로 에이전트의 입력이 되는지 따라간다</a:t>
+            </a:r>
+          </a:p>
+          <a:p>
+            <a:r>
+              <a:t>[다음] 따라갈 사건</a:t>
             </a:r>
           </a:p>
         </p:txBody>
@@ -2945,7 +3905,37 @@
           <a:lstStyle/>
           <a:p>
             <a:r>
-              <a:t>마지막으로 세 영역이 주고받는 걸 한 그림으로 묶었습니다. 지식, 에이전트, 프로세스, 세 상자를 왼쪽부터 놓았어요. 상자 사이의 파란 화살표가 영역 사이를 넘어가는 것입니다. 지식에서 에이전트로는 재료가 넘어가요. 관계와 기준, 그리고 값이 놓인 자리죠. 에이전트에서 프로세스로는 추천안 한 건이 넘어갑니다. 추천과 대안, 그리고 그 근거가 담겨 있고요. 프로세스는 그 추천안을 사람의 승인과 시스템의 실행으로 잇습니다. 그리고 누가 무엇을 결정하고 실행했는지를 아래의 띠, 처리 기록과 감사 기록으로 남겨요. 처음에 작업지시 한 장에서 판단과 근거까지 거슬러 갈 수 있다고 했죠. 그게 가능한 건 이 띠가 끝까지 이어져 있기 때문입니다. 그림은 판단 재료와 추천안이라는 두 연결을 강조한 겁니다. 실제 시스템에는 식별자와 상태, 오류나 보류 정보도 함께 오갑니다. 항목 이름과 형식만 같다고 서로 바꿔 끼울 수 있는 것은 아니에요. 값의 의미와 권한, 실패할 때의 행동까지 계약으로 맞추고 검증하면, 한 영역을 바꿀 때 다른 영역에 미치는 영향을 줄일 수 있습니다.</a:t>
+              <a:t>[짚을 곳] 세 상자 왼쪽부터 → 상자 사이 파란 화살표 → 아래 띠</a:t>
+            </a:r>
+          </a:p>
+          <a:p>
+            <a:r>
+              <a:t>· 지식 → 에이전트: 재료(관계 · 기준 · 값이 놓인 자리), 아래 칸 스키마 · SOP · 규칙 · 출처</a:t>
+            </a:r>
+          </a:p>
+          <a:p>
+            <a:r>
+              <a:t>· 에이전트 → 프로세스: 추천안 한 건(추천과 대안, 근거), 아래 칸 스킬 · MCP · 명세 · 시나리오</a:t>
+            </a:r>
+          </a:p>
+          <a:p>
+            <a:r>
+              <a:t>· 프로세스: 추천안을 사람의 승인과 시스템 실행으로 잇고(정의 · 인스턴스 · 승인 · 실행), 처리 기록과 감사 기록을 남긴다 — 작업지시 한 장에서 판단과 근거까지 거슬러 가는 것이 이 띠 덕분</a:t>
+            </a:r>
+          </a:p>
+          <a:p>
+            <a:r>
+              <a:t>· 실제로는 식별자 · 상태 · 오류 · 보류 정보도 오간다. 이름과 형식만 같다고 바꿔 끼울 수 없다</a:t>
+            </a:r>
+          </a:p>
+          <a:p>
+            <a:r>
+              <a:t>· 의미 · 권한 · 실패 때의 행동까지 계약으로 맞추고 검증하면 한 영역의 변경이 다른 영역에 번지는 것을 줄인다</a:t>
+            </a:r>
+          </a:p>
+          <a:p>
+            <a:r>
+              <a:t>[다음] 교대 인수인계 실습</a:t>
             </a:r>
           </a:p>
         </p:txBody>
@@ -3015,7 +4005,32 @@
           <a:lstStyle/>
           <a:p>
             <a:r>
-              <a:t>지금까지 쿨러 사건에서 지식이 판단의 근거가 되고, 사람의 승인을 거쳐 시스템이 실행하는 흐름을 살펴봤습니다. 이제 교대 인수인계를 통해 같은 연결을 적용합니다. 한 근무자가 전달받은 작업 메모를 다음 근무자에게 넘기는 장면입니다. 메모에 정비가 끝났다고 쓰여 있어도 열린 작업지시가 남아 있다면 둘을 따로 확인해야 합니다. 먼저 대상 설비와 교대, 기준 시각, 작업 메모를 정리합니다. 제공 점검 문서와 설비 이력, 정비·재고 자료가 확인할 출처입니다. 에이전트가 근거를 읽어 인계안 초안을 만들고, 인계자와 인수자가 차례로 검토합니다. 끝난 인계 기록에는 확인된 근거뿐 아니라 미확인 항목과 다음 사람이 할 확인도 남아야 합니다. 인수 확인은 정비 완료나 설비 조치가 아닙니다.</a:t>
+              <a:t>[짚을 곳] 실습 제목</a:t>
+            </a:r>
+          </a:p>
+          <a:p>
+            <a:r>
+              <a:t>· 같은 연결의 적용: 쿨러 사건에서 본 지식 → 판단 → 사람의 승인 → 시스템 실행을 교대 인수인계 한 건에 적용</a:t>
+            </a:r>
+          </a:p>
+          <a:p>
+            <a:r>
+              <a:t>· 장면: 한 근무자가 전달받은 작업 메모를 다음 근무자에게 넘긴다</a:t>
+            </a:r>
+          </a:p>
+          <a:p>
+            <a:r>
+              <a:t>· 핵심 긴장: 메모에 정비가 끝났다고 적혀 있어도 열린 작업지시가 남아 있으면 둘을 따로 확인해야 한다</a:t>
+            </a:r>
+          </a:p>
+          <a:p>
+            <a:r>
+              <a:t>· 이 단계는 인계 업무의 입력과 완료 조건을 정하는 데까지</a:t>
+            </a:r>
+          </a:p>
+          <a:p>
+            <a:r>
+              <a:t>[다음] 인계안에 담을 것</a:t>
             </a:r>
           </a:p>
         </p:txBody>
@@ -3085,7 +4100,37 @@
           <a:lstStyle/>
           <a:p>
             <a:r>
-              <a:t>41~42장 통합 발화는 41장 발표자 노트를 따른다.</a:t>
+              <a:t>[짚을 곳] 카드 넷 왼쪽부터, 넷째 카드(강조)</a:t>
+            </a:r>
+          </a:p>
+          <a:p>
+            <a:r>
+              <a:t>· 입력: 대상 설비, 교대, 기준 시각, 전달받은 작업 메모</a:t>
+            </a:r>
+          </a:p>
+          <a:p>
+            <a:r>
+              <a:t>· 대조: 설비 상태, 미완료 작업지시, 부품 대기 정보</a:t>
+            </a:r>
+          </a:p>
+          <a:p>
+            <a:r>
+              <a:t>· 범위: 다음 근무자가 확인할 일을 인계 — 앞에서 실행한 A · B · C의 조치 · 정비 · 구매를 다시 실행하지 않는다</a:t>
+            </a:r>
+          </a:p>
+          <a:p>
+            <a:r>
+              <a:t>· 완료 조건: 인계자 검토 + 인수자 확인. 끝난 인계 기록에는 확인된 근거와 함께 미확인 항목과 다음 사람이 할 확인도 남는다</a:t>
+            </a:r>
+          </a:p>
+          <a:p>
+            <a:r>
+              <a:t>· 인수 확인 ≠ 정비 완료 · 설비 조치</a:t>
+            </a:r>
+          </a:p>
+          <a:p>
+            <a:r>
+              <a:t>[다음] 보충 문서를 지식으로</a:t>
             </a:r>
           </a:p>
         </p:txBody>
@@ -3155,7 +4200,27 @@
           <a:lstStyle/>
           <a:p>
             <a:r>
-              <a:t>다음으로 인계에 사용할 보충 점검 문서를 기존 지식에 연결합니다. 강사가 제공한 HI-01 문서에는 설비 상태, 열린 작업지시, 부품 상태, 작업 메모를 대조하는 절차가 있습니다. 추출 결과의 각 절차가 원문의 어느 부분에서 왔는지 사람이 먼저 확인합니다. 같은 제공 문서와 추출 조건에서는 준비된 검토본을 재사용하지만, 사람이 확인하고 적재하는 단계는 남아 있습니다. 원문과 맞지 않거나 부족한 항목을 발견하면 그대로 적재하지 말고 확인해야 합니다. 기존 쿨러·정비·구매 지식은 그대로 두고 보충 문서만 추가합니다. 이 실습은 학생의 임의 문서를 무제한으로 추출하는 경로가 아닙니다.</a:t>
+              <a:t>[짚을 곳] 실습 제목</a:t>
+            </a:r>
+          </a:p>
+          <a:p>
+            <a:r>
+              <a:t>· 할 일: 인계에 쓸 보충 점검 문서를 기존 지식에 추가</a:t>
+            </a:r>
+          </a:p>
+          <a:p>
+            <a:r>
+              <a:t>· 입력: 강사가 제공한 HI-01 보충 매뉴얼과 준비된 추출 후보 — 설비 상태 · 열린 작업지시 · 부품 상태 · 작업 메모를 대조하는 절차가 들어 있다</a:t>
+            </a:r>
+          </a:p>
+          <a:p>
+            <a:r>
+              <a:t>· 범위: 기존 쿨러 · 정비 · 구매 지식은 그대로 두고, 학생의 임의 문서를 무제한으로 추출하는 실습이 아니다</a:t>
+            </a:r>
+          </a:p>
+          <a:p>
+            <a:r>
+              <a:t>[다음] 대조와 적재의 기준</a:t>
             </a:r>
           </a:p>
         </p:txBody>
@@ -3225,7 +4290,37 @@
           <a:lstStyle/>
           <a:p>
             <a:r>
-              <a:t>43~44장 통합 발화는 43장 발표자 노트를 따른다.</a:t>
+              <a:t>[짚을 곳] 카드 넷 왼쪽부터, 넷째 카드(강조)</a:t>
+            </a:r>
+          </a:p>
+          <a:p>
+            <a:r>
+              <a:t>· 입력: 제공 HI-01 보충 매뉴얼, 준비된 추출 후보</a:t>
+            </a:r>
+          </a:p>
+          <a:p>
+            <a:r>
+              <a:t>· 검토: 추출된 절차 · 조건 · 근거가 원문의 어느 부분에서 왔는지 사람이 먼저 대조. 원문과 안 맞거나 부족한 항목은 적재하지 않는다</a:t>
+            </a:r>
+          </a:p>
+          <a:p>
+            <a:r>
+              <a:t>· 적재: 승인한 것만 추가. 같은 문서 · 추출 조건이면 준비된 추출 결과를 다시 쓰지만, 사람의 확인과 적재는 그대로 — 둘을 구분해 기록</a:t>
+            </a:r>
+          </a:p>
+          <a:p>
+            <a:r>
+              <a:t>· 성공 기준: 지식 지도에서 새 항목의 식별자, 문서 · 판본 · 절 연결 확인</a:t>
+            </a:r>
+          </a:p>
+          <a:p>
+            <a:r>
+              <a:t>· 이렇게 추가한 기준을 뒤의 인계안에서 확인 기준으로 쓴다</a:t>
+            </a:r>
+          </a:p>
+          <a:p>
+            <a:r>
+              <a:t>[다음] 인계안을 쓸 에이전트</a:t>
             </a:r>
           </a:p>
         </p:txBody>
@@ -3295,7 +4390,27 @@
           <a:lstStyle/>
           <a:p>
             <a:r>
-              <a:t>이제 교대 인계안을 작성할 에이전트와 스킬을 구성합니다. 입력은 대상 설비와 인계할 교대, 기준 시각, 작업 메모입니다. 에이전트는 허용된 읽기 도구로 설비 상태와 열린 작업지시, 실제 재고와 입고 예정 자료를 조회합니다. 메모에서 정비가 완료됐다고 전했더라도 실제 작업지시가 열려 있다면 그 차이를 불일치로 남겨야 합니다. 입고 예정과 현재 재고도 같은 말이 아닙니다. 조회 결과가 없거나 조회 자체가 실패한 경우에는 확인이 필요한 이유와 다음 확인을 남깁니다. 실제 조회한 도구와 결과가 인계안의 근거가 되어야 합니다. 학생은 에이전트의 이름과 설명을 이해하기 쉽게 작성할 수 있지만 도구 서버나 모델을 임의로 바꾸지는 않습니다.</a:t>
+              <a:t>[짚을 곳] 실습 제목</a:t>
+            </a:r>
+          </a:p>
+          <a:p>
+            <a:r>
+              <a:t>· 할 일: 교대 인계안을 작성할 에이전트와 스킬을 구성</a:t>
+            </a:r>
+          </a:p>
+          <a:p>
+            <a:r>
+              <a:t>· 조회 범위: 설비 · 정비 · ERP의 허용된 조회 도구(설비 상태, 열린 작업지시, 실제 재고, 입고 예정)</a:t>
+            </a:r>
+          </a:p>
+          <a:p>
+            <a:r>
+              <a:t>· 도구 서버나 모델을 임의로 바꾸지 않는다</a:t>
+            </a:r>
+          </a:p>
+          <a:p>
+            <a:r>
+              <a:t>[다음] 구성과 성공 기준</a:t>
             </a:r>
           </a:p>
         </p:txBody>
@@ -3365,7 +4480,37 @@
           <a:lstStyle/>
           <a:p>
             <a:r>
-              <a:t>45~46장 통합 발화는 45장 발표자 노트를 따른다.</a:t>
+              <a:t>[짚을 곳] 카드 넷 왼쪽부터, 넷째 카드(강조)</a:t>
+            </a:r>
+          </a:p>
+          <a:p>
+            <a:r>
+              <a:t>· 구성: 에이전트의 이름 · 설명, 스킬에 확인할 항목</a:t>
+            </a:r>
+          </a:p>
+          <a:p>
+            <a:r>
+              <a:t>· 조회: 설비 · 정비 · ERP의 허용된 조회 도구</a:t>
+            </a:r>
+          </a:p>
+          <a:p>
+            <a:r>
+              <a:t>· 산출물: 네 영역의 인계안, 실제 조회 근거가 붙는다</a:t>
+            </a:r>
+          </a:p>
+          <a:p>
+            <a:r>
+              <a:t>· 성공 기준: 메모의 「정비 완료」와 실제로 열린 작업지시의 차이, 입고 예정과 실제 재고의 차이를 확인 사항으로 남긴다</a:t>
+            </a:r>
+          </a:p>
+          <a:p>
+            <a:r>
+              <a:t>· 조회 결과가 없거나 조회가 실패하면 확인이 필요한 이유와 다음 확인을 남긴다. 인계안의 근거가 실제로 부른 도구와 결과인지 원천과 다시 대조</a:t>
+            </a:r>
+          </a:p>
+          <a:p>
+            <a:r>
+              <a:t>[다음] 교대 흐름 실행</a:t>
             </a:r>
           </a:p>
         </p:txBody>
@@ -3435,7 +4580,27 @@
           <a:lstStyle/>
           <a:p>
             <a:r>
-              <a:t>마지막으로 제공된 교대 흐름을 포털에 연결해 한 처리 건을 진행합니다. bpmn.io에서 시작과 인계안 작성, 인계자 검토, 인수자 확인 또는 보완, 종료의 연결을 확인합니다. 포털에는 시작 입력과 역할, 각 작업에 담당할 에이전트를 연결한 뒤 검사를 통과한 판본을 등록합니다. 시작하면 에이전트가 실제 자료를 조회해 초안을 만들고 인계자가 확인합니다. 다음으로 인수자가 내용을 살펴보고 보완이 필요하면 사유를 적어 같은 처리 건으로 돌려보냅니다. 보완된 초안을 인계자가 다시 검토하고 인수자가 확인하면 인계 기록이 끝납니다. 이 확인은 사람 사이에 내용을 전달했다는 뜻이며, 설비가 조치됐거나 발주와 정비가 완료됐다는 뜻은 아닙니다.</a:t>
+              <a:t>[짚을 곳] 실습 제목</a:t>
+            </a:r>
+          </a:p>
+          <a:p>
+            <a:r>
+              <a:t>· 할 일: 제공된 교대 흐름을 등록하고 한 처리 건을 진행</a:t>
+            </a:r>
+          </a:p>
+          <a:p>
+            <a:r>
+              <a:t>· 흐름의 뼈대: 초안 작성 → 인계자 검토 → 인수자 보완 요청 → 재검토 → 인수 확인</a:t>
+            </a:r>
+          </a:p>
+          <a:p>
+            <a:r>
+              <a:t>· 이 확인은 사람 사이의 전달이다 — 설비 조치, 발주 · 정비의 완료를 뜻하지 않는다</a:t>
+            </a:r>
+          </a:p>
+          <a:p>
+            <a:r>
+              <a:t>[다음] 여섯 칸의 흐름</a:t>
             </a:r>
           </a:p>
         </p:txBody>
@@ -3505,7 +4670,37 @@
           <a:lstStyle/>
           <a:p>
             <a:r>
-              <a:t>47~48장 통합 발화는 47장 발표자 노트를 따른다.</a:t>
+              <a:t>[짚을 곳] 여섯 칸 왼쪽부터, 마지막 칸(강조)</a:t>
+            </a:r>
+          </a:p>
+          <a:p>
+            <a:r>
+              <a:t>· 흐름 정리: bpmn.io에서 제공 교대 BPMN을 열어 작업 이름과 배치를 정리, 시작 입력과 검토 · 보완 분기는 그대로</a:t>
+            </a:r>
+          </a:p>
+          <a:p>
+            <a:r>
+              <a:t>· 등록: 인계안 초안의 세 단계에 교대 에이전트를 배정하고 별도 판본으로 등록</a:t>
+            </a:r>
+          </a:p>
+          <a:p>
+            <a:r>
+              <a:t>· 인계안: 설비 · 교대 정보를 넣어 시작하면 에이전트가 실제 자료를 조회해 초안</a:t>
+            </a:r>
+          </a:p>
+          <a:p>
+            <a:r>
+              <a:t>· 인계자: 근거와 불일치 검토 → 인수자: 보완이 필요하면 사유를 적어 같은 처리 건으로 돌려보냄 → 재검토 → 확인</a:t>
+            </a:r>
+          </a:p>
+          <a:p>
+            <a:r>
+              <a:t>· 종료: 근거와 완료 기록 확인. 사람 사이의 전달 확인일 뿐 설비 조치 · 발주 · 정비 완료가 아니다</a:t>
+            </a:r>
+          </a:p>
+          <a:p>
+            <a:r>
+              <a:t>[다음] ProcessGPT 시연</a:t>
             </a:r>
           </a:p>
         </p:txBody>
@@ -3575,7 +4770,22 @@
           <a:lstStyle/>
           <a:p>
             <a:r>
-              <a:t>이어서 ProcessGPT 시연을 볼 기준을 준비합니다. 앞의 교대 실습에서는 제공 문서와 실제 조회를 인계안에 연결하고, 두 사람의 검토와 보완을 하나의 처리 건으로 이어 봅니다. 이제 제품에서는 지식, 에이전트, 프로세스가 각각 어디에 나타나고 다음 차례가 어떻게 열리는지 살펴보겠습니다.</a:t>
+              <a:t>[짚을 곳] 실습 제목</a:t>
+            </a:r>
+          </a:p>
+          <a:p>
+            <a:r>
+              <a:t>· 앞 실습에서 한 것: 제공 문서와 실제 조회를 인계안에 연결하고, 두 사람의 검토와 보완을 한 처리 건으로 이음</a:t>
+            </a:r>
+          </a:p>
+          <a:p>
+            <a:r>
+              <a:t>· 시연에서 볼 것: 제품에서 지식 · 에이전트 · 프로세스가 각각 어디에 나타나고, 다음 차례가 어떻게 열리는지</a:t>
+            </a:r>
+          </a:p>
+          <a:p>
+            <a:r>
+              <a:t>[다음] 제품 소개</a:t>
             </a:r>
           </a:p>
         </p:txBody>
@@ -3645,7 +4855,37 @@
           <a:lstStyle/>
           <a:p>
             <a:r>
-              <a:t>따라갈 건 앞 회차들에서 계속 다뤄 온 쿨러 사건이에요. HYD-01에서 오전 11시를 조금 넘겨 쿨러 성능 저하 경보가 났고요, 이 경보 한 건이 처리 건 하나를 열었습니다. 그 처리 건이 지나간 자리를 화면에 왼쪽부터 한 줄로 놓았어요. 맨 왼쪽이 경보입니다. 바로 옆 둘째 자리에서 에이전트가 원인을 진단하고 조치를 제안했죠. 셋째 자리에서는 운전원이 그 제안을 승인했어요. 승인 뒤로는 팬 속도를 올리는 냉각 명령이 나가고, 유온을 다시 읽어서 회복됐는지 확인합니다. 유온은 51도 남짓까지 내려왔고, 경보도 해제됐어요. 그다음 쿨러 핀을 세척하라는 작업지시가 등록되고, 결과 보고가 정상으로 나간 뒤 끝났습니다. 자리마다 아래에 작게 적힌 문자열 보이시죠? 그 자리에 남은 기록의 번호예요. 경보에도, 에이전트의 판단에도, 명령과 작업지시에도 번호가 붙어 있습니다. 번호를 읽을 필요는 없어요. 기억해 둘 건 자리마다 기록이 따로 남았다는 점입니다. 나중에 이 번호로 기록과 기록을 이어서 거슬러 볼 수 있거든요. 예를 들어 작업지시 기록에는 그 작업지시가 어느 판단에서 나왔는지, 판단 번호가 함께 적혀 있어요. 그래서 세척을 맡은 정비 담당자는 작업지시 한 장에서 출발해서, 왜 이 세척을 하게 됐는지 에이전트의 판단과 그 근거까지 따라갈 수 있습니다. 기록이 자리마다 남고 서로 이어져 있다는 게 이런 쓸모예요. 이 여덟 자리가 이번 회차 이론 전체의 지도예요. 지금까지 배운 지식, 에이전트, 프로세스가 어디에서 무슨 일을 했는지, 이 줄 위에서 하나씩 짚어 가겠습니다.</a:t>
+              <a:t>[짚을 곳] 여덟 자리 왼쪽부터, 자리마다 아래 작은 번호</a:t>
+            </a:r>
+          </a:p>
+          <a:p>
+            <a:r>
+              <a:t>· HYD-01, 오전 11시를 조금 넘겨 쿨러 성능 저하 경보 → 처리 건 하나가 열림</a:t>
+            </a:r>
+          </a:p>
+          <a:p>
+            <a:r>
+              <a:t>· 경보 → 에이전트의 진단 · 제안(DEC-…408b) → 운전원 승인(11:14:56) → 냉각 명령(CMD-…b94a) → 재관측(유온 51.5 ℃, 경보 해제) → 작업지시 등록(WO-…C058) → 결과 보고 정상 → 끝</a:t>
+            </a:r>
+          </a:p>
+          <a:p>
+            <a:r>
+              <a:t>· 번호는 읽을 필요 없다. 자리마다 기록이 따로 남았다는 점이 핵심</a:t>
+            </a:r>
+          </a:p>
+          <a:p>
+            <a:r>
+              <a:t>· 쓸모: 작업지시 기록에 판단 번호가 함께 적혀 있어, 정비 담당자가 작업지시 한 장에서 에이전트의 판단과 근거까지 거슬러 간다</a:t>
+            </a:r>
+          </a:p>
+          <a:p>
+            <a:r>
+              <a:t>· 이 여덟 자리가 이번 회차 이론 전체의 지도</a:t>
+            </a:r>
+          </a:p>
+          <a:p>
+            <a:r>
+              <a:t>[다음] 세 영역을 겹쳐 보기</a:t>
             </a:r>
           </a:p>
         </p:txBody>
@@ -3715,7 +4955,32 @@
           <a:lstStyle/>
           <a:p>
             <a:r>
-              <a:t>ProcessGPT는 BPMN으로 업무 흐름을 표현하고 여러 에이전트의 일을 조율하는 오픈소스 프로젝트입니다. 개발사의 공식 소개에서 확인할 수 있는 방향이에요. 여기서 볼 핵심은 제품 이름보다 오케스트레이션이라는 역할입니다. 여러 수행자가 각자의 일을 하더라도, 누가 언제 시작하고 어떤 결과를 다음에 넘길지는 조율해야 하죠. HYD에서 프로세스 엔진이 맡았던 역할입니다. 수행자가 여러 전문 에이전트로 늘어나도, 이 연결과 책임을 설계해야 한다는 점은 같습니다. 공식 소개에는 자연어로 프로세스를 정의하는 기능도 나옵니다. 업무를 말로 설명해 초안을 만드는 길이 열리는 거예요. 그렇다고 생성된 그림이 내 업무의 완료 조건이나 승인 규칙까지 자동으로 맞췄다는 뜻은 아닙니다. 사람이 의도를 검토하고 실제 실행 결과를 확인해야 하죠. 시연에서는 기능의 수보다 그 연결을 보겠습니다. 일을 맡기는 설계는 어디에 있고, 실제로 진행되는 한 건은 어디에 있으며, 결과를 낸 뒤 다음 차례를 누가 여는지요. 이 질문은 다른 제품을 볼 때도 그대로 사용할 수 있습니다.</a:t>
+              <a:t>[짚을 곳] 세 줄 위에서부터, 셋째 줄(강조)</a:t>
+            </a:r>
+          </a:p>
+          <a:p>
+            <a:r>
+              <a:t>· ProcessGPT: BPMN으로 업무 흐름을 표현하고 여러 에이전트의 일을 조율하는 uEngine Solutions의 오픈소스 프로젝트(개발사 공식 소개 기준)</a:t>
+            </a:r>
+          </a:p>
+          <a:p>
+            <a:r>
+              <a:t>· 볼 핵심은 제품 이름보다 오케스트레이션이라는 역할 — 누가 언제 시작하고 어떤 결과를 다음에 넘길지의 조율, HYD에서 프로세스 엔진이 맡던 일</a:t>
+            </a:r>
+          </a:p>
+          <a:p>
+            <a:r>
+              <a:t>· 자연어로 프로세스를 정의하는 기능: 초안을 만드는 길일 뿐, 생성된 그림이 완료 조건이나 승인 규칙까지 맞췄다는 뜻은 아니다 → 사람이 의도를 검토하고 실행 결과를 확인</a:t>
+            </a:r>
+          </a:p>
+          <a:p>
+            <a:r>
+              <a:t>· 시연의 질문: 일을 맡기는 설계(정의)는 어디에, 진행되는 한 건은 어디에, 결과 뒤 다음 차례는 누가 여나 — 다른 제품에도 그대로</a:t>
+            </a:r>
+          </a:p>
+          <a:p>
+            <a:r>
+              <a:t>[다음] 이름 짝 맞추기</a:t>
             </a:r>
           </a:p>
         </p:txBody>
@@ -3785,7 +5050,37 @@
           <a:lstStyle/>
           <a:p>
             <a:r>
-              <a:t>우리가 만든 건 제품의 어느 자리에 해당할까요? 짝을 맞춰 보겠습니다. 표의 왼쪽 칸이 이 과정에서 만든 것, 가운데 칸이 ProcessGPT에서 그게 나타나는 자리, 오른쪽 칸이 그 구실이에요. 첫 줄은 판단에 필요한 지식의 자리입니다. 제품의 공개 구조에는 지식 그래프뿐 아니라 문서 검색을 위한 구성도 있어요. 이 표는 HYD 제작 때 참고한 제품 구조와의 대응입니다. 둘째 줄, 에이전트는 사람과 같은 사용자 목록의 한 행으로 등록되고, 쓸 도구는 조직 단위로 등록한 MCP 서버에서 나옵니다. 우리 시스템도 같은 방식으로 에이전트를 등록했어요. 셋째 줄부터 프로세스 쪽인데, 이름이 조금 달라요. 흐름과 판본은 프로세스 정의와 정의 버전입니다. 강조한 두 줄을 보세요. 처리 건은 프로세스 인스턴스, 단계는 워크아이템이라고 불러요. 마지막 줄, 사람에게 맡겨진 워크아이템이 모이는 곳이 내 작업함입니다. 이름은 달라도 구실은 같아요. 그러니까 처리 건과 단계를 구별하던 질문을 제품의 인스턴스와 워크아이템에도 적용할 수 있습니다. 상태 이름이 비슷해도 실제 완료 의미는 해당 제품의 정의와 결과 기록을 확인해야 해요.</a:t>
+              <a:t>[짚을 곳] 표 여섯 줄, 왼쪽 이 과정에서 만든 것 → 가운데 ProcessGPT → 오른쪽 구실</a:t>
+            </a:r>
+          </a:p>
+          <a:p>
+            <a:r>
+              <a:t>· 지식 그래프와 인제스천 → 지식 그래프 · 문서 검색 등 지식 구성(판단의 근거). HYD 제작 때 참고한 제품 구조와의 대응</a:t>
+            </a:r>
+          </a:p>
+          <a:p>
+            <a:r>
+              <a:t>· 에이전트와 MCP 도구 → 사용자 목록의 에이전트 행, 조직 단위로 등록한 MCP 서버(우리 시스템도 같은 방식으로 에이전트를 등록)</a:t>
+            </a:r>
+          </a:p>
+          <a:p>
+            <a:r>
+              <a:t>· 흐름과 판본 → 프로세스 정의와 정의 버전</a:t>
+            </a:r>
+          </a:p>
+          <a:p>
+            <a:r>
+              <a:t>· 처리 건 → 프로세스 인스턴스, 단계 → 워크아이템, 사람에게 맡겨진 워크아이템이 모이는 곳 → 내 작업함</a:t>
+            </a:r>
+          </a:p>
+          <a:p>
+            <a:r>
+              <a:t>· 이름은 달라도 구실은 같아 처리 건과 단계를 가르던 질문을 그대로 쓴다. 상태 이름이 비슷해도 완료의 뜻은 제품의 정의와 결과 기록으로 확인</a:t>
+            </a:r>
+          </a:p>
+          <a:p>
+            <a:r>
+              <a:t>[다음] 작업 전달 구조</a:t>
             </a:r>
           </a:p>
         </p:txBody>
@@ -3855,7 +5150,37 @@
           <a:lstStyle/>
           <a:p>
             <a:r>
-              <a:t>이 대응이 실제로 어떻게 움직이는지, HYD가 참고한 제품의 작업 전달 구조를 한 그림으로 놓았습니다. 이 그림은 실제 제품의 쿨러 실행 화면이 아니라, 배운 사례를 구조에 대응시킨 설명입니다. 왼쪽이 실행 엔진, 가운데가 워크아이템 목록, 오른쪽이 수행자예요. 실행 엔진은 프로세스 정의를 읽고, 수행할 작업을 워크아이템으로 관리하고, 다음 차례의 작업을 진행 상태로 엽니다. 예정 작업을 미리 목록에 만들어 둘 수도 있어요. 오른쪽 수행자는 자기에게 맡겨진 워크아이템을 처리해서 결과를 제출하고요. 엔진은 그 결과를 받아서 다음 워크아이템을 엽니다. 쿨러 사건으로 읽어 볼까요? 목록 맨 위, 진단 · 조치 제안은 에이전트가 끝내서 완료 상태예요. 가운데 운전원 승인은 사람에게 맡겨져서 처리 중이고, 이 워크아이템이 운전원의 작업함에 놓여 있습니다. 맨 아래 다음 작업은 아직 차례가 오지 않은 예정 상태고요. 에이전트가 결과를 제출하면 엔진이 이어받는다는 걸 앞에서 봤죠. 제품에서도 그 구조가 그대로입니다. 에이전트든 사람이든 수행자는 자기 워크아이템만 처리하고, 다음을 여는 건 엔진이에요.</a:t>
+              <a:t>[짚을 곳] 왼쪽 실행 엔진 → 가운데 워크아이템 목록 → 오른쪽 수행자</a:t>
+            </a:r>
+          </a:p>
+          <a:p>
+            <a:r>
+              <a:t>· 실제 제품의 쿨러 실행 화면이 아니라, 배운 사례를 HYD가 참고한 제품의 작업 전달 구조에 대응시킨 설명</a:t>
+            </a:r>
+          </a:p>
+          <a:p>
+            <a:r>
+              <a:t>· 엔진: 정의를 읽고 작업을 워크아이템으로 관리, 다음 차례를 진행 상태로 연다(예정 작업을 미리 만들어 둘 수도)</a:t>
+            </a:r>
+          </a:p>
+          <a:p>
+            <a:r>
+              <a:t>· 수행자: 맡겨진 워크아이템을 처리해 결과를 제출 → 엔진이 받아 다음 워크아이템을 연다</a:t>
+            </a:r>
+          </a:p>
+          <a:p>
+            <a:r>
+              <a:t>· 쿨러 사건으로: 진단 · 조치 제안 DONE(에이전트가 끝냄), 운전원 승인 IN_PROGRESS(운전원의 작업함), 다음 작업 TODO(아직 차례 전)</a:t>
+            </a:r>
+          </a:p>
+          <a:p>
+            <a:r>
+              <a:t>· 에이전트든 사람이든 수행자는 자기 워크아이템만 처리하고, 다음을 여는 것은 엔진</a:t>
+            </a:r>
+          </a:p>
+          <a:p>
+            <a:r>
+              <a:t>[다음] 수업용과 제품의 경계</a:t>
             </a:r>
           </a:p>
         </p:txBody>
@@ -3925,7 +5250,32 @@
           <a:lstStyle/>
           <a:p>
             <a:r>
-              <a:t>왼쪽은 HYD가 제품 구조를 참고한 부분입니다. 프로세스 정의와 판본, 실제 인스턴스, 수행자에게 맡기는 작업을 구별했어요. 에이전트가 결과를 제출하고 엔진이 그 결과를 받아 다음 작업을 여는 구조도 참고했습니다. 제품을 그대로 설치해 쓴 것과는 구별해야 해요. 교육용으로 직접 구현한 부분과 적용 범위가 있기 때문입니다. 오른쪽은 제품을 평가할 때 더 살펴볼 범위예요. 자연어로 만든 정의를 어떻게 검토하는지, 여러 에이전트와 하위 프로세스를 어떻게 관리하는지, 지식을 어떤 방식으로 검색하는지, 운영 중에는 권한과 실패를 어떻게 다루는지입니다. 기능이 소개돼 있는 것과 우리 환경에서 그 기능을 검증한 것은 다릅니다. 특히 수업에서 역할을 골라 승인한 경험을 실제 사용자 인증과 혼동하지 마세요. 기업에서는 누가 접속했는지 확인하고, 그 신원에 어떤 권한이 있는지 연결해야 합니다. 같은 승인 상자가 있어도 이 연결이 빠지면 책임을 확인할 수 없죠. 제품이 바뀌었을 때도 살펴봐야 하는 것은 바로 이런 역할과 통제의 실제 연결입니다.</a:t>
+              <a:t>[짚을 곳] 왼쪽 HYD가 참고한 구조 → 오른쪽 제품에서 확인할 범위(강조)</a:t>
+            </a:r>
+          </a:p>
+          <a:p>
+            <a:r>
+              <a:t>· 참고한 것: 정의 · 판본 · 인스턴스의 구별, 워크아이템과 결과 제출, 엔진이 다음 작업을 여는 구조 — 제품을 그대로 설치해 쓴 것이 아니라 교육용으로 직접 구현</a:t>
+            </a:r>
+          </a:p>
+          <a:p>
+            <a:r>
+              <a:t>· 제품 평가 때 더 볼 것: 자연어로 만든 정의의 검토 방식, 여러 에이전트와 하위 프로세스 관리, 지식 검색과 접근 권한, 운영 중 신원 · 실패 · 운영 환경</a:t>
+            </a:r>
+          </a:p>
+          <a:p>
+            <a:r>
+              <a:t>· 기능이 소개된 것 ≠ 우리 환경에서 검증한 것</a:t>
+            </a:r>
+          </a:p>
+          <a:p>
+            <a:r>
+              <a:t>· 수업에서 역할을 골라 승인한 경험 ≠ 실제 사용자 인증. 기업은 접속한 신원과 그 권한을 연결해야 승인의 책임을 확인한다</a:t>
+            </a:r>
+          </a:p>
+          <a:p>
+            <a:r>
+              <a:t>[다음] 기업 적용의 통제</a:t>
             </a:r>
           </a:p>
         </p:txBody>
@@ -3995,7 +5345,37 @@
           <a:lstStyle/>
           <a:p>
             <a:r>
-              <a:t>기업 업무에 적용할 때는 표의 여섯 항목을 질문으로 바꿔 보면 좋습니다. 사람 승인은 효과를 내기 전에 필요한 결정이 있었는지, 권한은 그 결정을 할 사람이 맞는지를 묻습니다. 승인 버튼이 보인다는 것만으로 두 질문이 해결되지는 않아요. 감사 추적은 누가 무엇을 결정하고 어떤 실행이 일어났는지 되짚는 길입니다. 제안, 승인, 명령과 결과가 서로 이어져 있어야 원인을 추적할 수 있죠. 이미 한 작업을 다시 시도해도 되는지 판단할 때도 이 기록이 필요합니다. 보상은 실패 뒤에 남은 효과를 정리하는 일입니다. 모든 작업을 과거로 되돌리는 만능 취소가 아니에요. 예를 들어 발주 뒤 다음 단계가 실패했다면, 발주 취소가 가능한지 확인하고 취소 요청이나 정정 절차를 실행해야 합니다. 이미 발송한 안내를 없던 일로 만들 수 없다면 정정 안내가 필요할 수 있고요. BPMN도 보상 작업을 표현할 수 있지만, 무엇을 어떻게 보상할지는 업무별로 설계해야 합니다. 실행 격리는 에이전트와 도구가 접근할 데이터와 기능을 제한합니다. 읽기 도구의 범위, 계정 권한, 연결 가능한 시스템을 함께 봐야 해요. 변경 통제는 어떤 판본으로 실행 중인지와 새 정의를 언제 적용할지를 관리합니다. 처리 건의 판본을 고정해도 센서 값이나 현재 권한까지 고정되는 것은 아닙니다. 오른쪽 칸은 HYD에서 이 원리를 살펴본 자리와 추가로 확인할 지점입니다. 제품을 도입할 때도 각 항목이 실제 설정과 시험에서 어떻게 지켜지는지 확인하세요. 제품 이름이 같다는 이유만으로 우리 업무에 필요한 통제가 모두 갖춰졌다고 결론 내리지 않는 겁니다.</a:t>
+              <a:t>[짚을 곳] 표 여섯 줄, 칸은 통제 요소 → 지키는 것 → HYD 예 · 확인할 것</a:t>
+            </a:r>
+          </a:p>
+          <a:p>
+            <a:r>
+              <a:t>· 사람 승인(HITL): 효과를 내기 전에 필요한 결정이 있었나, 권한: 그 결정을 할 사람이 맞나 — 승인 버튼이 보인다고 두 질문이 풀리지 않는다</a:t>
+            </a:r>
+          </a:p>
+          <a:p>
+            <a:r>
+              <a:t>· 감사 추적: 제안 · 승인 · 명령과 결과가 이어져야 원인을 추적하고, 이미 한 작업을 다시 시도해도 되는지도 판단한다</a:t>
+            </a:r>
+          </a:p>
+          <a:p>
+            <a:r>
+              <a:t>· 보상: 모든 것을 되돌리는 만능 취소가 아니다. 예: 발주 뒤 실패 → 취소 가능 여부 확인 · 취소 요청이나 정정 절차, 발송한 안내는 정정 안내. 무엇을 어떻게 보상할지는 업무별 설계</a:t>
+            </a:r>
+          </a:p>
+          <a:p>
+            <a:r>
+              <a:t>· 실행 격리: 읽기 도구의 범위, 계정 권한, 연결 가능한 시스템. 변경 통제: 실행 중인 판본과 새 정의의 적용 시점 — 판본을 고정해도 센서 값이나 현재 권한까지 고정되지는 않는다</a:t>
+            </a:r>
+          </a:p>
+          <a:p>
+            <a:r>
+              <a:t>· 제품 이름이 같다고 필요한 통제가 갖춰졌다고 결론 내리지 않는다 — 실제 설정과 시험에서 확인</a:t>
+            </a:r>
+          </a:p>
+          <a:p>
+            <a:r>
+              <a:t>[다음] 시연에서 볼 것</a:t>
             </a:r>
           </a:p>
         </p:txBody>
@@ -4065,7 +5445,37 @@
           <a:lstStyle/>
           <a:p>
             <a:r>
-              <a:t>시연을 시작하기 전에 무엇을 볼지 정리해 두겠습니다. 화면의 카드 네 장이 눈여겨볼 것들이에요. 첫째, 지식과 에이전트와 프로세스가 제품에서 어떤 이름으로 나타나는지. 둘째, 정의 하나에서 열린 인스턴스가 에이전트 작업과 사람 작업으로 어떻게 이어지는지예요. 셋째는 배운 구조 위에 더해진 것들입니다. 말로 만드는 정의나 여러 에이전트의 협업 같은 거요. 넷째는 승인과 권한, 감사 추적 같은 통제가 흐름의 어디에 놓이는지예요. 시연을 본 뒤에는 화면에서 세 가지를 가려낼 수 있어야 합니다. 눈앞의 것이 정의인지 인스턴스인지, 지금이 누구의 차례인지, 사람이 결정하는 자리가 어디인지요. 실제 시연에서는 이 네 가지를 제품 화면에 대어 확인합니다. 준비된 환경에서 확인하지 못한 것은 미확인으로 남기면 됩니다.</a:t>
+              <a:t>[짚을 곳] 카드 넷 왼쪽부터</a:t>
+            </a:r>
+          </a:p>
+          <a:p>
+            <a:r>
+              <a:t>· 세 영역의 이름: 지식 · 에이전트 · 프로세스가 제품에서 불리는 이름과 구실</a:t>
+            </a:r>
+          </a:p>
+          <a:p>
+            <a:r>
+              <a:t>· 한 건의 흐름: 정의 하나에서 열린 인스턴스가 에이전트 작업과 사람 작업으로 이어지는 모습</a:t>
+            </a:r>
+          </a:p>
+          <a:p>
+            <a:r>
+              <a:t>· 넓어진 범위: 말로 만드는 정의, 여러 에이전트의 협업처럼 배운 구조 위에 더해진 것</a:t>
+            </a:r>
+          </a:p>
+          <a:p>
+            <a:r>
+              <a:t>· 통제가 놓이는 자리: 승인 · 권한 · 감사 추적이 흐름의 어디에</a:t>
+            </a:r>
+          </a:p>
+          <a:p>
+            <a:r>
+              <a:t>· 시연 뒤 가려낼 것: 눈앞의 것이 정의인지 인스턴스인지, 지금 누구의 차례인지, 사람이 결정하는 자리가 어디인지. 준비된 환경에서 확인 못 한 것은 미확인으로 남긴다</a:t>
+            </a:r>
+          </a:p>
+          <a:p>
+            <a:r>
+              <a:t>[다음] 지식 자산화 실습</a:t>
             </a:r>
           </a:p>
         </p:txBody>
@@ -4135,7 +5545,32 @@
           <a:lstStyle/>
           <a:p>
             <a:r>
-              <a:t>마지막으로 학습 내용과 결과를 다시 찾아볼 수 있게 정리합니다. 개념을 자신의 말로 적고, 그 개념이 나온 자료와 이번에 작성한 교대 에이전트·흐름·인계 처리 건을 연결합니다. 확인한 조회 근거와 사람의 검토, 보완 후에도 남은 미확인 항목을 함께 기록합니다. 학습 노트에 적힌 내용과 실제 처리 건의 결과를 구분하면 무엇을 배웠고 무엇을 확인했는지 다시 찾을 수 있습니다. 수업 계정의 연결과 쓰기 권한이 확인된 경우에만 Notion 연동을 시연하고, 그렇지 않으면 준비한 Markdown을 직접 정리합니다.</a:t>
+              <a:t>[짚을 곳] 실습 제목</a:t>
+            </a:r>
+          </a:p>
+          <a:p>
+            <a:r>
+              <a:t>· 할 일: 개념을 자신의 말로 적고, 그 개념이 나온 자료와 이번에 만든 교대 에이전트 · 흐름 · 인계 처리 건을 연결</a:t>
+            </a:r>
+          </a:p>
+          <a:p>
+            <a:r>
+              <a:t>· 함께 적을 것: 확인한 조회 근거, 사람의 검토, 보완 뒤에도 남은 미확인 항목</a:t>
+            </a:r>
+          </a:p>
+          <a:p>
+            <a:r>
+              <a:t>· 학습 노트에 적은 내용과 실제 처리 건의 결과를 구분 — 무엇을 배웠고 무엇을 확인했는지 다시 찾을 수 있게</a:t>
+            </a:r>
+          </a:p>
+          <a:p>
+            <a:r>
+              <a:t>· 오프라인 기본은 Notion 없이 준비한 Markdown 학습 노트로 정리. 현장에서 Notion 연결과 쓰기 권한이 확인되면 연동을 선택해 시연</a:t>
+            </a:r>
+          </a:p>
+          <a:p>
+            <a:r>
+              <a:t>[다음] 학습 노트에 잇는 넷</a:t>
             </a:r>
           </a:p>
         </p:txBody>
@@ -4205,7 +5640,37 @@
           <a:lstStyle/>
           <a:p>
             <a:r>
-              <a:t>56~57장 통합 발화는 56장 발표자 노트를 따른다.</a:t>
+              <a:t>[짚을 곳] 카드 넷 왼쪽부터, 넷째 카드(강조)</a:t>
+            </a:r>
+          </a:p>
+          <a:p>
+            <a:r>
+              <a:t>· 개념: 자신의 문장으로 다시 쓴 개념(이해)</a:t>
+            </a:r>
+          </a:p>
+          <a:p>
+            <a:r>
+              <a:t>· 참고 자료: 개념이 나온 자료와 문서의 연결(출처)</a:t>
+            </a:r>
+          </a:p>
+          <a:p>
+            <a:r>
+              <a:t>· 실습 산출물: 인계안과 에이전트, 흐름 · 처리 건(결과물)</a:t>
+            </a:r>
+          </a:p>
+          <a:p>
+            <a:r>
+              <a:t>· 검증 결과: 만든 것이 정한 대로 동작했는지의 기록 — 확인한 것과 미확인을 나눠 둔다</a:t>
+            </a:r>
+          </a:p>
+          <a:p>
+            <a:r>
+              <a:t>· 넷이 이어져 있어야 과정이 끝난 뒤에도 다시 찾아 쓰는 자산이 된다</a:t>
+            </a:r>
+          </a:p>
+          <a:p>
+            <a:r>
+              <a:t>[다음] 복습</a:t>
             </a:r>
           </a:p>
         </p:txBody>
@@ -4275,7 +5740,37 @@
           <a:lstStyle/>
           <a:p>
             <a:r>
-              <a:t>실습과 시연에서 남긴 기록으로 돌아왔습니다. 이제 복습과 용어 정리, 퀴즈로 이번 회차를 마무리하겠습니다. 학습 노트에는 완성한 결과와 아직 확인하지 못한 것을 구분해 두겠습니다. 먼저 이번 회차에 배운 흐름을 쿨러 사건으로 복습해 보겠습니다. 표에 쿨러 사건의 다섯 순간을 놓았어요. 답과 근거 칸은 잠깐 가려 둘게요. 순간마다 지식, 에이전트, 프로세스 가운데 어느 영역의 일인지 먼저 골라 보세요. 왜 그 영역인지 근거도 같이 생각해 보시고요. 답을 맞춰 볼까요? 첫째, 핀 오염을 판단할 기준을 등록해 관리하는 일은 지식의 영역입니다. 기준은 매뉴얼과 정책을 검토해 관리하고 개정하는 지식이죠. 둘째, 지금의 냉각 효율을 읽어서 기준에 댄 건 에이전트의 일이에요. 값은 도구로 읽은 현재 값이고, 그걸 기준에 대어 판단하는 게 에이전트의 몫이니까요. 셋째, 쿨러 핀 세척을 설비보전팀장이 승인한다는 건 다시 지식입니다. 승인 역할은 조치에 적힌 지식이었죠. 넷째, 운전원 승인 뒤에 냉각 명령이 열린 건 프로세스의 일이에요. 단계 사이의 순서는 엔진이 지킵니다. 다섯째가 헷갈리기 쉬워요. 내려간 유온을 다시 읽고 작업지시를 등록한 건 프로세스의 일입니다. 둘째 순간처럼 시계열 DB를 읽긴 하는데, 판단의 재료를 읽은 게 아니라 승인 뒤 실행의 결과를 확인한 서비스 작업이거든요. 결국 같은 값을 읽어도, 누가 무엇을 위해 읽었는지에 따라 영역이 갈립니다. 이 HYD 사례에서는 진단 도구를 통한 대조와 승인 뒤 재관측 서비스의 역할이 다릅니다. 다른 시스템에서는 배치가 달라질 수 있어도, 판단 근거를 읽는 일과 실행 결과를 확인하는 일을 구별하는 질문은 유효합니다.</a:t>
+              <a:t>[짚을 곳] 표 다섯 줄, 가운데 「맡은 영역」 · 오른쪽 「판단의 근거」 칸은 가린 채 시작</a:t>
+            </a:r>
+          </a:p>
+          <a:p>
+            <a:r>
+              <a:t>· 실습과 시연에서 돌아와 복습 · 용어 · 퀴즈로 마무리. 학습 노트에는 완성한 결과와 미확인을 구분해 둔다</a:t>
+            </a:r>
+          </a:p>
+          <a:p>
+            <a:r>
+              <a:t>· 물음: 쿨러 사건의 다섯 순간이 지식 · 에이전트 · 프로세스 중 어느 영역의 일인지, 근거와 함께(약 20초)</a:t>
+            </a:r>
+          </a:p>
+          <a:p>
+            <a:r>
+              <a:t>· 답: 핀 오염 기준(냉각 효율 70 % 미만) 등록 = 지식(검토 · 개정으로 관리), 냉각 효율 46.2 %를 기준에 대기 = 에이전트, 핀 세척 승인은 설비보전팀장 = 지식(조치에 적힌 승인 역할), 운전원 승인 뒤 냉각 명령 = 프로세스(엔진이 순서를 지킨다)</a:t>
+            </a:r>
+          </a:p>
+          <a:p>
+            <a:r>
+              <a:t>· 헷갈리는 다섯째: 유온 51.5 ℃를 다시 읽고 작업지시 등록 = 프로세스 — 같은 시계열 DB를 읽어도 판단 재료가 아니라 승인 뒤 실행 결과를 확인한 서비스 작업</a:t>
+            </a:r>
+          </a:p>
+          <a:p>
+            <a:r>
+              <a:t>· 같은 값도 누가 무엇을 위해 읽었는지에 따라 영역이 갈린다. 배치는 시스템마다 달라도 이 질문은 유효</a:t>
+            </a:r>
+          </a:p>
+          <a:p>
+            <a:r>
+              <a:t>[다음] 용어 정리</a:t>
             </a:r>
           </a:p>
         </p:txBody>
@@ -4345,7 +5840,37 @@
           <a:lstStyle/>
           <a:p>
             <a:r>
-              <a:t>흐름을 되짚었으니, 이번엔 용어의 이름과 뜻을 정리하겠습니다. 표에 이번 회차에서 다시 쓰고 새로 세운 용어 일곱 개가 있어요. 스킬은 에이전트가 업무를 수행하는 순서와 요령을 적은 재사용 지침입니다. MCP는 에이전트가 외부 시스템의 도구를 같은 방식으로 부르게 하는 연결 규약이에요. 출력 계약은 결과의 필수 항목과 형식, 의미와 처리 조건에 대한 약속입니다. HITL은 사람의 판단이나 피드백을 과정 안에 넣는 방식입니다. 이 수업에서는 실행 전에 승인하거나 거절하는 자리로 구체화했고요. 프로세스 인스턴스는 프로세스 정의에 따라 실제로 도는 한 건이에요. 우리가 처리 건이라고 불러 온 거죠. 워크아이템은 인스턴스 안에서 수행자에게 맡겨지는 작업 하나, 우리가 단계라고 부른 겁니다. 마지막으로 멀티 에이전트 오케스트레이션은 한 프로세스 안에서 여러 에이전트의 순서와 호출을 조율하는 일입니다.</a:t>
+              <a:t>[짚을 곳] 표 일곱 줄, 왼쪽 용어 → 오른쪽 정식 명칭 · 풀이</a:t>
+            </a:r>
+          </a:p>
+          <a:p>
+            <a:r>
+              <a:t>· 스킬(Skill): 업무 수행의 순서와 요령을 적은 재사용 지침, MCP(Model Context Protocol): 외부 시스템의 도구를 같은 방식으로 부르게 하는 연결 규약</a:t>
+            </a:r>
+          </a:p>
+          <a:p>
+            <a:r>
+              <a:t>· 출력 계약(Output Contract): 결과의 필수 항목 · 형식 · 의미와 처리 조건의 약속</a:t>
+            </a:r>
+          </a:p>
+          <a:p>
+            <a:r>
+              <a:t>· HITL(Human-in-the-Loop): 과정에 사람의 판단 · 피드백을 넣는 방식 — 이 수업에서는 실행 전 승인 · 거절의 자리</a:t>
+            </a:r>
+          </a:p>
+          <a:p>
+            <a:r>
+              <a:t>· 프로세스 인스턴스 = 처리 건, 워크아이템 = 단계</a:t>
+            </a:r>
+          </a:p>
+          <a:p>
+            <a:r>
+              <a:t>· 멀티 에이전트 오케스트레이션: 한 프로세스 안에서 여러 에이전트의 순서와 호출을 조율</a:t>
+            </a:r>
+          </a:p>
+          <a:p>
+            <a:r>
+              <a:t>[다음] 퀴즈</a:t>
             </a:r>
           </a:p>
         </p:txBody>
@@ -4415,7 +5940,37 @@
           <a:lstStyle/>
           <a:p>
             <a:r>
-              <a:t>같은 줄 위에 이번엔 세 영역을 겹쳐 놓았어요. 세 군데를 보시면 됩니다. 맨 위의 긴 괄호, 하늘색으로 칠한 둘째 자리, 그리고 왼쪽 아래의 상자예요. 맨 위 괄호가 프로세스입니다. 경보부터 끝까지 전체를 덮고 있죠. 어떤 순서로 무엇을 하고 각 자리를 누가 맡는지, 처음부터 끝까지 책임지는 쪽이 프로세스예요. 하늘색 둘째 자리가 에이전트입니다. 줄 전체를 봐도 에이전트가 일하는 곳은 이 한 자리뿐이에요. 원인을 진단하고 조치를 제안하는 데까지가 에이전트의 몫입니다. 자리로 세어 보면 더 분명해요. 여덟 자리 가운데 에이전트의 자리는 둘째 하나이고, 추천안이 나온 뒤에도 승인부터 끝까지 여섯 자리가 남아 있습니다. 추천안이 나온 순간은 업무가 끝난 때가 아니라, 이제 막 앞부분을 지난 때라는 거죠. 왼쪽 아래 상자는 판단에 쓸 지식과 값을 묶은 거예요. 지식 그래프, SOP와 판단 규칙, 그리고 시계열 DB와 업무 DB의 값이 여기 모여 있습니다. 그런데 이 상자가 줄과 어떻게 이어져 있는지 보세요. 에이전트 자리로 올라가는 화살표 하나뿐이에요. 이 그림은 에이전트가 판단 재료를 읽는 경로를 강조한 겁니다. 지식을 읽을 수 있는 쪽이 에이전트뿐이라는 뜻은 아니에요. 승인 조건을 확인하는 시스템도 필요한 기준을 읽습니다. 이 단원과 이어지는 두 단원에서는 바로 이 화살표 하나를 들여다볼 거예요. 지식이 어떤 모양으로 에이전트에게 건너가는지요. 에이전트 자리부터 끝까지, 프로세스가 맡은 구간은 뒤의 두 단원에서 다룹니다.</a:t>
+              <a:t>[짚을 곳] 맨 위 긴 괄호 → 하늘색 둘째 자리 → 왼쪽 아래 상자</a:t>
+            </a:r>
+          </a:p>
+          <a:p>
+            <a:r>
+              <a:t>· 프로세스: 경보부터 끝까지 덮는다 — 순서, 할 일, 자리마다 맡는 쪽을 처음부터 끝까지 책임</a:t>
+            </a:r>
+          </a:p>
+          <a:p>
+            <a:r>
+              <a:t>· 에이전트: 여덟 자리 가운데 둘째 하나(진단 · 제안). 추천안이 나온 뒤에도 승인부터 끝까지 여섯 자리가 남는다 → 추천안이 나온 순간은 업무의 끝이 아니다</a:t>
+            </a:r>
+          </a:p>
+          <a:p>
+            <a:r>
+              <a:t>· 지식과 값: 지식 그래프, SOP와 판단 규칙, 시계열 DB와 업무 DB의 값. 줄과 이어진 화살표는 에이전트 자리로 가는 하나뿐</a:t>
+            </a:r>
+          </a:p>
+          <a:p>
+            <a:r>
+              <a:t>· 주의: 그림은 판단 재료를 읽는 경로를 강조한 것. 승인 조건을 확인하는 시스템도 필요한 기준을 읽는다</a:t>
+            </a:r>
+          </a:p>
+          <a:p>
+            <a:r>
+              <a:t>· 이 단원과 다음 두 단원은 이 화살표 하나, 프로세스 구간은 뒤의 두 단원</a:t>
+            </a:r>
+          </a:p>
+          <a:p>
+            <a:r>
+              <a:t>[다음] 에이전트가 처음 쥔 것</a:t>
             </a:r>
           </a:p>
         </p:txBody>
@@ -4485,7 +6040,22 @@
           <a:lstStyle/>
           <a:p>
             <a:r>
-              <a:t>배운 내용을 판단에 쓸 수 있는지, 퀴즈 세 문제로 확인해 보겠습니다. 보기의 말을 기억하는 것보다, 그 판단이 어느 영역의 몫인지 근거를 댈 수 있는지가 중요해요. 문제마다 보기를 읽고 나면 잠깐 멈출 테니, 그때 답을 골라 보세요. 정답과 까닭은 세 문제를 다 푼 뒤에 함께 확인하겠습니다.</a:t>
+              <a:t>[짚을 곳] 간지 제목 → 부제</a:t>
+            </a:r>
+          </a:p>
+          <a:p>
+            <a:r>
+              <a:t>· 퀴즈 세 문제: 보기의 말을 기억하는지보다 그 판단이 어느 영역의 몫인지 근거를 댈 수 있는지</a:t>
+            </a:r>
+          </a:p>
+          <a:p>
+            <a:r>
+              <a:t>· 진행: 문제마다 보기를 읽은 뒤 잠깐 멈추고 답을 고른다. 정답과 까닭은 세 문제를 다 푼 뒤 함께</a:t>
+            </a:r>
+          </a:p>
+          <a:p>
+            <a:r>
+              <a:t>[다음] Quiz 1</a:t>
             </a:r>
           </a:p>
         </p:txBody>
@@ -4555,7 +6125,32 @@
           <a:lstStyle/>
           <a:p>
             <a:r>
-              <a:t>첫 번째 문제입니다. 상황부터 볼게요. 에이전트가 원인을 쿨러 핀 오염으로 가리고, 팬 최대 운전을 권하는 추천안을 제출했습니다. 운전원은 아직 응답하지 않았어요. 이 시점의 처리 건에 대한 설명으로 옳은 건 무엇일까요? 1번, 추천안이 제출됐으니 팬 속도는 이미 100퍼센트로 올라갔다. 2번, 에이전트가 승인 결과를 기다리며 다음 도구를 부르고 있다. 3번, 에이전트의 일은 끝났고 엔진이 운전원 승인을 열어 기다린다. 4번, 운전원이 응답하지 않으면 추천대로 자동 실행된다.</a:t>
+              <a:t>[짚을 곳] 위 상황 → 물음 → 보기 넷</a:t>
+            </a:r>
+          </a:p>
+          <a:p>
+            <a:r>
+              <a:t>· 상황: 에이전트가 원인을 쿨러 핀 오염으로 가리고 팬 최대 운전을 권하는 추천안을 제출, 운전원은 아직 응답 전</a:t>
+            </a:r>
+          </a:p>
+          <a:p>
+            <a:r>
+              <a:t>· 물음: 이 시점의 처리 건에 대한 설명으로 옳은 것은?</a:t>
+            </a:r>
+          </a:p>
+          <a:p>
+            <a:r>
+              <a:t>· 생각할 거리: 제출 시점에서 에이전트와 엔진의 몫, 승인 전 설비의 상태</a:t>
+            </a:r>
+          </a:p>
+          <a:p>
+            <a:r>
+              <a:t>· 약 20초</a:t>
+            </a:r>
+          </a:p>
+          <a:p>
+            <a:r>
+              <a:t>[다음] Quiz 2</a:t>
             </a:r>
           </a:p>
         </p:txBody>
@@ -4625,7 +6220,37 @@
           <a:lstStyle/>
           <a:p>
             <a:r>
-              <a:t>두 번째 문제입니다. 매뉴얼이 개정돼서, 쿨러 핀 오염을 가리는 냉각 효율의 기준값이 달라졌어요. 그런데 에이전트는 여전히 예전 기준으로 판단합니다. 조회 구조와 기준의 단위는 그대로라고 할 때, 새 기준이 판단에 쓰이게 하려면, 먼저 고칠 곳은 어디일까요? 1번, 스킬의 절차에 새 기준값을 문장으로 적어 넣는다. 2번, 개정된 문서를 검토해 증거 기준을 다시 적재한다. 3번, 프로세스 정의의 게이트웨이 조건을 새 기준값으로 바꾼다. 4번, 운전원이 승인할 때마다 새 기준값을 확인하게 한다.</a:t>
+              <a:t>[짚을 곳] 위 상황 → 물음 → 보기 넷</a:t>
+            </a:r>
+          </a:p>
+          <a:p>
+            <a:r>
+              <a:t>· 상황: 매뉴얼 개정으로 핀 오염을 가리는 냉각 효율 기준값이 바뀌었는데, 에이전트는 예전 기준으로 판단</a:t>
+            </a:r>
+          </a:p>
+          <a:p>
+            <a:r>
+              <a:t>· 가정: 조회 구조와 기준의 단위는 그대로</a:t>
+            </a:r>
+          </a:p>
+          <a:p>
+            <a:r>
+              <a:t>· 물음: 새 기준이 판단에 쓰이게 하려면 먼저 고칠 곳은?</a:t>
+            </a:r>
+          </a:p>
+          <a:p>
+            <a:r>
+              <a:t>· 생각할 거리: 증거 기준이 어디에 등록되어 있었고 어느 도구가 읽었나</a:t>
+            </a:r>
+          </a:p>
+          <a:p>
+            <a:r>
+              <a:t>· 약 20초</a:t>
+            </a:r>
+          </a:p>
+          <a:p>
+            <a:r>
+              <a:t>[다음] Quiz 3</a:t>
             </a:r>
           </a:p>
         </p:txBody>
@@ -4695,7 +6320,32 @@
           <a:lstStyle/>
           <a:p>
             <a:r>
-              <a:t>마지막 문제입니다. 재고 보충을 빨리 끝내려고, 구매 에이전트에게 발주를 직접 등록하는 쓰기 도구를 연결하자는 의견이 나왔어요. 이 수업의 승인 정책에서 가장 알맞은 판단은 무엇일까요? 1번, 발주는 승인 뒤 프로세스가 등록하고 에이전트는 업무 원천을 조회해 제안을 제출한다. 2번, 스킬에 승인 뒤에만 발주한다고 적어 두면 쓰기 도구를 연결해도 된다. 3번, 발주한 뒤에 감사 기록이 남으니 쓰기 도구를 연결해도 문제없다. 4번, 발주 수량을 규칙으로 계산하게 하면 사람의 승인은 필요 없다.</a:t>
+              <a:t>[짚을 곳] 위 상황 → 물음 → 보기 넷</a:t>
+            </a:r>
+          </a:p>
+          <a:p>
+            <a:r>
+              <a:t>· 상황: 재고 보충을 빨리 끝내려고 구매 에이전트에 발주를 직접 등록하는 쓰기 도구를 연결하자는 의견</a:t>
+            </a:r>
+          </a:p>
+          <a:p>
+            <a:r>
+              <a:t>· 물음: 이 수업의 승인 정책에서 가장 알맞은 판단은?</a:t>
+            </a:r>
+          </a:p>
+          <a:p>
+            <a:r>
+              <a:t>· 생각할 거리: 에이전트의 읽기와 프로세스의 쓰기, 스킬의 순서와 엔진의 순서</a:t>
+            </a:r>
+          </a:p>
+          <a:p>
+            <a:r>
+              <a:t>· 약 20초</a:t>
+            </a:r>
+          </a:p>
+          <a:p>
+            <a:r>
+              <a:t>[다음] 정답 맞추기</a:t>
             </a:r>
           </a:p>
         </p:txBody>
@@ -4765,7 +6415,32 @@
           <a:lstStyle/>
           <a:p>
             <a:r>
-              <a:t>정답을 확인해 보겠습니다. 고른 답과 근거를 같이 대조해 보세요. 첫 문항의 정답은 3번이에요. 에이전트의 일은 추천안을 제출하는 데서 끝나고, 운전원 승인 단계를 여는 건 엔진입니다. 설비 명령은 승인이 전달된 뒤에만 나가니까, 이 시점에 팬은 아직 그대로예요. 1번은 제출과 실행을 같은 걸로 본 보기예요. 2번은 에이전트가 승인을 기다린다고 본 건데, 에이전트는 다음에 누가 무엇을 하는지 몰라도 됩니다. 4번은 응답 없음을 승인으로 읽은 거예요. 응답이 없으면 지연 알림만 나가고, 처리 건은 계속 기다리죠. 둘째 문항의 정답은 2번입니다. 증거 기준은 매뉴얼에서 뽑아 적재한 지식이고, 진단 도구가 판단할 때마다 그 기준을 읽어요. 이 문제처럼 조회 구조와 기준의 단위가 유지된다면, 개정된 문서를 검토해 기준을 다시 적재하고 판단에 반영됐는지 확인합니다. 1번처럼 스킬에 적으면 기준이 두 곳에 생겨서, 문서가 다시 바뀔 때 어긋나요. 3번의 게이트웨이는 승인과 회복을 가르는 조건이라 원인의 기준과는 관계가 없습니다. 4번은 기준을 사람의 기억에 맡기는 셈이고요. 셋째 문항의 정답은 1번입니다. 업무 시스템에 쓰는 일은 승인 뒤의 프로세스 작업에 두고, 이 사례의 에이전트에는 읽기와 제안 제출에 필요한 권한을 둡니다. 2번은 스킬에 적은 순서를 엔진이 지키는 순서와 헷갈린 보기예요. 지침은 따르는 쪽에 맡겨질 뿐, 보장되지 않죠. 3번의 감사 기록은 일이 벌어진 뒤에 남는 거라서 승인을 대신하지 못하고요, 4번은 계산이 아무리 정확해도 책임질 사람의 결정이 빠집니다. 여기까지가 이번 회차입니다. 그리고 이 회차로 과정 전체를 마칩니다. 앞으로 다른 제품이나 도구를 만나더라도, 이 과정에서 익힌 원리와 역할의 구분은 그대로 쓸 수 있을 거예요. 이번 회차에 정리한 학습 노트, 그리고 직접 만든 명세와 에이전트와 흐름이 각자의 업무에서 다음 일을 시작하는 출발점이 되면 좋겠습니다. 그동안 수고 많으셨습니다. 감사합니다.</a:t>
+              <a:t>[짚을 곳] 표 세 줄 위에서부터, 판단 기준 → 정답</a:t>
+            </a:r>
+          </a:p>
+          <a:p>
+            <a:r>
+              <a:t>· Quiz 1 정답 3번: 에이전트의 일은 제출에서 끝, 운전원 승인을 여는 것은 엔진. 설비 명령은 승인 전달 뒤에만 → 팬은 그대로. 1번 제출과 실행 혼동, 2번 에이전트가 승인을 기다린다고 봄, 4번 응답 없음을 승인으로 읽음(지연 알림만, 계속 대기)</a:t>
+            </a:r>
+          </a:p>
+          <a:p>
+            <a:r>
+              <a:t>· Quiz 2 정답 2번: 증거 기준은 매뉴얼에서 적재한 지식이고 진단 도구가 판단 때마다 읽는다 → 개정 문서를 검토해 다시 적재하고 반영을 확인. 1번 기준이 두 곳에 생김, 3번 게이트웨이는 승인 · 회복을 가르는 조건, 4번 사람의 기억에 맡김</a:t>
+            </a:r>
+          </a:p>
+          <a:p>
+            <a:r>
+              <a:t>· Quiz 3 정답 1번: 쓰기는 승인 뒤 프로세스 작업, 에이전트에는 읽기와 제안 제출 권한. 2번 스킬의 순서 ≠ 엔진이 지키는 순서, 3번 감사 기록은 사후라 승인을 대신 못 함, 4번 책임질 사람의 결정이 빠진다</a:t>
+            </a:r>
+          </a:p>
+          <a:p>
+            <a:r>
+              <a:t>· 맺음: 이 회차로 과정 전체를 마친다. 다른 제품 · 도구를 만나도 익힌 원리와 역할의 구분은 그대로 — 학습 노트와 직접 만든 명세 · 에이전트 · 흐름이 각자 업무의 출발점</a:t>
+            </a:r>
+          </a:p>
+          <a:p>
+            <a:r>
+              <a:t>[다음] 과정을 마치며 인사</a:t>
             </a:r>
           </a:p>
         </p:txBody>
@@ -4835,7 +6510,32 @@
           <a:lstStyle/>
           <a:p>
             <a:r>
-              <a:t>화살표를 따라가기 전에, 에이전트가 처음 손에 쥔 것부터 확인해 볼게요. 에이전트 단계가 열릴 때 주어지는 건 화면 왼쪽의 경보 메시지 한 건입니다. 여기에 뭐가 있고 뭐가 없는지 보면, 에이전트가 왜 도구를 불러야 하는지가 보여요. 들어 있는 것부터 볼까요? 맨 위가 이 경보 한 건을 가리키는 번호고요, 그 아래로 어느 설비인지, 어떤 조건이 성립했는지, 심각도와 경보 상태, 발생 시각이 있습니다. 맨 아래에는 판정할 때 쓴 값도 붙어 있어요. 경보가 난 순간의 유온과 냉각 효율이죠. 유온은 경보 조건에 걸릴 만큼 올라 있었고, 냉각 효율은 절반에 못 미치는 46퍼센트쯤이었습니다. 이번엔 없는 걸 볼게요. 원인이 뭔지는 없습니다. 쿨러 성능 저하라는 조건이 성립했다, 그것만 알려 줄 뿐이에요. 어떤 조치를 할 수 있는지도 없고, 무엇을 기준으로 조치를 견줄지도 없습니다. 지금 생산 오더의 납기가 얼마나 남았는지도 없고요. 값이 기준을 넘었다는 것과 왜 넘었는지 안다는 건 다른 일이에요. 경보는 앞의 것까지만 알려 줍니다. 에이전트가 쓰는 모델이 아무리 유능해도, 이 메시지만 보고 원인과 조치를 말하면 그건 짐작이에요. 모자란 건 전부 바깥에서 읽어 와야 합니다.</a:t>
+              <a:t>[짚을 곳] 왼쪽 경보 메시지 → 오른쪽 세 줄(들어 있는 것 · 들어 있지 않은 것 · 채우는 길)</a:t>
+            </a:r>
+          </a:p>
+          <a:p>
+            <a:r>
+              <a:t>· 들어 있는 것: 경보 번호, 설비 HYD-01, 성립한 조건 COOLER_DEGRADATION, 심각도 · 상태 · 발생 시각, 판정에 쓴 값(경보 순간의 유온, 냉각 효율 46 %쯤)</a:t>
+            </a:r>
+          </a:p>
+          <a:p>
+            <a:r>
+              <a:t>· 들어 있지 않은 것: 원인, 할 수 있는 조치, 조치를 견줄 기준, 지금 생산 오더의 납기 사정</a:t>
+            </a:r>
+          </a:p>
+          <a:p>
+            <a:r>
+              <a:t>· 값이 기준을 넘었다는 것 ≠ 왜 넘었는지 안다는 것. 경보는 앞의 것까지만 알려 준다</a:t>
+            </a:r>
+          </a:p>
+          <a:p>
+            <a:r>
+              <a:t>· 이 메시지만 보고 원인과 조치를 말하면 짐작 — 모자란 것은 도구를 불러 바깥에서 읽어 온다</a:t>
+            </a:r>
+          </a:p>
+          <a:p>
+            <a:r>
+              <a:t>[다음] 무엇을 어디서 읽나</a:t>
             </a:r>
           </a:p>
         </p:txBody>
@@ -4905,7 +6605,42 @@
           <a:lstStyle/>
           <a:p>
             <a:r>
-              <a:t>그럼 무엇을 어디서 읽을지는 누가 정할까요? 스킬이 정해 둡니다. 냉각 긴급 대응 에이전트는 냉각 긴급 대응 스킬을 따라 일하고, 그 절차에 부를 도구가 적혀 있어요. 화면 위쪽 띠가 그 도구들이고, 아래쪽 띠가 도구마다 읽는 재료입니다. 왼쪽 경보에서 출발해 볼게요. 스킬이 안내하는 첫 도구가 진단 도구입니다. 아래에서 파란 화살표 두 개가 올라오죠? 하나는 지식 그래프에서, 하나는 시계열 DB에서 와요. 원인 후보와 판별 기준은 그래프에서 읽고, 판단 시점의 센서 값은 시계열 DB에서 읽어서 원인을 가립니다. 다음 자리는 업무 DB를 읽는 도구 두 개예요. 생산 오더와 품질 로트를 읽어서 납기와 품질 사정을 확인합니다. 이 자리만 회색으로 그린 건, 스킬에 이 단계가 「필요하면 확인한다」고 적혀 있어서예요. 늘 부르는 도구가 아니라, 에이전트가 상황을 보고 부를지 정합니다. 그다음이 조치 평가 도구예요. 이 그림은 스킬의 안내 순서입니다. 실제 호출 순서나 업무 조회 여부까지 모든 실행에서 같다는 뜻은 아니에요. SOP와 판단 규칙, 그리고 성과 기준을 읽어서 조치 후보를 견줍니다. 마지막으로 제출 도구가 추천안을 제출해요. 아래 띠의 재료는 하나도 이 자리에서 만들어진 게 아니에요. 그래프의 관계는 스키마로 정의했고, 판별 기준과 SOP는 매뉴얼에서 뽑아 검토하고 적재했죠. 판단 규칙과 성과 기준도 앞에서 정해 둔 겁니다. 그리고 아래 띠 오른쪽에 업무 원천 읽기라고 적어 둔 것처럼, 여기 그린 업무 도구들은 설비와 업무 시스템의 재료를 읽어요. 쓰는 건 추천안 제출 하나뿐입니다. 그러니까 처음 물음의 답은 이거예요. 경보 한 건만 받은 에이전트는 스킬이 정한 도구로, 미리 정의하고 등록해 둔 지식과 지금의 값을 읽어서 판단을 만듭니다.</a:t>
+              <a:t>[짚을 곳] 위 띠 도구 왼쪽부터 → 아래 띠 재료 → 오른쪽 아래 「업무 원천 읽기」</a:t>
+            </a:r>
+          </a:p>
+          <a:p>
+            <a:r>
+              <a:t>· 냉각 긴급 대응 에이전트는 냉각 긴급 대응 스킬을 따르고, 그 절차에 부를 도구가 적혀 있다</a:t>
+            </a:r>
+          </a:p>
+          <a:p>
+            <a:r>
+              <a:t>· 진단: 그래프에서 원인 후보와 판별 기준, 시계열 DB에서 판단 시점의 센서 값</a:t>
+            </a:r>
+          </a:p>
+          <a:p>
+            <a:r>
+              <a:t>· 업무 값 조회(회색): 생산 오더 · 품질 로트로 납기와 품질 사정. 스킬에 「필요하면 확인한다」 → 에이전트가 상황을 보고 부를지 정한다</a:t>
+            </a:r>
+          </a:p>
+          <a:p>
+            <a:r>
+              <a:t>· 조치 평가: SOP와 판단 규칙, 성과 기준으로 후보를 견준다 → 추천안 제출</a:t>
+            </a:r>
+          </a:p>
+          <a:p>
+            <a:r>
+              <a:t>· 그림은 스킬의 안내 순서. 실제 호출 순서와 업무 조회 여부는 실행마다 다를 수 있어 기록으로 확인</a:t>
+            </a:r>
+          </a:p>
+          <a:p>
+            <a:r>
+              <a:t>· 아래 띠 재료는 미리 정의 · 검토 · 적재한 것. 업무 도구는 읽기만, 쓰기는 추천안 제출 하나</a:t>
+            </a:r>
+          </a:p>
+          <a:p>
+            <a:r>
+              <a:t>[다음] 진단 도구 들여다보기</a:t>
             </a:r>
           </a:p>
         </p:txBody>
@@ -4975,7 +6710,22 @@
           <a:lstStyle/>
           <a:p>
             <a:r>
-              <a:t>에이전트가 무엇을 어디서 읽는지는 이렇게 잡혔어요. 두 번째 단원은 그래프 질의와 증거입니다. 그 도구들 가운데 첫 번째인 진단 도구를 들여다볼 건데요, 이 도구가 처음 손에 쥔 건 경보의 패턴 이름 하나예요. 이 이름 하나에서 어떻게 원인 하나에 닿을까요? 그래프의 어디로 들어가서, 무엇을 읽고, 무엇과 견주는지, 진단 도구 한 번의 호출 안에서 따라가 보겠습니다.</a:t>
+              <a:t>[짚을 곳] 단원명 → 부제</a:t>
+            </a:r>
+          </a:p>
+          <a:p>
+            <a:r>
+              <a:t>· 단원의 물음: 진단 도구가 처음 쥔 것은 경보의 패턴 이름 하나 — 이것에서 어떻게 원인 하나에 닿나</a:t>
+            </a:r>
+          </a:p>
+          <a:p>
+            <a:r>
+              <a:t>· 따라갈 것: 그래프의 어디로 들어가서, 무엇을 읽고, 무엇과 견주는지 — 진단 도구 한 번의 호출 안에서</a:t>
+            </a:r>
+          </a:p>
+          <a:p>
+            <a:r>
+              <a:t>[다음] 출발 노드</a:t>
             </a:r>
           </a:p>
         </p:txBody>
@@ -9266,7 +11016,7 @@
                 <a:ea typeface="맑은 고딕"/>
                 <a:cs typeface="맑은 고딕"/>
               </a:rPr>
-              <a:t>정의한 관계를 조회 경로로 사용하고, 후보가 없으면 질의 조건과 실제 적재된 연결을 함께 확인한다.</a:t>
+              <a:t>진단 도구의 조회는 스키마가 정한 관계를 길로 삼으므로, 후보가 없으면 질의 조건과 적재된 연결부터 확인한다.</a:t>
             </a:r>
           </a:p>
         </p:txBody>
@@ -11715,7 +13465,7 @@
                 <a:ea typeface="맑은 고딕"/>
                 <a:cs typeface="맑은 고딕"/>
               </a:rPr>
-              <a:t>허용된 후보를 성과 기준으로 비교하고, 승인 권한은 정책과 현재 담당 조건을 함께 검사한다.</a:t>
+              <a:t>판단 규칙이 허용한 후보를 성과 기준이 줄 세우고, 승인 역할은 에이전트가 정하지 않고 조치의 지식에서 읽어 온다.</a:t>
             </a:r>
           </a:p>
         </p:txBody>
@@ -16337,7 +18087,7 @@
                 <a:ea typeface="맑은 고딕"/>
                 <a:cs typeface="맑은 고딕"/>
               </a:rPr>
-              <a:t>후보 누락 · 근거 부족 · 출처 누락을 구별하며 지침과 실제 출력 검사를 함께 사용한다.</a:t>
+              <a:t>출력의 빈자리는 후보 누락 · 근거 부족 · 출처 누락으로 갈리고, 모습에 따라 먼저 살펴볼 지식과 값의 자리가 다르다.</a:t>
             </a:r>
           </a:p>
         </p:txBody>
@@ -17397,7 +19147,7 @@
                 <a:ea typeface="맑은 고딕"/>
                 <a:cs typeface="맑은 고딕"/>
               </a:rPr>
-              <a:t>쿨러 사건과 교대 인계로 지식·에이전트·프로세스의 연결을 설명한다.</a:t>
+              <a:t>쿨러 사건과 교대 인계로 지식 · 에이전트 · 프로세스의 연결을 설명한다.</a:t>
             </a:r>
           </a:p>
         </p:txBody>
@@ -18529,7 +20279,7 @@
                 <a:ea typeface="맑은 고딕"/>
                 <a:cs typeface="맑은 고딕"/>
               </a:rPr>
-              <a:t>무엇이 바뀌었는지에 따라 수정 대상을 정하고, 계약의 영향과 실제 판단 결과를 함께 확인한다.</a:t>
+              <a:t>기준이 바뀌면 지식을, 일하는 순서와 결과의 모양이 바뀌면 스킬을 고쳐야 기준이 두 곳에 생기지 않는다.</a:t>
             </a:r>
           </a:p>
         </p:txBody>
@@ -20612,7 +22362,7 @@
       </p:sp>
       <p:pic>
         <p:nvPicPr>
-          <p:cNvPr id="6" name="삽화:사건선_지식에서판단.svg" descr="illust_517454378178096295_1793003853.png"/>
+          <p:cNvPr id="6" name="삽화:사건선_지식에서판단.svg" descr="illust_3081650700689031771_1793113376.png"/>
           <p:cNvPicPr>
             <a:picLocks noChangeAspect="1"/>
           </p:cNvPicPr>
@@ -22999,7 +24749,7 @@
                 <a:ea typeface="맑은 고딕"/>
                 <a:cs typeface="맑은 고딕"/>
               </a:rPr>
-              <a:t>출력 계약의 이름 · 형식 · 의미를 지키며 필요한 결과가 다음 단계에 전달되는지 확인한다.</a:t>
+              <a:t>뒤 단계는 앞 단계의 결과를 약속한 변수 이름으로 읽으므로, 이름 · 형식 · 의미가 어긋나면 값이 넘어가지 않는다.</a:t>
             </a:r>
           </a:p>
         </p:txBody>
@@ -23911,7 +25661,7 @@
                 <a:ea typeface="맑은 고딕"/>
                 <a:cs typeface="맑은 고딕"/>
               </a:rPr>
-              <a:t>승인 처리 경로에서 선택과 역할을 기록하며 실제 업무에서는 신원 · 권한 · 현재 조건을 함께 확인한다.</a:t>
+              <a:t>승인한 역할은 서버가 채우고 접수와 전달이 기록으로 남으며, 승인이 전달된 뒤에야 냉각 명령이 열린다.</a:t>
             </a:r>
           </a:p>
         </p:txBody>
@@ -24784,7 +26534,7 @@
                 <a:ea typeface="맑은 고딕"/>
                 <a:cs typeface="맑은 고딕"/>
               </a:rPr>
-              <a:t>명령 성공, 회복 확인, 후속 작업지시 등록과 현장 정비 완료를 구별한다.</a:t>
+              <a:t>명령의 성공 응답과 유온의 회복 확인은 다른 사실이고, 작업지시 등록도 현장 정비의 완료를 뜻하지 않는다.</a:t>
             </a:r>
           </a:p>
         </p:txBody>
@@ -24859,7 +26609,7 @@
       </p:sp>
       <p:pic>
         <p:nvPicPr>
-          <p:cNvPr id="6" name="삽화:시스템실행.svg" descr="illust_8748433149265919179_1793003853.png"/>
+          <p:cNvPr id="6" name="삽화:시스템실행.svg" descr="illust_2207583074224619253_1793113376.png"/>
           <p:cNvPicPr>
             <a:picLocks noChangeAspect="1"/>
           </p:cNvPicPr>
@@ -25358,7 +27108,7 @@
                 <a:ea typeface="맑은 고딕"/>
                 <a:cs typeface="맑은 고딕"/>
               </a:rPr>
-              <a:t>승인 뒤에도 회복 여부를 확인하고, 거절이나 무응답을 자동 승인으로 해석하지 않는다.</a:t>
+              <a:t>같은 추천안도 사람의 결정에 따라 결말이 셋으로 갈리며, 기한이 지나도 자동 승인이나 자동 취소는 없다.</a:t>
             </a:r>
           </a:p>
         </p:txBody>
@@ -28885,7 +30635,7 @@
                 <a:ea typeface="맑은 고딕"/>
                 <a:cs typeface="맑은 고딕"/>
               </a:rPr>
-              <a:t>결과가 기대와 다르면 에이전트의 판단과 프로세스의 순서·책임 중 어느 쪽을 확인할지 가린다.</a:t>
+              <a:t>에이전트 쪽 장치는 판단의 품질을, 프로세스 쪽 장치는 순서와 책임을 지키므로 한쪽이 다른 쪽을 대신하지 못한다.</a:t>
             </a:r>
           </a:p>
         </p:txBody>
@@ -29756,7 +31506,7 @@
       </p:sp>
       <p:pic>
         <p:nvPicPr>
-          <p:cNvPr id="6" name="삽화:장치자리.svg" descr="illust_1837816691667695515_1793003853.png"/>
+          <p:cNvPr id="6" name="삽화:장치자리.svg" descr="illust_7495105410506782348_1793113376.png"/>
           <p:cNvPicPr>
             <a:picLocks noChangeAspect="1"/>
           </p:cNvPicPr>
@@ -31366,7 +33116,7 @@
                 <a:ea typeface="맑은 고딕"/>
                 <a:cs typeface="맑은 고딕"/>
               </a:rPr>
-              <a:t>MCP 자체의 성질과 구별해 HYD가 업무 원천 읽기 · 제안 · 승인 뒤 시스템 쓰기를 나눈 설계를 본다.</a:t>
+              <a:t>MCP에도 쓰기 도구를 이을 수 있지만, HYD는 에이전트에 읽기와 제안만 주고 쓰기는 승인 뒤 프로세스에 두었다.</a:t>
             </a:r>
           </a:p>
         </p:txBody>
@@ -32162,7 +33912,7 @@
                 <a:ea typeface="맑은 고딕"/>
                 <a:cs typeface="맑은 고딕"/>
               </a:rPr>
-              <a:t>명세의 요구를 구체적인 시나리오로 실행해 검증하고 문서 작성과 시험 통과를 구별한다.</a:t>
+              <a:t>명세를 적은 것만으로는 지켜진다고 할 수 없어, 시나리오가 거절 뒤 처리 건 전체의 행동을 실행으로 확인한다.</a:t>
             </a:r>
           </a:p>
         </p:txBody>
@@ -33293,7 +35043,7 @@
                 <a:ea typeface="맑은 고딕"/>
                 <a:cs typeface="맑은 고딕"/>
               </a:rPr>
-              <a:t>HYD는 사람 작업을 그리는 데 더해 등록 전 승인 경로와 실행 중 권한을 검사한다.</a:t>
+              <a:t>사람의 승인은 그림에서 빠뜨릴 수 있어, HYD는 등록 전에 승인 경로를, 실행 중에 승인 권한을 기계적으로 검사한다.</a:t>
             </a:r>
           </a:p>
         </p:txBody>
@@ -35104,7 +36854,7 @@
                 <a:ea typeface="맑은 고딕"/>
                 <a:cs typeface="맑은 고딕"/>
               </a:rPr>
-              <a:t>증상으로 첫 조사 지점을 좁히고, 실제 값과 기록을 따라 원인을 확인한다.</a:t>
+              <a:t>드러난 증상이 첫 조사 지점을 세 영역 가운데 하나로 좁히지만, 원인은 실제 값과 기록을 따라가 확정한다.</a:t>
             </a:r>
           </a:p>
         </p:txBody>
@@ -36611,7 +38361,7 @@
                 <a:ea typeface="맑은 고딕"/>
                 <a:cs typeface="맑은 고딕"/>
               </a:rPr>
-              <a:t>판단 재료와 추천안을 의미 · 권한 · 실패 행동까지 포함한 계약으로 연결해 변경의 영향을 줄인다.</a:t>
+              <a:t>세 영역은 재료와 추천안으로 이어지며, 의미 · 권한 · 실패 행동까지 계약으로 맞춰야 한 영역의 변경이 번지지 않는다.</a:t>
             </a:r>
           </a:p>
         </p:txBody>
@@ -36686,7 +38436,7 @@
       </p:sp>
       <p:pic>
         <p:nvPicPr>
-          <p:cNvPr id="6" name="삽화:세영역.svg" descr="illust_302325041450131729_1793003853.png"/>
+          <p:cNvPr id="6" name="삽화:세영역.svg" descr="illust_2538619527968756512_1793113376.png"/>
           <p:cNvPicPr>
             <a:picLocks noChangeAspect="1"/>
           </p:cNvPicPr>
@@ -37430,7 +39180,7 @@
                 <a:ea typeface="맑은 고딕"/>
                 <a:cs typeface="맑은 고딕"/>
               </a:rPr>
-              <a:t>대상과 작업 메모를 실제 자료와 대조해 다음 교대가 확인할 일을 남긴다.</a:t>
+              <a:t>대상과 작업 메모를 설비 · 작업지시 · 부품 자료와 대조하고, 인계자 검토와 인수자 확인을 완료 조건으로 정한다.</a:t>
             </a:r>
           </a:p>
         </p:txBody>
@@ -37511,8 +39261,8 @@
         </p:nvSpPr>
         <p:spPr>
           <a:xfrm>
-            <a:off x="548640" y="2510790"/>
-            <a:ext cx="2567863" cy="2961132"/>
+            <a:off x="548640" y="2313241"/>
+            <a:ext cx="2567863" cy="3356229"/>
           </a:xfrm>
           <a:prstGeom prst="roundRect">
             <a:avLst>
@@ -37544,7 +39294,7 @@
         </p:nvSpPr>
         <p:spPr>
           <a:xfrm>
-            <a:off x="777240" y="2711958"/>
+            <a:off x="777240" y="2514409"/>
             <a:ext cx="731520" cy="731520"/>
           </a:xfrm>
           <a:prstGeom prst="ellipse">
@@ -37581,7 +39331,7 @@
         </p:blipFill>
         <p:spPr>
           <a:xfrm>
-            <a:off x="930859" y="2865577"/>
+            <a:off x="930859" y="2668028"/>
             <a:ext cx="424281" cy="424281"/>
           </a:xfrm>
           <a:prstGeom prst="rect">
@@ -37597,8 +39347,8 @@
         </p:nvSpPr>
         <p:spPr>
           <a:xfrm>
-            <a:off x="713232" y="3534918"/>
-            <a:ext cx="2238679" cy="1434084"/>
+            <a:off x="713232" y="3337369"/>
+            <a:ext cx="2238679" cy="1829181"/>
           </a:xfrm>
           <a:prstGeom prst="rect">
             <a:avLst/>
@@ -37618,7 +39368,7 @@
               </a:spcAft>
             </a:pPr>
             <a:r>
-              <a:rPr sz="1950" b="1">
+              <a:rPr sz="2150" b="1">
                 <a:solidFill>
                   <a:srgbClr val="13294B"/>
                 </a:solidFill>
@@ -37630,7 +39380,7 @@
             </a:r>
           </a:p>
           <a:p>
-            <a:pPr algn="l" eaLnBrk="0" marL="177165" indent="-177165">
+            <a:pPr algn="l" eaLnBrk="0" marL="200025" indent="-200025">
               <a:lnSpc>
                 <a:spcPct val="110000"/>
               </a:lnSpc>
@@ -37639,7 +39389,7 @@
               </a:spcAft>
             </a:pPr>
             <a:r>
-              <a:rPr sz="1550" b="0">
+              <a:rPr sz="1750" b="0">
                 <a:solidFill>
                   <a:srgbClr val="1F2A3A"/>
                 </a:solidFill>
@@ -37651,7 +39401,7 @@
             </a:r>
           </a:p>
           <a:p>
-            <a:pPr algn="l" eaLnBrk="0" marL="177165" indent="-177165">
+            <a:pPr algn="l" eaLnBrk="0" marL="200025" indent="-200025">
               <a:lnSpc>
                 <a:spcPct val="110000"/>
               </a:lnSpc>
@@ -37660,7 +39410,7 @@
               </a:spcAft>
             </a:pPr>
             <a:r>
-              <a:rPr sz="1550" b="0">
+              <a:rPr sz="1750" b="0">
                 <a:solidFill>
                   <a:srgbClr val="1F2A3A"/>
                 </a:solidFill>
@@ -37681,7 +39431,7 @@
         </p:nvSpPr>
         <p:spPr>
           <a:xfrm>
-            <a:off x="777240" y="5042154"/>
+            <a:off x="777240" y="5239702"/>
             <a:ext cx="822960" cy="292608"/>
           </a:xfrm>
           <a:prstGeom prst="roundRect">
@@ -37712,7 +39462,7 @@
         </p:nvSpPr>
         <p:spPr>
           <a:xfrm>
-            <a:off x="777240" y="5042154"/>
+            <a:off x="777240" y="5239702"/>
             <a:ext cx="822960" cy="292608"/>
           </a:xfrm>
           <a:prstGeom prst="rect">
@@ -37751,8 +39501,8 @@
         </p:nvSpPr>
         <p:spPr>
           <a:xfrm>
-            <a:off x="3390823" y="2510790"/>
-            <a:ext cx="2567863" cy="2961132"/>
+            <a:off x="3390823" y="2313241"/>
+            <a:ext cx="2567863" cy="3356229"/>
           </a:xfrm>
           <a:prstGeom prst="roundRect">
             <a:avLst>
@@ -37784,7 +39534,7 @@
         </p:nvSpPr>
         <p:spPr>
           <a:xfrm>
-            <a:off x="3619423" y="2711958"/>
+            <a:off x="3619423" y="2514409"/>
             <a:ext cx="731520" cy="731520"/>
           </a:xfrm>
           <a:prstGeom prst="ellipse">
@@ -37821,7 +39571,7 @@
         </p:blipFill>
         <p:spPr>
           <a:xfrm>
-            <a:off x="3773043" y="2865577"/>
+            <a:off x="3773043" y="2668028"/>
             <a:ext cx="424281" cy="424281"/>
           </a:xfrm>
           <a:prstGeom prst="rect">
@@ -37837,8 +39587,8 @@
         </p:nvSpPr>
         <p:spPr>
           <a:xfrm>
-            <a:off x="3555415" y="3534918"/>
-            <a:ext cx="2238679" cy="1434084"/>
+            <a:off x="3555415" y="3337369"/>
+            <a:ext cx="2238679" cy="1829181"/>
           </a:xfrm>
           <a:prstGeom prst="rect">
             <a:avLst/>
@@ -37858,7 +39608,7 @@
               </a:spcAft>
             </a:pPr>
             <a:r>
-              <a:rPr sz="1950" b="1">
+              <a:rPr sz="2150" b="1">
                 <a:solidFill>
                   <a:srgbClr val="13294B"/>
                 </a:solidFill>
@@ -37866,11 +39616,11 @@
                 <a:ea typeface="맑은 고딕"/>
                 <a:cs typeface="맑은 고딕"/>
               </a:rPr>
-              <a:t>정보원</a:t>
-            </a:r>
-          </a:p>
-          <a:p>
-            <a:pPr algn="l" eaLnBrk="0" marL="177165" indent="-177165">
+              <a:t>대조</a:t>
+            </a:r>
+          </a:p>
+          <a:p>
+            <a:pPr algn="l" eaLnBrk="0" marL="200025" indent="-200025">
               <a:lnSpc>
                 <a:spcPct val="110000"/>
               </a:lnSpc>
@@ -37879,7 +39629,7 @@
               </a:spcAft>
             </a:pPr>
             <a:r>
-              <a:rPr sz="1550" b="0">
+              <a:rPr sz="1750" b="0">
                 <a:solidFill>
                   <a:srgbClr val="1F2A3A"/>
                 </a:solidFill>
@@ -37887,11 +39637,11 @@
                 <a:ea typeface="맑은 고딕"/>
                 <a:cs typeface="맑은 고딕"/>
               </a:rPr>
-              <a:t>• 점검 문서와 설비 이력</a:t>
-            </a:r>
-          </a:p>
-          <a:p>
-            <a:pPr algn="l" eaLnBrk="0" marL="177165" indent="-177165">
+              <a:t>• 설비 상태 · 미완료 작업지시</a:t>
+            </a:r>
+          </a:p>
+          <a:p>
+            <a:pPr algn="l" eaLnBrk="0" marL="200025" indent="-200025">
               <a:lnSpc>
                 <a:spcPct val="110000"/>
               </a:lnSpc>
@@ -37900,7 +39650,7 @@
               </a:spcAft>
             </a:pPr>
             <a:r>
-              <a:rPr sz="1550" b="0">
+              <a:rPr sz="1750" b="0">
                 <a:solidFill>
                   <a:srgbClr val="1F2A3A"/>
                 </a:solidFill>
@@ -37908,7 +39658,7 @@
                 <a:ea typeface="맑은 고딕"/>
                 <a:cs typeface="맑은 고딕"/>
               </a:rPr>
-              <a:t>• 정비 · 재고 자료</a:t>
+              <a:t>• 부품 대기 정보</a:t>
             </a:r>
           </a:p>
         </p:txBody>
@@ -37921,7 +39671,7 @@
         </p:nvSpPr>
         <p:spPr>
           <a:xfrm>
-            <a:off x="3619423" y="5042154"/>
+            <a:off x="3619423" y="5239702"/>
             <a:ext cx="822960" cy="292608"/>
           </a:xfrm>
           <a:prstGeom prst="roundRect">
@@ -37952,7 +39702,7 @@
         </p:nvSpPr>
         <p:spPr>
           <a:xfrm>
-            <a:off x="3619423" y="5042154"/>
+            <a:off x="3619423" y="5239702"/>
             <a:ext cx="822960" cy="292608"/>
           </a:xfrm>
           <a:prstGeom prst="rect">
@@ -37991,8 +39741,8 @@
         </p:nvSpPr>
         <p:spPr>
           <a:xfrm>
-            <a:off x="6233007" y="2510790"/>
-            <a:ext cx="2567863" cy="2961132"/>
+            <a:off x="6233007" y="2313241"/>
+            <a:ext cx="2567863" cy="3356229"/>
           </a:xfrm>
           <a:prstGeom prst="roundRect">
             <a:avLst>
@@ -38024,7 +39774,7 @@
         </p:nvSpPr>
         <p:spPr>
           <a:xfrm>
-            <a:off x="6461607" y="2711958"/>
+            <a:off x="6461607" y="2514409"/>
             <a:ext cx="731520" cy="731520"/>
           </a:xfrm>
           <a:prstGeom prst="ellipse">
@@ -38061,7 +39811,7 @@
         </p:blipFill>
         <p:spPr>
           <a:xfrm>
-            <a:off x="6615226" y="2865577"/>
+            <a:off x="6615226" y="2668028"/>
             <a:ext cx="424281" cy="424281"/>
           </a:xfrm>
           <a:prstGeom prst="rect">
@@ -38077,8 +39827,8 @@
         </p:nvSpPr>
         <p:spPr>
           <a:xfrm>
-            <a:off x="6397599" y="3534918"/>
-            <a:ext cx="2238679" cy="1434084"/>
+            <a:off x="6397599" y="3337369"/>
+            <a:ext cx="2238679" cy="1829181"/>
           </a:xfrm>
           <a:prstGeom prst="rect">
             <a:avLst/>
@@ -38098,7 +39848,7 @@
               </a:spcAft>
             </a:pPr>
             <a:r>
-              <a:rPr sz="1950" b="1">
+              <a:rPr sz="2150" b="1">
                 <a:solidFill>
                   <a:srgbClr val="13294B"/>
                 </a:solidFill>
@@ -38106,11 +39856,11 @@
                 <a:ea typeface="맑은 고딕"/>
                 <a:cs typeface="맑은 고딕"/>
               </a:rPr>
-              <a:t>사람 확인</a:t>
-            </a:r>
-          </a:p>
-          <a:p>
-            <a:pPr algn="l" eaLnBrk="0" marL="177165" indent="-177165">
+              <a:t>범위</a:t>
+            </a:r>
+          </a:p>
+          <a:p>
+            <a:pPr algn="l" eaLnBrk="0" marL="200025" indent="-200025">
               <a:lnSpc>
                 <a:spcPct val="110000"/>
               </a:lnSpc>
@@ -38119,7 +39869,7 @@
               </a:spcAft>
             </a:pPr>
             <a:r>
-              <a:rPr sz="1550" b="0">
+              <a:rPr sz="1750" b="0">
                 <a:solidFill>
                   <a:srgbClr val="1F2A3A"/>
                 </a:solidFill>
@@ -38127,11 +39877,11 @@
                 <a:ea typeface="맑은 고딕"/>
                 <a:cs typeface="맑은 고딕"/>
               </a:rPr>
-              <a:t>• 인계자가 검토</a:t>
-            </a:r>
-          </a:p>
-          <a:p>
-            <a:pPr algn="l" eaLnBrk="0" marL="177165" indent="-177165">
+              <a:t>• 다음 근무자가 확인할 일</a:t>
+            </a:r>
+          </a:p>
+          <a:p>
+            <a:pPr algn="l" eaLnBrk="0" marL="200025" indent="-200025">
               <a:lnSpc>
                 <a:spcPct val="110000"/>
               </a:lnSpc>
@@ -38140,7 +39890,7 @@
               </a:spcAft>
             </a:pPr>
             <a:r>
-              <a:rPr sz="1550" b="0">
+              <a:rPr sz="1750" b="0">
                 <a:solidFill>
                   <a:srgbClr val="1F2A3A"/>
                 </a:solidFill>
@@ -38148,7 +39898,7 @@
                 <a:ea typeface="맑은 고딕"/>
                 <a:cs typeface="맑은 고딕"/>
               </a:rPr>
-              <a:t>• 인수자가 확인</a:t>
+              <a:t>• ABC는 다시 실행하지 않는다</a:t>
             </a:r>
           </a:p>
         </p:txBody>
@@ -38161,7 +39911,7 @@
         </p:nvSpPr>
         <p:spPr>
           <a:xfrm>
-            <a:off x="6461607" y="5042154"/>
+            <a:off x="6461607" y="5239702"/>
             <a:ext cx="822960" cy="292608"/>
           </a:xfrm>
           <a:prstGeom prst="roundRect">
@@ -38192,7 +39942,7 @@
         </p:nvSpPr>
         <p:spPr>
           <a:xfrm>
-            <a:off x="6461607" y="5042154"/>
+            <a:off x="6461607" y="5239702"/>
             <a:ext cx="822960" cy="292608"/>
           </a:xfrm>
           <a:prstGeom prst="rect">
@@ -38218,7 +39968,7 @@
                 <a:ea typeface="맑은 고딕"/>
                 <a:cs typeface="맑은 고딕"/>
               </a:rPr>
-              <a:t>확인</a:t>
+              <a:t>범위</a:t>
             </a:r>
           </a:p>
         </p:txBody>
@@ -38231,8 +39981,8 @@
         </p:nvSpPr>
         <p:spPr>
           <a:xfrm>
-            <a:off x="9075191" y="2510790"/>
-            <a:ext cx="2567863" cy="2961132"/>
+            <a:off x="9075191" y="2313241"/>
+            <a:ext cx="2567863" cy="3356229"/>
           </a:xfrm>
           <a:prstGeom prst="roundRect">
             <a:avLst>
@@ -38264,7 +40014,7 @@
         </p:nvSpPr>
         <p:spPr>
           <a:xfrm>
-            <a:off x="9303791" y="2711958"/>
+            <a:off x="9303791" y="2514409"/>
             <a:ext cx="731520" cy="731520"/>
           </a:xfrm>
           <a:prstGeom prst="ellipse">
@@ -38301,7 +40051,7 @@
         </p:blipFill>
         <p:spPr>
           <a:xfrm>
-            <a:off x="9457410" y="2865577"/>
+            <a:off x="9457410" y="2668028"/>
             <a:ext cx="424281" cy="424281"/>
           </a:xfrm>
           <a:prstGeom prst="rect">
@@ -38317,8 +40067,8 @@
         </p:nvSpPr>
         <p:spPr>
           <a:xfrm>
-            <a:off x="9239783" y="3534918"/>
-            <a:ext cx="2238679" cy="1434084"/>
+            <a:off x="9239783" y="3337369"/>
+            <a:ext cx="2238679" cy="1829181"/>
           </a:xfrm>
           <a:prstGeom prst="rect">
             <a:avLst/>
@@ -38338,7 +40088,7 @@
               </a:spcAft>
             </a:pPr>
             <a:r>
-              <a:rPr sz="1950" b="1">
+              <a:rPr sz="2150" b="1">
                 <a:solidFill>
                   <a:srgbClr val="13294B"/>
                 </a:solidFill>
@@ -38350,7 +40100,7 @@
             </a:r>
           </a:p>
           <a:p>
-            <a:pPr algn="l" eaLnBrk="0" marL="177165" indent="-177165">
+            <a:pPr algn="l" eaLnBrk="0" marL="200025" indent="-200025">
               <a:lnSpc>
                 <a:spcPct val="110000"/>
               </a:lnSpc>
@@ -38359,7 +40109,7 @@
               </a:spcAft>
             </a:pPr>
             <a:r>
-              <a:rPr sz="1550" b="0">
+              <a:rPr sz="1750" b="0">
                 <a:solidFill>
                   <a:srgbClr val="1F2A3A"/>
                 </a:solidFill>
@@ -38367,11 +40117,11 @@
                 <a:ea typeface="맑은 고딕"/>
                 <a:cs typeface="맑은 고딕"/>
               </a:rPr>
-              <a:t>• 근거와 미확인 항목</a:t>
-            </a:r>
-          </a:p>
-          <a:p>
-            <a:pPr algn="l" eaLnBrk="0" marL="177165" indent="-177165">
+              <a:t>• 인계자 검토</a:t>
+            </a:r>
+          </a:p>
+          <a:p>
+            <a:pPr algn="l" eaLnBrk="0" marL="200025" indent="-200025">
               <a:lnSpc>
                 <a:spcPct val="110000"/>
               </a:lnSpc>
@@ -38380,7 +40130,7 @@
               </a:spcAft>
             </a:pPr>
             <a:r>
-              <a:rPr sz="1550" b="0">
+              <a:rPr sz="1750" b="0">
                 <a:solidFill>
                   <a:srgbClr val="1F2A3A"/>
                 </a:solidFill>
@@ -38388,7 +40138,7 @@
                 <a:ea typeface="맑은 고딕"/>
                 <a:cs typeface="맑은 고딕"/>
               </a:rPr>
-              <a:t>• 다음 확인할 일 기록</a:t>
+              <a:t>• 인수자 확인</a:t>
             </a:r>
           </a:p>
         </p:txBody>
@@ -38401,7 +40151,7 @@
         </p:nvSpPr>
         <p:spPr>
           <a:xfrm>
-            <a:off x="9303791" y="5042154"/>
+            <a:off x="9303791" y="5239702"/>
             <a:ext cx="1021080" cy="292608"/>
           </a:xfrm>
           <a:prstGeom prst="roundRect">
@@ -38432,7 +40182,7 @@
         </p:nvSpPr>
         <p:spPr>
           <a:xfrm>
-            <a:off x="9303791" y="5042154"/>
+            <a:off x="9303791" y="5239702"/>
             <a:ext cx="1021080" cy="292608"/>
           </a:xfrm>
           <a:prstGeom prst="rect">
@@ -38765,7 +40515,7 @@
                 <a:ea typeface="맑은 고딕"/>
                 <a:cs typeface="맑은 고딕"/>
               </a:rPr>
-              <a:t>제공된 보충 문서에서 추출한 절차와 출처를 검토한 뒤 기존 지식에 추가한다.</a:t>
+              <a:t>준비된 추출 후보를 원문과 대조해 승인한 것만 추가하고, 새 항목의 문서 · 판본 · 절 연결을 지식 지도에서 확인한다.</a:t>
             </a:r>
           </a:p>
         </p:txBody>
@@ -38846,8 +40596,8 @@
         </p:nvSpPr>
         <p:spPr>
           <a:xfrm>
-            <a:off x="548640" y="2371343"/>
-            <a:ext cx="2567863" cy="3240024"/>
+            <a:off x="548640" y="2313241"/>
+            <a:ext cx="2567863" cy="3356229"/>
           </a:xfrm>
           <a:prstGeom prst="roundRect">
             <a:avLst>
@@ -38879,7 +40629,7 @@
         </p:nvSpPr>
         <p:spPr>
           <a:xfrm>
-            <a:off x="777240" y="2572511"/>
+            <a:off x="777240" y="2514409"/>
             <a:ext cx="731520" cy="731520"/>
           </a:xfrm>
           <a:prstGeom prst="ellipse">
@@ -38916,7 +40666,7 @@
         </p:blipFill>
         <p:spPr>
           <a:xfrm>
-            <a:off x="930859" y="2726131"/>
+            <a:off x="930859" y="2668028"/>
             <a:ext cx="424281" cy="424281"/>
           </a:xfrm>
           <a:prstGeom prst="rect">
@@ -38932,8 +40682,8 @@
         </p:nvSpPr>
         <p:spPr>
           <a:xfrm>
-            <a:off x="713232" y="3395471"/>
-            <a:ext cx="2238679" cy="1712976"/>
+            <a:off x="713232" y="3337369"/>
+            <a:ext cx="2238679" cy="1829181"/>
           </a:xfrm>
           <a:prstGeom prst="rect">
             <a:avLst/>
@@ -38953,7 +40703,7 @@
               </a:spcAft>
             </a:pPr>
             <a:r>
-              <a:rPr sz="2000" b="1">
+              <a:rPr sz="2150" b="1">
                 <a:solidFill>
                   <a:srgbClr val="13294B"/>
                 </a:solidFill>
@@ -38965,7 +40715,7 @@
             </a:r>
           </a:p>
           <a:p>
-            <a:pPr algn="l" eaLnBrk="0" marL="182880" indent="-182880">
+            <a:pPr algn="l" eaLnBrk="0" marL="200025" indent="-200025">
               <a:lnSpc>
                 <a:spcPct val="110000"/>
               </a:lnSpc>
@@ -38974,7 +40724,7 @@
               </a:spcAft>
             </a:pPr>
             <a:r>
-              <a:rPr sz="1600" b="0">
+              <a:rPr sz="1750" b="0">
                 <a:solidFill>
                   <a:srgbClr val="1F2A3A"/>
                 </a:solidFill>
@@ -38982,11 +40732,11 @@
                 <a:ea typeface="맑은 고딕"/>
                 <a:cs typeface="맑은 고딕"/>
               </a:rPr>
-              <a:t>• 제공된 HI-01</a:t>
-            </a:r>
-          </a:p>
-          <a:p>
-            <a:pPr algn="l" eaLnBrk="0" marL="182880" indent="-182880">
+              <a:t>• 제공 HI-01 보충 매뉴얼</a:t>
+            </a:r>
+          </a:p>
+          <a:p>
+            <a:pPr algn="l" eaLnBrk="0" marL="200025" indent="-200025">
               <a:lnSpc>
                 <a:spcPct val="110000"/>
               </a:lnSpc>
@@ -38995,7 +40745,7 @@
               </a:spcAft>
             </a:pPr>
             <a:r>
-              <a:rPr sz="1600" b="0">
+              <a:rPr sz="1750" b="0">
                 <a:solidFill>
                   <a:srgbClr val="1F2A3A"/>
                 </a:solidFill>
@@ -39003,7 +40753,7 @@
                 <a:ea typeface="맑은 고딕"/>
                 <a:cs typeface="맑은 고딕"/>
               </a:rPr>
-              <a:t>• 점검 보충 문서</a:t>
+              <a:t>• 준비된 추출 후보</a:t>
             </a:r>
           </a:p>
         </p:txBody>
@@ -39016,7 +40766,7 @@
         </p:nvSpPr>
         <p:spPr>
           <a:xfrm>
-            <a:off x="777240" y="5181600"/>
+            <a:off x="777240" y="5239702"/>
             <a:ext cx="822960" cy="292608"/>
           </a:xfrm>
           <a:prstGeom prst="roundRect">
@@ -39047,7 +40797,7 @@
         </p:nvSpPr>
         <p:spPr>
           <a:xfrm>
-            <a:off x="777240" y="5181600"/>
+            <a:off x="777240" y="5239702"/>
             <a:ext cx="822960" cy="292608"/>
           </a:xfrm>
           <a:prstGeom prst="rect">
@@ -39086,8 +40836,8 @@
         </p:nvSpPr>
         <p:spPr>
           <a:xfrm>
-            <a:off x="3390823" y="2371343"/>
-            <a:ext cx="2567863" cy="3240024"/>
+            <a:off x="3390823" y="2313241"/>
+            <a:ext cx="2567863" cy="3356229"/>
           </a:xfrm>
           <a:prstGeom prst="roundRect">
             <a:avLst>
@@ -39119,7 +40869,7 @@
         </p:nvSpPr>
         <p:spPr>
           <a:xfrm>
-            <a:off x="3619423" y="2572511"/>
+            <a:off x="3619423" y="2514409"/>
             <a:ext cx="731520" cy="731520"/>
           </a:xfrm>
           <a:prstGeom prst="ellipse">
@@ -39156,7 +40906,7 @@
         </p:blipFill>
         <p:spPr>
           <a:xfrm>
-            <a:off x="3773043" y="2726131"/>
+            <a:off x="3773043" y="2668028"/>
             <a:ext cx="424281" cy="424281"/>
           </a:xfrm>
           <a:prstGeom prst="rect">
@@ -39172,8 +40922,8 @@
         </p:nvSpPr>
         <p:spPr>
           <a:xfrm>
-            <a:off x="3555415" y="3395471"/>
-            <a:ext cx="2238679" cy="1712976"/>
+            <a:off x="3555415" y="3337369"/>
+            <a:ext cx="2238679" cy="1829181"/>
           </a:xfrm>
           <a:prstGeom prst="rect">
             <a:avLst/>
@@ -39193,7 +40943,7 @@
               </a:spcAft>
             </a:pPr>
             <a:r>
-              <a:rPr sz="2000" b="1">
+              <a:rPr sz="2150" b="1">
                 <a:solidFill>
                   <a:srgbClr val="13294B"/>
                 </a:solidFill>
@@ -39201,11 +40951,11 @@
                 <a:ea typeface="맑은 고딕"/>
                 <a:cs typeface="맑은 고딕"/>
               </a:rPr>
-              <a:t>범위</a:t>
-            </a:r>
-          </a:p>
-          <a:p>
-            <a:pPr algn="l" eaLnBrk="0" marL="182880" indent="-182880">
+              <a:t>검토</a:t>
+            </a:r>
+          </a:p>
+          <a:p>
+            <a:pPr algn="l" eaLnBrk="0" marL="200025" indent="-200025">
               <a:lnSpc>
                 <a:spcPct val="110000"/>
               </a:lnSpc>
@@ -39214,7 +40964,7 @@
               </a:spcAft>
             </a:pPr>
             <a:r>
-              <a:rPr sz="1600" b="0">
+              <a:rPr sz="1750" b="0">
                 <a:solidFill>
                   <a:srgbClr val="1F2A3A"/>
                 </a:solidFill>
@@ -39222,11 +40972,11 @@
                 <a:ea typeface="맑은 고딕"/>
                 <a:cs typeface="맑은 고딕"/>
               </a:rPr>
-              <a:t>• 설비 · 작업지시 · 부품</a:t>
-            </a:r>
-          </a:p>
-          <a:p>
-            <a:pPr algn="l" eaLnBrk="0" marL="182880" indent="-182880">
+              <a:t>• 절차 · 조건 · 근거를</a:t>
+            </a:r>
+          </a:p>
+          <a:p>
+            <a:pPr algn="l" eaLnBrk="0" marL="200025" indent="-200025">
               <a:lnSpc>
                 <a:spcPct val="110000"/>
               </a:lnSpc>
@@ -39235,7 +40985,7 @@
               </a:spcAft>
             </a:pPr>
             <a:r>
-              <a:rPr sz="1600" b="0">
+              <a:rPr sz="1750" b="0">
                 <a:solidFill>
                   <a:srgbClr val="1F2A3A"/>
                 </a:solidFill>
@@ -39243,7 +40993,7 @@
                 <a:ea typeface="맑은 고딕"/>
                 <a:cs typeface="맑은 고딕"/>
               </a:rPr>
-              <a:t>• 작업 메모 확인 절차</a:t>
+              <a:t>• 원문 위치와 대조</a:t>
             </a:r>
           </a:p>
         </p:txBody>
@@ -39256,7 +41006,7 @@
         </p:nvSpPr>
         <p:spPr>
           <a:xfrm>
-            <a:off x="3619423" y="5181600"/>
+            <a:off x="3619423" y="5239702"/>
             <a:ext cx="822960" cy="292608"/>
           </a:xfrm>
           <a:prstGeom prst="roundRect">
@@ -39287,7 +41037,7 @@
         </p:nvSpPr>
         <p:spPr>
           <a:xfrm>
-            <a:off x="3619423" y="5181600"/>
+            <a:off x="3619423" y="5239702"/>
             <a:ext cx="822960" cy="292608"/>
           </a:xfrm>
           <a:prstGeom prst="rect">
@@ -39313,7 +41063,7 @@
                 <a:ea typeface="맑은 고딕"/>
                 <a:cs typeface="맑은 고딕"/>
               </a:rPr>
-              <a:t>범위</a:t>
+              <a:t>검토</a:t>
             </a:r>
           </a:p>
         </p:txBody>
@@ -39326,8 +41076,8 @@
         </p:nvSpPr>
         <p:spPr>
           <a:xfrm>
-            <a:off x="6233007" y="2371343"/>
-            <a:ext cx="2567863" cy="3240024"/>
+            <a:off x="6233007" y="2313241"/>
+            <a:ext cx="2567863" cy="3356229"/>
           </a:xfrm>
           <a:prstGeom prst="roundRect">
             <a:avLst>
@@ -39359,7 +41109,7 @@
         </p:nvSpPr>
         <p:spPr>
           <a:xfrm>
-            <a:off x="6461607" y="2572511"/>
+            <a:off x="6461607" y="2514409"/>
             <a:ext cx="731520" cy="731520"/>
           </a:xfrm>
           <a:prstGeom prst="ellipse">
@@ -39396,7 +41146,7 @@
         </p:blipFill>
         <p:spPr>
           <a:xfrm>
-            <a:off x="6615226" y="2726131"/>
+            <a:off x="6615226" y="2668028"/>
             <a:ext cx="424281" cy="424281"/>
           </a:xfrm>
           <a:prstGeom prst="rect">
@@ -39412,8 +41162,8 @@
         </p:nvSpPr>
         <p:spPr>
           <a:xfrm>
-            <a:off x="6397599" y="3395471"/>
-            <a:ext cx="2238679" cy="1712976"/>
+            <a:off x="6397599" y="3337369"/>
+            <a:ext cx="2238679" cy="1829181"/>
           </a:xfrm>
           <a:prstGeom prst="rect">
             <a:avLst/>
@@ -39433,7 +41183,7 @@
               </a:spcAft>
             </a:pPr>
             <a:r>
-              <a:rPr sz="2000" b="1">
+              <a:rPr sz="2150" b="1">
                 <a:solidFill>
                   <a:srgbClr val="13294B"/>
                 </a:solidFill>
@@ -39441,11 +41191,11 @@
                 <a:ea typeface="맑은 고딕"/>
                 <a:cs typeface="맑은 고딕"/>
               </a:rPr>
-              <a:t>검토</a:t>
-            </a:r>
-          </a:p>
-          <a:p>
-            <a:pPr algn="l" eaLnBrk="0" marL="182880" indent="-182880">
+              <a:t>적재</a:t>
+            </a:r>
+          </a:p>
+          <a:p>
+            <a:pPr algn="l" eaLnBrk="0" marL="200025" indent="-200025">
               <a:lnSpc>
                 <a:spcPct val="110000"/>
               </a:lnSpc>
@@ -39454,7 +41204,7 @@
               </a:spcAft>
             </a:pPr>
             <a:r>
-              <a:rPr sz="1600" b="0">
+              <a:rPr sz="1750" b="0">
                 <a:solidFill>
                   <a:srgbClr val="1F2A3A"/>
                 </a:solidFill>
@@ -39462,11 +41212,11 @@
                 <a:ea typeface="맑은 고딕"/>
                 <a:cs typeface="맑은 고딕"/>
               </a:rPr>
-              <a:t>• 추출된 내용과</a:t>
-            </a:r>
-          </a:p>
-          <a:p>
-            <a:pPr algn="l" eaLnBrk="0" marL="182880" indent="-182880">
+              <a:t>• 승인한 지식만 추가</a:t>
+            </a:r>
+          </a:p>
+          <a:p>
+            <a:pPr algn="l" eaLnBrk="0" marL="200025" indent="-200025">
               <a:lnSpc>
                 <a:spcPct val="110000"/>
               </a:lnSpc>
@@ -39475,7 +41225,7 @@
               </a:spcAft>
             </a:pPr>
             <a:r>
-              <a:rPr sz="1600" b="0">
+              <a:rPr sz="1750" b="0">
                 <a:solidFill>
                   <a:srgbClr val="1F2A3A"/>
                 </a:solidFill>
@@ -39483,7 +41233,7 @@
                 <a:ea typeface="맑은 고딕"/>
                 <a:cs typeface="맑은 고딕"/>
               </a:rPr>
-              <a:t>• 원문 위치를 대조</a:t>
+              <a:t>• 추출 재사용과 사람의 적재 구분</a:t>
             </a:r>
           </a:p>
         </p:txBody>
@@ -39496,7 +41246,7 @@
         </p:nvSpPr>
         <p:spPr>
           <a:xfrm>
-            <a:off x="6461607" y="5181600"/>
+            <a:off x="6461607" y="5239702"/>
             <a:ext cx="822960" cy="292608"/>
           </a:xfrm>
           <a:prstGeom prst="roundRect">
@@ -39527,7 +41277,7 @@
         </p:nvSpPr>
         <p:spPr>
           <a:xfrm>
-            <a:off x="6461607" y="5181600"/>
+            <a:off x="6461607" y="5239702"/>
             <a:ext cx="822960" cy="292608"/>
           </a:xfrm>
           <a:prstGeom prst="rect">
@@ -39553,7 +41303,7 @@
                 <a:ea typeface="맑은 고딕"/>
                 <a:cs typeface="맑은 고딕"/>
               </a:rPr>
-              <a:t>검토</a:t>
+              <a:t>적재</a:t>
             </a:r>
           </a:p>
         </p:txBody>
@@ -39566,8 +41316,8 @@
         </p:nvSpPr>
         <p:spPr>
           <a:xfrm>
-            <a:off x="9075191" y="2371343"/>
-            <a:ext cx="2567863" cy="3240024"/>
+            <a:off x="9075191" y="2313241"/>
+            <a:ext cx="2567863" cy="3356229"/>
           </a:xfrm>
           <a:prstGeom prst="roundRect">
             <a:avLst>
@@ -39599,7 +41349,7 @@
         </p:nvSpPr>
         <p:spPr>
           <a:xfrm>
-            <a:off x="9303791" y="2572511"/>
+            <a:off x="9303791" y="2514409"/>
             <a:ext cx="731520" cy="731520"/>
           </a:xfrm>
           <a:prstGeom prst="ellipse">
@@ -39636,7 +41386,7 @@
         </p:blipFill>
         <p:spPr>
           <a:xfrm>
-            <a:off x="9457410" y="2726131"/>
+            <a:off x="9457410" y="2668028"/>
             <a:ext cx="424281" cy="424281"/>
           </a:xfrm>
           <a:prstGeom prst="rect">
@@ -39652,8 +41402,8 @@
         </p:nvSpPr>
         <p:spPr>
           <a:xfrm>
-            <a:off x="9239783" y="3395471"/>
-            <a:ext cx="2238679" cy="1712976"/>
+            <a:off x="9239783" y="3337369"/>
+            <a:ext cx="2238679" cy="1829181"/>
           </a:xfrm>
           <a:prstGeom prst="rect">
             <a:avLst/>
@@ -39673,7 +41423,7 @@
               </a:spcAft>
             </a:pPr>
             <a:r>
-              <a:rPr sz="2000" b="1">
+              <a:rPr sz="2150" b="1">
                 <a:solidFill>
                   <a:srgbClr val="13294B"/>
                 </a:solidFill>
@@ -39685,7 +41435,7 @@
             </a:r>
           </a:p>
           <a:p>
-            <a:pPr algn="l" eaLnBrk="0" marL="182880" indent="-182880">
+            <a:pPr algn="l" eaLnBrk="0" marL="200025" indent="-200025">
               <a:lnSpc>
                 <a:spcPct val="110000"/>
               </a:lnSpc>
@@ -39694,7 +41444,7 @@
               </a:spcAft>
             </a:pPr>
             <a:r>
-              <a:rPr sz="1600" b="0">
+              <a:rPr sz="1750" b="0">
                 <a:solidFill>
                   <a:srgbClr val="1F2A3A"/>
                 </a:solidFill>
@@ -39702,11 +41452,11 @@
                 <a:ea typeface="맑은 고딕"/>
                 <a:cs typeface="맑은 고딕"/>
               </a:rPr>
-              <a:t>• 검토한 절차를 추가</a:t>
-            </a:r>
-          </a:p>
-          <a:p>
-            <a:pPr algn="l" eaLnBrk="0" marL="182880" indent="-182880">
+              <a:t>• 새 항목의 식별자와</a:t>
+            </a:r>
+          </a:p>
+          <a:p>
+            <a:pPr algn="l" eaLnBrk="0" marL="200025" indent="-200025">
               <a:lnSpc>
                 <a:spcPct val="110000"/>
               </a:lnSpc>
@@ -39715,7 +41465,7 @@
               </a:spcAft>
             </a:pPr>
             <a:r>
-              <a:rPr sz="1600" b="0">
+              <a:rPr sz="1750" b="0">
                 <a:solidFill>
                   <a:srgbClr val="1F2A3A"/>
                 </a:solidFill>
@@ -39723,7 +41473,7 @@
                 <a:ea typeface="맑은 고딕"/>
                 <a:cs typeface="맑은 고딕"/>
               </a:rPr>
-              <a:t>• 기존 지식은 유지</a:t>
+              <a:t>• 문서 · 판본 · 절 연결 확인</a:t>
             </a:r>
           </a:p>
         </p:txBody>
@@ -39736,7 +41486,7 @@
         </p:nvSpPr>
         <p:spPr>
           <a:xfrm>
-            <a:off x="9303791" y="5181600"/>
+            <a:off x="9303791" y="5239702"/>
             <a:ext cx="1021080" cy="292608"/>
           </a:xfrm>
           <a:prstGeom prst="roundRect">
@@ -39767,7 +41517,7 @@
         </p:nvSpPr>
         <p:spPr>
           <a:xfrm>
-            <a:off x="9303791" y="5181600"/>
+            <a:off x="9303791" y="5239702"/>
             <a:ext cx="1021080" cy="292608"/>
           </a:xfrm>
           <a:prstGeom prst="rect">
@@ -40100,7 +41850,7 @@
                 <a:ea typeface="맑은 고딕"/>
                 <a:cs typeface="맑은 고딕"/>
               </a:rPr>
-              <a:t>실제 조회 결과와 작업 메모를 대조해 확인된 것과 확인할 일을 구분한다.</a:t>
+              <a:t>허용된 조회 도구로 인계안을 쓰는 에이전트 · 스킬을 구성하고, 메모와 실제 자료가 다른 곳을 확인 사항으로 남긴다.</a:t>
             </a:r>
           </a:p>
         </p:txBody>
@@ -40181,8 +41931,8 @@
         </p:nvSpPr>
         <p:spPr>
           <a:xfrm>
-            <a:off x="548640" y="2313241"/>
-            <a:ext cx="2567863" cy="3356229"/>
+            <a:off x="548640" y="2247391"/>
+            <a:ext cx="2567863" cy="3487928"/>
           </a:xfrm>
           <a:prstGeom prst="roundRect">
             <a:avLst>
@@ -40214,7 +41964,7 @@
         </p:nvSpPr>
         <p:spPr>
           <a:xfrm>
-            <a:off x="777240" y="2514409"/>
+            <a:off x="777240" y="2448560"/>
             <a:ext cx="731520" cy="731520"/>
           </a:xfrm>
           <a:prstGeom prst="ellipse">
@@ -40251,7 +42001,7 @@
         </p:blipFill>
         <p:spPr>
           <a:xfrm>
-            <a:off x="930859" y="2668028"/>
+            <a:off x="930859" y="2602179"/>
             <a:ext cx="424281" cy="424281"/>
           </a:xfrm>
           <a:prstGeom prst="rect">
@@ -40267,8 +42017,8 @@
         </p:nvSpPr>
         <p:spPr>
           <a:xfrm>
-            <a:off x="713232" y="3337369"/>
-            <a:ext cx="2238679" cy="1829181"/>
+            <a:off x="713232" y="3271519"/>
+            <a:ext cx="2238679" cy="1960880"/>
           </a:xfrm>
           <a:prstGeom prst="rect">
             <a:avLst/>
@@ -40288,7 +42038,7 @@
               </a:spcAft>
             </a:pPr>
             <a:r>
-              <a:rPr sz="2150" b="1">
+              <a:rPr sz="2000" b="1">
                 <a:solidFill>
                   <a:srgbClr val="13294B"/>
                 </a:solidFill>
@@ -40296,11 +42046,11 @@
                 <a:ea typeface="맑은 고딕"/>
                 <a:cs typeface="맑은 고딕"/>
               </a:rPr>
-              <a:t>입력</a:t>
-            </a:r>
-          </a:p>
-          <a:p>
-            <a:pPr algn="l" eaLnBrk="0" marL="200025" indent="-200025">
+              <a:t>구성</a:t>
+            </a:r>
+          </a:p>
+          <a:p>
+            <a:pPr algn="l" eaLnBrk="0" marL="182880" indent="-182880">
               <a:lnSpc>
                 <a:spcPct val="110000"/>
               </a:lnSpc>
@@ -40309,7 +42059,7 @@
               </a:spcAft>
             </a:pPr>
             <a:r>
-              <a:rPr sz="1750" b="0">
+              <a:rPr sz="1600" b="0">
                 <a:solidFill>
                   <a:srgbClr val="1F2A3A"/>
                 </a:solidFill>
@@ -40317,11 +42067,11 @@
                 <a:ea typeface="맑은 고딕"/>
                 <a:cs typeface="맑은 고딕"/>
               </a:rPr>
-              <a:t>• 대상 · 교대 · 기준 시각</a:t>
-            </a:r>
-          </a:p>
-          <a:p>
-            <a:pPr algn="l" eaLnBrk="0" marL="200025" indent="-200025">
+              <a:t>• 이름 · 설명 작성</a:t>
+            </a:r>
+          </a:p>
+          <a:p>
+            <a:pPr algn="l" eaLnBrk="0" marL="182880" indent="-182880">
               <a:lnSpc>
                 <a:spcPct val="110000"/>
               </a:lnSpc>
@@ -40330,7 +42080,7 @@
               </a:spcAft>
             </a:pPr>
             <a:r>
-              <a:rPr sz="1750" b="0">
+              <a:rPr sz="1600" b="0">
                 <a:solidFill>
                   <a:srgbClr val="1F2A3A"/>
                 </a:solidFill>
@@ -40338,7 +42088,7 @@
                 <a:ea typeface="맑은 고딕"/>
                 <a:cs typeface="맑은 고딕"/>
               </a:rPr>
-              <a:t>• 전달받은 작업 메모</a:t>
+              <a:t>• 스킬에 확인 항목</a:t>
             </a:r>
           </a:p>
         </p:txBody>
@@ -40351,8 +42101,8 @@
         </p:nvSpPr>
         <p:spPr>
           <a:xfrm>
-            <a:off x="777240" y="5239702"/>
-            <a:ext cx="822960" cy="292608"/>
+            <a:off x="777240" y="5305552"/>
+            <a:ext cx="1523999" cy="292608"/>
           </a:xfrm>
           <a:prstGeom prst="roundRect">
             <a:avLst>
@@ -40382,8 +42132,8 @@
         </p:nvSpPr>
         <p:spPr>
           <a:xfrm>
-            <a:off x="777240" y="5239702"/>
-            <a:ext cx="822960" cy="292608"/>
+            <a:off x="777240" y="5305552"/>
+            <a:ext cx="1523999" cy="292608"/>
           </a:xfrm>
           <a:prstGeom prst="rect">
             <a:avLst/>
@@ -40408,7 +42158,7 @@
                 <a:ea typeface="맑은 고딕"/>
                 <a:cs typeface="맑은 고딕"/>
               </a:rPr>
-              <a:t>입력</a:t>
+              <a:t>에이전트 · 스킬</a:t>
             </a:r>
           </a:p>
         </p:txBody>
@@ -40421,8 +42171,8 @@
         </p:nvSpPr>
         <p:spPr>
           <a:xfrm>
-            <a:off x="3390823" y="2313241"/>
-            <a:ext cx="2567863" cy="3356229"/>
+            <a:off x="3390823" y="2247391"/>
+            <a:ext cx="2567863" cy="3487928"/>
           </a:xfrm>
           <a:prstGeom prst="roundRect">
             <a:avLst>
@@ -40454,7 +42204,7 @@
         </p:nvSpPr>
         <p:spPr>
           <a:xfrm>
-            <a:off x="3619423" y="2514409"/>
+            <a:off x="3619423" y="2448560"/>
             <a:ext cx="731520" cy="731520"/>
           </a:xfrm>
           <a:prstGeom prst="ellipse">
@@ -40491,7 +42241,7 @@
         </p:blipFill>
         <p:spPr>
           <a:xfrm>
-            <a:off x="3773043" y="2668028"/>
+            <a:off x="3773043" y="2602179"/>
             <a:ext cx="424281" cy="424281"/>
           </a:xfrm>
           <a:prstGeom prst="rect">
@@ -40507,8 +42257,8 @@
         </p:nvSpPr>
         <p:spPr>
           <a:xfrm>
-            <a:off x="3555415" y="3337369"/>
-            <a:ext cx="2238679" cy="1829181"/>
+            <a:off x="3555415" y="3271519"/>
+            <a:ext cx="2238679" cy="1960880"/>
           </a:xfrm>
           <a:prstGeom prst="rect">
             <a:avLst/>
@@ -40528,7 +42278,7 @@
               </a:spcAft>
             </a:pPr>
             <a:r>
-              <a:rPr sz="2150" b="1">
+              <a:rPr sz="2000" b="1">
                 <a:solidFill>
                   <a:srgbClr val="13294B"/>
                 </a:solidFill>
@@ -40540,7 +42290,7 @@
             </a:r>
           </a:p>
           <a:p>
-            <a:pPr algn="l" eaLnBrk="0" marL="200025" indent="-200025">
+            <a:pPr algn="l" eaLnBrk="0" marL="177165" indent="-177165">
               <a:lnSpc>
                 <a:spcPct val="110000"/>
               </a:lnSpc>
@@ -40549,7 +42299,7 @@
               </a:spcAft>
             </a:pPr>
             <a:r>
-              <a:rPr sz="1750" b="0">
+              <a:rPr sz="1550" b="0">
                 <a:solidFill>
                   <a:srgbClr val="1F2A3A"/>
                 </a:solidFill>
@@ -40557,11 +42307,11 @@
                 <a:ea typeface="맑은 고딕"/>
                 <a:cs typeface="맑은 고딕"/>
               </a:rPr>
-              <a:t>• 설비와 작업지시</a:t>
-            </a:r>
-          </a:p>
-          <a:p>
-            <a:pPr algn="l" eaLnBrk="0" marL="200025" indent="-200025">
+              <a:t>• 설비 · 정비 · ERP</a:t>
+            </a:r>
+          </a:p>
+          <a:p>
+            <a:pPr algn="l" eaLnBrk="0" marL="177165" indent="-177165">
               <a:lnSpc>
                 <a:spcPct val="110000"/>
               </a:lnSpc>
@@ -40570,7 +42320,7 @@
               </a:spcAft>
             </a:pPr>
             <a:r>
-              <a:rPr sz="1750" b="0">
+              <a:rPr sz="1550" b="0">
                 <a:solidFill>
                   <a:srgbClr val="1F2A3A"/>
                 </a:solidFill>
@@ -40578,7 +42328,7 @@
                 <a:ea typeface="맑은 고딕"/>
                 <a:cs typeface="맑은 고딕"/>
               </a:rPr>
-              <a:t>• 재고와 입고 예정</a:t>
+              <a:t>• 허용된 조회 도구</a:t>
             </a:r>
           </a:p>
         </p:txBody>
@@ -40591,7 +42341,7 @@
         </p:nvSpPr>
         <p:spPr>
           <a:xfrm>
-            <a:off x="3619423" y="5239702"/>
+            <a:off x="3619423" y="5305552"/>
             <a:ext cx="822960" cy="292608"/>
           </a:xfrm>
           <a:prstGeom prst="roundRect">
@@ -40622,7 +42372,7 @@
         </p:nvSpPr>
         <p:spPr>
           <a:xfrm>
-            <a:off x="3619423" y="5239702"/>
+            <a:off x="3619423" y="5305552"/>
             <a:ext cx="822960" cy="292608"/>
           </a:xfrm>
           <a:prstGeom prst="rect">
@@ -40661,8 +42411,8 @@
         </p:nvSpPr>
         <p:spPr>
           <a:xfrm>
-            <a:off x="6233007" y="2313241"/>
-            <a:ext cx="2567863" cy="3356229"/>
+            <a:off x="6233007" y="2247391"/>
+            <a:ext cx="2567863" cy="3487928"/>
           </a:xfrm>
           <a:prstGeom prst="roundRect">
             <a:avLst>
@@ -40694,7 +42444,7 @@
         </p:nvSpPr>
         <p:spPr>
           <a:xfrm>
-            <a:off x="6461607" y="2514409"/>
+            <a:off x="6461607" y="2448560"/>
             <a:ext cx="731520" cy="731520"/>
           </a:xfrm>
           <a:prstGeom prst="ellipse">
@@ -40731,7 +42481,7 @@
         </p:blipFill>
         <p:spPr>
           <a:xfrm>
-            <a:off x="6615226" y="2668028"/>
+            <a:off x="6615226" y="2602179"/>
             <a:ext cx="424281" cy="424281"/>
           </a:xfrm>
           <a:prstGeom prst="rect">
@@ -40747,8 +42497,8 @@
         </p:nvSpPr>
         <p:spPr>
           <a:xfrm>
-            <a:off x="6397599" y="3337369"/>
-            <a:ext cx="2238679" cy="1829181"/>
+            <a:off x="6397599" y="3271519"/>
+            <a:ext cx="2238679" cy="1960880"/>
           </a:xfrm>
           <a:prstGeom prst="rect">
             <a:avLst/>
@@ -40768,7 +42518,7 @@
               </a:spcAft>
             </a:pPr>
             <a:r>
-              <a:rPr sz="2150" b="1">
+              <a:rPr sz="2000" b="1">
                 <a:solidFill>
                   <a:srgbClr val="13294B"/>
                 </a:solidFill>
@@ -40780,7 +42530,7 @@
             </a:r>
           </a:p>
           <a:p>
-            <a:pPr algn="l" eaLnBrk="0" marL="200025" indent="-200025">
+            <a:pPr algn="l" eaLnBrk="0" marL="182880" indent="-182880">
               <a:lnSpc>
                 <a:spcPct val="110000"/>
               </a:lnSpc>
@@ -40789,7 +42539,7 @@
               </a:spcAft>
             </a:pPr>
             <a:r>
-              <a:rPr sz="1750" b="0">
+              <a:rPr sz="1600" b="0">
                 <a:solidFill>
                   <a:srgbClr val="1F2A3A"/>
                 </a:solidFill>
@@ -40801,7 +42551,7 @@
             </a:r>
           </a:p>
           <a:p>
-            <a:pPr algn="l" eaLnBrk="0" marL="200025" indent="-200025">
+            <a:pPr algn="l" eaLnBrk="0" marL="182880" indent="-182880">
               <a:lnSpc>
                 <a:spcPct val="110000"/>
               </a:lnSpc>
@@ -40810,7 +42560,7 @@
               </a:spcAft>
             </a:pPr>
             <a:r>
-              <a:rPr sz="1750" b="0">
+              <a:rPr sz="1600" b="0">
                 <a:solidFill>
                   <a:srgbClr val="1F2A3A"/>
                 </a:solidFill>
@@ -40831,7 +42581,7 @@
         </p:nvSpPr>
         <p:spPr>
           <a:xfrm>
-            <a:off x="6461607" y="5239702"/>
+            <a:off x="6461607" y="5305552"/>
             <a:ext cx="822960" cy="292608"/>
           </a:xfrm>
           <a:prstGeom prst="roundRect">
@@ -40862,7 +42612,7 @@
         </p:nvSpPr>
         <p:spPr>
           <a:xfrm>
-            <a:off x="6461607" y="5239702"/>
+            <a:off x="6461607" y="5305552"/>
             <a:ext cx="822960" cy="292608"/>
           </a:xfrm>
           <a:prstGeom prst="rect">
@@ -40901,8 +42651,8 @@
         </p:nvSpPr>
         <p:spPr>
           <a:xfrm>
-            <a:off x="9075191" y="2313241"/>
-            <a:ext cx="2567863" cy="3356229"/>
+            <a:off x="9075191" y="2247391"/>
+            <a:ext cx="2567863" cy="3487928"/>
           </a:xfrm>
           <a:prstGeom prst="roundRect">
             <a:avLst>
@@ -40934,7 +42684,7 @@
         </p:nvSpPr>
         <p:spPr>
           <a:xfrm>
-            <a:off x="9303791" y="2514409"/>
+            <a:off x="9303791" y="2448560"/>
             <a:ext cx="731520" cy="731520"/>
           </a:xfrm>
           <a:prstGeom prst="ellipse">
@@ -40971,7 +42721,7 @@
         </p:blipFill>
         <p:spPr>
           <a:xfrm>
-            <a:off x="9457410" y="2668028"/>
+            <a:off x="9457410" y="2602179"/>
             <a:ext cx="424281" cy="424281"/>
           </a:xfrm>
           <a:prstGeom prst="rect">
@@ -40987,8 +42737,8 @@
         </p:nvSpPr>
         <p:spPr>
           <a:xfrm>
-            <a:off x="9239783" y="3337369"/>
-            <a:ext cx="2238679" cy="1829181"/>
+            <a:off x="9239783" y="3271519"/>
+            <a:ext cx="2238679" cy="1960880"/>
           </a:xfrm>
           <a:prstGeom prst="rect">
             <a:avLst/>
@@ -41008,7 +42758,7 @@
               </a:spcAft>
             </a:pPr>
             <a:r>
-              <a:rPr sz="2150" b="1">
+              <a:rPr sz="2000" b="1">
                 <a:solidFill>
                   <a:srgbClr val="13294B"/>
                 </a:solidFill>
@@ -41020,7 +42770,7 @@
             </a:r>
           </a:p>
           <a:p>
-            <a:pPr algn="l" eaLnBrk="0" marL="200025" indent="-200025">
+            <a:pPr algn="l" eaLnBrk="0" marL="182880" indent="-182880">
               <a:lnSpc>
                 <a:spcPct val="110000"/>
               </a:lnSpc>
@@ -41029,7 +42779,7 @@
               </a:spcAft>
             </a:pPr>
             <a:r>
-              <a:rPr sz="1750" b="0">
+              <a:rPr sz="1600" b="0">
                 <a:solidFill>
                   <a:srgbClr val="1F2A3A"/>
                 </a:solidFill>
@@ -41037,11 +42787,11 @@
                 <a:ea typeface="맑은 고딕"/>
                 <a:cs typeface="맑은 고딕"/>
               </a:rPr>
-              <a:t>• 불일치 · 누락 · 조회 시점</a:t>
-            </a:r>
-          </a:p>
-          <a:p>
-            <a:pPr algn="l" eaLnBrk="0" marL="200025" indent="-200025">
+              <a:t>• 메모와 열린 작업지시의 차이</a:t>
+            </a:r>
+          </a:p>
+          <a:p>
+            <a:pPr algn="l" eaLnBrk="0" marL="182880" indent="-182880">
               <a:lnSpc>
                 <a:spcPct val="110000"/>
               </a:lnSpc>
@@ -41050,7 +42800,7 @@
               </a:spcAft>
             </a:pPr>
             <a:r>
-              <a:rPr sz="1750" b="0">
+              <a:rPr sz="1600" b="0">
                 <a:solidFill>
                   <a:srgbClr val="1F2A3A"/>
                 </a:solidFill>
@@ -41058,7 +42808,28 @@
                 <a:ea typeface="맑은 고딕"/>
                 <a:cs typeface="맑은 고딕"/>
               </a:rPr>
-              <a:t>• 다음 확인을 기록</a:t>
+              <a:t>• 입고 예정과 실제 재고의 차이</a:t>
+            </a:r>
+          </a:p>
+          <a:p>
+            <a:pPr algn="l" eaLnBrk="0" marL="182880" indent="-182880">
+              <a:lnSpc>
+                <a:spcPct val="110000"/>
+              </a:lnSpc>
+              <a:spcAft>
+                <a:spcPts val="400"/>
+              </a:spcAft>
+            </a:pPr>
+            <a:r>
+              <a:rPr sz="1600" b="0">
+                <a:solidFill>
+                  <a:srgbClr val="1F2A3A"/>
+                </a:solidFill>
+                <a:latin typeface="맑은 고딕"/>
+                <a:ea typeface="맑은 고딕"/>
+                <a:cs typeface="맑은 고딕"/>
+              </a:rPr>
+              <a:t>• 확인 사항으로 남김</a:t>
             </a:r>
           </a:p>
         </p:txBody>
@@ -41071,7 +42842,7 @@
         </p:nvSpPr>
         <p:spPr>
           <a:xfrm>
-            <a:off x="9303791" y="5239702"/>
+            <a:off x="9303791" y="5305552"/>
             <a:ext cx="1021080" cy="292608"/>
           </a:xfrm>
           <a:prstGeom prst="roundRect">
@@ -41102,7 +42873,7 @@
         </p:nvSpPr>
         <p:spPr>
           <a:xfrm>
-            <a:off x="9303791" y="5239702"/>
+            <a:off x="9303791" y="5305552"/>
             <a:ext cx="1021080" cy="292608"/>
           </a:xfrm>
           <a:prstGeom prst="rect">
@@ -41435,7 +43206,7 @@
                 <a:ea typeface="맑은 고딕"/>
                 <a:cs typeface="맑은 고딕"/>
               </a:rPr>
-              <a:t>제공 흐름을 연결해 같은 처리 건에서 검토·보완하고 인수를 확인한다.</a:t>
+              <a:t>제공 교대 흐름을 정리해 별도 판본으로 등록하고, 같은 처리 건에서 초안 · 검토 · 보완 · 인수 확인을 거친다.</a:t>
             </a:r>
           </a:p>
         </p:txBody>
@@ -41516,8 +43287,8 @@
         </p:nvSpPr>
         <p:spPr>
           <a:xfrm>
-            <a:off x="548640" y="2670619"/>
-            <a:ext cx="1911644" cy="2641473"/>
+            <a:off x="548640" y="2488565"/>
+            <a:ext cx="1529029" cy="3005582"/>
           </a:xfrm>
           <a:prstGeom prst="roundRect">
             <a:avLst>
@@ -41547,7 +43318,7 @@
         </p:nvSpPr>
         <p:spPr>
           <a:xfrm>
-            <a:off x="1138702" y="2853499"/>
+            <a:off x="947394" y="2671445"/>
             <a:ext cx="731520" cy="731520"/>
           </a:xfrm>
           <a:prstGeom prst="ellipse">
@@ -41570,7 +43341,7 @@
       </p:sp>
       <p:pic>
         <p:nvPicPr>
-          <p:cNvPr id="8" name="아이콘:player-play" descr="player-play_13294B_1.6.png"/>
+          <p:cNvPr id="8" name="아이콘:pencil" descr="pencil_13294B_1.6.png"/>
           <p:cNvPicPr>
             <a:picLocks noChangeAspect="1"/>
           </p:cNvPicPr>
@@ -41584,7 +43355,7 @@
         </p:blipFill>
         <p:spPr>
           <a:xfrm>
-            <a:off x="1292321" y="3007118"/>
+            <a:off x="1101013" y="2825064"/>
             <a:ext cx="424281" cy="424281"/>
           </a:xfrm>
           <a:prstGeom prst="rect">
@@ -41600,8 +43371,8 @@
         </p:nvSpPr>
         <p:spPr>
           <a:xfrm>
-            <a:off x="621792" y="3658171"/>
-            <a:ext cx="1765340" cy="1580768"/>
+            <a:off x="621792" y="3476117"/>
+            <a:ext cx="1382725" cy="1944877"/>
           </a:xfrm>
           <a:prstGeom prst="rect">
             <a:avLst/>
@@ -41621,7 +43392,7 @@
               </a:spcAft>
             </a:pPr>
             <a:r>
-              <a:rPr sz="1850" b="1">
+              <a:rPr sz="1700" b="1">
                 <a:solidFill>
                   <a:srgbClr val="13294B"/>
                 </a:solidFill>
@@ -41629,7 +43400,7 @@
                 <a:ea typeface="맑은 고딕"/>
                 <a:cs typeface="맑은 고딕"/>
               </a:rPr>
-              <a:t>시작</a:t>
+              <a:t>흐름 정리</a:t>
             </a:r>
           </a:p>
           <a:p>
@@ -41642,7 +43413,7 @@
               </a:spcAft>
             </a:pPr>
             <a:r>
-              <a:rPr sz="1550" b="0">
+              <a:rPr sz="1400" b="0">
                 <a:solidFill>
                   <a:srgbClr val="1F2A3A"/>
                 </a:solidFill>
@@ -41650,7 +43421,7 @@
                 <a:ea typeface="맑은 고딕"/>
                 <a:cs typeface="맑은 고딕"/>
               </a:rPr>
-              <a:t>설비 · 교대</a:t>
+              <a:t>bpmn.io에서</a:t>
             </a:r>
           </a:p>
           <a:p>
@@ -41663,7 +43434,7 @@
               </a:spcAft>
             </a:pPr>
             <a:r>
-              <a:rPr sz="1550" b="0">
+              <a:rPr sz="1400" b="0">
                 <a:solidFill>
                   <a:srgbClr val="1F2A3A"/>
                 </a:solidFill>
@@ -41671,7 +43442,28 @@
                 <a:ea typeface="맑은 고딕"/>
                 <a:cs typeface="맑은 고딕"/>
               </a:rPr>
-              <a:t>시각 · 메모</a:t>
+              <a:t>이름 · 배치 정리</a:t>
+            </a:r>
+          </a:p>
+          <a:p>
+            <a:pPr algn="ctr" eaLnBrk="0">
+              <a:lnSpc>
+                <a:spcPct val="110000"/>
+              </a:lnSpc>
+              <a:spcAft>
+                <a:spcPts val="400"/>
+              </a:spcAft>
+            </a:pPr>
+            <a:r>
+              <a:rPr sz="1400" b="0">
+                <a:solidFill>
+                  <a:srgbClr val="1F2A3A"/>
+                </a:solidFill>
+                <a:latin typeface="맑은 고딕"/>
+                <a:ea typeface="맑은 고딕"/>
+                <a:cs typeface="맑은 고딕"/>
+              </a:rPr>
+              <a:t>분기는 유지</a:t>
             </a:r>
           </a:p>
         </p:txBody>
@@ -41684,7 +43476,7 @@
         </p:nvSpPr>
         <p:spPr>
           <a:xfrm>
-            <a:off x="2524292" y="3854196"/>
+            <a:off x="2141677" y="3854196"/>
             <a:ext cx="256031" cy="274320"/>
           </a:xfrm>
           <a:prstGeom prst="rightArrow">
@@ -41713,8 +43505,8 @@
         </p:nvSpPr>
         <p:spPr>
           <a:xfrm>
-            <a:off x="2844332" y="2670619"/>
-            <a:ext cx="1911644" cy="2641473"/>
+            <a:off x="2461717" y="2488565"/>
+            <a:ext cx="1529029" cy="3005582"/>
           </a:xfrm>
           <a:prstGeom prst="roundRect">
             <a:avLst>
@@ -41744,7 +43536,7 @@
         </p:nvSpPr>
         <p:spPr>
           <a:xfrm>
-            <a:off x="3434394" y="2853499"/>
+            <a:off x="2860471" y="2671445"/>
             <a:ext cx="731520" cy="731520"/>
           </a:xfrm>
           <a:prstGeom prst="ellipse">
@@ -41767,7 +43559,7 @@
       </p:sp>
       <p:pic>
         <p:nvPicPr>
-          <p:cNvPr id="13" name="아이콘:robot" descr="robot_13294B_1.6.png"/>
+          <p:cNvPr id="13" name="아이콘:versions" descr="versions_13294B_1.6.png"/>
           <p:cNvPicPr>
             <a:picLocks noChangeAspect="1"/>
           </p:cNvPicPr>
@@ -41781,7 +43573,7 @@
         </p:blipFill>
         <p:spPr>
           <a:xfrm>
-            <a:off x="3588014" y="3007118"/>
+            <a:off x="3014091" y="2825064"/>
             <a:ext cx="424281" cy="424281"/>
           </a:xfrm>
           <a:prstGeom prst="rect">
@@ -41797,8 +43589,8 @@
         </p:nvSpPr>
         <p:spPr>
           <a:xfrm>
-            <a:off x="2917484" y="3658171"/>
-            <a:ext cx="1765340" cy="1580768"/>
+            <a:off x="2534869" y="3476117"/>
+            <a:ext cx="1382725" cy="1944877"/>
           </a:xfrm>
           <a:prstGeom prst="rect">
             <a:avLst/>
@@ -41818,7 +43610,7 @@
               </a:spcAft>
             </a:pPr>
             <a:r>
-              <a:rPr sz="1850" b="1">
+              <a:rPr sz="1700" b="1">
                 <a:solidFill>
                   <a:srgbClr val="13294B"/>
                 </a:solidFill>
@@ -41826,7 +43618,7 @@
                 <a:ea typeface="맑은 고딕"/>
                 <a:cs typeface="맑은 고딕"/>
               </a:rPr>
-              <a:t>인계안</a:t>
+              <a:t>등록</a:t>
             </a:r>
           </a:p>
           <a:p>
@@ -41839,7 +43631,7 @@
               </a:spcAft>
             </a:pPr>
             <a:r>
-              <a:rPr sz="1550" b="0">
+              <a:rPr sz="1400" b="0">
                 <a:solidFill>
                   <a:srgbClr val="1F2A3A"/>
                 </a:solidFill>
@@ -41847,7 +43639,7 @@
                 <a:ea typeface="맑은 고딕"/>
                 <a:cs typeface="맑은 고딕"/>
               </a:rPr>
-              <a:t>에이전트가</a:t>
+              <a:t>세 초안 단계에</a:t>
             </a:r>
           </a:p>
           <a:p>
@@ -41860,7 +43652,7 @@
               </a:spcAft>
             </a:pPr>
             <a:r>
-              <a:rPr sz="1550" b="0">
+              <a:rPr sz="1400" b="0">
                 <a:solidFill>
                   <a:srgbClr val="1F2A3A"/>
                 </a:solidFill>
@@ -41868,7 +43660,28 @@
                 <a:ea typeface="맑은 고딕"/>
                 <a:cs typeface="맑은 고딕"/>
               </a:rPr>
-              <a:t>근거를 조회</a:t>
+              <a:t>교대 에이전트 배정</a:t>
+            </a:r>
+          </a:p>
+          <a:p>
+            <a:pPr algn="ctr" eaLnBrk="0">
+              <a:lnSpc>
+                <a:spcPct val="110000"/>
+              </a:lnSpc>
+              <a:spcAft>
+                <a:spcPts val="400"/>
+              </a:spcAft>
+            </a:pPr>
+            <a:r>
+              <a:rPr sz="1400" b="0">
+                <a:solidFill>
+                  <a:srgbClr val="1F2A3A"/>
+                </a:solidFill>
+                <a:latin typeface="맑은 고딕"/>
+                <a:ea typeface="맑은 고딕"/>
+                <a:cs typeface="맑은 고딕"/>
+              </a:rPr>
+              <a:t>별도 판본 등록</a:t>
             </a:r>
           </a:p>
         </p:txBody>
@@ -41881,7 +43694,7 @@
         </p:nvSpPr>
         <p:spPr>
           <a:xfrm>
-            <a:off x="4819985" y="3854196"/>
+            <a:off x="4054754" y="3854196"/>
             <a:ext cx="256031" cy="274320"/>
           </a:xfrm>
           <a:prstGeom prst="rightArrow">
@@ -41910,8 +43723,8 @@
         </p:nvSpPr>
         <p:spPr>
           <a:xfrm>
-            <a:off x="5140025" y="2670619"/>
-            <a:ext cx="1911644" cy="2641473"/>
+            <a:off x="4374794" y="2488565"/>
+            <a:ext cx="1529029" cy="3005582"/>
           </a:xfrm>
           <a:prstGeom prst="roundRect">
             <a:avLst>
@@ -41941,7 +43754,7 @@
         </p:nvSpPr>
         <p:spPr>
           <a:xfrm>
-            <a:off x="5730087" y="2853499"/>
+            <a:off x="4773549" y="2671445"/>
             <a:ext cx="731520" cy="731520"/>
           </a:xfrm>
           <a:prstGeom prst="ellipse">
@@ -41964,7 +43777,7 @@
       </p:sp>
       <p:pic>
         <p:nvPicPr>
-          <p:cNvPr id="18" name="아이콘:user-check" descr="user-check_13294B_1.6.png"/>
+          <p:cNvPr id="18" name="아이콘:robot" descr="robot_13294B_1.6.png"/>
           <p:cNvPicPr>
             <a:picLocks noChangeAspect="1"/>
           </p:cNvPicPr>
@@ -41978,7 +43791,7 @@
         </p:blipFill>
         <p:spPr>
           <a:xfrm>
-            <a:off x="5883706" y="3007118"/>
+            <a:off x="4927168" y="2825064"/>
             <a:ext cx="424281" cy="424281"/>
           </a:xfrm>
           <a:prstGeom prst="rect">
@@ -41994,8 +43807,8 @@
         </p:nvSpPr>
         <p:spPr>
           <a:xfrm>
-            <a:off x="5213177" y="3658171"/>
-            <a:ext cx="1765340" cy="1580768"/>
+            <a:off x="4447946" y="3476117"/>
+            <a:ext cx="1382725" cy="1944877"/>
           </a:xfrm>
           <a:prstGeom prst="rect">
             <a:avLst/>
@@ -42015,7 +43828,7 @@
               </a:spcAft>
             </a:pPr>
             <a:r>
-              <a:rPr sz="1850" b="1">
+              <a:rPr sz="1700" b="1">
                 <a:solidFill>
                   <a:srgbClr val="13294B"/>
                 </a:solidFill>
@@ -42023,7 +43836,7 @@
                 <a:ea typeface="맑은 고딕"/>
                 <a:cs typeface="맑은 고딕"/>
               </a:rPr>
-              <a:t>인계자</a:t>
+              <a:t>인계안</a:t>
             </a:r>
           </a:p>
           <a:p>
@@ -42036,7 +43849,7 @@
               </a:spcAft>
             </a:pPr>
             <a:r>
-              <a:rPr sz="1550" b="0">
+              <a:rPr sz="1400" b="0">
                 <a:solidFill>
                   <a:srgbClr val="1F2A3A"/>
                 </a:solidFill>
@@ -42044,7 +43857,7 @@
                 <a:ea typeface="맑은 고딕"/>
                 <a:cs typeface="맑은 고딕"/>
               </a:rPr>
-              <a:t>초안과</a:t>
+              <a:t>설비 · 교대</a:t>
             </a:r>
           </a:p>
           <a:p>
@@ -42057,7 +43870,7 @@
               </a:spcAft>
             </a:pPr>
             <a:r>
-              <a:rPr sz="1550" b="0">
+              <a:rPr sz="1400" b="0">
                 <a:solidFill>
                   <a:srgbClr val="1F2A3A"/>
                 </a:solidFill>
@@ -42065,7 +43878,7 @@
                 <a:ea typeface="맑은 고딕"/>
                 <a:cs typeface="맑은 고딕"/>
               </a:rPr>
-              <a:t>불일치 검토</a:t>
+              <a:t>정보로 초안</a:t>
             </a:r>
           </a:p>
         </p:txBody>
@@ -42078,7 +43891,7 @@
         </p:nvSpPr>
         <p:spPr>
           <a:xfrm>
-            <a:off x="7115677" y="3854196"/>
+            <a:off x="5967831" y="3854196"/>
             <a:ext cx="256031" cy="274320"/>
           </a:xfrm>
           <a:prstGeom prst="rightArrow">
@@ -42107,8 +43920,8 @@
         </p:nvSpPr>
         <p:spPr>
           <a:xfrm>
-            <a:off x="7435717" y="2670619"/>
-            <a:ext cx="1911644" cy="2641473"/>
+            <a:off x="6287871" y="2488565"/>
+            <a:ext cx="1529029" cy="3005582"/>
           </a:xfrm>
           <a:prstGeom prst="roundRect">
             <a:avLst>
@@ -42138,7 +43951,7 @@
         </p:nvSpPr>
         <p:spPr>
           <a:xfrm>
-            <a:off x="8025780" y="2853499"/>
+            <a:off x="6686626" y="2671445"/>
             <a:ext cx="731520" cy="731520"/>
           </a:xfrm>
           <a:prstGeom prst="ellipse">
@@ -42161,7 +43974,7 @@
       </p:sp>
       <p:pic>
         <p:nvPicPr>
-          <p:cNvPr id="23" name="아이콘:file-check" descr="file-check_13294B_1.6.png"/>
+          <p:cNvPr id="23" name="아이콘:user-check" descr="user-check_13294B_1.6.png"/>
           <p:cNvPicPr>
             <a:picLocks noChangeAspect="1"/>
           </p:cNvPicPr>
@@ -42175,7 +43988,7 @@
         </p:blipFill>
         <p:spPr>
           <a:xfrm>
-            <a:off x="8179399" y="3007118"/>
+            <a:off x="6840245" y="2825064"/>
             <a:ext cx="424281" cy="424281"/>
           </a:xfrm>
           <a:prstGeom prst="rect">
@@ -42191,8 +44004,8 @@
         </p:nvSpPr>
         <p:spPr>
           <a:xfrm>
-            <a:off x="7508869" y="3658171"/>
-            <a:ext cx="1765340" cy="1580768"/>
+            <a:off x="6361023" y="3476117"/>
+            <a:ext cx="1382725" cy="1944877"/>
           </a:xfrm>
           <a:prstGeom prst="rect">
             <a:avLst/>
@@ -42212,7 +44025,7 @@
               </a:spcAft>
             </a:pPr>
             <a:r>
-              <a:rPr sz="1850" b="1">
+              <a:rPr sz="1700" b="1">
                 <a:solidFill>
                   <a:srgbClr val="13294B"/>
                 </a:solidFill>
@@ -42220,7 +44033,7 @@
                 <a:ea typeface="맑은 고딕"/>
                 <a:cs typeface="맑은 고딕"/>
               </a:rPr>
-              <a:t>인수자</a:t>
+              <a:t>인계자</a:t>
             </a:r>
           </a:p>
           <a:p>
@@ -42233,7 +44046,7 @@
               </a:spcAft>
             </a:pPr>
             <a:r>
-              <a:rPr sz="1550" b="0">
+              <a:rPr sz="1400" b="0">
                 <a:solidFill>
                   <a:srgbClr val="1F2A3A"/>
                 </a:solidFill>
@@ -42241,7 +44054,7 @@
                 <a:ea typeface="맑은 고딕"/>
                 <a:cs typeface="맑은 고딕"/>
               </a:rPr>
-              <a:t>확인 또는</a:t>
+              <a:t>근거와</a:t>
             </a:r>
           </a:p>
           <a:p>
@@ -42254,7 +44067,7 @@
               </a:spcAft>
             </a:pPr>
             <a:r>
-              <a:rPr sz="1550" b="0">
+              <a:rPr sz="1400" b="0">
                 <a:solidFill>
                   <a:srgbClr val="1F2A3A"/>
                 </a:solidFill>
@@ -42262,7 +44075,7 @@
                 <a:ea typeface="맑은 고딕"/>
                 <a:cs typeface="맑은 고딕"/>
               </a:rPr>
-              <a:t>보완 요청</a:t>
+              <a:t>불일치 검토</a:t>
             </a:r>
           </a:p>
         </p:txBody>
@@ -42275,7 +44088,7 @@
         </p:nvSpPr>
         <p:spPr>
           <a:xfrm>
-            <a:off x="9411370" y="3854196"/>
+            <a:off x="7880908" y="3854196"/>
             <a:ext cx="256031" cy="274320"/>
           </a:xfrm>
           <a:prstGeom prst="rightArrow">
@@ -42304,8 +44117,226 @@
         </p:nvSpPr>
         <p:spPr>
           <a:xfrm>
-            <a:off x="9731410" y="2670619"/>
-            <a:ext cx="1911644" cy="2641473"/>
+            <a:off x="8200948" y="2488565"/>
+            <a:ext cx="1529029" cy="3005582"/>
+          </a:xfrm>
+          <a:prstGeom prst="roundRect">
+            <a:avLst>
+              <a:gd name="adj" fmla="val 5000"/>
+            </a:avLst>
+          </a:prstGeom>
+          <a:solidFill>
+            <a:srgbClr val="F3F6F9"/>
+          </a:solidFill>
+          <a:ln>
+            <a:noFill/>
+          </a:ln>
+        </p:spPr>
+        <p:txBody>
+          <a:bodyPr rtlCol="0" anchor="ctr"/>
+          <a:lstStyle/>
+          <a:p>
+            <a:pPr algn="ctr"/>
+          </a:p>
+        </p:txBody>
+      </p:sp>
+      <p:sp>
+        <p:nvSpPr>
+          <p:cNvPr id="27" name="Oval 26"/>
+          <p:cNvSpPr/>
+          <p:nvPr/>
+        </p:nvSpPr>
+        <p:spPr>
+          <a:xfrm>
+            <a:off x="8599703" y="2671445"/>
+            <a:ext cx="731520" cy="731520"/>
+          </a:xfrm>
+          <a:prstGeom prst="ellipse">
+            <a:avLst/>
+          </a:prstGeom>
+          <a:solidFill>
+            <a:srgbClr val="FFFFFF"/>
+          </a:solidFill>
+          <a:ln>
+            <a:noFill/>
+          </a:ln>
+        </p:spPr>
+        <p:txBody>
+          <a:bodyPr rtlCol="0" anchor="ctr"/>
+          <a:lstStyle/>
+          <a:p>
+            <a:pPr algn="ctr"/>
+          </a:p>
+        </p:txBody>
+      </p:sp>
+      <p:pic>
+        <p:nvPicPr>
+          <p:cNvPr id="28" name="아이콘:users" descr="users_13294B_1.6.png"/>
+          <p:cNvPicPr>
+            <a:picLocks noChangeAspect="1"/>
+          </p:cNvPicPr>
+          <p:nvPr/>
+        </p:nvPicPr>
+        <p:blipFill>
+          <a:blip r:embed="rId7"/>
+          <a:stretch>
+            <a:fillRect/>
+          </a:stretch>
+        </p:blipFill>
+        <p:spPr>
+          <a:xfrm>
+            <a:off x="8753322" y="2825064"/>
+            <a:ext cx="424281" cy="424281"/>
+          </a:xfrm>
+          <a:prstGeom prst="rect">
+            <a:avLst/>
+          </a:prstGeom>
+        </p:spPr>
+      </p:pic>
+      <p:sp>
+        <p:nvSpPr>
+          <p:cNvPr id="29" name="TextBox 28"/>
+          <p:cNvSpPr txBox="1"/>
+          <p:nvPr/>
+        </p:nvSpPr>
+        <p:spPr>
+          <a:xfrm>
+            <a:off x="8274100" y="3476117"/>
+            <a:ext cx="1382725" cy="1944877"/>
+          </a:xfrm>
+          <a:prstGeom prst="rect">
+            <a:avLst/>
+          </a:prstGeom>
+          <a:noFill/>
+        </p:spPr>
+        <p:txBody>
+          <a:bodyPr wrap="square" anchor="t"/>
+          <a:lstStyle/>
+          <a:p>
+            <a:pPr algn="ctr" eaLnBrk="0">
+              <a:lnSpc>
+                <a:spcPct val="110000"/>
+              </a:lnSpc>
+              <a:spcAft>
+                <a:spcPts val="400"/>
+              </a:spcAft>
+            </a:pPr>
+            <a:r>
+              <a:rPr sz="1700" b="1">
+                <a:solidFill>
+                  <a:srgbClr val="13294B"/>
+                </a:solidFill>
+                <a:latin typeface="맑은 고딕"/>
+                <a:ea typeface="맑은 고딕"/>
+                <a:cs typeface="맑은 고딕"/>
+              </a:rPr>
+              <a:t>인수자</a:t>
+            </a:r>
+          </a:p>
+          <a:p>
+            <a:pPr algn="ctr" eaLnBrk="0">
+              <a:lnSpc>
+                <a:spcPct val="110000"/>
+              </a:lnSpc>
+              <a:spcAft>
+                <a:spcPts val="400"/>
+              </a:spcAft>
+            </a:pPr>
+            <a:r>
+              <a:rPr sz="1400" b="0">
+                <a:solidFill>
+                  <a:srgbClr val="1F2A3A"/>
+                </a:solidFill>
+                <a:latin typeface="맑은 고딕"/>
+                <a:ea typeface="맑은 고딕"/>
+                <a:cs typeface="맑은 고딕"/>
+              </a:rPr>
+              <a:t>보완 요청</a:t>
+            </a:r>
+          </a:p>
+          <a:p>
+            <a:pPr algn="ctr" eaLnBrk="0">
+              <a:lnSpc>
+                <a:spcPct val="110000"/>
+              </a:lnSpc>
+              <a:spcAft>
+                <a:spcPts val="400"/>
+              </a:spcAft>
+            </a:pPr>
+            <a:r>
+              <a:rPr sz="1400" b="0">
+                <a:solidFill>
+                  <a:srgbClr val="1F2A3A"/>
+                </a:solidFill>
+                <a:latin typeface="맑은 고딕"/>
+                <a:ea typeface="맑은 고딕"/>
+                <a:cs typeface="맑은 고딕"/>
+              </a:rPr>
+              <a:t>→ 재검토</a:t>
+            </a:r>
+          </a:p>
+          <a:p>
+            <a:pPr algn="ctr" eaLnBrk="0">
+              <a:lnSpc>
+                <a:spcPct val="110000"/>
+              </a:lnSpc>
+              <a:spcAft>
+                <a:spcPts val="400"/>
+              </a:spcAft>
+            </a:pPr>
+            <a:r>
+              <a:rPr sz="1400" b="0">
+                <a:solidFill>
+                  <a:srgbClr val="1F2A3A"/>
+                </a:solidFill>
+                <a:latin typeface="맑은 고딕"/>
+                <a:ea typeface="맑은 고딕"/>
+                <a:cs typeface="맑은 고딕"/>
+              </a:rPr>
+              <a:t>→ 확인</a:t>
+            </a:r>
+          </a:p>
+        </p:txBody>
+      </p:sp>
+      <p:sp>
+        <p:nvSpPr>
+          <p:cNvPr id="30" name="Right Arrow 29"/>
+          <p:cNvSpPr/>
+          <p:nvPr/>
+        </p:nvSpPr>
+        <p:spPr>
+          <a:xfrm>
+            <a:off x="9793986" y="3854196"/>
+            <a:ext cx="256031" cy="274320"/>
+          </a:xfrm>
+          <a:prstGeom prst="rightArrow">
+            <a:avLst/>
+          </a:prstGeom>
+          <a:solidFill>
+            <a:srgbClr val="13294B"/>
+          </a:solidFill>
+          <a:ln>
+            <a:noFill/>
+          </a:ln>
+        </p:spPr>
+        <p:txBody>
+          <a:bodyPr rtlCol="0" anchor="ctr"/>
+          <a:lstStyle/>
+          <a:p>
+            <a:pPr algn="ctr"/>
+          </a:p>
+        </p:txBody>
+      </p:sp>
+      <p:sp>
+        <p:nvSpPr>
+          <p:cNvPr id="31" name="Rounded Rectangle 30"/>
+          <p:cNvSpPr/>
+          <p:nvPr/>
+        </p:nvSpPr>
+        <p:spPr>
+          <a:xfrm>
+            <a:off x="10114026" y="2488565"/>
+            <a:ext cx="1529029" cy="3005582"/>
           </a:xfrm>
           <a:prstGeom prst="roundRect">
             <a:avLst>
@@ -42331,13 +44362,13 @@
       </p:sp>
       <p:sp>
         <p:nvSpPr>
-          <p:cNvPr id="27" name="Oval 26"/>
+          <p:cNvPr id="32" name="Oval 31"/>
           <p:cNvSpPr/>
           <p:nvPr/>
         </p:nvSpPr>
         <p:spPr>
           <a:xfrm>
-            <a:off x="10321472" y="2853499"/>
+            <a:off x="10512780" y="2671445"/>
             <a:ext cx="731520" cy="731520"/>
           </a:xfrm>
           <a:prstGeom prst="ellipse">
@@ -42360,21 +44391,21 @@
       </p:sp>
       <p:pic>
         <p:nvPicPr>
-          <p:cNvPr id="28" name="아이콘:flag" descr="flag_13294B_1.6.png"/>
+          <p:cNvPr id="33" name="아이콘:flag" descr="flag_13294B_1.6.png"/>
           <p:cNvPicPr>
             <a:picLocks noChangeAspect="1"/>
           </p:cNvPicPr>
           <p:nvPr/>
         </p:nvPicPr>
         <p:blipFill>
-          <a:blip r:embed="rId7"/>
+          <a:blip r:embed="rId8"/>
           <a:stretch>
             <a:fillRect/>
           </a:stretch>
         </p:blipFill>
         <p:spPr>
           <a:xfrm>
-            <a:off x="10475092" y="3007118"/>
+            <a:off x="10666399" y="2825064"/>
             <a:ext cx="424281" cy="424281"/>
           </a:xfrm>
           <a:prstGeom prst="rect">
@@ -42384,14 +44415,14 @@
       </p:pic>
       <p:sp>
         <p:nvSpPr>
-          <p:cNvPr id="29" name="TextBox 28"/>
-          <p:cNvSpPr txBox="1"/>
-          <p:nvPr/>
-        </p:nvSpPr>
-        <p:spPr>
-          <a:xfrm>
-            <a:off x="9804562" y="3658171"/>
-            <a:ext cx="1765340" cy="1580768"/>
+          <p:cNvPr id="34" name="TextBox 33"/>
+          <p:cNvSpPr txBox="1"/>
+          <p:nvPr/>
+        </p:nvSpPr>
+        <p:spPr>
+          <a:xfrm>
+            <a:off x="10187178" y="3476117"/>
+            <a:ext cx="1382725" cy="1944877"/>
           </a:xfrm>
           <a:prstGeom prst="rect">
             <a:avLst/>
@@ -42411,7 +44442,7 @@
               </a:spcAft>
             </a:pPr>
             <a:r>
-              <a:rPr sz="1850" b="1">
+              <a:rPr sz="1700" b="1">
                 <a:solidFill>
                   <a:srgbClr val="13294B"/>
                 </a:solidFill>
@@ -42432,7 +44463,7 @@
               </a:spcAft>
             </a:pPr>
             <a:r>
-              <a:rPr sz="1550" b="0">
+              <a:rPr sz="1400" b="0">
                 <a:solidFill>
                   <a:srgbClr val="1F2A3A"/>
                 </a:solidFill>
@@ -42440,7 +44471,7 @@
                 <a:ea typeface="맑은 고딕"/>
                 <a:cs typeface="맑은 고딕"/>
               </a:rPr>
-              <a:t>인계 확인과</a:t>
+              <a:t>근거와</a:t>
             </a:r>
           </a:p>
           <a:p>
@@ -42453,7 +44484,7 @@
               </a:spcAft>
             </a:pPr>
             <a:r>
-              <a:rPr sz="1550" b="0">
+              <a:rPr sz="1400" b="0">
                 <a:solidFill>
                   <a:srgbClr val="1F2A3A"/>
                 </a:solidFill>
@@ -42461,7 +44492,7 @@
                 <a:ea typeface="맑은 고딕"/>
                 <a:cs typeface="맑은 고딕"/>
               </a:rPr>
-              <a:t>남은 일 기록</a:t>
+              <a:t>완료 기록 확인</a:t>
             </a:r>
           </a:p>
         </p:txBody>
@@ -42843,7 +44874,7 @@
       </p:sp>
       <p:pic>
         <p:nvPicPr>
-          <p:cNvPr id="6" name="삽화:사건선_전체.svg" descr="illust_362663970001902619_1793003853.png"/>
+          <p:cNvPr id="6" name="삽화:사건선_전체.svg" descr="illust_7660807224202100658_1793113376.png"/>
           <p:cNvPicPr>
             <a:picLocks noChangeAspect="1"/>
           </p:cNvPicPr>
@@ -43447,7 +45478,7 @@
                 <a:ea typeface="맑은 고딕"/>
                 <a:cs typeface="맑은 고딕"/>
               </a:rPr>
-              <a:t>여러 수행자의 일을 조율하는 제품 사례에서 생성된 설계와 실제 실행 결과를 검토한다.</a:t>
+              <a:t>ProcessGPT는 BPMN으로 여러 수행자의 일을 조율하지만, 말로 생성한 설계가 완료 조건까지 맞추지는 않는다.</a:t>
             </a:r>
           </a:p>
         </p:txBody>
@@ -44086,7 +46117,7 @@
                 <a:ea typeface="맑은 고딕"/>
                 <a:cs typeface="맑은 고딕"/>
               </a:rPr>
-              <a:t>HYD 제작 때 참고한 구조와 역할을 대응시키되 현재 제품의 상태와 완료 의미를 확인한다.</a:t>
+              <a:t>처리 건은 인스턴스, 단계는 워크아이템으로 대응하지만, 비슷한 상태 이름도 완료의 뜻은 제품의 정의와 기록이 정한다.</a:t>
             </a:r>
           </a:p>
         </p:txBody>
@@ -45294,7 +47325,7 @@
                 <a:ea typeface="맑은 고딕"/>
                 <a:cs typeface="맑은 고딕"/>
               </a:rPr>
-              <a:t>쿨러 사례를 작업 전달 구조에 대어 보며 엔진이 수행자의 결과를 받아 다음 차례를 여는 원리를 확인한다.</a:t>
+              <a:t>수행자는 자기 워크아이템의 결과만 제출하고, 그 결과를 받아 다음 워크아이템을 여는 것은 실행 엔진이다.</a:t>
             </a:r>
           </a:p>
         </p:txBody>
@@ -45369,7 +47400,7 @@
       </p:sp>
       <p:pic>
         <p:nvPicPr>
-          <p:cNvPr id="6" name="삽화:작업목록.svg" descr="illust_4144048635385471968_1793003853.png"/>
+          <p:cNvPr id="6" name="삽화:작업목록.svg" descr="illust_1913649580707469446_1793113376.png"/>
           <p:cNvPicPr>
             <a:picLocks noChangeAspect="1"/>
           </p:cNvPicPr>
@@ -46099,7 +48130,7 @@
                 <a:ea typeface="맑은 고딕"/>
                 <a:cs typeface="맑은 고딕"/>
               </a:rPr>
-              <a:t>HYD의 구현 범위와 제품의 실제 지원 범위를 구별하고, 역할 · 계약 · 권한을 확인한다.</a:t>
+              <a:t>HYD는 제품의 구조를 참고해 교육용으로 구현했으므로, 제품의 실제 지원 범위와 신원 · 권한의 연결은 따로 확인한다.</a:t>
             </a:r>
           </a:p>
         </p:txBody>
@@ -52902,7 +54933,7 @@
       </p:sp>
       <p:pic>
         <p:nvPicPr>
-          <p:cNvPr id="6" name="삽화:사건선_영역.svg" descr="illust_5259675158869045562_1793003853.png"/>
+          <p:cNvPr id="6" name="삽화:사건선_영역.svg" descr="illust_6338659748404160508_1793113376.png"/>
           <p:cNvPicPr>
             <a:picLocks noChangeAspect="1"/>
           </p:cNvPicPr>
@@ -57373,7 +59404,7 @@
                 <a:ea typeface="맑은 고딕"/>
                 <a:cs typeface="맑은 고딕"/>
               </a:rPr>
-              <a:t>스킬의 안내 순서와 실제 호출 기록을 구별하고, 각 도구가 어떤 지식과 값을 읽는지 확인한다.</a:t>
+              <a:t>에이전트는 스킬이 안내한 도구로 미리 등록된 지식과 판단 시점의 값을 읽으며, 실제 호출 순서는 기록으로 확인한다.</a:t>
             </a:r>
           </a:p>
         </p:txBody>
@@ -57448,7 +59479,7 @@
       </p:sp>
       <p:pic>
         <p:nvPicPr>
-          <p:cNvPr id="6" name="삽화:스킬도구.svg" descr="illust_460370959206957816_1793003853.png"/>
+          <p:cNvPr id="6" name="삽화:스킬도구.svg" descr="illust_4190129316220028997_1793113376.png"/>
           <p:cNvPicPr>
             <a:picLocks noChangeAspect="1"/>
           </p:cNvPicPr>

--- a/산출물/통합반/이론/11회차/통합반_11일차.pptx
+++ b/산출물/통합반/이론/11회차/통합반_11일차.pptx
@@ -3025,12 +3025,7 @@
           </a:p>
           <a:p>
             <a:r>
-              <a:t>· 쿨러 사건에서: 판단의 품질 = 근거가 지지하는 원인, 근거 · 배제 후보 · 출처를 남긴 추천안</a:t>
-            </a:r>
-          </a:p>
-          <a:p>
-            <a:r>
-              <a:t>순서와 책임 = 승인 전에는 팬 명령이 나가지 않았고 누가 승인했는지 기록</a:t>
+              <a:t>· 쿨러 사건에서: 판단의 품질 = 근거가 지지하는 원인, 근거 · 배제 후보 · 출처를 남긴 추천안/순서와 책임 = 승인 전에는 팬 명령이 나가지 않았고 누가 승인했는지 기록</a:t>
             </a:r>
           </a:p>
           <a:p>

--- a/산출물/통합반/이론/11회차/통합반_11일차.pptx
+++ b/산출물/통합반/이론/11회차/통합반_11일차.pptx
@@ -2635,7 +2635,7 @@
           </a:p>
           <a:p>
             <a:r>
-              <a:t>· 거절: 시스템 실행 0건, E_rejected · 결과 보고 반려. 가지 않은 단계(냉각 명령 · 재관측 · 작업지시)는 취소 상태, 거절 사유도 남는다</a:t>
+              <a:t>· 거절: 시스템 실행 0건, E_rejected · 결과 보고 거절(기록의 값은 반려). 가지 않은 단계(냉각 명령 · 재관측 · 작업지시)는 취소 상태, 거절 사유도 남는다</a:t>
             </a:r>
           </a:p>
           <a:p>
@@ -5560,7 +5560,7 @@
           </a:p>
           <a:p>
             <a:r>
-              <a:t>· 오프라인 기본은 Notion 없이 준비한 Markdown 학습 노트로 정리. 현장에서 Notion 연결과 쓰기 권한이 확인되면 연동을 선택해 시연</a:t>
+              <a:t>· 기록할 곳은 첫날 준비한 Notion 학습노트. 수업 계정에서 Notion 연결과 쓰기 권한이 확인되면 MCP 연동을 시연하고, 미연결 환경에서는 준비한 Markdown을 Notion에 직접 정리(실라버스 117행)</a:t>
             </a:r>
           </a:p>
           <a:p>
@@ -22357,7 +22357,7 @@
       </p:sp>
       <p:pic>
         <p:nvPicPr>
-          <p:cNvPr id="6" name="삽화:사건선_지식에서판단.svg" descr="illust_3081650700689031771_1793113376.png"/>
+          <p:cNvPr id="6" name="삽화:사건선_지식에서판단.svg" descr="illust_4392656776916944768_1793113376.png"/>
           <p:cNvPicPr>
             <a:picLocks noChangeAspect="1"/>
           </p:cNvPicPr>
@@ -26604,7 +26604,7 @@
       </p:sp>
       <p:pic>
         <p:nvPicPr>
-          <p:cNvPr id="6" name="삽화:시스템실행.svg" descr="illust_2207583074224619253_1793113376.png"/>
+          <p:cNvPr id="6" name="삽화:시스템실행.svg" descr="illust_925807459599113599_1793113376.png"/>
           <p:cNvPicPr>
             <a:picLocks noChangeAspect="1"/>
           </p:cNvPicPr>
@@ -27669,7 +27669,25 @@
                 <a:ea typeface="맑은 고딕"/>
                 <a:cs typeface="맑은 고딕"/>
               </a:rPr>
-              <a:t>결과 보고: 반려</a:t>
+              <a:t>결과 보고: 거절</a:t>
+            </a:r>
+          </a:p>
+          <a:p>
+            <a:pPr algn="l" eaLnBrk="0">
+              <a:lnSpc>
+                <a:spcPct val="110000"/>
+              </a:lnSpc>
+            </a:pPr>
+            <a:r>
+              <a:rPr sz="1250" b="1">
+                <a:solidFill>
+                  <a:srgbClr val="556175"/>
+                </a:solidFill>
+                <a:latin typeface="맑은 고딕"/>
+                <a:ea typeface="맑은 고딕"/>
+                <a:cs typeface="맑은 고딕"/>
+              </a:rPr>
+              <a:t>(기록의 값은 반려)</a:t>
             </a:r>
           </a:p>
         </p:txBody>
@@ -31501,7 +31519,7 @@
       </p:sp>
       <p:pic>
         <p:nvPicPr>
-          <p:cNvPr id="6" name="삽화:장치자리.svg" descr="illust_7495105410506782348_1793113376.png"/>
+          <p:cNvPr id="6" name="삽화:장치자리.svg" descr="illust_3834600309256523341_1793113376.png"/>
           <p:cNvPicPr>
             <a:picLocks noChangeAspect="1"/>
           </p:cNvPicPr>
@@ -38431,7 +38449,7 @@
       </p:sp>
       <p:pic>
         <p:nvPicPr>
-          <p:cNvPr id="6" name="삽화:세영역.svg" descr="illust_2538619527968756512_1793113376.png"/>
+          <p:cNvPr id="6" name="삽화:세영역.svg" descr="illust_4085899118356175340_1793113376.png"/>
           <p:cNvPicPr>
             <a:picLocks noChangeAspect="1"/>
           </p:cNvPicPr>
@@ -44869,7 +44887,7 @@
       </p:sp>
       <p:pic>
         <p:nvPicPr>
-          <p:cNvPr id="6" name="삽화:사건선_전체.svg" descr="illust_7660807224202100658_1793113376.png"/>
+          <p:cNvPr id="6" name="삽화:사건선_전체.svg" descr="illust_617607344827200332_1793113376.png"/>
           <p:cNvPicPr>
             <a:picLocks noChangeAspect="1"/>
           </p:cNvPicPr>
@@ -47395,7 +47413,7 @@
       </p:sp>
       <p:pic>
         <p:nvPicPr>
-          <p:cNvPr id="6" name="삽화:작업목록.svg" descr="illust_1913649580707469446_1793113376.png"/>
+          <p:cNvPr id="6" name="삽화:작업목록.svg" descr="illust_4194165170618771821_1793113376.png"/>
           <p:cNvPicPr>
             <a:picLocks noChangeAspect="1"/>
           </p:cNvPicPr>
@@ -54928,7 +54946,7 @@
       </p:sp>
       <p:pic>
         <p:nvPicPr>
-          <p:cNvPr id="6" name="삽화:사건선_영역.svg" descr="illust_6338659748404160508_1793113376.png"/>
+          <p:cNvPr id="6" name="삽화:사건선_영역.svg" descr="illust_3788758293627969738_1793113376.png"/>
           <p:cNvPicPr>
             <a:picLocks noChangeAspect="1"/>
           </p:cNvPicPr>
@@ -59474,7 +59492,7 @@
       </p:sp>
       <p:pic>
         <p:nvPicPr>
-          <p:cNvPr id="6" name="삽화:스킬도구.svg" descr="illust_4190129316220028997_1793113376.png"/>
+          <p:cNvPr id="6" name="삽화:스킬도구.svg" descr="illust_8653763445069445753_1793113376.png"/>
           <p:cNvPicPr>
             <a:picLocks noChangeAspect="1"/>
           </p:cNvPicPr>
